--- a/Data/pitch_decks/pitch_deck_001.pptx
+++ b/Data/pitch_decks/pitch_deck_001.pptx
@@ -3359,7 +3359,7 @@
                         <a:defRPr sz="1200"/>
                       </a:pPr>
                       <a:r>
-                        <a:t>$1,000.00</a:t>
+                        <a:t>$450.00</a:t>
                       </a:r>
                     </a:p>
                   </a:txBody>
@@ -3374,7 +3374,7 @@
                         <a:defRPr sz="1200"/>
                       </a:pPr>
                       <a:r>
-                        <a:t>AMD Ryzen processor</a:t>
+                        <a:t>Quad-core processor</a:t>
                       </a:r>
                     </a:p>
                   </a:txBody>
@@ -3389,7 +3389,7 @@
                         <a:defRPr sz="1200"/>
                       </a:pPr>
                       <a:r>
-                        <a:t>Up to 32 GB RAM</a:t>
+                        <a:t>4GB RAM (expandable)</a:t>
                       </a:r>
                     </a:p>
                   </a:txBody>
@@ -3404,7 +3404,7 @@
                         <a:defRPr sz="1200"/>
                       </a:pPr>
                       <a:r>
-                        <a:t>8-bay chassis supporting 3 x 16 TB Seagate IronWolf Pro drives</a:t>
+                        <a:t>16TB (4x4TB) RAID 6</a:t>
                       </a:r>
                     </a:p>
                   </a:txBody>
@@ -3419,7 +3419,7 @@
                         <a:defRPr sz="1200"/>
                       </a:pPr>
                       <a:r>
-                        <a:t>Manufacturer warranty applies</a:t>
+                        <a:t>Manufacturer hardware warranty</a:t>
                       </a:r>
                     </a:p>
                   </a:txBody>
@@ -3434,7 +3434,7 @@
                         <a:defRPr sz="1200"/>
                       </a:pPr>
                       <a:r>
-                        <a:t>Installation and configuration services available</a:t>
+                        <a:t>30 days installation &amp; configuration service guarantee</a:t>
                       </a:r>
                     </a:p>
                   </a:txBody>
@@ -3466,7 +3466,7 @@
                         <a:defRPr sz="1200"/>
                       </a:pPr>
                       <a:r>
-                        <a:t>$1,000.00</a:t>
+                        <a:t>$450.00</a:t>
                       </a:r>
                     </a:p>
                   </a:txBody>
@@ -3481,7 +3481,7 @@
                         <a:defRPr sz="1200"/>
                       </a:pPr>
                       <a:r>
-                        <a:t>AMD Ryzen processor</a:t>
+                        <a:t>Quad-core processor</a:t>
                       </a:r>
                     </a:p>
                   </a:txBody>
@@ -3496,7 +3496,7 @@
                         <a:defRPr sz="1200"/>
                       </a:pPr>
                       <a:r>
-                        <a:t>Up to 32 GB RAM</a:t>
+                        <a:t>4GB RAM (expandable)</a:t>
                       </a:r>
                     </a:p>
                   </a:txBody>
@@ -3511,7 +3511,7 @@
                         <a:defRPr sz="1200"/>
                       </a:pPr>
                       <a:r>
-                        <a:t>8-bay chassis supporting 3 x 16 TB Seagate IronWolf Pro drives</a:t>
+                        <a:t>16TB (4x4TB) RAID 6</a:t>
                       </a:r>
                     </a:p>
                   </a:txBody>
@@ -3526,7 +3526,7 @@
                         <a:defRPr sz="1200"/>
                       </a:pPr>
                       <a:r>
-                        <a:t>Manufacturer warranty applies</a:t>
+                        <a:t>Manufacturer hardware warranty</a:t>
                       </a:r>
                     </a:p>
                   </a:txBody>
@@ -3541,7 +3541,7 @@
                         <a:defRPr sz="1200"/>
                       </a:pPr>
                       <a:r>
-                        <a:t>Installation and configuration services available</a:t>
+                        <a:t>30 days installation &amp; configuration service guarantee</a:t>
                       </a:r>
                     </a:p>
                   </a:txBody>
@@ -3573,7 +3573,7 @@
                         <a:defRPr sz="1200"/>
                       </a:pPr>
                       <a:r>
-                        <a:t>$1,000.00</a:t>
+                        <a:t>$450.00</a:t>
                       </a:r>
                     </a:p>
                   </a:txBody>
@@ -3588,7 +3588,7 @@
                         <a:defRPr sz="1200"/>
                       </a:pPr>
                       <a:r>
-                        <a:t>AMD Ryzen processor</a:t>
+                        <a:t>Quad-core processor</a:t>
                       </a:r>
                     </a:p>
                   </a:txBody>
@@ -3603,7 +3603,7 @@
                         <a:defRPr sz="1200"/>
                       </a:pPr>
                       <a:r>
-                        <a:t>Up to 32 GB RAM</a:t>
+                        <a:t>4GB RAM (expandable)</a:t>
                       </a:r>
                     </a:p>
                   </a:txBody>
@@ -3618,7 +3618,7 @@
                         <a:defRPr sz="1200"/>
                       </a:pPr>
                       <a:r>
-                        <a:t>8-bay chassis supporting 3 x 16 TB Seagate IronWolf Pro drives</a:t>
+                        <a:t>16TB (4x4TB) RAID 6</a:t>
                       </a:r>
                     </a:p>
                   </a:txBody>
@@ -3633,7 +3633,7 @@
                         <a:defRPr sz="1200"/>
                       </a:pPr>
                       <a:r>
-                        <a:t>Manufacturer warranty applies</a:t>
+                        <a:t>Manufacturer hardware warranty</a:t>
                       </a:r>
                     </a:p>
                   </a:txBody>
@@ -3648,7 +3648,7 @@
                         <a:defRPr sz="1200"/>
                       </a:pPr>
                       <a:r>
-                        <a:t>Installation and configuration services available</a:t>
+                        <a:t>30 days installation &amp; configuration service guarantee</a:t>
                       </a:r>
                     </a:p>
                   </a:txBody>
@@ -3790,7 +3790,7 @@
               </a:defRPr>
             </a:pPr>
             <a:r>
-              <a:t>• Otsuka Corporation requires a robust NAS server solution for backing up 16 TB of video data.</a:t>
+              <a:t>• Otsuka Corporation requires a reliable NAS server solution to support video backup operations.</a:t>
             </a:r>
           </a:p>
           <a:p>
@@ -3806,7 +3806,7 @@
               </a:defRPr>
             </a:pPr>
             <a:r>
-              <a:t>• High transfer speeds are essential to handle large video files efficiently.</a:t>
+              <a:t>• Supports an IT environment with 200 employees requiring efficient data storage and protection.</a:t>
             </a:r>
           </a:p>
           <a:p>
@@ -3822,7 +3822,7 @@
               </a:defRPr>
             </a:pPr>
             <a:r>
-              <a:t>• Reliable data redundancy is critical to ensure data integrity and availability.</a:t>
+              <a:t>• Needs a storage capacity of 16TB configured in RAID 6 for data redundancy and security.</a:t>
             </a:r>
           </a:p>
           <a:p>
@@ -3838,7 +3838,7 @@
               </a:defRPr>
             </a:pPr>
             <a:r>
-              <a:t>• The solution must support scalability for future storage growth.</a:t>
+              <a:t>• Requires a transfer speed of 2.5 Gbps to ensure efficient handling of large video files.</a:t>
             </a:r>
           </a:p>
           <a:p>
@@ -3854,7 +3854,7 @@
               </a:defRPr>
             </a:pPr>
             <a:r>
-              <a:t>• Efficient video backup management is needed in their IT services environment.</a:t>
+              <a:t>• Solution must be scalable, secure, and optimized for video backup infrastructure.</a:t>
             </a:r>
           </a:p>
         </p:txBody>
@@ -3990,7 +3990,7 @@
               </a:defRPr>
             </a:pPr>
             <a:r>
-              <a:t>• A comprehensive NAS Video Backup Solution tailored for Otsuka Corporation's needs.</a:t>
+              <a:t>• A tailored NAS server solution designed specifically for video backup needs.</a:t>
             </a:r>
           </a:p>
           <a:p>
@@ -4006,7 +4006,7 @@
               </a:defRPr>
             </a:pPr>
             <a:r>
-              <a:t>• Includes an 8-bay Synology DiskStation DS1821+ with AMD Ryzen processor for powerful performance.</a:t>
+              <a:t>• Includes high-performance NAS device with built-in 2.5 Gigabit Ethernet ports.</a:t>
             </a:r>
           </a:p>
           <a:p>
@@ -4022,7 +4022,7 @@
               </a:defRPr>
             </a:pPr>
             <a:r>
-              <a:t>• Three Seagate IronWolf Pro 16 TB NAS drives configured for RAID 5 for data redundancy and speed.</a:t>
+              <a:t>• Configured RAID 6 setup for enhanced data protection and fault tolerance.</a:t>
             </a:r>
           </a:p>
           <a:p>
@@ -4038,7 +4038,7 @@
               </a:defRPr>
             </a:pPr>
             <a:r>
-              <a:t>• High-speed 10 GbE networking enabled by Intel X550-T2 NIC and Netgear ProSAFE XS708E switch.</a:t>
+              <a:t>• Comprehensive setup and configuration service to optimize network and backup environment.</a:t>
             </a:r>
           </a:p>
           <a:p>
@@ -4054,7 +4054,7 @@
               </a:defRPr>
             </a:pPr>
             <a:r>
-              <a:t>• Cat6a Ethernet cables ensure optimal network performance and reliable data transfer.</a:t>
+              <a:t>• Reliable UPS system included to maintain data integrity during power disruptions.</a:t>
             </a:r>
           </a:p>
         </p:txBody>
@@ -4190,7 +4190,7 @@
               </a:defRPr>
             </a:pPr>
             <a:r>
-              <a:t>• Synology DiskStation DS1821+: 8-bay NAS chassis with AMD Ryzen processor.</a:t>
+              <a:t>• NAS Device: Asustor AS5304T with quad-core processor and 4GB RAM (expandable).</a:t>
             </a:r>
           </a:p>
           <a:p>
@@ -4206,7 +4206,7 @@
               </a:defRPr>
             </a:pPr>
             <a:r>
-              <a:t>• Supports up to 32 GB RAM for enhanced multitasking and performance.</a:t>
+              <a:t>• Storage: Four Seagate IronWolf 4TB NAS hard drives totaling 16TB, RAID 6 configured.</a:t>
             </a:r>
           </a:p>
           <a:p>
@@ -4222,7 +4222,7 @@
               </a:defRPr>
             </a:pPr>
             <a:r>
-              <a:t>• RAID configurations and SSD caching available for data redundancy and speed.</a:t>
+              <a:t>• Network: Built-in 2.5 Gigabit Ethernet ports for high-speed data transfer.</a:t>
             </a:r>
           </a:p>
           <a:p>
@@ -4238,7 +4238,7 @@
               </a:defRPr>
             </a:pPr>
             <a:r>
-              <a:t>• Seagate IronWolf Pro 16 TB NAS Drives: NAS-optimized with AgileArray technology.</a:t>
+              <a:t>• Backup Protection: APC Back-UPS Pro 1500VA for power backup and surge protection.</a:t>
             </a:r>
           </a:p>
           <a:p>
@@ -4254,7 +4254,7 @@
               </a:defRPr>
             </a:pPr>
             <a:r>
-              <a:t>• Intel X550-T2 Dual Port 10 GbE NIC and Netgear XS708E 8-Port 10 GbE Switch for fast networking.</a:t>
+              <a:t>• Service: Professional NAS setup, RAID configuration, and network optimization.</a:t>
             </a:r>
           </a:p>
         </p:txBody>
@@ -4390,7 +4390,7 @@
               </a:defRPr>
             </a:pPr>
             <a:r>
-              <a:t>• Synology DiskStation DS1821+: $1,000.00</a:t>
+              <a:t>• Asustor AS5304T NAS Device: $450.00</a:t>
             </a:r>
           </a:p>
           <a:p>
@@ -4406,7 +4406,7 @@
               </a:defRPr>
             </a:pPr>
             <a:r>
-              <a:t>• Three Seagate IronWolf Pro 16 TB Drives: $1,320.00</a:t>
+              <a:t>• Seagate IronWolf 4TB NAS Hard Drives (4 units): $440.00</a:t>
             </a:r>
           </a:p>
           <a:p>
@@ -4422,7 +4422,7 @@
               </a:defRPr>
             </a:pPr>
             <a:r>
-              <a:t>• Intel X550-T2 Dual Port 10 GbE NIC: $250.00</a:t>
+              <a:t>• APC Back-UPS Pro 1500VA UPS: $220.00</a:t>
             </a:r>
           </a:p>
           <a:p>
@@ -4438,7 +4438,7 @@
               </a:defRPr>
             </a:pPr>
             <a:r>
-              <a:t>• Netgear ProSAFE XS708E 8-Port 10 GbE Switch: $700.00</a:t>
+              <a:t>• NAS Setup and Configuration Service: $300.00</a:t>
             </a:r>
           </a:p>
           <a:p>
@@ -4454,23 +4454,7 @@
               </a:defRPr>
             </a:pPr>
             <a:r>
-              <a:t>• Cat6a Ethernet Cables (4 packs): $100.00</a:t>
-            </a:r>
-          </a:p>
-          <a:p>
-            <a:pPr>
-              <a:spcAft>
-                <a:spcPts val="1200"/>
-              </a:spcAft>
-              <a:defRPr sz="2000">
-                <a:solidFill>
-                  <a:srgbClr val="505050"/>
-                </a:solidFill>
-                <a:latin typeface="Segoe UI"/>
-              </a:defRPr>
-            </a:pPr>
-            <a:r>
-              <a:t>• Subtotal: $3,370.00 | Tax (8%): $269.60 | Total: $3,639.60 USD</a:t>
+              <a:t>• Subtotal: $1,410.00 | Tax (8%): $112.80 | Total: $1,522.80 USD</a:t>
             </a:r>
           </a:p>
         </p:txBody>
@@ -4606,7 +4590,7 @@
               </a:defRPr>
             </a:pPr>
             <a:r>
-              <a:t>• Hardware warranty is provided according to manufacturer terms.</a:t>
+              <a:t>• Hardware warranty provided by respective manufacturers for all devices.</a:t>
             </a:r>
           </a:p>
           <a:p>
@@ -4622,7 +4606,7 @@
               </a:defRPr>
             </a:pPr>
             <a:r>
-              <a:t>• Installation and configuration services available at additional cost.</a:t>
+              <a:t>• Installation and configuration services guaranteed for 30 days post-completion.</a:t>
             </a:r>
           </a:p>
           <a:p>
@@ -4638,7 +4622,7 @@
               </a:defRPr>
             </a:pPr>
             <a:r>
-              <a:t>• Otsuka Corporation responsible for network compatibility and infrastructure readiness.</a:t>
+              <a:t>• Technical support available for setup and network optimization.</a:t>
             </a:r>
           </a:p>
           <a:p>
@@ -4654,7 +4638,7 @@
               </a:defRPr>
             </a:pPr>
             <a:r>
-              <a:t>• Support includes setup of RAID 5 for data redundancy and performance optimization.</a:t>
+              <a:t>• Power backup ensures data integrity during outages and fluctuations.</a:t>
             </a:r>
           </a:p>
           <a:p>
@@ -4670,7 +4654,7 @@
               </a:defRPr>
             </a:pPr>
             <a:r>
-              <a:t>• Training sessions for IT staff on NAS management and backup procedures can be arranged.</a:t>
+              <a:t>• Additional hardware or software needs can be quoted separately.</a:t>
             </a:r>
           </a:p>
         </p:txBody>
@@ -4806,7 +4790,7 @@
               </a:defRPr>
             </a:pPr>
             <a:r>
-              <a:t>• Three variants of the Synology DiskStation DS1821+ tailored for different needs.</a:t>
+              <a:t>• Compare three variants of our NAS solution tailored for video backup.</a:t>
             </a:r>
           </a:p>
           <a:p>
@@ -4822,7 +4806,7 @@
               </a:defRPr>
             </a:pPr>
             <a:r>
-              <a:t>• All variants include AMD Ryzen processor and support up to 32 GB RAM.</a:t>
+              <a:t>• All variants offer identical high performance and reliability.</a:t>
             </a:r>
           </a:p>
           <a:p>
@@ -4838,7 +4822,7 @@
               </a:defRPr>
             </a:pPr>
             <a:r>
-              <a:t>• Each variant supports RAID configurations and SSD caching for video backup reliability.</a:t>
+              <a:t>• Choose based on preferred product naming or internal cataloging.</a:t>
             </a:r>
           </a:p>
           <a:p>
@@ -4854,7 +4838,7 @@
               </a:defRPr>
             </a:pPr>
             <a:r>
-              <a:t>• Pricing varies slightly to reflect potential customization options.</a:t>
+              <a:t>• Consistent pricing and specifications ensure uniform quality.</a:t>
             </a:r>
           </a:p>
           <a:p>
@@ -4870,7 +4854,7 @@
               </a:defRPr>
             </a:pPr>
             <a:r>
-              <a:t>• All options ensure high-speed 10 GbE connectivity and scalable storage.</a:t>
+              <a:t>• Helps in decision making with clear and transparent comparison.</a:t>
             </a:r>
           </a:p>
         </p:txBody>
@@ -5006,7 +4990,7 @@
               </a:defRPr>
             </a:pPr>
             <a:r>
-              <a:t>• Quote valid until July 31, 2024.</a:t>
+              <a:t>• Coordinate delivery of NAS device and hard drives to Otsuka Corporation IT department.</a:t>
             </a:r>
           </a:p>
           <a:p>
@@ -5022,7 +5006,7 @@
               </a:defRPr>
             </a:pPr>
             <a:r>
-              <a:t>• Installation and configuration to be scheduled upon quote approval.</a:t>
+              <a:t>• Schedule installation and configuration service within 2 weeks of order confirmation.</a:t>
             </a:r>
           </a:p>
           <a:p>
@@ -5038,7 +5022,7 @@
               </a:defRPr>
             </a:pPr>
             <a:r>
-              <a:t>• Delivery timeline depends on procurement and network infrastructure readiness.</a:t>
+              <a:t>• Ensure network infrastructure supports 2.5 Gbps transfer speeds before setup.</a:t>
             </a:r>
           </a:p>
           <a:p>
@@ -5054,7 +5038,7 @@
               </a:defRPr>
             </a:pPr>
             <a:r>
-              <a:t>• Upgrades to NAS RAM to be assessed and implemented as needed.</a:t>
+              <a:t>• Perform RAID 6 configuration and verify data redundancy and backup functionality.</a:t>
             </a:r>
           </a:p>
           <a:p>
@@ -5070,7 +5054,7 @@
               </a:defRPr>
             </a:pPr>
             <a:r>
-              <a:t>• Backup and restore testing to ensure data integrity post-installation.</a:t>
+              <a:t>• Timely delivery ensures minimal disruption to video backup operations.</a:t>
             </a:r>
           </a:p>
         </p:txBody>
@@ -5206,7 +5190,7 @@
               </a:defRPr>
             </a:pPr>
             <a:r>
-              <a:t>• Review and approve the quotation to initiate procurement.</a:t>
+              <a:t>• Review and approve the quotation to proceed with the order.</a:t>
             </a:r>
           </a:p>
           <a:p>
@@ -5222,7 +5206,7 @@
               </a:defRPr>
             </a:pPr>
             <a:r>
-              <a:t>• Confirm budget and timeline to align with project goals.</a:t>
+              <a:t>• Confirm delivery address and provide accurate contact details.</a:t>
             </a:r>
           </a:p>
           <a:p>
@@ -5238,7 +5222,7 @@
               </a:defRPr>
             </a:pPr>
             <a:r>
-              <a:t>• Schedule installation and configuration with our technical team.</a:t>
+              <a:t>• Schedule installation date with our technical team at your convenience.</a:t>
             </a:r>
           </a:p>
           <a:p>
@@ -5254,7 +5238,7 @@
               </a:defRPr>
             </a:pPr>
             <a:r>
-              <a:t>• Provide network infrastructure details for compatibility assessment.</a:t>
+              <a:t>• Communicate any additional requirements or questions to our sales representative.</a:t>
             </a:r>
           </a:p>
           <a:p>
@@ -5270,7 +5254,7 @@
               </a:defRPr>
             </a:pPr>
             <a:r>
-              <a:t>• Plan training sessions to empower your IT staff on the new system.</a:t>
+              <a:t>• Secure your reliable NAS server solution tailored for your video backup needs.</a:t>
             </a:r>
           </a:p>
         </p:txBody>

--- a/Data/pitch_decks/pitch_deck_001.pptx
+++ b/Data/pitch_decks/pitch_deck_001.pptx
@@ -3374,7 +3374,7 @@
                         <a:defRPr sz="1200"/>
                       </a:pPr>
                       <a:r>
-                        <a:t>Intel Core i7 第11世代</a:t>
+                        <a:t>Intel Core i7</a:t>
                       </a:r>
                     </a:p>
                   </a:txBody>
@@ -3419,7 +3419,7 @@
                         <a:defRPr sz="1200"/>
                       </a:pPr>
                       <a:r>
-                        <a:t>3年オンサイト対応</a:t>
+                        <a:t>3年間オンサイト保証</a:t>
                       </a:r>
                     </a:p>
                   </a:txBody>
@@ -3434,7 +3434,7 @@
                         <a:defRPr sz="1200"/>
                       </a:pPr>
                       <a:r>
-                        <a:t>翌営業日オンサイトサポート</a:t>
+                        <a:t>日本語電話・チャットサポート</a:t>
                       </a:r>
                     </a:p>
                   </a:txBody>
@@ -3481,7 +3481,7 @@
                         <a:defRPr sz="1200"/>
                       </a:pPr>
                       <a:r>
-                        <a:t>Intel Core i7 第11世代</a:t>
+                        <a:t>Intel Core i7</a:t>
                       </a:r>
                     </a:p>
                   </a:txBody>
@@ -3526,7 +3526,7 @@
                         <a:defRPr sz="1200"/>
                       </a:pPr>
                       <a:r>
-                        <a:t>3年オンサイト対応</a:t>
+                        <a:t>3年間オンサイト保証</a:t>
                       </a:r>
                     </a:p>
                   </a:txBody>
@@ -3541,7 +3541,7 @@
                         <a:defRPr sz="1200"/>
                       </a:pPr>
                       <a:r>
-                        <a:t>翌営業日オンサイトサポート</a:t>
+                        <a:t>日本語電話・チャットサポート</a:t>
                       </a:r>
                     </a:p>
                   </a:txBody>
@@ -3588,7 +3588,7 @@
                         <a:defRPr sz="1200"/>
                       </a:pPr>
                       <a:r>
-                        <a:t>Intel Core i7 第11世代</a:t>
+                        <a:t>Intel Core i7</a:t>
                       </a:r>
                     </a:p>
                   </a:txBody>
@@ -3633,7 +3633,7 @@
                         <a:defRPr sz="1200"/>
                       </a:pPr>
                       <a:r>
-                        <a:t>3年オンサイト対応</a:t>
+                        <a:t>3年間オンサイト保証</a:t>
                       </a:r>
                     </a:p>
                   </a:txBody>
@@ -3648,7 +3648,7 @@
                         <a:defRPr sz="1200"/>
                       </a:pPr>
                       <a:r>
-                        <a:t>翌営業日オンサイトサポート</a:t>
+                        <a:t>日本語電話・チャットサポート</a:t>
                       </a:r>
                     </a:p>
                   </a:txBody>
@@ -3790,7 +3790,7 @@
               </a:defRPr>
             </a:pPr>
             <a:r>
-              <a:t>• 株式会社クロステック様はコンサルティング業務での効率化を求めています。</a:t>
+              <a:t>• 株式会社クロステック様はコンサルティング業務での効率化を目指しています。</a:t>
             </a:r>
           </a:p>
           <a:p>
@@ -3806,7 +3806,7 @@
               </a:defRPr>
             </a:pPr>
             <a:r>
-              <a:t>• 主な用途は資料作成、Zoom会議、軽いグラフィック編集です。</a:t>
+              <a:t>• 資料作成、Zoom会議、プレゼンテーション、軽いグラフィック編集が主な作業。</a:t>
             </a:r>
           </a:p>
           <a:p>
@@ -3822,7 +3822,7 @@
               </a:defRPr>
             </a:pPr>
             <a:r>
-              <a:t>• 軽量かつ長時間バッテリー駆動のノートPCが必要です。</a:t>
+              <a:t>• 軽量かつ高解像度ディスプレイ搭載のノートパソコンを5台導入希望。</a:t>
             </a:r>
           </a:p>
           <a:p>
@@ -3838,7 +3838,7 @@
               </a:defRPr>
             </a:pPr>
             <a:r>
-              <a:t>• 高解像度ディスプレイで画面の見やすさも重視。</a:t>
+              <a:t>• 長時間バッテリー駆動と静音設計を重視。</a:t>
             </a:r>
           </a:p>
           <a:p>
@@ -3854,23 +3854,7 @@
               </a:defRPr>
             </a:pPr>
             <a:r>
-              <a:t>• 業務の安定性と迅速なトラブル対応が不可欠です。</a:t>
-            </a:r>
-          </a:p>
-          <a:p>
-            <a:pPr>
-              <a:spcAft>
-                <a:spcPts val="1200"/>
-              </a:spcAft>
-              <a:defRPr sz="2000">
-                <a:solidFill>
-                  <a:srgbClr val="505050"/>
-                </a:solidFill>
-                <a:latin typeface="Segoe UI"/>
-              </a:defRPr>
-            </a:pPr>
-            <a:r>
-              <a:t>• 3年間のハードウェア保証と翌営業日オンサイト対応が必須条件です。</a:t>
+              <a:t>• 迅速な故障対応と3年間のハードウェア保証、全国対応のオンサイトサポートを求めています。</a:t>
             </a:r>
           </a:p>
         </p:txBody>
@@ -4006,7 +3990,7 @@
               </a:defRPr>
             </a:pPr>
             <a:r>
-              <a:t>• 高性能かつ軽量な15.6インチノートPCを5台ご提案。</a:t>
+              <a:t>• 高性能15.6インチノートPCモデルCを5台ご提案。</a:t>
             </a:r>
           </a:p>
           <a:p>
@@ -4022,7 +4006,7 @@
               </a:defRPr>
             </a:pPr>
             <a:r>
-              <a:t>• Intel Core i7 第11世代搭載で快適な処理速度を実現。</a:t>
+              <a:t>• 法人向け3年オンサイト対応保証と日本語電話サポート付き。</a:t>
             </a:r>
           </a:p>
           <a:p>
@@ -4038,7 +4022,7 @@
               </a:defRPr>
             </a:pPr>
             <a:r>
-              <a:t>• 最大15時間駆動の長時間バッテリーで外出先でも安心。</a:t>
+              <a:t>• 延長保証プランで翌営業日オンサイト対応を実現。</a:t>
             </a:r>
           </a:p>
           <a:p>
@@ -4054,7 +4038,7 @@
               </a:defRPr>
             </a:pPr>
             <a:r>
-              <a:t>• 3年間のハードウェア保証と全国対応の翌営業日オンサイトサポート付き。</a:t>
+              <a:t>• 日本語電話・チャットサポートプランで迅速な問題解決を支援。</a:t>
             </a:r>
           </a:p>
           <a:p>
@@ -4070,23 +4054,7 @@
               </a:defRPr>
             </a:pPr>
             <a:r>
-              <a:t>• 法人向け延長保証プランでさらなる安心を提供。</a:t>
-            </a:r>
-          </a:p>
-          <a:p>
-            <a:pPr>
-              <a:spcAft>
-                <a:spcPts val="1200"/>
-              </a:spcAft>
-              <a:defRPr sz="2000">
-                <a:solidFill>
-                  <a:srgbClr val="505050"/>
-                </a:solidFill>
-                <a:latin typeface="Segoe UI"/>
-              </a:defRPr>
-            </a:pPr>
-            <a:r>
-              <a:t>• 必要に応じてグラフィック性能強化モデルもご用意可能です。</a:t>
+              <a:t>• 軽量・長時間駆動・静音設計で業務効率を最大化。</a:t>
             </a:r>
           </a:p>
         </p:txBody>
@@ -4140,7 +4108,7 @@
               </a:defRPr>
             </a:pPr>
             <a:r>
-              <a:t>Product Overview</a:t>
+              <a:t>Product Overview (Specifications)</a:t>
             </a:r>
           </a:p>
         </p:txBody>
@@ -4222,7 +4190,7 @@
               </a:defRPr>
             </a:pPr>
             <a:r>
-              <a:t>• モデルC：高性能＆長時間バッテリー15.6インチノートPC</a:t>
+              <a:t>• CPU: Intel Core i7搭載で高い処理性能を実現。</a:t>
             </a:r>
           </a:p>
           <a:p>
@@ -4238,7 +4206,7 @@
               </a:defRPr>
             </a:pPr>
             <a:r>
-              <a:t>• CPU: Intel Core i7 第11世代</a:t>
+              <a:t>• メモリ: 16GB RAMでマルチタスクもスムーズ。</a:t>
             </a:r>
           </a:p>
           <a:p>
@@ -4254,7 +4222,7 @@
               </a:defRPr>
             </a:pPr>
             <a:r>
-              <a:t>• メモリ: 16GB</a:t>
+              <a:t>• ストレージ: 512GB SSDで高速アクセスと大容量を両立。</a:t>
             </a:r>
           </a:p>
           <a:p>
@@ -4270,7 +4238,7 @@
               </a:defRPr>
             </a:pPr>
             <a:r>
-              <a:t>• ストレージ: 512GB SSD</a:t>
+              <a:t>• ディスプレイ: 15.6インチフルHD高解像度で見やすい画面。</a:t>
             </a:r>
           </a:p>
           <a:p>
@@ -4286,7 +4254,7 @@
               </a:defRPr>
             </a:pPr>
             <a:r>
-              <a:t>• ディスプレイ: 15.6インチ フルHD</a:t>
+              <a:t>• 重量: 約1.6kgの軽量設計で持ち運びも快適。</a:t>
             </a:r>
           </a:p>
           <a:p>
@@ -4302,7 +4270,7 @@
               </a:defRPr>
             </a:pPr>
             <a:r>
-              <a:t>• 重量: 約1.6kg、最大15時間駆動、静音設計</a:t>
+              <a:t>• バッテリー: 最大15時間駆動、静音設計で快適な作業環境を提供。</a:t>
             </a:r>
           </a:p>
         </p:txBody>
@@ -4438,7 +4406,7 @@
               </a:defRPr>
             </a:pPr>
             <a:r>
-              <a:t>• ノートPC 5台：900,000円 (1台あたり180,000円)</a:t>
+              <a:t>• モデルCノートPC（5台）合計: ¥900,000</a:t>
             </a:r>
           </a:p>
           <a:p>
@@ -4454,7 +4422,7 @@
               </a:defRPr>
             </a:pPr>
             <a:r>
-              <a:t>• 法人向け3年延長保証・翌営業日オンサイトサポートプラン 5台分：75,000円</a:t>
+              <a:t>• 延長保証プラン（5台分）: ¥40,000</a:t>
             </a:r>
           </a:p>
           <a:p>
@@ -4470,7 +4438,7 @@
               </a:defRPr>
             </a:pPr>
             <a:r>
-              <a:t>• 小計：975,000円</a:t>
+              <a:t>• 法人向け電話・チャットサポートプラン（3年間）: ¥35,000</a:t>
             </a:r>
           </a:p>
           <a:p>
@@ -4486,7 +4454,7 @@
               </a:defRPr>
             </a:pPr>
             <a:r>
-              <a:t>• 消費税（10%）：97,500円</a:t>
+              <a:t>• 小計: ¥975,000</a:t>
             </a:r>
           </a:p>
           <a:p>
@@ -4502,7 +4470,7 @@
               </a:defRPr>
             </a:pPr>
             <a:r>
-              <a:t>• 合計金額：1,072,500円</a:t>
+              <a:t>• 消費税10%: ¥97,500</a:t>
             </a:r>
           </a:p>
           <a:p>
@@ -4518,7 +4486,7 @@
               </a:defRPr>
             </a:pPr>
             <a:r>
-              <a:t>• コストパフォーマンスに優れた安心のトータルサポートプラン</a:t>
+              <a:t>• 合計金額: ¥1,072,500</a:t>
             </a:r>
           </a:p>
         </p:txBody>
@@ -4654,7 +4622,7 @@
               </a:defRPr>
             </a:pPr>
             <a:r>
-              <a:t>• 3年間のハードウェア保証を標準装備。</a:t>
+              <a:t>• 3年間の法人向けオンサイト保証付き。</a:t>
             </a:r>
           </a:p>
           <a:p>
@@ -4670,7 +4638,7 @@
               </a:defRPr>
             </a:pPr>
             <a:r>
-              <a:t>• 全国対応の翌営業日オンサイトサポートで迅速なトラブル対応。</a:t>
+              <a:t>• 故障時は翌営業日に全国対応でオンサイトサポート。</a:t>
             </a:r>
           </a:p>
           <a:p>
@@ -4686,7 +4654,7 @@
               </a:defRPr>
             </a:pPr>
             <a:r>
-              <a:t>• 法人向け延長保証プランでさらに安心のサポート。</a:t>
+              <a:t>• 日本語対応の電話・チャットサポートで迅速なトラブル解決。</a:t>
             </a:r>
           </a:p>
           <a:p>
@@ -4702,7 +4670,7 @@
               </a:defRPr>
             </a:pPr>
             <a:r>
-              <a:t>• 日本語電話サポート付きでいつでも相談可能。</a:t>
+              <a:t>• 延長保証プランで安心の長期サポートを提供。</a:t>
             </a:r>
           </a:p>
           <a:p>
@@ -4718,23 +4686,7 @@
               </a:defRPr>
             </a:pPr>
             <a:r>
-              <a:t>• 大阪支社を含む全国全拠点をカバー。</a:t>
-            </a:r>
-          </a:p>
-          <a:p>
-            <a:pPr>
-              <a:spcAft>
-                <a:spcPts val="1200"/>
-              </a:spcAft>
-              <a:defRPr sz="2000">
-                <a:solidFill>
-                  <a:srgbClr val="505050"/>
-                </a:solidFill>
-                <a:latin typeface="Segoe UI"/>
-              </a:defRPr>
-            </a:pPr>
-            <a:r>
-              <a:t>• 安定した業務運用を強力にバックアップします。</a:t>
+              <a:t>• 大阪支社も含む全国対応体制で安心のサービスネットワーク。</a:t>
             </a:r>
           </a:p>
         </p:txBody>
@@ -4870,7 +4822,7 @@
               </a:defRPr>
             </a:pPr>
             <a:r>
-              <a:t>• 以下の3モデルでニーズに合わせた選択が可能です。</a:t>
+              <a:t>• 3つのバリエーションで性能は同等、名称のみ異なります。</a:t>
             </a:r>
           </a:p>
           <a:p>
@@ -4886,7 +4838,7 @@
               </a:defRPr>
             </a:pPr>
             <a:r>
-              <a:t>• 全てIntel Core i7 第11世代、16GBメモリ、512GB SSD搭載。</a:t>
+              <a:t>• すべて15.6インチフルHDディスプレイ搭載。</a:t>
             </a:r>
           </a:p>
           <a:p>
@@ -4902,7 +4854,7 @@
               </a:defRPr>
             </a:pPr>
             <a:r>
-              <a:t>• ディスプレイは15.6インチ フルHDで快適な視認性。</a:t>
+              <a:t>• Intel Core i7、16GB RAM、512GB SSDの高性能構成。</a:t>
             </a:r>
           </a:p>
           <a:p>
@@ -4918,7 +4870,7 @@
               </a:defRPr>
             </a:pPr>
             <a:r>
-              <a:t>• 重量は約1.6～1.7kg、バッテリー駆動時間は14～15時間。</a:t>
+              <a:t>• 3年間のオンサイト保証と日本語サポート付き。</a:t>
             </a:r>
           </a:p>
           <a:p>
@@ -4934,23 +4886,7 @@
               </a:defRPr>
             </a:pPr>
             <a:r>
-              <a:t>• 3年間のオンサイト対応保証付きで安心。</a:t>
-            </a:r>
-          </a:p>
-          <a:p>
-            <a:pPr>
-              <a:spcAft>
-                <a:spcPts val="1200"/>
-              </a:spcAft>
-              <a:defRPr sz="2000">
-                <a:solidFill>
-                  <a:srgbClr val="505050"/>
-                </a:solidFill>
-                <a:latin typeface="Segoe UI"/>
-              </a:defRPr>
-            </a:pPr>
-            <a:r>
-              <a:t>• グラフィック性能強化モデルはオプション対応可能。</a:t>
+              <a:t>• 価格はすべて同一でコストパフォーマンスに優れています。</a:t>
             </a:r>
           </a:p>
         </p:txBody>
@@ -5086,7 +5022,7 @@
               </a:defRPr>
             </a:pPr>
             <a:r>
-              <a:t>• ご注文確定後、通常1週間以内に発送。</a:t>
+              <a:t>• ご注文確定後、1週間以内の納品を予定。</a:t>
             </a:r>
           </a:p>
           <a:p>
@@ -5102,7 +5038,7 @@
               </a:defRPr>
             </a:pPr>
             <a:r>
-              <a:t>• 納期調整および配送手配を速やかに実施。</a:t>
+              <a:t>• 在庫状況により納期が変動する場合があります。</a:t>
             </a:r>
           </a:p>
           <a:p>
@@ -5118,7 +5054,7 @@
               </a:defRPr>
             </a:pPr>
             <a:r>
-              <a:t>• 導入前の初期設定やソフトウェアインストールもサポート可能。</a:t>
+              <a:t>• 納品時に初期設定および動作確認を実施。</a:t>
             </a:r>
           </a:p>
           <a:p>
@@ -5134,7 +5070,7 @@
               </a:defRPr>
             </a:pPr>
             <a:r>
-              <a:t>• 全国対応のオンサイトサポートで大阪支社もカバー。</a:t>
+              <a:t>• オンサイトサポートのスケジュールは別途調整。</a:t>
             </a:r>
           </a:p>
           <a:p>
@@ -5150,23 +5086,7 @@
               </a:defRPr>
             </a:pPr>
             <a:r>
-              <a:t>• 迅速な導入で業務効率化を早期実現。</a:t>
-            </a:r>
-          </a:p>
-          <a:p>
-            <a:pPr>
-              <a:spcAft>
-                <a:spcPts val="1200"/>
-              </a:spcAft>
-              <a:defRPr sz="2000">
-                <a:solidFill>
-                  <a:srgbClr val="505050"/>
-                </a:solidFill>
-                <a:latin typeface="Segoe UI"/>
-              </a:defRPr>
-            </a:pPr>
-            <a:r>
-              <a:t>• 納期に関するご相談もお気軽にどうぞ。</a:t>
+              <a:t>• 迅速な対応でスムーズな導入をサポートします。</a:t>
             </a:r>
           </a:p>
         </p:txBody>
@@ -5302,7 +5222,7 @@
               </a:defRPr>
             </a:pPr>
             <a:r>
-              <a:t>• 本見積もり内容をご確認のうえ、ご注文の意思表示をお願いいたします。</a:t>
+              <a:t>• 本見積書をご確認のうえ、ご質問やご要望をお知らせください。</a:t>
             </a:r>
           </a:p>
           <a:p>
@@ -5318,7 +5238,7 @@
               </a:defRPr>
             </a:pPr>
             <a:r>
-              <a:t>• ご注文確定後、正式な契約書を発行いたします。</a:t>
+              <a:t>• 社内検討用の比較資料（PDF）をメール送付いたします。</a:t>
             </a:r>
           </a:p>
           <a:p>
@@ -5334,7 +5254,7 @@
               </a:defRPr>
             </a:pPr>
             <a:r>
-              <a:t>• 比較資料（PDF）を鈴木様のメールアドレスに送付予定です。</a:t>
+              <a:t>• ご承認いただけましたら正式発注の手続きをお願いいたします。</a:t>
             </a:r>
           </a:p>
           <a:p>
@@ -5350,7 +5270,7 @@
               </a:defRPr>
             </a:pPr>
             <a:r>
-              <a:t>• 追加のご質問やカスタマイズのご希望があればご連絡ください。</a:t>
+              <a:t>• 必要に応じて製品デモや技術相談のアレンジも可能です。</a:t>
             </a:r>
           </a:p>
           <a:p>
@@ -5366,23 +5286,7 @@
               </a:defRPr>
             </a:pPr>
             <a:r>
-              <a:t>• 最適なITソリューションで貴社の業務効率化を全力で支援します。</a:t>
-            </a:r>
-          </a:p>
-          <a:p>
-            <a:pPr>
-              <a:spcAft>
-                <a:spcPts val="1200"/>
-              </a:spcAft>
-              <a:defRPr sz="2000">
-                <a:solidFill>
-                  <a:srgbClr val="505050"/>
-                </a:solidFill>
-                <a:latin typeface="Segoe UI"/>
-              </a:defRPr>
-            </a:pPr>
-            <a:r>
-              <a:t>• ご連絡を心よりお待ちしております。</a:t>
+              <a:t>• 納期および導入スケジュールの最終調整を進めましょう。</a:t>
             </a:r>
           </a:p>
         </p:txBody>

--- a/Data/pitch_decks/pitch_deck_001.pptx
+++ b/Data/pitch_decks/pitch_deck_001.pptx
@@ -3234,7 +3234,9 @@
                     <a:lstStyle/>
                     <a:p>
                       <a:pPr>
-                        <a:defRPr b="1" sz="1400"/>
+                        <a:defRPr b="1" sz="1400">
+                          <a:latin typeface="Segoe UI Semibold"/>
+                        </a:defRPr>
                       </a:pPr>
                       <a:r>
                         <a:t>Product Name</a:t>
@@ -3249,7 +3251,9 @@
                     <a:lstStyle/>
                     <a:p>
                       <a:pPr>
-                        <a:defRPr b="1" sz="1400"/>
+                        <a:defRPr b="1" sz="1400">
+                          <a:latin typeface="Segoe UI Semibold"/>
+                        </a:defRPr>
                       </a:pPr>
                       <a:r>
                         <a:t>Price</a:t>
@@ -3264,7 +3268,9 @@
                     <a:lstStyle/>
                     <a:p>
                       <a:pPr>
-                        <a:defRPr b="1" sz="1400"/>
+                        <a:defRPr b="1" sz="1400">
+                          <a:latin typeface="Segoe UI Semibold"/>
+                        </a:defRPr>
                       </a:pPr>
                       <a:r>
                         <a:t>CPU</a:t>
@@ -3279,7 +3285,9 @@
                     <a:lstStyle/>
                     <a:p>
                       <a:pPr>
-                        <a:defRPr b="1" sz="1400"/>
+                        <a:defRPr b="1" sz="1400">
+                          <a:latin typeface="Segoe UI Semibold"/>
+                        </a:defRPr>
                       </a:pPr>
                       <a:r>
                         <a:t>RAM</a:t>
@@ -3294,7 +3302,9 @@
                     <a:lstStyle/>
                     <a:p>
                       <a:pPr>
-                        <a:defRPr b="1" sz="1400"/>
+                        <a:defRPr b="1" sz="1400">
+                          <a:latin typeface="Segoe UI Semibold"/>
+                        </a:defRPr>
                       </a:pPr>
                       <a:r>
                         <a:t>Storage</a:t>
@@ -3309,7 +3319,9 @@
                     <a:lstStyle/>
                     <a:p>
                       <a:pPr>
-                        <a:defRPr b="1" sz="1400"/>
+                        <a:defRPr b="1" sz="1400">
+                          <a:latin typeface="Segoe UI Semibold"/>
+                        </a:defRPr>
                       </a:pPr>
                       <a:r>
                         <a:t>Warranty</a:t>
@@ -3324,7 +3336,9 @@
                     <a:lstStyle/>
                     <a:p>
                       <a:pPr>
-                        <a:defRPr b="1" sz="1400"/>
+                        <a:defRPr b="1" sz="1400">
+                          <a:latin typeface="Segoe UI Semibold"/>
+                        </a:defRPr>
                       </a:pPr>
                       <a:r>
                         <a:t>Support</a:t>
@@ -3341,7 +3355,9 @@
                     <a:lstStyle/>
                     <a:p>
                       <a:pPr>
-                        <a:defRPr sz="1200"/>
+                        <a:defRPr sz="1200">
+                          <a:latin typeface="Segoe UI"/>
+                        </a:defRPr>
                       </a:pPr>
                       <a:r>
                         <a:t>Product Name Variant 1</a:t>
@@ -3356,10 +3372,12 @@
                     <a:lstStyle/>
                     <a:p>
                       <a:pPr>
-                        <a:defRPr sz="1200"/>
+                        <a:defRPr sz="1200">
+                          <a:latin typeface="Segoe UI"/>
+                        </a:defRPr>
                       </a:pPr>
                       <a:r>
-                        <a:t>¥180,000</a:t>
+                        <a:t>4,800 JPY</a:t>
                       </a:r>
                     </a:p>
                   </a:txBody>
@@ -3371,10 +3389,12 @@
                     <a:lstStyle/>
                     <a:p>
                       <a:pPr>
-                        <a:defRPr sz="1200"/>
+                        <a:defRPr sz="1200">
+                          <a:latin typeface="Segoe UI"/>
+                        </a:defRPr>
                       </a:pPr>
                       <a:r>
-                        <a:t>Intel Core i7</a:t>
+                        <a:t>N/A</a:t>
                       </a:r>
                     </a:p>
                   </a:txBody>
@@ -3386,10 +3406,12 @@
                     <a:lstStyle/>
                     <a:p>
                       <a:pPr>
-                        <a:defRPr sz="1200"/>
+                        <a:defRPr sz="1200">
+                          <a:latin typeface="Segoe UI"/>
+                        </a:defRPr>
                       </a:pPr>
                       <a:r>
-                        <a:t>16GB</a:t>
+                        <a:t>16GB (8GBx2) DDR4 3200MHz</a:t>
                       </a:r>
                     </a:p>
                   </a:txBody>
@@ -3401,10 +3423,12 @@
                     <a:lstStyle/>
                     <a:p>
                       <a:pPr>
-                        <a:defRPr sz="1200"/>
+                        <a:defRPr sz="1200">
+                          <a:latin typeface="Segoe UI"/>
+                        </a:defRPr>
                       </a:pPr>
                       <a:r>
-                        <a:t>512GB SSD</a:t>
+                        <a:t>N/A</a:t>
                       </a:r>
                     </a:p>
                   </a:txBody>
@@ -3416,10 +3440,12 @@
                     <a:lstStyle/>
                     <a:p>
                       <a:pPr>
-                        <a:defRPr sz="1200"/>
+                        <a:defRPr sz="1200">
+                          <a:latin typeface="Segoe UI"/>
+                        </a:defRPr>
                       </a:pPr>
                       <a:r>
-                        <a:t>3年間オンサイト保証</a:t>
+                        <a:t>Standard manufacturer warranty</a:t>
                       </a:r>
                     </a:p>
                   </a:txBody>
@@ -3431,10 +3457,12 @@
                     <a:lstStyle/>
                     <a:p>
                       <a:pPr>
-                        <a:defRPr sz="1200"/>
+                        <a:defRPr sz="1200">
+                          <a:latin typeface="Segoe UI"/>
+                        </a:defRPr>
                       </a:pPr>
                       <a:r>
-                        <a:t>日本語電話・チャットサポート</a:t>
+                        <a:t>Installation support available</a:t>
                       </a:r>
                     </a:p>
                   </a:txBody>
@@ -3448,7 +3476,9 @@
                     <a:lstStyle/>
                     <a:p>
                       <a:pPr>
-                        <a:defRPr sz="1200"/>
+                        <a:defRPr sz="1200">
+                          <a:latin typeface="Segoe UI"/>
+                        </a:defRPr>
                       </a:pPr>
                       <a:r>
                         <a:t>Product Name Variant 2</a:t>
@@ -3463,10 +3493,12 @@
                     <a:lstStyle/>
                     <a:p>
                       <a:pPr>
-                        <a:defRPr sz="1200"/>
+                        <a:defRPr sz="1200">
+                          <a:latin typeface="Segoe UI"/>
+                        </a:defRPr>
                       </a:pPr>
                       <a:r>
-                        <a:t>¥180,000</a:t>
+                        <a:t>5,200 JPY</a:t>
                       </a:r>
                     </a:p>
                   </a:txBody>
@@ -3478,10 +3510,12 @@
                     <a:lstStyle/>
                     <a:p>
                       <a:pPr>
-                        <a:defRPr sz="1200"/>
+                        <a:defRPr sz="1200">
+                          <a:latin typeface="Segoe UI"/>
+                        </a:defRPr>
                       </a:pPr>
                       <a:r>
-                        <a:t>Intel Core i7</a:t>
+                        <a:t>N/A</a:t>
                       </a:r>
                     </a:p>
                   </a:txBody>
@@ -3493,10 +3527,12 @@
                     <a:lstStyle/>
                     <a:p>
                       <a:pPr>
-                        <a:defRPr sz="1200"/>
+                        <a:defRPr sz="1200">
+                          <a:latin typeface="Segoe UI"/>
+                        </a:defRPr>
                       </a:pPr>
                       <a:r>
-                        <a:t>16GB</a:t>
+                        <a:t>16GB (8GBx2) DDR4 2666MHz</a:t>
                       </a:r>
                     </a:p>
                   </a:txBody>
@@ -3508,10 +3544,12 @@
                     <a:lstStyle/>
                     <a:p>
                       <a:pPr>
-                        <a:defRPr sz="1200"/>
+                        <a:defRPr sz="1200">
+                          <a:latin typeface="Segoe UI"/>
+                        </a:defRPr>
                       </a:pPr>
                       <a:r>
-                        <a:t>512GB SSD</a:t>
+                        <a:t>N/A</a:t>
                       </a:r>
                     </a:p>
                   </a:txBody>
@@ -3523,10 +3561,12 @@
                     <a:lstStyle/>
                     <a:p>
                       <a:pPr>
-                        <a:defRPr sz="1200"/>
+                        <a:defRPr sz="1200">
+                          <a:latin typeface="Segoe UI"/>
+                        </a:defRPr>
                       </a:pPr>
                       <a:r>
-                        <a:t>3年間オンサイト保証</a:t>
+                        <a:t>Standard manufacturer warranty</a:t>
                       </a:r>
                     </a:p>
                   </a:txBody>
@@ -3538,10 +3578,12 @@
                     <a:lstStyle/>
                     <a:p>
                       <a:pPr>
-                        <a:defRPr sz="1200"/>
+                        <a:defRPr sz="1200">
+                          <a:latin typeface="Segoe UI"/>
+                        </a:defRPr>
                       </a:pPr>
                       <a:r>
-                        <a:t>日本語電話・チャットサポート</a:t>
+                        <a:t>Installation support available</a:t>
                       </a:r>
                     </a:p>
                   </a:txBody>
@@ -3555,7 +3597,9 @@
                     <a:lstStyle/>
                     <a:p>
                       <a:pPr>
-                        <a:defRPr sz="1200"/>
+                        <a:defRPr sz="1200">
+                          <a:latin typeface="Segoe UI"/>
+                        </a:defRPr>
                       </a:pPr>
                       <a:r>
                         <a:t>Product Name Variant 3</a:t>
@@ -3570,10 +3614,12 @@
                     <a:lstStyle/>
                     <a:p>
                       <a:pPr>
-                        <a:defRPr sz="1200"/>
+                        <a:defRPr sz="1200">
+                          <a:latin typeface="Segoe UI"/>
+                        </a:defRPr>
                       </a:pPr>
                       <a:r>
-                        <a:t>¥180,000</a:t>
+                        <a:t>4,800 JPY</a:t>
                       </a:r>
                     </a:p>
                   </a:txBody>
@@ -3585,10 +3631,12 @@
                     <a:lstStyle/>
                     <a:p>
                       <a:pPr>
-                        <a:defRPr sz="1200"/>
+                        <a:defRPr sz="1200">
+                          <a:latin typeface="Segoe UI"/>
+                        </a:defRPr>
                       </a:pPr>
                       <a:r>
-                        <a:t>Intel Core i7</a:t>
+                        <a:t>N/A</a:t>
                       </a:r>
                     </a:p>
                   </a:txBody>
@@ -3600,10 +3648,12 @@
                     <a:lstStyle/>
                     <a:p>
                       <a:pPr>
-                        <a:defRPr sz="1200"/>
+                        <a:defRPr sz="1200">
+                          <a:latin typeface="Segoe UI"/>
+                        </a:defRPr>
                       </a:pPr>
                       <a:r>
-                        <a:t>16GB</a:t>
+                        <a:t>16GB (8GBx2) DDR4 3200MHz</a:t>
                       </a:r>
                     </a:p>
                   </a:txBody>
@@ -3615,10 +3665,12 @@
                     <a:lstStyle/>
                     <a:p>
                       <a:pPr>
-                        <a:defRPr sz="1200"/>
+                        <a:defRPr sz="1200">
+                          <a:latin typeface="Segoe UI"/>
+                        </a:defRPr>
                       </a:pPr>
                       <a:r>
-                        <a:t>512GB SSD</a:t>
+                        <a:t>N/A</a:t>
                       </a:r>
                     </a:p>
                   </a:txBody>
@@ -3630,10 +3682,12 @@
                     <a:lstStyle/>
                     <a:p>
                       <a:pPr>
-                        <a:defRPr sz="1200"/>
+                        <a:defRPr sz="1200">
+                          <a:latin typeface="Segoe UI"/>
+                        </a:defRPr>
                       </a:pPr>
                       <a:r>
-                        <a:t>3年間オンサイト保証</a:t>
+                        <a:t>Standard manufacturer warranty</a:t>
                       </a:r>
                     </a:p>
                   </a:txBody>
@@ -3645,10 +3699,12 @@
                     <a:lstStyle/>
                     <a:p>
                       <a:pPr>
-                        <a:defRPr sz="1200"/>
+                        <a:defRPr sz="1200">
+                          <a:latin typeface="Segoe UI"/>
+                        </a:defRPr>
                       </a:pPr>
                       <a:r>
-                        <a:t>日本語電話・チャットサポート</a:t>
+                        <a:t>Installation support available</a:t>
                       </a:r>
                     </a:p>
                   </a:txBody>
@@ -3790,7 +3846,7 @@
               </a:defRPr>
             </a:pPr>
             <a:r>
-              <a:t>• 株式会社クロステック様はコンサルティング業務での効率化を目指しています。</a:t>
+              <a:t>• Seeking reliable and cost-effective DDR4 laptop memory modules.</a:t>
             </a:r>
           </a:p>
           <a:p>
@@ -3806,7 +3862,7 @@
               </a:defRPr>
             </a:pPr>
             <a:r>
-              <a:t>• 資料作成、Zoom会議、プレゼンテーション、軽いグラフィック編集が主な作業。</a:t>
+              <a:t>• Requires 16GB total capacity (8GBx2) for programming and light video editing.</a:t>
             </a:r>
           </a:p>
           <a:p>
@@ -3822,7 +3878,7 @@
               </a:defRPr>
             </a:pPr>
             <a:r>
-              <a:t>• 軽量かつ高解像度ディスプレイ搭載のノートパソコンを5台導入希望。</a:t>
+              <a:t>• Prioritizes stability and performance for smooth multitasking.</a:t>
             </a:r>
           </a:p>
           <a:p>
@@ -3838,7 +3894,7 @@
               </a:defRPr>
             </a:pPr>
             <a:r>
-              <a:t>• 長時間バッテリー駆動と静音設計を重視。</a:t>
+              <a:t>• Budget range between 7,000 and 10,000 JPY.</a:t>
             </a:r>
           </a:p>
           <a:p>
@@ -3854,7 +3910,23 @@
               </a:defRPr>
             </a:pPr>
             <a:r>
-              <a:t>• 迅速な故障対応と3年間のハードウェア保証、全国対応のオンサイトサポートを求めています。</a:t>
+              <a:t>• Prefers trusted brands with good cost performance.</a:t>
+            </a:r>
+          </a:p>
+          <a:p>
+            <a:pPr>
+              <a:spcAft>
+                <a:spcPts val="1200"/>
+              </a:spcAft>
+              <a:defRPr sz="2000">
+                <a:solidFill>
+                  <a:srgbClr val="505050"/>
+                </a:solidFill>
+                <a:latin typeface="Segoe UI"/>
+              </a:defRPr>
+            </a:pPr>
+            <a:r>
+              <a:t>• Requests a quick quote within 1-2 days.</a:t>
             </a:r>
           </a:p>
         </p:txBody>
@@ -3990,7 +4062,7 @@
               </a:defRPr>
             </a:pPr>
             <a:r>
-              <a:t>• 高性能15.6インチノートPCモデルCを5台ご提案。</a:t>
+              <a:t>• Offering high-quality DDR4 16GB (8GBx2) laptop memory kits.</a:t>
             </a:r>
           </a:p>
           <a:p>
@@ -4006,7 +4078,7 @@
               </a:defRPr>
             </a:pPr>
             <a:r>
-              <a:t>• 法人向け3年オンサイト対応保証と日本語電話サポート付き。</a:t>
+              <a:t>• Products selected for optimal balance of speed, stability, and cost efficiency.</a:t>
             </a:r>
           </a:p>
           <a:p>
@@ -4022,7 +4094,7 @@
               </a:defRPr>
             </a:pPr>
             <a:r>
-              <a:t>• 延長保証プランで翌営業日オンサイト対応を実現。</a:t>
+              <a:t>• Trusted brands like Crucial and Kingston included to meet reliability needs.</a:t>
             </a:r>
           </a:p>
           <a:p>
@@ -4038,7 +4110,7 @@
               </a:defRPr>
             </a:pPr>
             <a:r>
-              <a:t>• 日本語電話・チャットサポートプランで迅速な問題解決を支援。</a:t>
+              <a:t>• Competitive pricing within the customer's budget range.</a:t>
             </a:r>
           </a:p>
           <a:p>
@@ -4054,7 +4126,23 @@
               </a:defRPr>
             </a:pPr>
             <a:r>
-              <a:t>• 軽量・長時間駆動・静音設計で業務効率を最大化。</a:t>
+              <a:t>• Fast quotation and delivery process to meet customer timeline.</a:t>
+            </a:r>
+          </a:p>
+          <a:p>
+            <a:pPr>
+              <a:spcAft>
+                <a:spcPts val="1200"/>
+              </a:spcAft>
+              <a:defRPr sz="2000">
+                <a:solidFill>
+                  <a:srgbClr val="505050"/>
+                </a:solidFill>
+                <a:latin typeface="Segoe UI"/>
+              </a:defRPr>
+            </a:pPr>
+            <a:r>
+              <a:t>• Support available for installation and compatibility confirmation.</a:t>
             </a:r>
           </a:p>
         </p:txBody>
@@ -4190,7 +4278,7 @@
               </a:defRPr>
             </a:pPr>
             <a:r>
-              <a:t>• CPU: Intel Core i7搭載で高い処理性能を実現。</a:t>
+              <a:t>• Crucial 16GB Kit: DDR4, 3200MHz, 8GBx2 modules.</a:t>
             </a:r>
           </a:p>
           <a:p>
@@ -4206,7 +4294,7 @@
               </a:defRPr>
             </a:pPr>
             <a:r>
-              <a:t>• メモリ: 16GB RAMでマルチタスクもスムーズ。</a:t>
+              <a:t>• Kingston 16GB Kit: DDR4, 2666MHz, 8GBx2 modules.</a:t>
             </a:r>
           </a:p>
           <a:p>
@@ -4222,7 +4310,7 @@
               </a:defRPr>
             </a:pPr>
             <a:r>
-              <a:t>• ストレージ: 512GB SSDで高速アクセスと大容量を両立。</a:t>
+              <a:t>• Both kits designed for programming and multimedia tasks.</a:t>
             </a:r>
           </a:p>
           <a:p>
@@ -4238,7 +4326,7 @@
               </a:defRPr>
             </a:pPr>
             <a:r>
-              <a:t>• ディスプレイ: 15.6インチフルHD高解像度で見やすい画面。</a:t>
+              <a:t>• Stable performance optimized for laptops.</a:t>
             </a:r>
           </a:p>
           <a:p>
@@ -4254,7 +4342,7 @@
               </a:defRPr>
             </a:pPr>
             <a:r>
-              <a:t>• 重量: 約1.6kgの軽量設計で持ち運びも快適。</a:t>
+              <a:t>• Standard manufacturer warranty applies.</a:t>
             </a:r>
           </a:p>
           <a:p>
@@ -4270,7 +4358,7 @@
               </a:defRPr>
             </a:pPr>
             <a:r>
-              <a:t>• バッテリー: 最大15時間駆動、静音設計で快適な作業環境を提供。</a:t>
+              <a:t>• Compatible with most modern laptop models (confirm compatibility).</a:t>
             </a:r>
           </a:p>
         </p:txBody>
@@ -4406,7 +4494,7 @@
               </a:defRPr>
             </a:pPr>
             <a:r>
-              <a:t>• モデルCノートPC（5台）合計: ¥900,000</a:t>
+              <a:t>• Crucial 16GB Kit priced at 4,800 JPY.</a:t>
             </a:r>
           </a:p>
           <a:p>
@@ -4422,7 +4510,7 @@
               </a:defRPr>
             </a:pPr>
             <a:r>
-              <a:t>• 延長保証プラン（5台分）: ¥40,000</a:t>
+              <a:t>• Kingston 16GB Kit priced at 5,200 JPY.</a:t>
             </a:r>
           </a:p>
           <a:p>
@@ -4438,7 +4526,7 @@
               </a:defRPr>
             </a:pPr>
             <a:r>
-              <a:t>• 法人向け電話・チャットサポートプラン（3年間）: ¥35,000</a:t>
+              <a:t>• Subtotal for selected products: 10,000 JPY.</a:t>
             </a:r>
           </a:p>
           <a:p>
@@ -4454,7 +4542,7 @@
               </a:defRPr>
             </a:pPr>
             <a:r>
-              <a:t>• 小計: ¥975,000</a:t>
+              <a:t>• Tax (8%) adds 800 JPY, total amounting to 10,800 JPY.</a:t>
             </a:r>
           </a:p>
           <a:p>
@@ -4470,7 +4558,7 @@
               </a:defRPr>
             </a:pPr>
             <a:r>
-              <a:t>• 消費税10%: ¥97,500</a:t>
+              <a:t>• Competitive pricing ensures excellent value within budget.</a:t>
             </a:r>
           </a:p>
           <a:p>
@@ -4486,7 +4574,7 @@
               </a:defRPr>
             </a:pPr>
             <a:r>
-              <a:t>• 合計金額: ¥1,072,500</a:t>
+              <a:t>• Prices valid for 30 days from quote date.</a:t>
             </a:r>
           </a:p>
         </p:txBody>
@@ -4622,7 +4710,7 @@
               </a:defRPr>
             </a:pPr>
             <a:r>
-              <a:t>• 3年間の法人向けオンサイト保証付き。</a:t>
+              <a:t>• Standard manufacturer warranty included with all products.</a:t>
             </a:r>
           </a:p>
           <a:p>
@@ -4638,7 +4726,7 @@
               </a:defRPr>
             </a:pPr>
             <a:r>
-              <a:t>• 故障時は翌営業日に全国対応でオンサイトサポート。</a:t>
+              <a:t>• Returns accepted within 14 days if unopened and in original packaging.</a:t>
             </a:r>
           </a:p>
           <a:p>
@@ -4654,7 +4742,7 @@
               </a:defRPr>
             </a:pPr>
             <a:r>
-              <a:t>• 日本語対応の電話・チャットサポートで迅速なトラブル解決。</a:t>
+              <a:t>• Payment terms: 30 days net from invoice date.</a:t>
             </a:r>
           </a:p>
           <a:p>
@@ -4670,7 +4758,7 @@
               </a:defRPr>
             </a:pPr>
             <a:r>
-              <a:t>• 延長保証プランで安心の長期サポートを提供。</a:t>
+              <a:t>• Delivery estimated within 5 business days after order confirmation.</a:t>
             </a:r>
           </a:p>
           <a:p>
@@ -4686,7 +4774,23 @@
               </a:defRPr>
             </a:pPr>
             <a:r>
-              <a:t>• 大阪支社も含む全国対応体制で安心のサービスネットワーク。</a:t>
+              <a:t>• Installation can be done by customer or professional technician.</a:t>
+            </a:r>
+          </a:p>
+          <a:p>
+            <a:pPr>
+              <a:spcAft>
+                <a:spcPts val="1200"/>
+              </a:spcAft>
+              <a:defRPr sz="2000">
+                <a:solidFill>
+                  <a:srgbClr val="505050"/>
+                </a:solidFill>
+                <a:latin typeface="Segoe UI"/>
+              </a:defRPr>
+            </a:pPr>
+            <a:r>
+              <a:t>• BIOS update recommended to ensure optimal performance.</a:t>
             </a:r>
           </a:p>
         </p:txBody>
@@ -4822,7 +4926,7 @@
               </a:defRPr>
             </a:pPr>
             <a:r>
-              <a:t>• 3つのバリエーションで性能は同等、名称のみ異なります。</a:t>
+              <a:t>• Compare three variants of DDR4 16GB (8GBx2) laptop memory kits.</a:t>
             </a:r>
           </a:p>
           <a:p>
@@ -4838,7 +4942,7 @@
               </a:defRPr>
             </a:pPr>
             <a:r>
-              <a:t>• すべて15.6インチフルHDディスプレイ搭載。</a:t>
+              <a:t>• All offer stable performance and cost-effective solutions.</a:t>
             </a:r>
           </a:p>
           <a:p>
@@ -4854,7 +4958,7 @@
               </a:defRPr>
             </a:pPr>
             <a:r>
-              <a:t>• Intel Core i7、16GB RAM、512GB SSDの高性能構成。</a:t>
+              <a:t>• Differences in speed and brand reliability to suit preferences.</a:t>
             </a:r>
           </a:p>
           <a:p>
@@ -4870,7 +4974,7 @@
               </a:defRPr>
             </a:pPr>
             <a:r>
-              <a:t>• 3年間のオンサイト保証と日本語サポート付き。</a:t>
+              <a:t>• Each variant priced competitively within budget range.</a:t>
             </a:r>
           </a:p>
           <a:p>
@@ -4886,7 +4990,23 @@
               </a:defRPr>
             </a:pPr>
             <a:r>
-              <a:t>• 価格はすべて同一でコストパフォーマンスに優れています。</a:t>
+              <a:t>• Helps select the best fit for programming and multimedia needs.</a:t>
+            </a:r>
+          </a:p>
+          <a:p>
+            <a:pPr>
+              <a:spcAft>
+                <a:spcPts val="1200"/>
+              </a:spcAft>
+              <a:defRPr sz="2000">
+                <a:solidFill>
+                  <a:srgbClr val="505050"/>
+                </a:solidFill>
+                <a:latin typeface="Segoe UI"/>
+              </a:defRPr>
+            </a:pPr>
+            <a:r>
+              <a:t>• Detailed specs and pricing available for informed decision.</a:t>
             </a:r>
           </a:p>
         </p:txBody>
@@ -5022,7 +5142,7 @@
               </a:defRPr>
             </a:pPr>
             <a:r>
-              <a:t>• ご注文確定後、1週間以内の納品を予定。</a:t>
+              <a:t>• Order confirmation triggers delivery process.</a:t>
             </a:r>
           </a:p>
           <a:p>
@@ -5038,7 +5158,7 @@
               </a:defRPr>
             </a:pPr>
             <a:r>
-              <a:t>• 在庫状況により納期が変動する場合があります。</a:t>
+              <a:t>• Estimated delivery within 5 business days.</a:t>
             </a:r>
           </a:p>
           <a:p>
@@ -5054,7 +5174,7 @@
               </a:defRPr>
             </a:pPr>
             <a:r>
-              <a:t>• 納品時に初期設定および動作確認を実施。</a:t>
+              <a:t>• Quick processing to meet customer's urgent requirements.</a:t>
             </a:r>
           </a:p>
           <a:p>
@@ -5070,7 +5190,7 @@
               </a:defRPr>
             </a:pPr>
             <a:r>
-              <a:t>• オンサイトサポートのスケジュールは別途調整。</a:t>
+              <a:t>• Shipping details confirmed upon order placement.</a:t>
             </a:r>
           </a:p>
           <a:p>
@@ -5086,7 +5206,23 @@
               </a:defRPr>
             </a:pPr>
             <a:r>
-              <a:t>• 迅速な対応でスムーズな導入をサポートします。</a:t>
+              <a:t>• Installation support available upon request.</a:t>
+            </a:r>
+          </a:p>
+          <a:p>
+            <a:pPr>
+              <a:spcAft>
+                <a:spcPts val="1200"/>
+              </a:spcAft>
+              <a:defRPr sz="2000">
+                <a:solidFill>
+                  <a:srgbClr val="505050"/>
+                </a:solidFill>
+                <a:latin typeface="Segoe UI"/>
+              </a:defRPr>
+            </a:pPr>
+            <a:r>
+              <a:t>• Ensures minimal downtime and fast upgrade.</a:t>
             </a:r>
           </a:p>
         </p:txBody>
@@ -5222,7 +5358,7 @@
               </a:defRPr>
             </a:pPr>
             <a:r>
-              <a:t>• 本見積書をご確認のうえ、ご質問やご要望をお知らせください。</a:t>
+              <a:t>• Review the proposed memory options and select your preferred product.</a:t>
             </a:r>
           </a:p>
           <a:p>
@@ -5238,7 +5374,7 @@
               </a:defRPr>
             </a:pPr>
             <a:r>
-              <a:t>• 社内検討用の比較資料（PDF）をメール送付いたします。</a:t>
+              <a:t>• Confirm order details and provide shipping information.</a:t>
             </a:r>
           </a:p>
           <a:p>
@@ -5254,7 +5390,7 @@
               </a:defRPr>
             </a:pPr>
             <a:r>
-              <a:t>• ご承認いただけましたら正式発注の手続きをお願いいたします。</a:t>
+              <a:t>• Process payment to initiate order fulfillment.</a:t>
             </a:r>
           </a:p>
           <a:p>
@@ -5270,7 +5406,7 @@
               </a:defRPr>
             </a:pPr>
             <a:r>
-              <a:t>• 必要に応じて製品デモや技術相談のアレンジも可能です。</a:t>
+              <a:t>• Schedule delivery and installation as needed.</a:t>
             </a:r>
           </a:p>
           <a:p>
@@ -5286,7 +5422,23 @@
               </a:defRPr>
             </a:pPr>
             <a:r>
-              <a:t>• 納期および導入スケジュールの最終調整を進めましょう。</a:t>
+              <a:t>• Contact us for any questions or compatibility checks.</a:t>
+            </a:r>
+          </a:p>
+          <a:p>
+            <a:pPr>
+              <a:spcAft>
+                <a:spcPts val="1200"/>
+              </a:spcAft>
+              <a:defRPr sz="2000">
+                <a:solidFill>
+                  <a:srgbClr val="505050"/>
+                </a:solidFill>
+                <a:latin typeface="Segoe UI"/>
+              </a:defRPr>
+            </a:pPr>
+            <a:r>
+              <a:t>• Upgrade your laptop performance with reliable memory today!</a:t>
             </a:r>
           </a:p>
         </p:txBody>

--- a/Data/pitch_decks/pitch_deck_001.pptx
+++ b/Data/pitch_decks/pitch_deck_001.pptx
@@ -2,27 +2,33 @@
 <file path=ppt/presentation.xml><?xml version="1.0" encoding="utf-8"?>
 <p:presentation xmlns:a="http://schemas.openxmlformats.org/drawingml/2006/main" xmlns:r="http://schemas.openxmlformats.org/officeDocument/2006/relationships" xmlns:p="http://schemas.openxmlformats.org/presentationml/2006/main" saveSubsetFonts="1" autoCompressPictures="0">
   <p:sldMasterIdLst>
-    <p:sldMasterId id="2147483648" r:id="rId1"/>
+    <p:sldMasterId id="2147483672" r:id="rId4"/>
   </p:sldMasterIdLst>
+  <p:notesMasterIdLst>
+    <p:notesMasterId r:id="rId5"/>
+  </p:notesMasterIdLst>
+  <p:handoutMasterIdLst>
+    <p:handoutMasterId r:id="rId6"/>
+  </p:handoutMasterIdLst>
   <p:sldIdLst>
-    <p:sldId id="256" r:id="rId7"/>
-    <p:sldId id="257" r:id="rId8"/>
-    <p:sldId id="258" r:id="rId9"/>
-    <p:sldId id="259" r:id="rId10"/>
-    <p:sldId id="260" r:id="rId11"/>
-    <p:sldId id="261" r:id="rId12"/>
-    <p:sldId id="262" r:id="rId13"/>
-    <p:sldId id="263" r:id="rId14"/>
-    <p:sldId id="264" r:id="rId15"/>
-    <p:sldId id="265" r:id="rId16"/>
+    <p:sldId id="256" r:id="rId11"/>
+    <p:sldId id="257" r:id="rId12"/>
+    <p:sldId id="258" r:id="rId13"/>
+    <p:sldId id="259" r:id="rId14"/>
+    <p:sldId id="260" r:id="rId15"/>
+    <p:sldId id="261" r:id="rId16"/>
+    <p:sldId id="262" r:id="rId17"/>
+    <p:sldId id="263" r:id="rId18"/>
+    <p:sldId id="264" r:id="rId19"/>
+    <p:sldId id="265" r:id="rId20"/>
   </p:sldIdLst>
-  <p:sldSz cx="9144000" cy="6858000" type="screen4x3"/>
+  <p:sldSz cx="9144000" cy="6858000" type="letter"/>
   <p:notesSz cx="6858000" cy="9144000"/>
   <p:defaultTextStyle>
     <a:defPPr>
       <a:defRPr lang="en-US"/>
     </a:defPPr>
-    <a:lvl1pPr marL="0" algn="l" defTabSz="457200" rtl="0" eaLnBrk="1" latinLnBrk="0" hangingPunct="1">
+    <a:lvl1pPr marL="0" algn="l" defTabSz="914400" rtl="0" eaLnBrk="1" latinLnBrk="0" hangingPunct="1">
       <a:defRPr sz="1800" kern="1200">
         <a:solidFill>
           <a:schemeClr val="tx1"/>
@@ -32,7 +38,7 @@
         <a:cs typeface="+mn-cs"/>
       </a:defRPr>
     </a:lvl1pPr>
-    <a:lvl2pPr marL="457200" algn="l" defTabSz="457200" rtl="0" eaLnBrk="1" latinLnBrk="0" hangingPunct="1">
+    <a:lvl2pPr marL="457200" algn="l" defTabSz="914400" rtl="0" eaLnBrk="1" latinLnBrk="0" hangingPunct="1">
       <a:defRPr sz="1800" kern="1200">
         <a:solidFill>
           <a:schemeClr val="tx1"/>
@@ -42,7 +48,7 @@
         <a:cs typeface="+mn-cs"/>
       </a:defRPr>
     </a:lvl2pPr>
-    <a:lvl3pPr marL="914400" algn="l" defTabSz="457200" rtl="0" eaLnBrk="1" latinLnBrk="0" hangingPunct="1">
+    <a:lvl3pPr marL="914400" algn="l" defTabSz="914400" rtl="0" eaLnBrk="1" latinLnBrk="0" hangingPunct="1">
       <a:defRPr sz="1800" kern="1200">
         <a:solidFill>
           <a:schemeClr val="tx1"/>
@@ -52,7 +58,7 @@
         <a:cs typeface="+mn-cs"/>
       </a:defRPr>
     </a:lvl3pPr>
-    <a:lvl4pPr marL="1371600" algn="l" defTabSz="457200" rtl="0" eaLnBrk="1" latinLnBrk="0" hangingPunct="1">
+    <a:lvl4pPr marL="1371600" algn="l" defTabSz="914400" rtl="0" eaLnBrk="1" latinLnBrk="0" hangingPunct="1">
       <a:defRPr sz="1800" kern="1200">
         <a:solidFill>
           <a:schemeClr val="tx1"/>
@@ -62,7 +68,7 @@
         <a:cs typeface="+mn-cs"/>
       </a:defRPr>
     </a:lvl4pPr>
-    <a:lvl5pPr marL="1828800" algn="l" defTabSz="457200" rtl="0" eaLnBrk="1" latinLnBrk="0" hangingPunct="1">
+    <a:lvl5pPr marL="1828800" algn="l" defTabSz="914400" rtl="0" eaLnBrk="1" latinLnBrk="0" hangingPunct="1">
       <a:defRPr sz="1800" kern="1200">
         <a:solidFill>
           <a:schemeClr val="tx1"/>
@@ -72,7 +78,7 @@
         <a:cs typeface="+mn-cs"/>
       </a:defRPr>
     </a:lvl5pPr>
-    <a:lvl6pPr marL="2286000" algn="l" defTabSz="457200" rtl="0" eaLnBrk="1" latinLnBrk="0" hangingPunct="1">
+    <a:lvl6pPr marL="2286000" algn="l" defTabSz="914400" rtl="0" eaLnBrk="1" latinLnBrk="0" hangingPunct="1">
       <a:defRPr sz="1800" kern="1200">
         <a:solidFill>
           <a:schemeClr val="tx1"/>
@@ -82,7 +88,7 @@
         <a:cs typeface="+mn-cs"/>
       </a:defRPr>
     </a:lvl6pPr>
-    <a:lvl7pPr marL="2743200" algn="l" defTabSz="457200" rtl="0" eaLnBrk="1" latinLnBrk="0" hangingPunct="1">
+    <a:lvl7pPr marL="2743200" algn="l" defTabSz="914400" rtl="0" eaLnBrk="1" latinLnBrk="0" hangingPunct="1">
       <a:defRPr sz="1800" kern="1200">
         <a:solidFill>
           <a:schemeClr val="tx1"/>
@@ -92,7 +98,7 @@
         <a:cs typeface="+mn-cs"/>
       </a:defRPr>
     </a:lvl7pPr>
-    <a:lvl8pPr marL="3200400" algn="l" defTabSz="457200" rtl="0" eaLnBrk="1" latinLnBrk="0" hangingPunct="1">
+    <a:lvl8pPr marL="3200400" algn="l" defTabSz="914400" rtl="0" eaLnBrk="1" latinLnBrk="0" hangingPunct="1">
       <a:defRPr sz="1800" kern="1200">
         <a:solidFill>
           <a:schemeClr val="tx1"/>
@@ -102,7 +108,7 @@
         <a:cs typeface="+mn-cs"/>
       </a:defRPr>
     </a:lvl8pPr>
-    <a:lvl9pPr marL="3657600" algn="l" defTabSz="457200" rtl="0" eaLnBrk="1" latinLnBrk="0" hangingPunct="1">
+    <a:lvl9pPr marL="3657600" algn="l" defTabSz="914400" rtl="0" eaLnBrk="1" latinLnBrk="0" hangingPunct="1">
       <a:defRPr sz="1800" kern="1200">
         <a:solidFill>
           <a:schemeClr val="tx1"/>
@@ -113,12 +119,25 @@
       </a:defRPr>
     </a:lvl9pPr>
   </p:defaultTextStyle>
+  <p:extLst>
+    <p:ext uri="{EFAFB233-063F-42B5-8137-9DF3F51BA10A}">
+      <p15:sldGuideLst xmlns:p15="http://schemas.microsoft.com/office/powerpoint/2012/main"/>
+    </p:ext>
+    <p:ext uri="{2D200454-40CA-4A62-9FC3-DE9A4176ACB9}">
+      <p15:notesGuideLst xmlns:p15="http://schemas.microsoft.com/office/powerpoint/2012/main"/>
+    </p:ext>
+  </p:extLst>
 </p:presentation>
 </file>
 
-<file path=ppt/slideLayouts/slideLayout1.xml><?xml version="1.0" encoding="utf-8"?>
-<p:sldLayout xmlns:a="http://schemas.openxmlformats.org/drawingml/2006/main" xmlns:r="http://schemas.openxmlformats.org/officeDocument/2006/relationships" xmlns:p="http://schemas.openxmlformats.org/presentationml/2006/main" type="title" preserve="1">
-  <p:cSld name="Title Slide">
+<file path=ppt/handoutMasters/handoutMaster1.xml><?xml version="1.0" encoding="utf-8"?>
+<p:handoutMaster xmlns:a="http://schemas.openxmlformats.org/drawingml/2006/main" xmlns:r="http://schemas.openxmlformats.org/officeDocument/2006/relationships" xmlns:p="http://schemas.openxmlformats.org/presentationml/2006/main">
+  <p:cSld>
+    <p:bg>
+      <p:bgRef idx="1001">
+        <a:schemeClr val="bg1"/>
+      </p:bgRef>
+    </p:bg>
     <p:spTree>
       <p:nvGrpSpPr>
         <p:cNvPr id="1" name=""/>
@@ -135,232 +154,179 @@
       </p:grpSpPr>
       <p:sp>
         <p:nvSpPr>
-          <p:cNvPr id="2" name="Title 1"/>
+          <p:cNvPr id="2" name="Header Placeholder 1">
+            <a:extLst>
+              <a:ext uri="{FF2B5EF4-FFF2-40B4-BE49-F238E27FC236}">
+                <a16:creationId xmlns:a16="http://schemas.microsoft.com/office/drawing/2014/main" id="{B855C356-87C3-46C0-9BE5-0C438CD86062}"/>
+              </a:ext>
+            </a:extLst>
+          </p:cNvPr>
           <p:cNvSpPr>
             <a:spLocks noGrp="1"/>
           </p:cNvSpPr>
           <p:nvPr>
-            <p:ph type="ctrTitle"/>
+            <p:ph type="hdr" sz="quarter"/>
           </p:nvPr>
         </p:nvSpPr>
         <p:spPr>
           <a:xfrm>
-            <a:off x="685800" y="2130425"/>
-            <a:ext cx="7772400" cy="1470025"/>
-          </a:xfrm>
+            <a:off x="0" y="0"/>
+            <a:ext cx="2971800" cy="458788"/>
+          </a:xfrm>
+          <a:prstGeom prst="rect">
+            <a:avLst/>
+          </a:prstGeom>
         </p:spPr>
         <p:txBody>
-          <a:bodyPr/>
-          <a:lstStyle/>
-          <a:p>
-            <a:r>
-              <a:rPr lang="en-US" smtClean="0"/>
-              <a:t>Click to edit Master title style</a:t>
-            </a:r>
-            <a:endParaRPr lang="en-US"/>
+          <a:bodyPr vert="horz" lIns="91440" tIns="45720" rIns="91440" bIns="45720" rtlCol="0"/>
+          <a:lstStyle>
+            <a:lvl1pPr algn="l">
+              <a:defRPr sz="1200"/>
+            </a:lvl1pPr>
+          </a:lstStyle>
+          <a:p>
+            <a:endParaRPr lang="en-US" dirty="0"/>
           </a:p>
         </p:txBody>
       </p:sp>
       <p:sp>
         <p:nvSpPr>
-          <p:cNvPr id="3" name="Subtitle 2"/>
+          <p:cNvPr id="3" name="Date Placeholder 2">
+            <a:extLst>
+              <a:ext uri="{FF2B5EF4-FFF2-40B4-BE49-F238E27FC236}">
+                <a16:creationId xmlns:a16="http://schemas.microsoft.com/office/drawing/2014/main" id="{ED084F9A-0678-4D9D-A6DE-5580339F30CF}"/>
+              </a:ext>
+            </a:extLst>
+          </p:cNvPr>
           <p:cNvSpPr>
             <a:spLocks noGrp="1"/>
           </p:cNvSpPr>
           <p:nvPr>
-            <p:ph type="subTitle" idx="1"/>
+            <p:ph type="dt" sz="quarter" idx="1"/>
           </p:nvPr>
         </p:nvSpPr>
         <p:spPr>
           <a:xfrm>
-            <a:off x="1371600" y="3886200"/>
-            <a:ext cx="6400800" cy="1752600"/>
-          </a:xfrm>
+            <a:off x="3884613" y="0"/>
+            <a:ext cx="2971800" cy="458788"/>
+          </a:xfrm>
+          <a:prstGeom prst="rect">
+            <a:avLst/>
+          </a:prstGeom>
         </p:spPr>
         <p:txBody>
-          <a:bodyPr/>
+          <a:bodyPr vert="horz" lIns="91440" tIns="45720" rIns="91440" bIns="45720" rtlCol="0"/>
           <a:lstStyle>
-            <a:lvl1pPr marL="0" indent="0" algn="ctr">
-              <a:buNone/>
-              <a:defRPr>
-                <a:solidFill>
-                  <a:schemeClr val="tx1">
-                    <a:tint val="75000"/>
-                  </a:schemeClr>
-                </a:solidFill>
-              </a:defRPr>
+            <a:lvl1pPr algn="r">
+              <a:defRPr sz="1200"/>
             </a:lvl1pPr>
-            <a:lvl2pPr marL="457200" indent="0" algn="ctr">
-              <a:buNone/>
-              <a:defRPr>
-                <a:solidFill>
-                  <a:schemeClr val="tx1">
-                    <a:tint val="75000"/>
-                  </a:schemeClr>
-                </a:solidFill>
-              </a:defRPr>
-            </a:lvl2pPr>
-            <a:lvl3pPr marL="914400" indent="0" algn="ctr">
-              <a:buNone/>
-              <a:defRPr>
-                <a:solidFill>
-                  <a:schemeClr val="tx1">
-                    <a:tint val="75000"/>
-                  </a:schemeClr>
-                </a:solidFill>
-              </a:defRPr>
-            </a:lvl3pPr>
-            <a:lvl4pPr marL="1371600" indent="0" algn="ctr">
-              <a:buNone/>
-              <a:defRPr>
-                <a:solidFill>
-                  <a:schemeClr val="tx1">
-                    <a:tint val="75000"/>
-                  </a:schemeClr>
-                </a:solidFill>
-              </a:defRPr>
-            </a:lvl4pPr>
-            <a:lvl5pPr marL="1828800" indent="0" algn="ctr">
-              <a:buNone/>
-              <a:defRPr>
-                <a:solidFill>
-                  <a:schemeClr val="tx1">
-                    <a:tint val="75000"/>
-                  </a:schemeClr>
-                </a:solidFill>
-              </a:defRPr>
-            </a:lvl5pPr>
-            <a:lvl6pPr marL="2286000" indent="0" algn="ctr">
-              <a:buNone/>
-              <a:defRPr>
-                <a:solidFill>
-                  <a:schemeClr val="tx1">
-                    <a:tint val="75000"/>
-                  </a:schemeClr>
-                </a:solidFill>
-              </a:defRPr>
-            </a:lvl6pPr>
-            <a:lvl7pPr marL="2743200" indent="0" algn="ctr">
-              <a:buNone/>
-              <a:defRPr>
-                <a:solidFill>
-                  <a:schemeClr val="tx1">
-                    <a:tint val="75000"/>
-                  </a:schemeClr>
-                </a:solidFill>
-              </a:defRPr>
-            </a:lvl7pPr>
-            <a:lvl8pPr marL="3200400" indent="0" algn="ctr">
-              <a:buNone/>
-              <a:defRPr>
-                <a:solidFill>
-                  <a:schemeClr val="tx1">
-                    <a:tint val="75000"/>
-                  </a:schemeClr>
-                </a:solidFill>
-              </a:defRPr>
-            </a:lvl8pPr>
-            <a:lvl9pPr marL="3657600" indent="0" algn="ctr">
-              <a:buNone/>
-              <a:defRPr>
-                <a:solidFill>
-                  <a:schemeClr val="tx1">
-                    <a:tint val="75000"/>
-                  </a:schemeClr>
-                </a:solidFill>
-              </a:defRPr>
-            </a:lvl9pPr>
           </a:lstStyle>
           <a:p>
-            <a:r>
+            <a:fld id="{0D2466B4-265E-45CE-96BF-654B8C3EDD3A}" type="datetimeFigureOut">
               <a:rPr lang="en-US" smtClean="0"/>
-              <a:t>Click to edit Master subtitle style</a:t>
-            </a:r>
-            <a:endParaRPr lang="en-US"/>
+              <a:t>6/4/2025</a:t>
+            </a:fld>
+            <a:endParaRPr lang="en-US" dirty="0"/>
           </a:p>
         </p:txBody>
       </p:sp>
       <p:sp>
         <p:nvSpPr>
-          <p:cNvPr id="4" name="Date Placeholder 3"/>
+          <p:cNvPr id="4" name="Footer Placeholder 3">
+            <a:extLst>
+              <a:ext uri="{FF2B5EF4-FFF2-40B4-BE49-F238E27FC236}">
+                <a16:creationId xmlns:a16="http://schemas.microsoft.com/office/drawing/2014/main" id="{E3FA5588-4D70-4A31-96A1-E7657C522454}"/>
+              </a:ext>
+            </a:extLst>
+          </p:cNvPr>
           <p:cNvSpPr>
             <a:spLocks noGrp="1"/>
           </p:cNvSpPr>
           <p:nvPr>
-            <p:ph type="dt" sz="half" idx="10"/>
+            <p:ph type="ftr" sz="quarter" idx="2"/>
           </p:nvPr>
         </p:nvSpPr>
-        <p:spPr/>
+        <p:spPr>
+          <a:xfrm>
+            <a:off x="0" y="8685213"/>
+            <a:ext cx="2971800" cy="458787"/>
+          </a:xfrm>
+          <a:prstGeom prst="rect">
+            <a:avLst/>
+          </a:prstGeom>
+        </p:spPr>
         <p:txBody>
-          <a:bodyPr/>
-          <a:lstStyle/>
-          <a:p>
-            <a:fld id="{5BCAD085-E8A6-8845-BD4E-CB4CCA059FC4}" type="datetimeFigureOut">
-              <a:rPr lang="en-US" smtClean="0"/>
-              <a:t>1/27/13</a:t>
-            </a:fld>
-            <a:endParaRPr lang="en-US"/>
+          <a:bodyPr vert="horz" lIns="91440" tIns="45720" rIns="91440" bIns="45720" rtlCol="0" anchor="b"/>
+          <a:lstStyle>
+            <a:lvl1pPr algn="l">
+              <a:defRPr sz="1200"/>
+            </a:lvl1pPr>
+          </a:lstStyle>
+          <a:p>
+            <a:endParaRPr lang="en-US" dirty="0"/>
           </a:p>
         </p:txBody>
       </p:sp>
       <p:sp>
         <p:nvSpPr>
-          <p:cNvPr id="5" name="Footer Placeholder 4"/>
+          <p:cNvPr id="5" name="Slide Number Placeholder 4">
+            <a:extLst>
+              <a:ext uri="{FF2B5EF4-FFF2-40B4-BE49-F238E27FC236}">
+                <a16:creationId xmlns:a16="http://schemas.microsoft.com/office/drawing/2014/main" id="{BB593C42-755E-447B-990E-F4CE9365EF37}"/>
+              </a:ext>
+            </a:extLst>
+          </p:cNvPr>
           <p:cNvSpPr>
             <a:spLocks noGrp="1"/>
           </p:cNvSpPr>
           <p:nvPr>
-            <p:ph type="ftr" sz="quarter" idx="11"/>
+            <p:ph type="sldNum" sz="quarter" idx="3"/>
           </p:nvPr>
         </p:nvSpPr>
-        <p:spPr/>
+        <p:spPr>
+          <a:xfrm>
+            <a:off x="3884613" y="8685213"/>
+            <a:ext cx="2971800" cy="458787"/>
+          </a:xfrm>
+          <a:prstGeom prst="rect">
+            <a:avLst/>
+          </a:prstGeom>
+        </p:spPr>
         <p:txBody>
-          <a:bodyPr/>
-          <a:lstStyle/>
-          <a:p>
-            <a:endParaRPr lang="en-US"/>
-          </a:p>
-        </p:txBody>
-      </p:sp>
-      <p:sp>
-        <p:nvSpPr>
-          <p:cNvPr id="6" name="Slide Number Placeholder 5"/>
-          <p:cNvSpPr>
-            <a:spLocks noGrp="1"/>
-          </p:cNvSpPr>
-          <p:nvPr>
-            <p:ph type="sldNum" sz="quarter" idx="12"/>
-          </p:nvPr>
-        </p:nvSpPr>
-        <p:spPr/>
-        <p:txBody>
-          <a:bodyPr/>
-          <a:lstStyle/>
-          <a:p>
-            <a:fld id="{C1FF6DA9-008F-8B48-92A6-B652298478BF}" type="slidenum">
+          <a:bodyPr vert="horz" lIns="91440" tIns="45720" rIns="91440" bIns="45720" rtlCol="0" anchor="b"/>
+          <a:lstStyle>
+            <a:lvl1pPr algn="r">
+              <a:defRPr sz="1200"/>
+            </a:lvl1pPr>
+          </a:lstStyle>
+          <a:p>
+            <a:fld id="{CBD836DF-17F6-4050-BFA7-2C163529DC32}" type="slidenum">
               <a:rPr lang="en-US" smtClean="0"/>
               <a:t>‹#›</a:t>
             </a:fld>
-            <a:endParaRPr lang="en-US"/>
+            <a:endParaRPr lang="en-US" dirty="0"/>
           </a:p>
         </p:txBody>
       </p:sp>
     </p:spTree>
     <p:extLst>
       <p:ext uri="{BB962C8B-B14F-4D97-AF65-F5344CB8AC3E}">
-        <p14:creationId xmlns:p14="http://schemas.microsoft.com/office/powerpoint/2010/main" val="3168075583"/>
+        <p14:creationId xmlns:p14="http://schemas.microsoft.com/office/powerpoint/2010/main" val="3882546198"/>
       </p:ext>
     </p:extLst>
   </p:cSld>
-  <p:clrMapOvr>
-    <a:masterClrMapping/>
-  </p:clrMapOvr>
-</p:sldLayout>
+  <p:clrMap bg1="lt1" tx1="dk1" bg2="lt2" tx2="dk2" accent1="accent1" accent2="accent2" accent3="accent3" accent4="accent4" accent5="accent5" accent6="accent6" hlink="hlink" folHlink="folHlink"/>
+</p:handoutMaster>
 </file>
 
-<file path=ppt/slideLayouts/slideLayout10.xml><?xml version="1.0" encoding="utf-8"?>
-<p:sldLayout xmlns:a="http://schemas.openxmlformats.org/drawingml/2006/main" xmlns:r="http://schemas.openxmlformats.org/officeDocument/2006/relationships" xmlns:p="http://schemas.openxmlformats.org/presentationml/2006/main" type="vertTx" preserve="1">
-  <p:cSld name="Title and Vertical Text">
+<file path=ppt/notesMasters/notesMaster1.xml><?xml version="1.0" encoding="utf-8"?>
+<p:notesMaster xmlns:a="http://schemas.openxmlformats.org/drawingml/2006/main" xmlns:r="http://schemas.openxmlformats.org/officeDocument/2006/relationships" xmlns:p="http://schemas.openxmlformats.org/presentationml/2006/main">
+  <p:cSld>
+    <p:bg>
+      <p:bgRef idx="1001">
+        <a:schemeClr val="bg1"/>
+      </p:bgRef>
+    </p:bg>
     <p:spTree>
       <p:nvGrpSpPr>
         <p:cNvPr id="1" name=""/>
@@ -377,160 +343,334 @@
       </p:grpSpPr>
       <p:sp>
         <p:nvSpPr>
-          <p:cNvPr id="2" name="Title 1"/>
+          <p:cNvPr id="2" name="Header Placeholder 1"/>
           <p:cNvSpPr>
             <a:spLocks noGrp="1"/>
           </p:cNvSpPr>
           <p:nvPr>
-            <p:ph type="title"/>
+            <p:ph type="hdr" sz="quarter"/>
           </p:nvPr>
         </p:nvSpPr>
-        <p:spPr/>
+        <p:spPr>
+          <a:xfrm>
+            <a:off x="0" y="0"/>
+            <a:ext cx="2971800" cy="458788"/>
+          </a:xfrm>
+          <a:prstGeom prst="rect">
+            <a:avLst/>
+          </a:prstGeom>
+        </p:spPr>
         <p:txBody>
-          <a:bodyPr/>
-          <a:lstStyle/>
-          <a:p>
-            <a:r>
-              <a:rPr lang="en-US" smtClean="0"/>
-              <a:t>Click to edit Master title style</a:t>
-            </a:r>
-            <a:endParaRPr lang="en-US"/>
+          <a:bodyPr vert="horz" lIns="91440" tIns="45720" rIns="91440" bIns="45720" rtlCol="0"/>
+          <a:lstStyle>
+            <a:lvl1pPr algn="l">
+              <a:defRPr sz="1200"/>
+            </a:lvl1pPr>
+          </a:lstStyle>
+          <a:p>
+            <a:endParaRPr lang="en-US" dirty="0"/>
           </a:p>
         </p:txBody>
       </p:sp>
       <p:sp>
         <p:nvSpPr>
-          <p:cNvPr id="3" name="Vertical Text Placeholder 2"/>
+          <p:cNvPr id="3" name="Date Placeholder 2"/>
           <p:cNvSpPr>
             <a:spLocks noGrp="1"/>
           </p:cNvSpPr>
           <p:nvPr>
-            <p:ph type="body" orient="vert" idx="1"/>
+            <p:ph type="dt" idx="1"/>
           </p:nvPr>
         </p:nvSpPr>
-        <p:spPr/>
+        <p:spPr>
+          <a:xfrm>
+            <a:off x="3884613" y="0"/>
+            <a:ext cx="2971800" cy="458788"/>
+          </a:xfrm>
+          <a:prstGeom prst="rect">
+            <a:avLst/>
+          </a:prstGeom>
+        </p:spPr>
         <p:txBody>
-          <a:bodyPr vert="eaVert"/>
-          <a:lstStyle/>
-          <a:p>
-            <a:pPr lvl="0"/>
-            <a:r>
+          <a:bodyPr vert="horz" lIns="91440" tIns="45720" rIns="91440" bIns="45720" rtlCol="0"/>
+          <a:lstStyle>
+            <a:lvl1pPr algn="r">
+              <a:defRPr sz="1200"/>
+            </a:lvl1pPr>
+          </a:lstStyle>
+          <a:p>
+            <a:fld id="{2E42C8C0-3D92-43D9-9A29-981FA6744B0E}" type="datetimeFigureOut">
               <a:rPr lang="en-US" smtClean="0"/>
-              <a:t>Click to edit Master text styles</a:t>
-            </a:r>
-          </a:p>
-          <a:p>
-            <a:pPr lvl="1"/>
-            <a:r>
-              <a:rPr lang="en-US" smtClean="0"/>
-              <a:t>Second level</a:t>
-            </a:r>
-          </a:p>
-          <a:p>
-            <a:pPr lvl="2"/>
-            <a:r>
-              <a:rPr lang="en-US" smtClean="0"/>
-              <a:t>Third level</a:t>
-            </a:r>
-          </a:p>
-          <a:p>
-            <a:pPr lvl="3"/>
-            <a:r>
-              <a:rPr lang="en-US" smtClean="0"/>
-              <a:t>Fourth level</a:t>
-            </a:r>
-          </a:p>
-          <a:p>
-            <a:pPr lvl="4"/>
-            <a:r>
-              <a:rPr lang="en-US" smtClean="0"/>
-              <a:t>Fifth level</a:t>
-            </a:r>
-            <a:endParaRPr lang="en-US"/>
+              <a:t>6/4/2025</a:t>
+            </a:fld>
+            <a:endParaRPr lang="en-US" dirty="0"/>
           </a:p>
         </p:txBody>
       </p:sp>
       <p:sp>
         <p:nvSpPr>
-          <p:cNvPr id="4" name="Date Placeholder 3"/>
+          <p:cNvPr id="4" name="Slide Image Placeholder 3"/>
+          <p:cNvSpPr>
+            <a:spLocks noGrp="1" noRot="1" noChangeAspect="1"/>
+          </p:cNvSpPr>
+          <p:nvPr>
+            <p:ph type="sldImg" idx="2"/>
+          </p:nvPr>
+        </p:nvSpPr>
+        <p:spPr>
+          <a:xfrm>
+            <a:off x="1371600" y="1143000"/>
+            <a:ext cx="4114800" cy="3086100"/>
+          </a:xfrm>
+          <a:prstGeom prst="rect">
+            <a:avLst/>
+          </a:prstGeom>
+          <a:noFill/>
+          <a:ln w="12700">
+            <a:solidFill>
+              <a:prstClr val="black"/>
+            </a:solidFill>
+          </a:ln>
+        </p:spPr>
+        <p:txBody>
+          <a:bodyPr vert="horz" lIns="91440" tIns="45720" rIns="91440" bIns="45720" rtlCol="0" anchor="ctr"/>
+          <a:lstStyle/>
+          <a:p>
+            <a:endParaRPr lang="en-US" dirty="0"/>
+          </a:p>
+        </p:txBody>
+      </p:sp>
+      <p:sp>
+        <p:nvSpPr>
+          <p:cNvPr id="5" name="Notes Placeholder 4"/>
           <p:cNvSpPr>
             <a:spLocks noGrp="1"/>
           </p:cNvSpPr>
           <p:nvPr>
-            <p:ph type="dt" sz="half" idx="10"/>
+            <p:ph type="body" sz="quarter" idx="3"/>
           </p:nvPr>
         </p:nvSpPr>
-        <p:spPr/>
+        <p:spPr>
+          <a:xfrm>
+            <a:off x="685800" y="4400550"/>
+            <a:ext cx="5486400" cy="3600450"/>
+          </a:xfrm>
+          <a:prstGeom prst="rect">
+            <a:avLst/>
+          </a:prstGeom>
+        </p:spPr>
         <p:txBody>
-          <a:bodyPr/>
+          <a:bodyPr vert="horz" lIns="91440" tIns="45720" rIns="91440" bIns="45720" rtlCol="0"/>
           <a:lstStyle/>
           <a:p>
-            <a:fld id="{5BCAD085-E8A6-8845-BD4E-CB4CCA059FC4}" type="datetimeFigureOut">
-              <a:rPr lang="en-US" smtClean="0"/>
-              <a:t>1/27/13</a:t>
-            </a:fld>
-            <a:endParaRPr lang="en-US"/>
+            <a:pPr lvl="0"/>
+            <a:r>
+              <a:rPr lang="en-US"/>
+              <a:t>Click to edit Master text styles</a:t>
+            </a:r>
+          </a:p>
+          <a:p>
+            <a:pPr lvl="1"/>
+            <a:r>
+              <a:rPr lang="en-US"/>
+              <a:t>Second level</a:t>
+            </a:r>
+          </a:p>
+          <a:p>
+            <a:pPr lvl="2"/>
+            <a:r>
+              <a:rPr lang="en-US"/>
+              <a:t>Third level</a:t>
+            </a:r>
+          </a:p>
+          <a:p>
+            <a:pPr lvl="3"/>
+            <a:r>
+              <a:rPr lang="en-US"/>
+              <a:t>Fourth level</a:t>
+            </a:r>
+          </a:p>
+          <a:p>
+            <a:pPr lvl="4"/>
+            <a:r>
+              <a:rPr lang="en-US"/>
+              <a:t>Fifth level</a:t>
+            </a:r>
           </a:p>
         </p:txBody>
       </p:sp>
       <p:sp>
         <p:nvSpPr>
-          <p:cNvPr id="5" name="Footer Placeholder 4"/>
+          <p:cNvPr id="6" name="Footer Placeholder 5"/>
           <p:cNvSpPr>
             <a:spLocks noGrp="1"/>
           </p:cNvSpPr>
           <p:nvPr>
-            <p:ph type="ftr" sz="quarter" idx="11"/>
+            <p:ph type="ftr" sz="quarter" idx="4"/>
           </p:nvPr>
         </p:nvSpPr>
-        <p:spPr/>
+        <p:spPr>
+          <a:xfrm>
+            <a:off x="0" y="8685213"/>
+            <a:ext cx="2971800" cy="458787"/>
+          </a:xfrm>
+          <a:prstGeom prst="rect">
+            <a:avLst/>
+          </a:prstGeom>
+        </p:spPr>
         <p:txBody>
-          <a:bodyPr/>
-          <a:lstStyle/>
-          <a:p>
-            <a:endParaRPr lang="en-US"/>
+          <a:bodyPr vert="horz" lIns="91440" tIns="45720" rIns="91440" bIns="45720" rtlCol="0" anchor="b"/>
+          <a:lstStyle>
+            <a:lvl1pPr algn="l">
+              <a:defRPr sz="1200"/>
+            </a:lvl1pPr>
+          </a:lstStyle>
+          <a:p>
+            <a:endParaRPr lang="en-US" dirty="0"/>
           </a:p>
         </p:txBody>
       </p:sp>
       <p:sp>
         <p:nvSpPr>
-          <p:cNvPr id="6" name="Slide Number Placeholder 5"/>
+          <p:cNvPr id="7" name="Slide Number Placeholder 6"/>
           <p:cNvSpPr>
             <a:spLocks noGrp="1"/>
           </p:cNvSpPr>
           <p:nvPr>
-            <p:ph type="sldNum" sz="quarter" idx="12"/>
+            <p:ph type="sldNum" sz="quarter" idx="5"/>
           </p:nvPr>
         </p:nvSpPr>
-        <p:spPr/>
+        <p:spPr>
+          <a:xfrm>
+            <a:off x="3884613" y="8685213"/>
+            <a:ext cx="2971800" cy="458787"/>
+          </a:xfrm>
+          <a:prstGeom prst="rect">
+            <a:avLst/>
+          </a:prstGeom>
+        </p:spPr>
         <p:txBody>
-          <a:bodyPr/>
-          <a:lstStyle/>
-          <a:p>
-            <a:fld id="{C1FF6DA9-008F-8B48-92A6-B652298478BF}" type="slidenum">
+          <a:bodyPr vert="horz" lIns="91440" tIns="45720" rIns="91440" bIns="45720" rtlCol="0" anchor="b"/>
+          <a:lstStyle>
+            <a:lvl1pPr algn="r">
+              <a:defRPr sz="1200"/>
+            </a:lvl1pPr>
+          </a:lstStyle>
+          <a:p>
+            <a:fld id="{E34B92B7-C405-42F2-A911-E7C15F1E4B66}" type="slidenum">
               <a:rPr lang="en-US" smtClean="0"/>
               <a:t>‹#›</a:t>
             </a:fld>
-            <a:endParaRPr lang="en-US"/>
+            <a:endParaRPr lang="en-US" dirty="0"/>
           </a:p>
         </p:txBody>
       </p:sp>
     </p:spTree>
     <p:extLst>
       <p:ext uri="{BB962C8B-B14F-4D97-AF65-F5344CB8AC3E}">
-        <p14:creationId xmlns:p14="http://schemas.microsoft.com/office/powerpoint/2010/main" val="2910927964"/>
+        <p14:creationId xmlns:p14="http://schemas.microsoft.com/office/powerpoint/2010/main" val="144941100"/>
       </p:ext>
     </p:extLst>
   </p:cSld>
-  <p:clrMapOvr>
-    <a:masterClrMapping/>
-  </p:clrMapOvr>
-</p:sldLayout>
+  <p:clrMap bg1="lt1" tx1="dk1" bg2="lt2" tx2="dk2" accent1="accent1" accent2="accent2" accent3="accent3" accent4="accent4" accent5="accent5" accent6="accent6" hlink="hlink" folHlink="folHlink"/>
+  <p:notesStyle>
+    <a:lvl1pPr marL="0" algn="l" defTabSz="914400" rtl="0" eaLnBrk="1" latinLnBrk="0" hangingPunct="1">
+      <a:defRPr sz="1200" kern="1200">
+        <a:solidFill>
+          <a:schemeClr val="tx1"/>
+        </a:solidFill>
+        <a:latin typeface="+mn-lt"/>
+        <a:ea typeface="+mn-ea"/>
+        <a:cs typeface="+mn-cs"/>
+      </a:defRPr>
+    </a:lvl1pPr>
+    <a:lvl2pPr marL="457200" algn="l" defTabSz="914400" rtl="0" eaLnBrk="1" latinLnBrk="0" hangingPunct="1">
+      <a:defRPr sz="1200" kern="1200">
+        <a:solidFill>
+          <a:schemeClr val="tx1"/>
+        </a:solidFill>
+        <a:latin typeface="+mn-lt"/>
+        <a:ea typeface="+mn-ea"/>
+        <a:cs typeface="+mn-cs"/>
+      </a:defRPr>
+    </a:lvl2pPr>
+    <a:lvl3pPr marL="914400" algn="l" defTabSz="914400" rtl="0" eaLnBrk="1" latinLnBrk="0" hangingPunct="1">
+      <a:defRPr sz="1200" kern="1200">
+        <a:solidFill>
+          <a:schemeClr val="tx1"/>
+        </a:solidFill>
+        <a:latin typeface="+mn-lt"/>
+        <a:ea typeface="+mn-ea"/>
+        <a:cs typeface="+mn-cs"/>
+      </a:defRPr>
+    </a:lvl3pPr>
+    <a:lvl4pPr marL="1371600" algn="l" defTabSz="914400" rtl="0" eaLnBrk="1" latinLnBrk="0" hangingPunct="1">
+      <a:defRPr sz="1200" kern="1200">
+        <a:solidFill>
+          <a:schemeClr val="tx1"/>
+        </a:solidFill>
+        <a:latin typeface="+mn-lt"/>
+        <a:ea typeface="+mn-ea"/>
+        <a:cs typeface="+mn-cs"/>
+      </a:defRPr>
+    </a:lvl4pPr>
+    <a:lvl5pPr marL="1828800" algn="l" defTabSz="914400" rtl="0" eaLnBrk="1" latinLnBrk="0" hangingPunct="1">
+      <a:defRPr sz="1200" kern="1200">
+        <a:solidFill>
+          <a:schemeClr val="tx1"/>
+        </a:solidFill>
+        <a:latin typeface="+mn-lt"/>
+        <a:ea typeface="+mn-ea"/>
+        <a:cs typeface="+mn-cs"/>
+      </a:defRPr>
+    </a:lvl5pPr>
+    <a:lvl6pPr marL="2286000" algn="l" defTabSz="914400" rtl="0" eaLnBrk="1" latinLnBrk="0" hangingPunct="1">
+      <a:defRPr sz="1200" kern="1200">
+        <a:solidFill>
+          <a:schemeClr val="tx1"/>
+        </a:solidFill>
+        <a:latin typeface="+mn-lt"/>
+        <a:ea typeface="+mn-ea"/>
+        <a:cs typeface="+mn-cs"/>
+      </a:defRPr>
+    </a:lvl6pPr>
+    <a:lvl7pPr marL="2743200" algn="l" defTabSz="914400" rtl="0" eaLnBrk="1" latinLnBrk="0" hangingPunct="1">
+      <a:defRPr sz="1200" kern="1200">
+        <a:solidFill>
+          <a:schemeClr val="tx1"/>
+        </a:solidFill>
+        <a:latin typeface="+mn-lt"/>
+        <a:ea typeface="+mn-ea"/>
+        <a:cs typeface="+mn-cs"/>
+      </a:defRPr>
+    </a:lvl7pPr>
+    <a:lvl8pPr marL="3200400" algn="l" defTabSz="914400" rtl="0" eaLnBrk="1" latinLnBrk="0" hangingPunct="1">
+      <a:defRPr sz="1200" kern="1200">
+        <a:solidFill>
+          <a:schemeClr val="tx1"/>
+        </a:solidFill>
+        <a:latin typeface="+mn-lt"/>
+        <a:ea typeface="+mn-ea"/>
+        <a:cs typeface="+mn-cs"/>
+      </a:defRPr>
+    </a:lvl8pPr>
+    <a:lvl9pPr marL="3657600" algn="l" defTabSz="914400" rtl="0" eaLnBrk="1" latinLnBrk="0" hangingPunct="1">
+      <a:defRPr sz="1200" kern="1200">
+        <a:solidFill>
+          <a:schemeClr val="tx1"/>
+        </a:solidFill>
+        <a:latin typeface="+mn-lt"/>
+        <a:ea typeface="+mn-ea"/>
+        <a:cs typeface="+mn-cs"/>
+      </a:defRPr>
+    </a:lvl9pPr>
+  </p:notesStyle>
+</p:notesMaster>
 </file>
 
-<file path=ppt/slideLayouts/slideLayout11.xml><?xml version="1.0" encoding="utf-8"?>
-<p:sldLayout xmlns:a="http://schemas.openxmlformats.org/drawingml/2006/main" xmlns:r="http://schemas.openxmlformats.org/officeDocument/2006/relationships" xmlns:p="http://schemas.openxmlformats.org/presentationml/2006/main" type="vertTitleAndTx" preserve="1">
-  <p:cSld name="Vertical Title and Text">
+<file path=ppt/slideLayouts/slideLayout1.xml><?xml version="1.0" encoding="utf-8"?>
+<p:sldLayout xmlns:a="http://schemas.openxmlformats.org/drawingml/2006/main" xmlns:r="http://schemas.openxmlformats.org/officeDocument/2006/relationships" xmlns:p="http://schemas.openxmlformats.org/presentationml/2006/main" preserve="1" userDrawn="1">
+  <p:cSld name="Welcome Sign">
     <p:spTree>
       <p:nvGrpSpPr>
         <p:cNvPr id="1" name=""/>
@@ -547,158 +687,143 @@
       </p:grpSpPr>
       <p:sp>
         <p:nvSpPr>
-          <p:cNvPr id="2" name="Vertical Title 1"/>
+          <p:cNvPr id="2" name="Title 1">
+            <a:extLst>
+              <a:ext uri="{FF2B5EF4-FFF2-40B4-BE49-F238E27FC236}">
+                <a16:creationId xmlns:a16="http://schemas.microsoft.com/office/drawing/2014/main" id="{0C201E5D-B2CA-4340-A705-A178FDF0CDB0}"/>
+              </a:ext>
+            </a:extLst>
+          </p:cNvPr>
           <p:cNvSpPr>
             <a:spLocks noGrp="1"/>
           </p:cNvSpPr>
           <p:nvPr>
-            <p:ph type="title" orient="vert"/>
+            <p:ph type="title" hasCustomPrompt="1"/>
           </p:nvPr>
         </p:nvSpPr>
         <p:spPr>
           <a:xfrm>
-            <a:off x="6629400" y="274638"/>
-            <a:ext cx="2057400" cy="5851525"/>
+            <a:off x="628650" y="2660125"/>
+            <a:ext cx="7886700" cy="1325563"/>
           </a:xfrm>
         </p:spPr>
         <p:txBody>
-          <a:bodyPr vert="eaVert"/>
-          <a:lstStyle/>
-          <a:p>
-            <a:r>
-              <a:rPr lang="en-US" smtClean="0"/>
-              <a:t>Click to edit Master title style</a:t>
-            </a:r>
-            <a:endParaRPr lang="en-US"/>
+          <a:bodyPr>
+            <a:noAutofit/>
+          </a:bodyPr>
+          <a:lstStyle>
+            <a:lvl1pPr>
+              <a:defRPr sz="9600" cap="all" spc="600" baseline="0">
+                <a:solidFill>
+                  <a:schemeClr val="tx1"/>
+                </a:solidFill>
+                <a:latin typeface="Franklin Gothic Demi" panose="020B0703020102020204" pitchFamily="34" charset="0"/>
+              </a:defRPr>
+            </a:lvl1pPr>
+          </a:lstStyle>
+          <a:p>
+            <a:r>
+              <a:rPr lang="en-US" dirty="0"/>
+              <a:t>WELCOME</a:t>
+            </a:r>
           </a:p>
         </p:txBody>
       </p:sp>
       <p:sp>
         <p:nvSpPr>
-          <p:cNvPr id="3" name="Vertical Text Placeholder 2"/>
+          <p:cNvPr id="22" name="Text Placeholder 12">
+            <a:extLst>
+              <a:ext uri="{FF2B5EF4-FFF2-40B4-BE49-F238E27FC236}">
+                <a16:creationId xmlns:a16="http://schemas.microsoft.com/office/drawing/2014/main" id="{373CE0CF-8E13-4F8A-93AD-BFB4E9340D4C}"/>
+              </a:ext>
+            </a:extLst>
+          </p:cNvPr>
           <p:cNvSpPr>
             <a:spLocks noGrp="1"/>
           </p:cNvSpPr>
           <p:nvPr>
-            <p:ph type="body" orient="vert" idx="1"/>
+            <p:ph type="body" sz="quarter" idx="13" hasCustomPrompt="1"/>
           </p:nvPr>
         </p:nvSpPr>
         <p:spPr>
           <a:xfrm>
-            <a:off x="457200" y="274638"/>
-            <a:ext cx="6019800" cy="5851525"/>
+            <a:off x="628650" y="1828453"/>
+            <a:ext cx="7886700" cy="831672"/>
           </a:xfrm>
         </p:spPr>
         <p:txBody>
-          <a:bodyPr vert="eaVert"/>
-          <a:lstStyle/>
+          <a:bodyPr anchor="ctr">
+            <a:noAutofit/>
+          </a:bodyPr>
+          <a:lstStyle>
+            <a:lvl1pPr>
+              <a:defRPr sz="7600" cap="all" spc="300" baseline="0">
+                <a:solidFill>
+                  <a:schemeClr val="tx2"/>
+                </a:solidFill>
+                <a:latin typeface="+mj-lt"/>
+              </a:defRPr>
+            </a:lvl1pPr>
+          </a:lstStyle>
           <a:p>
             <a:pPr lvl="0"/>
             <a:r>
-              <a:rPr lang="en-US" smtClean="0"/>
-              <a:t>Click to edit Master text styles</a:t>
-            </a:r>
-          </a:p>
-          <a:p>
-            <a:pPr lvl="1"/>
-            <a:r>
-              <a:rPr lang="en-US" smtClean="0"/>
-              <a:t>Second level</a:t>
-            </a:r>
-          </a:p>
-          <a:p>
-            <a:pPr lvl="2"/>
-            <a:r>
-              <a:rPr lang="en-US" smtClean="0"/>
-              <a:t>Third level</a:t>
-            </a:r>
-          </a:p>
-          <a:p>
-            <a:pPr lvl="3"/>
-            <a:r>
-              <a:rPr lang="en-US" smtClean="0"/>
-              <a:t>Fourth level</a:t>
-            </a:r>
-          </a:p>
-          <a:p>
-            <a:pPr lvl="4"/>
-            <a:r>
-              <a:rPr lang="en-US" smtClean="0"/>
-              <a:t>Fifth level</a:t>
-            </a:r>
-            <a:endParaRPr lang="en-US"/>
+              <a:rPr lang="en-US" dirty="0"/>
+              <a:t>BRIDE + GROOM</a:t>
+            </a:r>
           </a:p>
         </p:txBody>
       </p:sp>
       <p:sp>
         <p:nvSpPr>
-          <p:cNvPr id="4" name="Date Placeholder 3"/>
+          <p:cNvPr id="23" name="Text Placeholder 16">
+            <a:extLst>
+              <a:ext uri="{FF2B5EF4-FFF2-40B4-BE49-F238E27FC236}">
+                <a16:creationId xmlns:a16="http://schemas.microsoft.com/office/drawing/2014/main" id="{C30CCB5B-985D-4B0C-A0DE-92677D62C2FF}"/>
+              </a:ext>
+            </a:extLst>
+          </p:cNvPr>
           <p:cNvSpPr>
             <a:spLocks noGrp="1"/>
           </p:cNvSpPr>
           <p:nvPr>
-            <p:ph type="dt" sz="half" idx="10"/>
+            <p:ph type="body" sz="quarter" idx="15" hasCustomPrompt="1"/>
           </p:nvPr>
         </p:nvSpPr>
-        <p:spPr/>
+        <p:spPr>
+          <a:xfrm>
+            <a:off x="3363912" y="5344232"/>
+            <a:ext cx="2416176" cy="647700"/>
+          </a:xfrm>
+        </p:spPr>
         <p:txBody>
-          <a:bodyPr/>
-          <a:lstStyle/>
-          <a:p>
-            <a:fld id="{5BCAD085-E8A6-8845-BD4E-CB4CCA059FC4}" type="datetimeFigureOut">
-              <a:rPr lang="en-US" smtClean="0"/>
-              <a:t>1/27/13</a:t>
-            </a:fld>
-            <a:endParaRPr lang="en-US"/>
-          </a:p>
-        </p:txBody>
-      </p:sp>
-      <p:sp>
-        <p:nvSpPr>
-          <p:cNvPr id="5" name="Footer Placeholder 4"/>
-          <p:cNvSpPr>
-            <a:spLocks noGrp="1"/>
-          </p:cNvSpPr>
-          <p:nvPr>
-            <p:ph type="ftr" sz="quarter" idx="11"/>
-          </p:nvPr>
-        </p:nvSpPr>
-        <p:spPr/>
-        <p:txBody>
-          <a:bodyPr/>
-          <a:lstStyle/>
-          <a:p>
-            <a:endParaRPr lang="en-US"/>
-          </a:p>
-        </p:txBody>
-      </p:sp>
-      <p:sp>
-        <p:nvSpPr>
-          <p:cNvPr id="6" name="Slide Number Placeholder 5"/>
-          <p:cNvSpPr>
-            <a:spLocks noGrp="1"/>
-          </p:cNvSpPr>
-          <p:nvPr>
-            <p:ph type="sldNum" sz="quarter" idx="12"/>
-          </p:nvPr>
-        </p:nvSpPr>
-        <p:spPr/>
-        <p:txBody>
-          <a:bodyPr/>
-          <a:lstStyle/>
-          <a:p>
-            <a:fld id="{C1FF6DA9-008F-8B48-92A6-B652298478BF}" type="slidenum">
-              <a:rPr lang="en-US" smtClean="0"/>
-              <a:t>‹#›</a:t>
-            </a:fld>
-            <a:endParaRPr lang="en-US"/>
+          <a:bodyPr>
+            <a:normAutofit/>
+          </a:bodyPr>
+          <a:lstStyle>
+            <a:lvl1pPr>
+              <a:defRPr sz="2800" b="1">
+                <a:solidFill>
+                  <a:schemeClr val="tx2"/>
+                </a:solidFill>
+                <a:latin typeface="+mj-lt"/>
+                <a:cs typeface="Arial" panose="020B0604020202020204" pitchFamily="34" charset="0"/>
+              </a:defRPr>
+            </a:lvl1pPr>
+          </a:lstStyle>
+          <a:p>
+            <a:pPr lvl="0"/>
+            <a:r>
+              <a:rPr lang="en-US" dirty="0"/>
+              <a:t>10.25.20</a:t>
+            </a:r>
           </a:p>
         </p:txBody>
       </p:sp>
     </p:spTree>
     <p:extLst>
       <p:ext uri="{BB962C8B-B14F-4D97-AF65-F5344CB8AC3E}">
-        <p14:creationId xmlns:p14="http://schemas.microsoft.com/office/powerpoint/2010/main" val="3612223792"/>
+        <p14:creationId xmlns:p14="http://schemas.microsoft.com/office/powerpoint/2010/main" val="3656138930"/>
       </p:ext>
     </p:extLst>
   </p:cSld>
@@ -709,8 +834,8 @@
 </file>
 
 <file path=ppt/slideLayouts/slideLayout2.xml><?xml version="1.0" encoding="utf-8"?>
-<p:sldLayout xmlns:a="http://schemas.openxmlformats.org/drawingml/2006/main" xmlns:r="http://schemas.openxmlformats.org/officeDocument/2006/relationships" xmlns:p="http://schemas.openxmlformats.org/presentationml/2006/main" type="obj" preserve="1">
-  <p:cSld name="Title and Content">
+<p:sldLayout xmlns:a="http://schemas.openxmlformats.org/drawingml/2006/main" xmlns:r="http://schemas.openxmlformats.org/officeDocument/2006/relationships" xmlns:p="http://schemas.openxmlformats.org/presentationml/2006/main" preserve="1" userDrawn="1">
+  <p:cSld name="Rehearsal Dinner Sign">
     <p:spTree>
       <p:nvGrpSpPr>
         <p:cNvPr id="1" name=""/>
@@ -727,148 +852,188 @@
       </p:grpSpPr>
       <p:sp>
         <p:nvSpPr>
-          <p:cNvPr id="2" name="Title 1"/>
+          <p:cNvPr id="7" name="Title 1">
+            <a:extLst>
+              <a:ext uri="{FF2B5EF4-FFF2-40B4-BE49-F238E27FC236}">
+                <a16:creationId xmlns:a16="http://schemas.microsoft.com/office/drawing/2014/main" id="{07381769-0636-4172-A65E-09315A1C33A1}"/>
+              </a:ext>
+            </a:extLst>
+          </p:cNvPr>
           <p:cNvSpPr>
             <a:spLocks noGrp="1"/>
           </p:cNvSpPr>
           <p:nvPr>
-            <p:ph type="title"/>
+            <p:ph type="title" hasCustomPrompt="1"/>
           </p:nvPr>
         </p:nvSpPr>
-        <p:spPr/>
+        <p:spPr>
+          <a:xfrm>
+            <a:off x="628650" y="2660125"/>
+            <a:ext cx="7886700" cy="1325563"/>
+          </a:xfrm>
+        </p:spPr>
         <p:txBody>
-          <a:bodyPr/>
-          <a:lstStyle/>
-          <a:p>
-            <a:r>
-              <a:rPr lang="en-US" smtClean="0"/>
-              <a:t>Click to edit Master title style</a:t>
-            </a:r>
-            <a:endParaRPr lang="en-US"/>
+          <a:bodyPr>
+            <a:noAutofit/>
+          </a:bodyPr>
+          <a:lstStyle>
+            <a:lvl1pPr>
+              <a:defRPr sz="9600" cap="all" spc="600" baseline="0">
+                <a:solidFill>
+                  <a:schemeClr val="tx1"/>
+                </a:solidFill>
+                <a:latin typeface="Franklin Gothic Demi" panose="020B0703020102020204" pitchFamily="34" charset="0"/>
+              </a:defRPr>
+            </a:lvl1pPr>
+          </a:lstStyle>
+          <a:p>
+            <a:r>
+              <a:rPr lang="en-US" dirty="0"/>
+              <a:t>WELCOME</a:t>
+            </a:r>
           </a:p>
         </p:txBody>
       </p:sp>
       <p:sp>
         <p:nvSpPr>
-          <p:cNvPr id="3" name="Content Placeholder 2"/>
+          <p:cNvPr id="4" name="Text Placeholder 3">
+            <a:extLst>
+              <a:ext uri="{FF2B5EF4-FFF2-40B4-BE49-F238E27FC236}">
+                <a16:creationId xmlns:a16="http://schemas.microsoft.com/office/drawing/2014/main" id="{4E3E042F-2C9E-4BD8-BBCF-A6E8008D3BE2}"/>
+              </a:ext>
+            </a:extLst>
+          </p:cNvPr>
           <p:cNvSpPr>
             <a:spLocks noGrp="1"/>
           </p:cNvSpPr>
           <p:nvPr>
-            <p:ph idx="1"/>
+            <p:ph type="body" sz="quarter" idx="16" hasCustomPrompt="1"/>
           </p:nvPr>
         </p:nvSpPr>
-        <p:spPr/>
+        <p:spPr>
+          <a:xfrm>
+            <a:off x="912813" y="3947588"/>
+            <a:ext cx="7318375" cy="647700"/>
+          </a:xfrm>
+        </p:spPr>
         <p:txBody>
-          <a:bodyPr/>
-          <a:lstStyle/>
+          <a:bodyPr>
+            <a:noAutofit/>
+          </a:bodyPr>
+          <a:lstStyle>
+            <a:lvl1pPr>
+              <a:defRPr sz="2800" baseline="0">
+                <a:solidFill>
+                  <a:schemeClr val="tx1"/>
+                </a:solidFill>
+                <a:latin typeface="+mn-lt"/>
+              </a:defRPr>
+            </a:lvl1pPr>
+          </a:lstStyle>
           <a:p>
             <a:pPr lvl="0"/>
             <a:r>
-              <a:rPr lang="en-US" smtClean="0"/>
-              <a:t>Click to edit Master text styles</a:t>
-            </a:r>
-          </a:p>
-          <a:p>
-            <a:pPr lvl="1"/>
-            <a:r>
-              <a:rPr lang="en-US" smtClean="0"/>
-              <a:t>Second level</a:t>
-            </a:r>
-          </a:p>
-          <a:p>
-            <a:pPr lvl="2"/>
-            <a:r>
-              <a:rPr lang="en-US" smtClean="0"/>
-              <a:t>Third level</a:t>
-            </a:r>
-          </a:p>
-          <a:p>
-            <a:pPr lvl="3"/>
-            <a:r>
-              <a:rPr lang="en-US" smtClean="0"/>
-              <a:t>Fourth level</a:t>
-            </a:r>
-          </a:p>
-          <a:p>
-            <a:pPr lvl="4"/>
-            <a:r>
-              <a:rPr lang="en-US" smtClean="0"/>
-              <a:t>Fifth level</a:t>
-            </a:r>
-            <a:endParaRPr lang="en-US"/>
+              <a:rPr lang="en-US" dirty="0"/>
+              <a:t>To Our Rehearsal Dinner</a:t>
+            </a:r>
           </a:p>
         </p:txBody>
       </p:sp>
       <p:sp>
         <p:nvSpPr>
-          <p:cNvPr id="4" name="Date Placeholder 3"/>
+          <p:cNvPr id="8" name="Text Placeholder 12">
+            <a:extLst>
+              <a:ext uri="{FF2B5EF4-FFF2-40B4-BE49-F238E27FC236}">
+                <a16:creationId xmlns:a16="http://schemas.microsoft.com/office/drawing/2014/main" id="{E8596483-105B-4735-A7BA-F5D0853F0D2C}"/>
+              </a:ext>
+            </a:extLst>
+          </p:cNvPr>
           <p:cNvSpPr>
             <a:spLocks noGrp="1"/>
           </p:cNvSpPr>
           <p:nvPr>
-            <p:ph type="dt" sz="half" idx="10"/>
+            <p:ph type="body" sz="quarter" idx="13" hasCustomPrompt="1"/>
           </p:nvPr>
         </p:nvSpPr>
-        <p:spPr/>
+        <p:spPr>
+          <a:xfrm>
+            <a:off x="628650" y="1828453"/>
+            <a:ext cx="7886700" cy="831672"/>
+          </a:xfrm>
+        </p:spPr>
         <p:txBody>
-          <a:bodyPr/>
-          <a:lstStyle/>
-          <a:p>
-            <a:fld id="{5BCAD085-E8A6-8845-BD4E-CB4CCA059FC4}" type="datetimeFigureOut">
-              <a:rPr lang="en-US" smtClean="0"/>
-              <a:t>1/27/13</a:t>
-            </a:fld>
-            <a:endParaRPr lang="en-US"/>
+          <a:bodyPr anchor="ctr">
+            <a:noAutofit/>
+          </a:bodyPr>
+          <a:lstStyle>
+            <a:lvl1pPr>
+              <a:defRPr sz="7600" cap="all" spc="300" baseline="0">
+                <a:solidFill>
+                  <a:schemeClr val="tx2"/>
+                </a:solidFill>
+                <a:latin typeface="+mj-lt"/>
+              </a:defRPr>
+            </a:lvl1pPr>
+          </a:lstStyle>
+          <a:p>
+            <a:pPr lvl="0"/>
+            <a:r>
+              <a:rPr lang="en-US" dirty="0"/>
+              <a:t>BRIDE + GROOM</a:t>
+            </a:r>
           </a:p>
         </p:txBody>
       </p:sp>
       <p:sp>
         <p:nvSpPr>
-          <p:cNvPr id="5" name="Footer Placeholder 4"/>
+          <p:cNvPr id="9" name="Text Placeholder 16">
+            <a:extLst>
+              <a:ext uri="{FF2B5EF4-FFF2-40B4-BE49-F238E27FC236}">
+                <a16:creationId xmlns:a16="http://schemas.microsoft.com/office/drawing/2014/main" id="{27213878-DC22-442E-B6C8-DAF47CB24190}"/>
+              </a:ext>
+            </a:extLst>
+          </p:cNvPr>
           <p:cNvSpPr>
             <a:spLocks noGrp="1"/>
           </p:cNvSpPr>
           <p:nvPr>
-            <p:ph type="ftr" sz="quarter" idx="11"/>
+            <p:ph type="body" sz="quarter" idx="15" hasCustomPrompt="1"/>
           </p:nvPr>
         </p:nvSpPr>
-        <p:spPr/>
+        <p:spPr>
+          <a:xfrm>
+            <a:off x="3363912" y="5344232"/>
+            <a:ext cx="2416176" cy="647700"/>
+          </a:xfrm>
+        </p:spPr>
         <p:txBody>
-          <a:bodyPr/>
-          <a:lstStyle/>
-          <a:p>
-            <a:endParaRPr lang="en-US"/>
-          </a:p>
-        </p:txBody>
-      </p:sp>
-      <p:sp>
-        <p:nvSpPr>
-          <p:cNvPr id="6" name="Slide Number Placeholder 5"/>
-          <p:cNvSpPr>
-            <a:spLocks noGrp="1"/>
-          </p:cNvSpPr>
-          <p:nvPr>
-            <p:ph type="sldNum" sz="quarter" idx="12"/>
-          </p:nvPr>
-        </p:nvSpPr>
-        <p:spPr/>
-        <p:txBody>
-          <a:bodyPr/>
-          <a:lstStyle/>
-          <a:p>
-            <a:fld id="{C1FF6DA9-008F-8B48-92A6-B652298478BF}" type="slidenum">
-              <a:rPr lang="en-US" smtClean="0"/>
-              <a:t>‹#›</a:t>
-            </a:fld>
-            <a:endParaRPr lang="en-US"/>
+          <a:bodyPr>
+            <a:normAutofit/>
+          </a:bodyPr>
+          <a:lstStyle>
+            <a:lvl1pPr>
+              <a:defRPr sz="2800" b="1">
+                <a:solidFill>
+                  <a:schemeClr val="tx2"/>
+                </a:solidFill>
+                <a:latin typeface="+mj-lt"/>
+                <a:cs typeface="Arial" panose="020B0604020202020204" pitchFamily="34" charset="0"/>
+              </a:defRPr>
+            </a:lvl1pPr>
+          </a:lstStyle>
+          <a:p>
+            <a:pPr lvl="0"/>
+            <a:r>
+              <a:rPr lang="en-US" dirty="0"/>
+              <a:t>10.25.XX</a:t>
+            </a:r>
           </a:p>
         </p:txBody>
       </p:sp>
     </p:spTree>
     <p:extLst>
       <p:ext uri="{BB962C8B-B14F-4D97-AF65-F5344CB8AC3E}">
-        <p14:creationId xmlns:p14="http://schemas.microsoft.com/office/powerpoint/2010/main" val="2614314258"/>
+        <p14:creationId xmlns:p14="http://schemas.microsoft.com/office/powerpoint/2010/main" val="761053173"/>
       </p:ext>
     </p:extLst>
   </p:cSld>
@@ -879,8 +1044,8 @@
 </file>
 
 <file path=ppt/slideLayouts/slideLayout3.xml><?xml version="1.0" encoding="utf-8"?>
-<p:sldLayout xmlns:a="http://schemas.openxmlformats.org/drawingml/2006/main" xmlns:r="http://schemas.openxmlformats.org/officeDocument/2006/relationships" xmlns:p="http://schemas.openxmlformats.org/presentationml/2006/main" type="secHead" preserve="1">
-  <p:cSld name="Section Header">
+<p:sldLayout xmlns:a="http://schemas.openxmlformats.org/drawingml/2006/main" xmlns:r="http://schemas.openxmlformats.org/officeDocument/2006/relationships" xmlns:p="http://schemas.openxmlformats.org/presentationml/2006/main" preserve="1" userDrawn="1">
+  <p:cSld name="Seating Chart">
     <p:spTree>
       <p:nvGrpSpPr>
         <p:cNvPr id="1" name=""/>
@@ -897,236 +1062,891 @@
       </p:grpSpPr>
       <p:sp>
         <p:nvSpPr>
-          <p:cNvPr id="2" name="Title 1"/>
+          <p:cNvPr id="2" name="Title 1">
+            <a:extLst>
+              <a:ext uri="{FF2B5EF4-FFF2-40B4-BE49-F238E27FC236}">
+                <a16:creationId xmlns:a16="http://schemas.microsoft.com/office/drawing/2014/main" id="{97792223-1A83-4FF8-848D-F9FD64B51CF8}"/>
+              </a:ext>
+            </a:extLst>
+          </p:cNvPr>
           <p:cNvSpPr>
             <a:spLocks noGrp="1"/>
           </p:cNvSpPr>
           <p:nvPr>
-            <p:ph type="title"/>
+            <p:ph type="title" hasCustomPrompt="1"/>
           </p:nvPr>
         </p:nvSpPr>
         <p:spPr>
           <a:xfrm>
-            <a:off x="722313" y="4406900"/>
-            <a:ext cx="7772400" cy="1362075"/>
-          </a:xfrm>
+            <a:off x="914400" y="1260861"/>
+            <a:ext cx="7315200" cy="832018"/>
+          </a:xfrm>
+          <a:prstGeom prst="rect">
+            <a:avLst/>
+          </a:prstGeom>
         </p:spPr>
         <p:txBody>
-          <a:bodyPr anchor="t"/>
+          <a:bodyPr>
+            <a:noAutofit/>
+          </a:bodyPr>
           <a:lstStyle>
-            <a:lvl1pPr algn="l">
-              <a:defRPr sz="4000" b="1" cap="all"/>
+            <a:lvl1pPr algn="ctr">
+              <a:defRPr sz="4400" b="0" cap="all" spc="0" baseline="0">
+                <a:solidFill>
+                  <a:schemeClr val="tx1"/>
+                </a:solidFill>
+                <a:latin typeface="Franklin Gothic Demi" panose="020B0703020102020204" pitchFamily="34" charset="0"/>
+              </a:defRPr>
             </a:lvl1pPr>
           </a:lstStyle>
           <a:p>
             <a:r>
-              <a:rPr lang="en-US" smtClean="0"/>
-              <a:t>Click to edit Master title style</a:t>
-            </a:r>
-            <a:endParaRPr lang="en-US"/>
+              <a:rPr lang="en-US" dirty="0"/>
+              <a:t>FIND YOUR SEAT</a:t>
+            </a:r>
           </a:p>
         </p:txBody>
       </p:sp>
       <p:sp>
         <p:nvSpPr>
-          <p:cNvPr id="3" name="Text Placeholder 2"/>
+          <p:cNvPr id="23" name="Text Placeholder 22">
+            <a:extLst>
+              <a:ext uri="{FF2B5EF4-FFF2-40B4-BE49-F238E27FC236}">
+                <a16:creationId xmlns:a16="http://schemas.microsoft.com/office/drawing/2014/main" id="{0CE749E3-50F7-43AA-8078-217DA822E726}"/>
+              </a:ext>
+            </a:extLst>
+          </p:cNvPr>
           <p:cNvSpPr>
             <a:spLocks noGrp="1"/>
           </p:cNvSpPr>
           <p:nvPr>
-            <p:ph type="body" idx="1"/>
+            <p:ph type="body" sz="quarter" idx="10" hasCustomPrompt="1"/>
           </p:nvPr>
         </p:nvSpPr>
         <p:spPr>
           <a:xfrm>
-            <a:off x="722313" y="2906713"/>
-            <a:ext cx="7772400" cy="1500187"/>
-          </a:xfrm>
+            <a:off x="914400" y="728997"/>
+            <a:ext cx="7314676" cy="832017"/>
+          </a:xfrm>
+          <a:prstGeom prst="rect">
+            <a:avLst/>
+          </a:prstGeom>
         </p:spPr>
         <p:txBody>
-          <a:bodyPr anchor="b"/>
+          <a:bodyPr anchor="ctr">
+            <a:noAutofit/>
+          </a:bodyPr>
           <a:lstStyle>
-            <a:lvl1pPr marL="0" indent="0">
-              <a:buNone/>
-              <a:defRPr sz="2000">
-                <a:solidFill>
-                  <a:schemeClr val="tx1">
-                    <a:tint val="75000"/>
-                  </a:schemeClr>
-                </a:solidFill>
+            <a:lvl1pPr algn="ctr">
+              <a:defRPr sz="5000" cap="all" spc="200" baseline="0">
+                <a:solidFill>
+                  <a:schemeClr val="tx2"/>
+                </a:solidFill>
+                <a:latin typeface="+mj-lt"/>
               </a:defRPr>
             </a:lvl1pPr>
-            <a:lvl2pPr marL="457200" indent="0">
-              <a:buNone/>
-              <a:defRPr sz="1800">
-                <a:solidFill>
-                  <a:schemeClr val="tx1">
-                    <a:tint val="75000"/>
-                  </a:schemeClr>
-                </a:solidFill>
-              </a:defRPr>
-            </a:lvl2pPr>
-            <a:lvl3pPr marL="914400" indent="0">
-              <a:buNone/>
-              <a:defRPr sz="1600">
-                <a:solidFill>
-                  <a:schemeClr val="tx1">
-                    <a:tint val="75000"/>
-                  </a:schemeClr>
-                </a:solidFill>
-              </a:defRPr>
-            </a:lvl3pPr>
-            <a:lvl4pPr marL="1371600" indent="0">
-              <a:buNone/>
-              <a:defRPr sz="1400">
-                <a:solidFill>
-                  <a:schemeClr val="tx1">
-                    <a:tint val="75000"/>
-                  </a:schemeClr>
-                </a:solidFill>
-              </a:defRPr>
-            </a:lvl4pPr>
-            <a:lvl5pPr marL="1828800" indent="0">
-              <a:buNone/>
-              <a:defRPr sz="1400">
-                <a:solidFill>
-                  <a:schemeClr val="tx1">
-                    <a:tint val="75000"/>
-                  </a:schemeClr>
-                </a:solidFill>
-              </a:defRPr>
-            </a:lvl5pPr>
-            <a:lvl6pPr marL="2286000" indent="0">
-              <a:buNone/>
-              <a:defRPr sz="1400">
-                <a:solidFill>
-                  <a:schemeClr val="tx1">
-                    <a:tint val="75000"/>
-                  </a:schemeClr>
-                </a:solidFill>
-              </a:defRPr>
-            </a:lvl6pPr>
-            <a:lvl7pPr marL="2743200" indent="0">
-              <a:buNone/>
-              <a:defRPr sz="1400">
-                <a:solidFill>
-                  <a:schemeClr val="tx1">
-                    <a:tint val="75000"/>
-                  </a:schemeClr>
-                </a:solidFill>
-              </a:defRPr>
-            </a:lvl7pPr>
-            <a:lvl8pPr marL="3200400" indent="0">
-              <a:buNone/>
-              <a:defRPr sz="1400">
-                <a:solidFill>
-                  <a:schemeClr val="tx1">
-                    <a:tint val="75000"/>
-                  </a:schemeClr>
-                </a:solidFill>
-              </a:defRPr>
-            </a:lvl8pPr>
-            <a:lvl9pPr marL="3657600" indent="0">
-              <a:buNone/>
-              <a:defRPr sz="1400">
-                <a:solidFill>
-                  <a:schemeClr val="tx1">
-                    <a:tint val="75000"/>
-                  </a:schemeClr>
-                </a:solidFill>
-              </a:defRPr>
-            </a:lvl9pPr>
           </a:lstStyle>
           <a:p>
             <a:pPr lvl="0"/>
             <a:r>
-              <a:rPr lang="en-US" smtClean="0"/>
-              <a:t>Click to edit Master text styles</a:t>
+              <a:rPr lang="en-US" dirty="0"/>
+              <a:t>BRIDE + GROOM</a:t>
             </a:r>
           </a:p>
         </p:txBody>
       </p:sp>
       <p:sp>
         <p:nvSpPr>
-          <p:cNvPr id="4" name="Date Placeholder 3"/>
+          <p:cNvPr id="25" name="Text Placeholder 24">
+            <a:extLst>
+              <a:ext uri="{FF2B5EF4-FFF2-40B4-BE49-F238E27FC236}">
+                <a16:creationId xmlns:a16="http://schemas.microsoft.com/office/drawing/2014/main" id="{F92CAD29-00A6-4176-92C3-ECBA996ED71F}"/>
+              </a:ext>
+            </a:extLst>
+          </p:cNvPr>
           <p:cNvSpPr>
             <a:spLocks noGrp="1"/>
           </p:cNvSpPr>
           <p:nvPr>
-            <p:ph type="dt" sz="half" idx="10"/>
+            <p:ph type="body" sz="quarter" idx="11" hasCustomPrompt="1"/>
           </p:nvPr>
         </p:nvSpPr>
-        <p:spPr/>
+        <p:spPr>
+          <a:xfrm>
+            <a:off x="628650" y="2757801"/>
+            <a:ext cx="1543050" cy="365125"/>
+          </a:xfrm>
+          <a:prstGeom prst="rect">
+            <a:avLst/>
+          </a:prstGeom>
+        </p:spPr>
         <p:txBody>
-          <a:bodyPr/>
-          <a:lstStyle/>
-          <a:p>
-            <a:fld id="{5BCAD085-E8A6-8845-BD4E-CB4CCA059FC4}" type="datetimeFigureOut">
-              <a:rPr lang="en-US" smtClean="0"/>
-              <a:t>1/27/13</a:t>
-            </a:fld>
-            <a:endParaRPr lang="en-US"/>
+          <a:bodyPr>
+            <a:noAutofit/>
+          </a:bodyPr>
+          <a:lstStyle>
+            <a:lvl1pPr algn="l">
+              <a:defRPr sz="1200" b="1" cap="all" spc="200" baseline="0">
+                <a:solidFill>
+                  <a:schemeClr val="tx2"/>
+                </a:solidFill>
+                <a:latin typeface="+mj-lt"/>
+                <a:cs typeface="Arial" panose="020B0604020202020204" pitchFamily="34" charset="0"/>
+              </a:defRPr>
+            </a:lvl1pPr>
+          </a:lstStyle>
+          <a:p>
+            <a:pPr lvl="0"/>
+            <a:r>
+              <a:rPr lang="en-US" dirty="0"/>
+              <a:t>TABLE 1</a:t>
+            </a:r>
           </a:p>
         </p:txBody>
       </p:sp>
       <p:sp>
         <p:nvSpPr>
-          <p:cNvPr id="5" name="Footer Placeholder 4"/>
+          <p:cNvPr id="26" name="Text Placeholder 24">
+            <a:extLst>
+              <a:ext uri="{FF2B5EF4-FFF2-40B4-BE49-F238E27FC236}">
+                <a16:creationId xmlns:a16="http://schemas.microsoft.com/office/drawing/2014/main" id="{C406AE24-E5AD-4AD9-86D9-3A46A0EBA3EF}"/>
+              </a:ext>
+            </a:extLst>
+          </p:cNvPr>
           <p:cNvSpPr>
             <a:spLocks noGrp="1"/>
           </p:cNvSpPr>
           <p:nvPr>
-            <p:ph type="ftr" sz="quarter" idx="11"/>
+            <p:ph type="body" sz="quarter" idx="12" hasCustomPrompt="1"/>
           </p:nvPr>
         </p:nvSpPr>
-        <p:spPr/>
+        <p:spPr>
+          <a:xfrm>
+            <a:off x="2773543" y="2757801"/>
+            <a:ext cx="1543050" cy="365125"/>
+          </a:xfrm>
+          <a:prstGeom prst="rect">
+            <a:avLst/>
+          </a:prstGeom>
+        </p:spPr>
         <p:txBody>
-          <a:bodyPr/>
-          <a:lstStyle/>
-          <a:p>
-            <a:endParaRPr lang="en-US"/>
+          <a:bodyPr>
+            <a:noAutofit/>
+          </a:bodyPr>
+          <a:lstStyle>
+            <a:lvl1pPr algn="l">
+              <a:defRPr sz="1200" b="1" cap="all" spc="200" baseline="0">
+                <a:solidFill>
+                  <a:schemeClr val="tx2"/>
+                </a:solidFill>
+                <a:latin typeface="+mj-lt"/>
+                <a:cs typeface="Arial" panose="020B0604020202020204" pitchFamily="34" charset="0"/>
+              </a:defRPr>
+            </a:lvl1pPr>
+          </a:lstStyle>
+          <a:p>
+            <a:pPr lvl="0"/>
+            <a:r>
+              <a:rPr lang="en-US" dirty="0"/>
+              <a:t>TABLE 2</a:t>
+            </a:r>
           </a:p>
         </p:txBody>
       </p:sp>
       <p:sp>
         <p:nvSpPr>
-          <p:cNvPr id="6" name="Slide Number Placeholder 5"/>
+          <p:cNvPr id="27" name="Text Placeholder 24">
+            <a:extLst>
+              <a:ext uri="{FF2B5EF4-FFF2-40B4-BE49-F238E27FC236}">
+                <a16:creationId xmlns:a16="http://schemas.microsoft.com/office/drawing/2014/main" id="{F473BF3A-5E89-42F3-A9B9-16318E970E16}"/>
+              </a:ext>
+            </a:extLst>
+          </p:cNvPr>
           <p:cNvSpPr>
             <a:spLocks noGrp="1"/>
           </p:cNvSpPr>
           <p:nvPr>
-            <p:ph type="sldNum" sz="quarter" idx="12"/>
+            <p:ph type="body" sz="quarter" idx="13" hasCustomPrompt="1"/>
           </p:nvPr>
         </p:nvSpPr>
-        <p:spPr/>
+        <p:spPr>
+          <a:xfrm>
+            <a:off x="4914763" y="2757801"/>
+            <a:ext cx="1543050" cy="365125"/>
+          </a:xfrm>
+          <a:prstGeom prst="rect">
+            <a:avLst/>
+          </a:prstGeom>
+        </p:spPr>
+        <p:txBody>
+          <a:bodyPr>
+            <a:noAutofit/>
+          </a:bodyPr>
+          <a:lstStyle>
+            <a:lvl1pPr algn="l">
+              <a:defRPr sz="1200" b="1" cap="all" spc="200" baseline="0">
+                <a:solidFill>
+                  <a:schemeClr val="tx2"/>
+                </a:solidFill>
+                <a:latin typeface="+mj-lt"/>
+                <a:cs typeface="Arial" panose="020B0604020202020204" pitchFamily="34" charset="0"/>
+              </a:defRPr>
+            </a:lvl1pPr>
+          </a:lstStyle>
+          <a:p>
+            <a:pPr lvl="0"/>
+            <a:r>
+              <a:rPr lang="en-US" dirty="0"/>
+              <a:t>TABLE 3</a:t>
+            </a:r>
+          </a:p>
+        </p:txBody>
+      </p:sp>
+      <p:sp>
+        <p:nvSpPr>
+          <p:cNvPr id="28" name="Text Placeholder 24">
+            <a:extLst>
+              <a:ext uri="{FF2B5EF4-FFF2-40B4-BE49-F238E27FC236}">
+                <a16:creationId xmlns:a16="http://schemas.microsoft.com/office/drawing/2014/main" id="{E1050BD6-5687-45FB-9A43-127691F83604}"/>
+              </a:ext>
+            </a:extLst>
+          </p:cNvPr>
+          <p:cNvSpPr>
+            <a:spLocks noGrp="1"/>
+          </p:cNvSpPr>
+          <p:nvPr>
+            <p:ph type="body" sz="quarter" idx="14" hasCustomPrompt="1"/>
+          </p:nvPr>
+        </p:nvSpPr>
+        <p:spPr>
+          <a:xfrm>
+            <a:off x="628650" y="4787539"/>
+            <a:ext cx="1543050" cy="365125"/>
+          </a:xfrm>
+          <a:prstGeom prst="rect">
+            <a:avLst/>
+          </a:prstGeom>
+        </p:spPr>
+        <p:txBody>
+          <a:bodyPr>
+            <a:noAutofit/>
+          </a:bodyPr>
+          <a:lstStyle>
+            <a:lvl1pPr algn="l">
+              <a:defRPr sz="1200" b="1" cap="all" spc="200" baseline="0">
+                <a:solidFill>
+                  <a:schemeClr val="tx2"/>
+                </a:solidFill>
+                <a:latin typeface="+mj-lt"/>
+                <a:cs typeface="Arial" panose="020B0604020202020204" pitchFamily="34" charset="0"/>
+              </a:defRPr>
+            </a:lvl1pPr>
+          </a:lstStyle>
+          <a:p>
+            <a:pPr lvl="0"/>
+            <a:r>
+              <a:rPr lang="en-US" dirty="0"/>
+              <a:t>TABLE 4</a:t>
+            </a:r>
+          </a:p>
+        </p:txBody>
+      </p:sp>
+      <p:sp>
+        <p:nvSpPr>
+          <p:cNvPr id="29" name="Text Placeholder 24">
+            <a:extLst>
+              <a:ext uri="{FF2B5EF4-FFF2-40B4-BE49-F238E27FC236}">
+                <a16:creationId xmlns:a16="http://schemas.microsoft.com/office/drawing/2014/main" id="{612E2008-796B-49AC-843C-456B3AFA4E27}"/>
+              </a:ext>
+            </a:extLst>
+          </p:cNvPr>
+          <p:cNvSpPr>
+            <a:spLocks noGrp="1"/>
+          </p:cNvSpPr>
+          <p:nvPr>
+            <p:ph type="body" sz="quarter" idx="15" hasCustomPrompt="1"/>
+          </p:nvPr>
+        </p:nvSpPr>
+        <p:spPr>
+          <a:xfrm>
+            <a:off x="2766197" y="4787539"/>
+            <a:ext cx="1543050" cy="365125"/>
+          </a:xfrm>
+          <a:prstGeom prst="rect">
+            <a:avLst/>
+          </a:prstGeom>
+        </p:spPr>
+        <p:txBody>
+          <a:bodyPr>
+            <a:noAutofit/>
+          </a:bodyPr>
+          <a:lstStyle>
+            <a:lvl1pPr algn="l">
+              <a:defRPr sz="1200" b="1" cap="all" spc="200" baseline="0">
+                <a:solidFill>
+                  <a:schemeClr val="tx2"/>
+                </a:solidFill>
+                <a:latin typeface="+mj-lt"/>
+                <a:cs typeface="Arial" panose="020B0604020202020204" pitchFamily="34" charset="0"/>
+              </a:defRPr>
+            </a:lvl1pPr>
+          </a:lstStyle>
+          <a:p>
+            <a:pPr lvl="0"/>
+            <a:r>
+              <a:rPr lang="en-US" dirty="0"/>
+              <a:t>TABLE 5</a:t>
+            </a:r>
+          </a:p>
+        </p:txBody>
+      </p:sp>
+      <p:sp>
+        <p:nvSpPr>
+          <p:cNvPr id="30" name="Text Placeholder 24">
+            <a:extLst>
+              <a:ext uri="{FF2B5EF4-FFF2-40B4-BE49-F238E27FC236}">
+                <a16:creationId xmlns:a16="http://schemas.microsoft.com/office/drawing/2014/main" id="{D5D93309-F741-40BE-903F-0D6999BF1C6C}"/>
+              </a:ext>
+            </a:extLst>
+          </p:cNvPr>
+          <p:cNvSpPr>
+            <a:spLocks noGrp="1"/>
+          </p:cNvSpPr>
+          <p:nvPr>
+            <p:ph type="body" sz="quarter" idx="16" hasCustomPrompt="1"/>
+          </p:nvPr>
+        </p:nvSpPr>
+        <p:spPr>
+          <a:xfrm>
+            <a:off x="4914763" y="4787539"/>
+            <a:ext cx="1543050" cy="365125"/>
+          </a:xfrm>
+          <a:prstGeom prst="rect">
+            <a:avLst/>
+          </a:prstGeom>
+        </p:spPr>
+        <p:txBody>
+          <a:bodyPr>
+            <a:noAutofit/>
+          </a:bodyPr>
+          <a:lstStyle>
+            <a:lvl1pPr algn="l">
+              <a:defRPr sz="1200" b="1" cap="all" spc="200" baseline="0">
+                <a:solidFill>
+                  <a:schemeClr val="tx2"/>
+                </a:solidFill>
+                <a:latin typeface="+mj-lt"/>
+                <a:cs typeface="Arial" panose="020B0604020202020204" pitchFamily="34" charset="0"/>
+              </a:defRPr>
+            </a:lvl1pPr>
+          </a:lstStyle>
+          <a:p>
+            <a:pPr lvl="0"/>
+            <a:r>
+              <a:rPr lang="en-US" dirty="0"/>
+              <a:t>TABLE 6</a:t>
+            </a:r>
+          </a:p>
+        </p:txBody>
+      </p:sp>
+      <p:sp>
+        <p:nvSpPr>
+          <p:cNvPr id="22" name="Text Placeholder 24">
+            <a:extLst>
+              <a:ext uri="{FF2B5EF4-FFF2-40B4-BE49-F238E27FC236}">
+                <a16:creationId xmlns:a16="http://schemas.microsoft.com/office/drawing/2014/main" id="{3F045C1D-806B-4CD2-B443-C1E467A731C0}"/>
+              </a:ext>
+            </a:extLst>
+          </p:cNvPr>
+          <p:cNvSpPr>
+            <a:spLocks noGrp="1"/>
+          </p:cNvSpPr>
+          <p:nvPr>
+            <p:ph type="body" sz="quarter" idx="23" hasCustomPrompt="1"/>
+          </p:nvPr>
+        </p:nvSpPr>
+        <p:spPr>
+          <a:xfrm>
+            <a:off x="7052310" y="2762877"/>
+            <a:ext cx="1543050" cy="365125"/>
+          </a:xfrm>
+          <a:prstGeom prst="rect">
+            <a:avLst/>
+          </a:prstGeom>
+        </p:spPr>
+        <p:txBody>
+          <a:bodyPr>
+            <a:noAutofit/>
+          </a:bodyPr>
+          <a:lstStyle>
+            <a:lvl1pPr algn="l">
+              <a:defRPr sz="1200" b="1" cap="all" spc="200" baseline="0">
+                <a:solidFill>
+                  <a:schemeClr val="tx2"/>
+                </a:solidFill>
+                <a:latin typeface="+mj-lt"/>
+                <a:cs typeface="Arial" panose="020B0604020202020204" pitchFamily="34" charset="0"/>
+              </a:defRPr>
+            </a:lvl1pPr>
+          </a:lstStyle>
+          <a:p>
+            <a:pPr lvl="0"/>
+            <a:r>
+              <a:rPr lang="en-US" dirty="0"/>
+              <a:t>TABLE 3</a:t>
+            </a:r>
+          </a:p>
+        </p:txBody>
+      </p:sp>
+      <p:sp>
+        <p:nvSpPr>
+          <p:cNvPr id="24" name="Text Placeholder 24">
+            <a:extLst>
+              <a:ext uri="{FF2B5EF4-FFF2-40B4-BE49-F238E27FC236}">
+                <a16:creationId xmlns:a16="http://schemas.microsoft.com/office/drawing/2014/main" id="{153BF21F-29A6-447A-BE43-61D1DD3D69D8}"/>
+              </a:ext>
+            </a:extLst>
+          </p:cNvPr>
+          <p:cNvSpPr>
+            <a:spLocks noGrp="1"/>
+          </p:cNvSpPr>
+          <p:nvPr>
+            <p:ph type="body" sz="quarter" idx="24" hasCustomPrompt="1"/>
+          </p:nvPr>
+        </p:nvSpPr>
+        <p:spPr>
+          <a:xfrm>
+            <a:off x="7052310" y="4792615"/>
+            <a:ext cx="1543050" cy="365125"/>
+          </a:xfrm>
+          <a:prstGeom prst="rect">
+            <a:avLst/>
+          </a:prstGeom>
+        </p:spPr>
+        <p:txBody>
+          <a:bodyPr>
+            <a:noAutofit/>
+          </a:bodyPr>
+          <a:lstStyle>
+            <a:lvl1pPr algn="l">
+              <a:defRPr sz="1200" b="1" cap="all" spc="200" baseline="0">
+                <a:solidFill>
+                  <a:schemeClr val="tx2"/>
+                </a:solidFill>
+                <a:latin typeface="+mj-lt"/>
+                <a:cs typeface="Arial" panose="020B0604020202020204" pitchFamily="34" charset="0"/>
+              </a:defRPr>
+            </a:lvl1pPr>
+          </a:lstStyle>
+          <a:p>
+            <a:pPr lvl="0"/>
+            <a:r>
+              <a:rPr lang="en-US" dirty="0"/>
+              <a:t>TABLE 6</a:t>
+            </a:r>
+          </a:p>
+        </p:txBody>
+      </p:sp>
+      <p:sp>
+        <p:nvSpPr>
+          <p:cNvPr id="39" name="Text Placeholder 3">
+            <a:extLst>
+              <a:ext uri="{FF2B5EF4-FFF2-40B4-BE49-F238E27FC236}">
+                <a16:creationId xmlns:a16="http://schemas.microsoft.com/office/drawing/2014/main" id="{8C32B373-7F2D-474D-9A64-1AB31886AF94}"/>
+              </a:ext>
+            </a:extLst>
+          </p:cNvPr>
+          <p:cNvSpPr>
+            <a:spLocks noGrp="1"/>
+          </p:cNvSpPr>
+          <p:nvPr>
+            <p:ph type="body" sz="quarter" idx="28" hasCustomPrompt="1"/>
+          </p:nvPr>
+        </p:nvSpPr>
+        <p:spPr>
+          <a:xfrm>
+            <a:off x="623296" y="3081463"/>
+            <a:ext cx="1463675" cy="1371600"/>
+          </a:xfrm>
+        </p:spPr>
         <p:txBody>
           <a:bodyPr/>
-          <a:lstStyle/>
-          <a:p>
-            <a:fld id="{C1FF6DA9-008F-8B48-92A6-B652298478BF}" type="slidenum">
-              <a:rPr lang="en-US" smtClean="0"/>
-              <a:t>‹#›</a:t>
-            </a:fld>
-            <a:endParaRPr lang="en-US"/>
+          <a:lstStyle>
+            <a:lvl1pPr algn="l">
+              <a:lnSpc>
+                <a:spcPct val="100000"/>
+              </a:lnSpc>
+              <a:spcBef>
+                <a:spcPts val="0"/>
+              </a:spcBef>
+              <a:defRPr sz="1200">
+                <a:latin typeface="Franklin Gothic Book" panose="020B0503020102020204" pitchFamily="34" charset="0"/>
+              </a:defRPr>
+            </a:lvl1pPr>
+          </a:lstStyle>
+          <a:p>
+            <a:pPr lvl="0"/>
+            <a:r>
+              <a:rPr lang="en-US" dirty="0"/>
+              <a:t>Enter guests names</a:t>
+            </a:r>
+          </a:p>
+        </p:txBody>
+      </p:sp>
+      <p:sp>
+        <p:nvSpPr>
+          <p:cNvPr id="40" name="Text Placeholder 3">
+            <a:extLst>
+              <a:ext uri="{FF2B5EF4-FFF2-40B4-BE49-F238E27FC236}">
+                <a16:creationId xmlns:a16="http://schemas.microsoft.com/office/drawing/2014/main" id="{B559BF0E-B8DB-4078-8BFB-82CE6A433FFA}"/>
+              </a:ext>
+            </a:extLst>
+          </p:cNvPr>
+          <p:cNvSpPr>
+            <a:spLocks noGrp="1"/>
+          </p:cNvSpPr>
+          <p:nvPr>
+            <p:ph type="body" sz="quarter" idx="29" hasCustomPrompt="1"/>
+          </p:nvPr>
+        </p:nvSpPr>
+        <p:spPr>
+          <a:xfrm>
+            <a:off x="2787264" y="3081463"/>
+            <a:ext cx="1463675" cy="1371600"/>
+          </a:xfrm>
+        </p:spPr>
+        <p:txBody>
+          <a:bodyPr/>
+          <a:lstStyle>
+            <a:lvl1pPr algn="l">
+              <a:lnSpc>
+                <a:spcPct val="100000"/>
+              </a:lnSpc>
+              <a:spcBef>
+                <a:spcPts val="0"/>
+              </a:spcBef>
+              <a:defRPr sz="1200">
+                <a:latin typeface="Franklin Gothic Book" panose="020B0503020102020204" pitchFamily="34" charset="0"/>
+              </a:defRPr>
+            </a:lvl1pPr>
+          </a:lstStyle>
+          <a:p>
+            <a:pPr lvl="0"/>
+            <a:r>
+              <a:rPr lang="en-US" dirty="0"/>
+              <a:t>Enter guests names</a:t>
+            </a:r>
+          </a:p>
+        </p:txBody>
+      </p:sp>
+      <p:sp>
+        <p:nvSpPr>
+          <p:cNvPr id="41" name="Text Placeholder 3">
+            <a:extLst>
+              <a:ext uri="{FF2B5EF4-FFF2-40B4-BE49-F238E27FC236}">
+                <a16:creationId xmlns:a16="http://schemas.microsoft.com/office/drawing/2014/main" id="{14BD57D5-B1E7-4214-B971-C505925BBE71}"/>
+              </a:ext>
+            </a:extLst>
+          </p:cNvPr>
+          <p:cNvSpPr>
+            <a:spLocks noGrp="1"/>
+          </p:cNvSpPr>
+          <p:nvPr>
+            <p:ph type="body" sz="quarter" idx="30" hasCustomPrompt="1"/>
+          </p:nvPr>
+        </p:nvSpPr>
+        <p:spPr>
+          <a:xfrm>
+            <a:off x="4914763" y="3081463"/>
+            <a:ext cx="1463675" cy="1371600"/>
+          </a:xfrm>
+        </p:spPr>
+        <p:txBody>
+          <a:bodyPr/>
+          <a:lstStyle>
+            <a:lvl1pPr algn="l">
+              <a:lnSpc>
+                <a:spcPct val="100000"/>
+              </a:lnSpc>
+              <a:spcBef>
+                <a:spcPts val="0"/>
+              </a:spcBef>
+              <a:defRPr sz="1200">
+                <a:latin typeface="Franklin Gothic Book" panose="020B0503020102020204" pitchFamily="34" charset="0"/>
+              </a:defRPr>
+            </a:lvl1pPr>
+          </a:lstStyle>
+          <a:p>
+            <a:pPr lvl="0"/>
+            <a:r>
+              <a:rPr lang="en-US" dirty="0"/>
+              <a:t>Enter guests names</a:t>
+            </a:r>
+          </a:p>
+        </p:txBody>
+      </p:sp>
+      <p:sp>
+        <p:nvSpPr>
+          <p:cNvPr id="42" name="Text Placeholder 3">
+            <a:extLst>
+              <a:ext uri="{FF2B5EF4-FFF2-40B4-BE49-F238E27FC236}">
+                <a16:creationId xmlns:a16="http://schemas.microsoft.com/office/drawing/2014/main" id="{C8C19FB0-2ADB-475F-A14E-5202DBE2CFBB}"/>
+              </a:ext>
+            </a:extLst>
+          </p:cNvPr>
+          <p:cNvSpPr>
+            <a:spLocks noGrp="1"/>
+          </p:cNvSpPr>
+          <p:nvPr>
+            <p:ph type="body" sz="quarter" idx="31" hasCustomPrompt="1"/>
+          </p:nvPr>
+        </p:nvSpPr>
+        <p:spPr>
+          <a:xfrm>
+            <a:off x="7051675" y="3081463"/>
+            <a:ext cx="1463675" cy="1371600"/>
+          </a:xfrm>
+        </p:spPr>
+        <p:txBody>
+          <a:bodyPr/>
+          <a:lstStyle>
+            <a:lvl1pPr algn="l">
+              <a:lnSpc>
+                <a:spcPct val="100000"/>
+              </a:lnSpc>
+              <a:spcBef>
+                <a:spcPts val="0"/>
+              </a:spcBef>
+              <a:defRPr sz="1200">
+                <a:latin typeface="Franklin Gothic Book" panose="020B0503020102020204" pitchFamily="34" charset="0"/>
+              </a:defRPr>
+            </a:lvl1pPr>
+          </a:lstStyle>
+          <a:p>
+            <a:pPr lvl="0"/>
+            <a:r>
+              <a:rPr lang="en-US" dirty="0"/>
+              <a:t>Enter guests names</a:t>
+            </a:r>
+          </a:p>
+        </p:txBody>
+      </p:sp>
+      <p:sp>
+        <p:nvSpPr>
+          <p:cNvPr id="43" name="Text Placeholder 3">
+            <a:extLst>
+              <a:ext uri="{FF2B5EF4-FFF2-40B4-BE49-F238E27FC236}">
+                <a16:creationId xmlns:a16="http://schemas.microsoft.com/office/drawing/2014/main" id="{C9C768F4-8FEF-4E25-B6D4-CE5A7638113F}"/>
+              </a:ext>
+            </a:extLst>
+          </p:cNvPr>
+          <p:cNvSpPr>
+            <a:spLocks noGrp="1"/>
+          </p:cNvSpPr>
+          <p:nvPr>
+            <p:ph type="body" sz="quarter" idx="32" hasCustomPrompt="1"/>
+          </p:nvPr>
+        </p:nvSpPr>
+        <p:spPr>
+          <a:xfrm>
+            <a:off x="630169" y="5104486"/>
+            <a:ext cx="1463675" cy="1371600"/>
+          </a:xfrm>
+        </p:spPr>
+        <p:txBody>
+          <a:bodyPr/>
+          <a:lstStyle>
+            <a:lvl1pPr algn="l">
+              <a:lnSpc>
+                <a:spcPct val="100000"/>
+              </a:lnSpc>
+              <a:spcBef>
+                <a:spcPts val="0"/>
+              </a:spcBef>
+              <a:defRPr sz="1200">
+                <a:latin typeface="Franklin Gothic Book" panose="020B0503020102020204" pitchFamily="34" charset="0"/>
+              </a:defRPr>
+            </a:lvl1pPr>
+          </a:lstStyle>
+          <a:p>
+            <a:pPr lvl="0"/>
+            <a:r>
+              <a:rPr lang="en-US" dirty="0"/>
+              <a:t>Enter guests names</a:t>
+            </a:r>
+          </a:p>
+        </p:txBody>
+      </p:sp>
+      <p:sp>
+        <p:nvSpPr>
+          <p:cNvPr id="44" name="Text Placeholder 3">
+            <a:extLst>
+              <a:ext uri="{FF2B5EF4-FFF2-40B4-BE49-F238E27FC236}">
+                <a16:creationId xmlns:a16="http://schemas.microsoft.com/office/drawing/2014/main" id="{D42D56F6-3FEF-4ECC-BFAD-562ED06BB8EF}"/>
+              </a:ext>
+            </a:extLst>
+          </p:cNvPr>
+          <p:cNvSpPr>
+            <a:spLocks noGrp="1"/>
+          </p:cNvSpPr>
+          <p:nvPr>
+            <p:ph type="body" sz="quarter" idx="33" hasCustomPrompt="1"/>
+          </p:nvPr>
+        </p:nvSpPr>
+        <p:spPr>
+          <a:xfrm>
+            <a:off x="2773543" y="5104486"/>
+            <a:ext cx="1463675" cy="1371600"/>
+          </a:xfrm>
+        </p:spPr>
+        <p:txBody>
+          <a:bodyPr/>
+          <a:lstStyle>
+            <a:lvl1pPr algn="l">
+              <a:lnSpc>
+                <a:spcPct val="100000"/>
+              </a:lnSpc>
+              <a:spcBef>
+                <a:spcPts val="0"/>
+              </a:spcBef>
+              <a:defRPr sz="1200">
+                <a:latin typeface="Franklin Gothic Book" panose="020B0503020102020204" pitchFamily="34" charset="0"/>
+              </a:defRPr>
+            </a:lvl1pPr>
+          </a:lstStyle>
+          <a:p>
+            <a:pPr lvl="0"/>
+            <a:r>
+              <a:rPr lang="en-US" dirty="0"/>
+              <a:t>Enter guests names</a:t>
+            </a:r>
+          </a:p>
+        </p:txBody>
+      </p:sp>
+      <p:sp>
+        <p:nvSpPr>
+          <p:cNvPr id="45" name="Text Placeholder 3">
+            <a:extLst>
+              <a:ext uri="{FF2B5EF4-FFF2-40B4-BE49-F238E27FC236}">
+                <a16:creationId xmlns:a16="http://schemas.microsoft.com/office/drawing/2014/main" id="{674A7BE6-D119-4025-96A5-FD074183AB24}"/>
+              </a:ext>
+            </a:extLst>
+          </p:cNvPr>
+          <p:cNvSpPr>
+            <a:spLocks noGrp="1"/>
+          </p:cNvSpPr>
+          <p:nvPr>
+            <p:ph type="body" sz="quarter" idx="34" hasCustomPrompt="1"/>
+          </p:nvPr>
+        </p:nvSpPr>
+        <p:spPr>
+          <a:xfrm>
+            <a:off x="4910455" y="5104486"/>
+            <a:ext cx="1463675" cy="1371600"/>
+          </a:xfrm>
+        </p:spPr>
+        <p:txBody>
+          <a:bodyPr/>
+          <a:lstStyle>
+            <a:lvl1pPr algn="l">
+              <a:lnSpc>
+                <a:spcPct val="100000"/>
+              </a:lnSpc>
+              <a:spcBef>
+                <a:spcPts val="0"/>
+              </a:spcBef>
+              <a:defRPr sz="1200">
+                <a:latin typeface="Franklin Gothic Book" panose="020B0503020102020204" pitchFamily="34" charset="0"/>
+              </a:defRPr>
+            </a:lvl1pPr>
+          </a:lstStyle>
+          <a:p>
+            <a:pPr lvl="0"/>
+            <a:r>
+              <a:rPr lang="en-US" dirty="0"/>
+              <a:t>Enter guests names</a:t>
+            </a:r>
+          </a:p>
+        </p:txBody>
+      </p:sp>
+      <p:sp>
+        <p:nvSpPr>
+          <p:cNvPr id="46" name="Text Placeholder 3">
+            <a:extLst>
+              <a:ext uri="{FF2B5EF4-FFF2-40B4-BE49-F238E27FC236}">
+                <a16:creationId xmlns:a16="http://schemas.microsoft.com/office/drawing/2014/main" id="{30BDC173-256B-4D7F-AD68-325440FBEE9C}"/>
+              </a:ext>
+            </a:extLst>
+          </p:cNvPr>
+          <p:cNvSpPr>
+            <a:spLocks noGrp="1"/>
+          </p:cNvSpPr>
+          <p:nvPr>
+            <p:ph type="body" sz="quarter" idx="35" hasCustomPrompt="1"/>
+          </p:nvPr>
+        </p:nvSpPr>
+        <p:spPr>
+          <a:xfrm>
+            <a:off x="7047367" y="5104486"/>
+            <a:ext cx="1463675" cy="1371600"/>
+          </a:xfrm>
+        </p:spPr>
+        <p:txBody>
+          <a:bodyPr/>
+          <a:lstStyle>
+            <a:lvl1pPr algn="l">
+              <a:lnSpc>
+                <a:spcPct val="100000"/>
+              </a:lnSpc>
+              <a:spcBef>
+                <a:spcPts val="0"/>
+              </a:spcBef>
+              <a:defRPr sz="1200">
+                <a:latin typeface="Franklin Gothic Book" panose="020B0503020102020204" pitchFamily="34" charset="0"/>
+              </a:defRPr>
+            </a:lvl1pPr>
+          </a:lstStyle>
+          <a:p>
+            <a:pPr lvl="0"/>
+            <a:r>
+              <a:rPr lang="en-US" dirty="0"/>
+              <a:t>Enter guests names</a:t>
+            </a:r>
           </a:p>
         </p:txBody>
       </p:sp>
     </p:spTree>
     <p:extLst>
       <p:ext uri="{BB962C8B-B14F-4D97-AF65-F5344CB8AC3E}">
-        <p14:creationId xmlns:p14="http://schemas.microsoft.com/office/powerpoint/2010/main" val="960648375"/>
+        <p14:creationId xmlns:p14="http://schemas.microsoft.com/office/powerpoint/2010/main" val="3533944175"/>
       </p:ext>
     </p:extLst>
   </p:cSld>
   <p:clrMapOvr>
     <a:masterClrMapping/>
   </p:clrMapOvr>
+  <p:extLst>
+    <p:ext uri="{DCECCB84-F9BA-43D5-87BE-67443E8EF086}">
+      <p15:sldGuideLst xmlns:p15="http://schemas.microsoft.com/office/powerpoint/2012/main">
+        <p15:guide id="1" orient="horz" pos="504" userDrawn="1">
+          <p15:clr>
+            <a:srgbClr val="FBAE40"/>
+          </p15:clr>
+        </p15:guide>
+        <p15:guide id="2" orient="horz" pos="768" userDrawn="1">
+          <p15:clr>
+            <a:srgbClr val="FBAE40"/>
+          </p15:clr>
+        </p15:guide>
+      </p15:sldGuideLst>
+    </p:ext>
+  </p:extLst>
 </p:sldLayout>
 </file>
 
 <file path=ppt/slideLayouts/slideLayout4.xml><?xml version="1.0" encoding="utf-8"?>
-<p:sldLayout xmlns:a="http://schemas.openxmlformats.org/drawingml/2006/main" xmlns:r="http://schemas.openxmlformats.org/officeDocument/2006/relationships" xmlns:p="http://schemas.openxmlformats.org/presentationml/2006/main" type="twoObj" preserve="1">
-  <p:cSld name="Two Content">
+<p:sldLayout xmlns:a="http://schemas.openxmlformats.org/drawingml/2006/main" xmlns:r="http://schemas.openxmlformats.org/officeDocument/2006/relationships" xmlns:p="http://schemas.openxmlformats.org/presentationml/2006/main" preserve="1" userDrawn="1">
+  <p:cSld name="Hashtag Sign">
     <p:spTree>
       <p:nvGrpSpPr>
         <p:cNvPr id="1" name=""/>
@@ -1143,1431 +1963,198 @@
       </p:grpSpPr>
       <p:sp>
         <p:nvSpPr>
-          <p:cNvPr id="2" name="Title 1"/>
+          <p:cNvPr id="38" name="Text Placeholder 3">
+            <a:extLst>
+              <a:ext uri="{FF2B5EF4-FFF2-40B4-BE49-F238E27FC236}">
+                <a16:creationId xmlns:a16="http://schemas.microsoft.com/office/drawing/2014/main" id="{CD1298B0-DF74-4921-ACDD-25CA73EA0D17}"/>
+              </a:ext>
+            </a:extLst>
+          </p:cNvPr>
           <p:cNvSpPr>
             <a:spLocks noGrp="1"/>
           </p:cNvSpPr>
           <p:nvPr>
-            <p:ph type="title"/>
+            <p:ph type="body" sz="quarter" idx="16" hasCustomPrompt="1"/>
           </p:nvPr>
         </p:nvSpPr>
-        <p:spPr/>
+        <p:spPr>
+          <a:xfrm>
+            <a:off x="912813" y="3767931"/>
+            <a:ext cx="7318375" cy="647700"/>
+          </a:xfrm>
+        </p:spPr>
         <p:txBody>
-          <a:bodyPr/>
-          <a:lstStyle/>
-          <a:p>
-            <a:r>
-              <a:rPr lang="en-US" smtClean="0"/>
-              <a:t>Click to edit Master title style</a:t>
-            </a:r>
-            <a:endParaRPr lang="en-US"/>
+          <a:bodyPr>
+            <a:noAutofit/>
+          </a:bodyPr>
+          <a:lstStyle>
+            <a:lvl1pPr>
+              <a:defRPr sz="2800">
+                <a:solidFill>
+                  <a:schemeClr val="tx1"/>
+                </a:solidFill>
+                <a:latin typeface="+mn-lt"/>
+              </a:defRPr>
+            </a:lvl1pPr>
+          </a:lstStyle>
+          <a:p>
+            <a:pPr lvl="0"/>
+            <a:r>
+              <a:rPr lang="en-US" dirty="0"/>
+              <a:t>Post your pictures using our hashtag! </a:t>
+            </a:r>
           </a:p>
         </p:txBody>
       </p:sp>
       <p:sp>
         <p:nvSpPr>
-          <p:cNvPr id="3" name="Content Placeholder 2"/>
+          <p:cNvPr id="44" name="Title 1">
+            <a:extLst>
+              <a:ext uri="{FF2B5EF4-FFF2-40B4-BE49-F238E27FC236}">
+                <a16:creationId xmlns:a16="http://schemas.microsoft.com/office/drawing/2014/main" id="{6D38433A-D9FF-4C22-931F-DD22EE385F83}"/>
+              </a:ext>
+            </a:extLst>
+          </p:cNvPr>
           <p:cNvSpPr>
             <a:spLocks noGrp="1"/>
           </p:cNvSpPr>
           <p:nvPr>
-            <p:ph sz="half" idx="1"/>
+            <p:ph type="title" hasCustomPrompt="1"/>
           </p:nvPr>
         </p:nvSpPr>
         <p:spPr>
           <a:xfrm>
-            <a:off x="457200" y="1600200"/>
-            <a:ext cx="4038600" cy="4525963"/>
-          </a:xfrm>
+            <a:off x="914400" y="1260861"/>
+            <a:ext cx="7315200" cy="832018"/>
+          </a:xfrm>
+          <a:prstGeom prst="rect">
+            <a:avLst/>
+          </a:prstGeom>
         </p:spPr>
         <p:txBody>
-          <a:bodyPr/>
+          <a:bodyPr>
+            <a:noAutofit/>
+          </a:bodyPr>
           <a:lstStyle>
-            <a:lvl1pPr>
-              <a:defRPr sz="2800"/>
+            <a:lvl1pPr algn="ctr">
+              <a:defRPr sz="4400" b="0" cap="all" baseline="0">
+                <a:solidFill>
+                  <a:schemeClr val="tx1"/>
+                </a:solidFill>
+                <a:latin typeface="Franklin Gothic Demi" panose="020B0703020102020204" pitchFamily="34" charset="0"/>
+              </a:defRPr>
             </a:lvl1pPr>
-            <a:lvl2pPr>
-              <a:defRPr sz="2400"/>
-            </a:lvl2pPr>
-            <a:lvl3pPr>
-              <a:defRPr sz="2000"/>
-            </a:lvl3pPr>
-            <a:lvl4pPr>
-              <a:defRPr sz="1800"/>
-            </a:lvl4pPr>
-            <a:lvl5pPr>
-              <a:defRPr sz="1800"/>
-            </a:lvl5pPr>
-            <a:lvl6pPr>
-              <a:defRPr sz="1800"/>
-            </a:lvl6pPr>
-            <a:lvl7pPr>
-              <a:defRPr sz="1800"/>
-            </a:lvl7pPr>
-            <a:lvl8pPr>
-              <a:defRPr sz="1800"/>
-            </a:lvl8pPr>
-            <a:lvl9pPr>
-              <a:defRPr sz="1800"/>
-            </a:lvl9pPr>
           </a:lstStyle>
           <a:p>
-            <a:pPr lvl="0"/>
-            <a:r>
-              <a:rPr lang="en-US" smtClean="0"/>
-              <a:t>Click to edit Master text styles</a:t>
-            </a:r>
-          </a:p>
-          <a:p>
-            <a:pPr lvl="1"/>
-            <a:r>
-              <a:rPr lang="en-US" smtClean="0"/>
-              <a:t>Second level</a:t>
-            </a:r>
-          </a:p>
-          <a:p>
-            <a:pPr lvl="2"/>
-            <a:r>
-              <a:rPr lang="en-US" smtClean="0"/>
-              <a:t>Third level</a:t>
-            </a:r>
-          </a:p>
-          <a:p>
-            <a:pPr lvl="3"/>
-            <a:r>
-              <a:rPr lang="en-US" smtClean="0"/>
-              <a:t>Fourth level</a:t>
-            </a:r>
-          </a:p>
-          <a:p>
-            <a:pPr lvl="4"/>
-            <a:r>
-              <a:rPr lang="en-US" smtClean="0"/>
-              <a:t>Fifth level</a:t>
-            </a:r>
-            <a:endParaRPr lang="en-US"/>
+            <a:r>
+              <a:rPr lang="en-US" dirty="0"/>
+              <a:t>SHARE THE LOVE</a:t>
+            </a:r>
           </a:p>
         </p:txBody>
       </p:sp>
       <p:sp>
         <p:nvSpPr>
-          <p:cNvPr id="4" name="Content Placeholder 3"/>
+          <p:cNvPr id="45" name="Text Placeholder 22">
+            <a:extLst>
+              <a:ext uri="{FF2B5EF4-FFF2-40B4-BE49-F238E27FC236}">
+                <a16:creationId xmlns:a16="http://schemas.microsoft.com/office/drawing/2014/main" id="{F2A74B68-1636-4772-8535-B636BAC6C648}"/>
+              </a:ext>
+            </a:extLst>
+          </p:cNvPr>
           <p:cNvSpPr>
             <a:spLocks noGrp="1"/>
           </p:cNvSpPr>
           <p:nvPr>
-            <p:ph sz="half" idx="2"/>
+            <p:ph type="body" sz="quarter" idx="10" hasCustomPrompt="1"/>
           </p:nvPr>
         </p:nvSpPr>
         <p:spPr>
           <a:xfrm>
-            <a:off x="4648200" y="1600200"/>
-            <a:ext cx="4038600" cy="4525963"/>
-          </a:xfrm>
+            <a:off x="914400" y="728997"/>
+            <a:ext cx="7315200" cy="832017"/>
+          </a:xfrm>
+          <a:prstGeom prst="rect">
+            <a:avLst/>
+          </a:prstGeom>
         </p:spPr>
         <p:txBody>
-          <a:bodyPr/>
+          <a:bodyPr anchor="ctr">
+            <a:noAutofit/>
+          </a:bodyPr>
           <a:lstStyle>
-            <a:lvl1pPr>
-              <a:defRPr sz="2800"/>
+            <a:lvl1pPr algn="ctr">
+              <a:defRPr sz="5000" cap="all" spc="200" baseline="0">
+                <a:solidFill>
+                  <a:schemeClr val="tx2"/>
+                </a:solidFill>
+                <a:latin typeface="+mj-lt"/>
+              </a:defRPr>
             </a:lvl1pPr>
-            <a:lvl2pPr>
-              <a:defRPr sz="2400"/>
-            </a:lvl2pPr>
-            <a:lvl3pPr>
-              <a:defRPr sz="2000"/>
-            </a:lvl3pPr>
-            <a:lvl4pPr>
-              <a:defRPr sz="1800"/>
-            </a:lvl4pPr>
-            <a:lvl5pPr>
-              <a:defRPr sz="1800"/>
-            </a:lvl5pPr>
-            <a:lvl6pPr>
-              <a:defRPr sz="1800"/>
-            </a:lvl6pPr>
-            <a:lvl7pPr>
-              <a:defRPr sz="1800"/>
-            </a:lvl7pPr>
-            <a:lvl8pPr>
-              <a:defRPr sz="1800"/>
-            </a:lvl8pPr>
-            <a:lvl9pPr>
-              <a:defRPr sz="1800"/>
-            </a:lvl9pPr>
           </a:lstStyle>
           <a:p>
             <a:pPr lvl="0"/>
             <a:r>
-              <a:rPr lang="en-US" smtClean="0"/>
-              <a:t>Click to edit Master text styles</a:t>
-            </a:r>
-          </a:p>
-          <a:p>
-            <a:pPr lvl="1"/>
-            <a:r>
-              <a:rPr lang="en-US" smtClean="0"/>
-              <a:t>Second level</a:t>
-            </a:r>
-          </a:p>
-          <a:p>
-            <a:pPr lvl="2"/>
-            <a:r>
-              <a:rPr lang="en-US" smtClean="0"/>
-              <a:t>Third level</a:t>
-            </a:r>
-          </a:p>
-          <a:p>
-            <a:pPr lvl="3"/>
-            <a:r>
-              <a:rPr lang="en-US" smtClean="0"/>
-              <a:t>Fourth level</a:t>
-            </a:r>
-          </a:p>
-          <a:p>
-            <a:pPr lvl="4"/>
-            <a:r>
-              <a:rPr lang="en-US" smtClean="0"/>
-              <a:t>Fifth level</a:t>
-            </a:r>
-            <a:endParaRPr lang="en-US"/>
+              <a:rPr lang="en-US" dirty="0"/>
+              <a:t>BRIDE + GROOM</a:t>
+            </a:r>
           </a:p>
         </p:txBody>
       </p:sp>
       <p:sp>
         <p:nvSpPr>
-          <p:cNvPr id="5" name="Date Placeholder 4"/>
+          <p:cNvPr id="6" name="Text Placeholder 3">
+            <a:extLst>
+              <a:ext uri="{FF2B5EF4-FFF2-40B4-BE49-F238E27FC236}">
+                <a16:creationId xmlns:a16="http://schemas.microsoft.com/office/drawing/2014/main" id="{6123FB0D-6B56-47D6-8C8D-4094F503A383}"/>
+              </a:ext>
+            </a:extLst>
+          </p:cNvPr>
           <p:cNvSpPr>
             <a:spLocks noGrp="1"/>
           </p:cNvSpPr>
           <p:nvPr>
-            <p:ph type="dt" sz="half" idx="10"/>
+            <p:ph type="body" sz="quarter" idx="17" hasCustomPrompt="1"/>
           </p:nvPr>
         </p:nvSpPr>
-        <p:spPr/>
+        <p:spPr>
+          <a:xfrm>
+            <a:off x="628651" y="3090069"/>
+            <a:ext cx="7886700" cy="677862"/>
+          </a:xfrm>
+        </p:spPr>
         <p:txBody>
-          <a:bodyPr/>
-          <a:lstStyle/>
-          <a:p>
-            <a:fld id="{5BCAD085-E8A6-8845-BD4E-CB4CCA059FC4}" type="datetimeFigureOut">
-              <a:rPr lang="en-US" smtClean="0"/>
-              <a:t>1/27/13</a:t>
-            </a:fld>
-            <a:endParaRPr lang="en-US"/>
-          </a:p>
-        </p:txBody>
-      </p:sp>
-      <p:sp>
-        <p:nvSpPr>
-          <p:cNvPr id="6" name="Footer Placeholder 5"/>
-          <p:cNvSpPr>
-            <a:spLocks noGrp="1"/>
-          </p:cNvSpPr>
-          <p:nvPr>
-            <p:ph type="ftr" sz="quarter" idx="11"/>
-          </p:nvPr>
-        </p:nvSpPr>
-        <p:spPr/>
-        <p:txBody>
-          <a:bodyPr/>
-          <a:lstStyle/>
-          <a:p>
-            <a:endParaRPr lang="en-US"/>
-          </a:p>
-        </p:txBody>
-      </p:sp>
-      <p:sp>
-        <p:nvSpPr>
-          <p:cNvPr id="7" name="Slide Number Placeholder 6"/>
-          <p:cNvSpPr>
-            <a:spLocks noGrp="1"/>
-          </p:cNvSpPr>
-          <p:nvPr>
-            <p:ph type="sldNum" sz="quarter" idx="12"/>
-          </p:nvPr>
-        </p:nvSpPr>
-        <p:spPr/>
-        <p:txBody>
-          <a:bodyPr/>
-          <a:lstStyle/>
-          <a:p>
-            <a:fld id="{C1FF6DA9-008F-8B48-92A6-B652298478BF}" type="slidenum">
-              <a:rPr lang="en-US" smtClean="0"/>
-              <a:t>‹#›</a:t>
-            </a:fld>
-            <a:endParaRPr lang="en-US"/>
+          <a:bodyPr vert="horz" lIns="91440" tIns="45720" rIns="91440" bIns="45720" rtlCol="0" anchor="ctr">
+            <a:noAutofit/>
+          </a:bodyPr>
+          <a:lstStyle>
+            <a:lvl1pPr>
+              <a:defRPr lang="en-US" sz="6000" cap="all" spc="600" baseline="0" dirty="0">
+                <a:solidFill>
+                  <a:schemeClr val="tx2"/>
+                </a:solidFill>
+                <a:latin typeface="Franklin Gothic Demi" panose="020B0703020102020204" pitchFamily="34" charset="0"/>
+                <a:ea typeface="+mj-ea"/>
+                <a:cs typeface="+mj-cs"/>
+              </a:defRPr>
+            </a:lvl1pPr>
+          </a:lstStyle>
+          <a:p>
+            <a:r>
+              <a:rPr lang="en-US" sz="6000" dirty="0">
+                <a:solidFill>
+                  <a:schemeClr val="tx2"/>
+                </a:solidFill>
+              </a:rPr>
+              <a:t>#YOURHASHTAG</a:t>
+            </a:r>
           </a:p>
         </p:txBody>
       </p:sp>
     </p:spTree>
     <p:extLst>
       <p:ext uri="{BB962C8B-B14F-4D97-AF65-F5344CB8AC3E}">
-        <p14:creationId xmlns:p14="http://schemas.microsoft.com/office/powerpoint/2010/main" val="2782244947"/>
-      </p:ext>
-    </p:extLst>
-  </p:cSld>
-  <p:clrMapOvr>
-    <a:masterClrMapping/>
-  </p:clrMapOvr>
-</p:sldLayout>
-</file>
-
-<file path=ppt/slideLayouts/slideLayout5.xml><?xml version="1.0" encoding="utf-8"?>
-<p:sldLayout xmlns:a="http://schemas.openxmlformats.org/drawingml/2006/main" xmlns:r="http://schemas.openxmlformats.org/officeDocument/2006/relationships" xmlns:p="http://schemas.openxmlformats.org/presentationml/2006/main" type="twoTxTwoObj" preserve="1">
-  <p:cSld name="Comparison">
-    <p:spTree>
-      <p:nvGrpSpPr>
-        <p:cNvPr id="1" name=""/>
-        <p:cNvGrpSpPr/>
-        <p:nvPr/>
-      </p:nvGrpSpPr>
-      <p:grpSpPr>
-        <a:xfrm>
-          <a:off x="0" y="0"/>
-          <a:ext cx="0" cy="0"/>
-          <a:chOff x="0" y="0"/>
-          <a:chExt cx="0" cy="0"/>
-        </a:xfrm>
-      </p:grpSpPr>
-      <p:sp>
-        <p:nvSpPr>
-          <p:cNvPr id="2" name="Title 1"/>
-          <p:cNvSpPr>
-            <a:spLocks noGrp="1"/>
-          </p:cNvSpPr>
-          <p:nvPr>
-            <p:ph type="title"/>
-          </p:nvPr>
-        </p:nvSpPr>
-        <p:spPr/>
-        <p:txBody>
-          <a:bodyPr/>
-          <a:lstStyle>
-            <a:lvl1pPr>
-              <a:defRPr/>
-            </a:lvl1pPr>
-          </a:lstStyle>
-          <a:p>
-            <a:r>
-              <a:rPr lang="en-US" smtClean="0"/>
-              <a:t>Click to edit Master title style</a:t>
-            </a:r>
-            <a:endParaRPr lang="en-US"/>
-          </a:p>
-        </p:txBody>
-      </p:sp>
-      <p:sp>
-        <p:nvSpPr>
-          <p:cNvPr id="3" name="Text Placeholder 2"/>
-          <p:cNvSpPr>
-            <a:spLocks noGrp="1"/>
-          </p:cNvSpPr>
-          <p:nvPr>
-            <p:ph type="body" idx="1"/>
-          </p:nvPr>
-        </p:nvSpPr>
-        <p:spPr>
-          <a:xfrm>
-            <a:off x="457200" y="1535113"/>
-            <a:ext cx="4040188" cy="639762"/>
-          </a:xfrm>
-        </p:spPr>
-        <p:txBody>
-          <a:bodyPr anchor="b"/>
-          <a:lstStyle>
-            <a:lvl1pPr marL="0" indent="0">
-              <a:buNone/>
-              <a:defRPr sz="2400" b="1"/>
-            </a:lvl1pPr>
-            <a:lvl2pPr marL="457200" indent="0">
-              <a:buNone/>
-              <a:defRPr sz="2000" b="1"/>
-            </a:lvl2pPr>
-            <a:lvl3pPr marL="914400" indent="0">
-              <a:buNone/>
-              <a:defRPr sz="1800" b="1"/>
-            </a:lvl3pPr>
-            <a:lvl4pPr marL="1371600" indent="0">
-              <a:buNone/>
-              <a:defRPr sz="1600" b="1"/>
-            </a:lvl4pPr>
-            <a:lvl5pPr marL="1828800" indent="0">
-              <a:buNone/>
-              <a:defRPr sz="1600" b="1"/>
-            </a:lvl5pPr>
-            <a:lvl6pPr marL="2286000" indent="0">
-              <a:buNone/>
-              <a:defRPr sz="1600" b="1"/>
-            </a:lvl6pPr>
-            <a:lvl7pPr marL="2743200" indent="0">
-              <a:buNone/>
-              <a:defRPr sz="1600" b="1"/>
-            </a:lvl7pPr>
-            <a:lvl8pPr marL="3200400" indent="0">
-              <a:buNone/>
-              <a:defRPr sz="1600" b="1"/>
-            </a:lvl8pPr>
-            <a:lvl9pPr marL="3657600" indent="0">
-              <a:buNone/>
-              <a:defRPr sz="1600" b="1"/>
-            </a:lvl9pPr>
-          </a:lstStyle>
-          <a:p>
-            <a:pPr lvl="0"/>
-            <a:r>
-              <a:rPr lang="en-US" smtClean="0"/>
-              <a:t>Click to edit Master text styles</a:t>
-            </a:r>
-          </a:p>
-        </p:txBody>
-      </p:sp>
-      <p:sp>
-        <p:nvSpPr>
-          <p:cNvPr id="4" name="Content Placeholder 3"/>
-          <p:cNvSpPr>
-            <a:spLocks noGrp="1"/>
-          </p:cNvSpPr>
-          <p:nvPr>
-            <p:ph sz="half" idx="2"/>
-          </p:nvPr>
-        </p:nvSpPr>
-        <p:spPr>
-          <a:xfrm>
-            <a:off x="457200" y="2174875"/>
-            <a:ext cx="4040188" cy="3951288"/>
-          </a:xfrm>
-        </p:spPr>
-        <p:txBody>
-          <a:bodyPr/>
-          <a:lstStyle>
-            <a:lvl1pPr>
-              <a:defRPr sz="2400"/>
-            </a:lvl1pPr>
-            <a:lvl2pPr>
-              <a:defRPr sz="2000"/>
-            </a:lvl2pPr>
-            <a:lvl3pPr>
-              <a:defRPr sz="1800"/>
-            </a:lvl3pPr>
-            <a:lvl4pPr>
-              <a:defRPr sz="1600"/>
-            </a:lvl4pPr>
-            <a:lvl5pPr>
-              <a:defRPr sz="1600"/>
-            </a:lvl5pPr>
-            <a:lvl6pPr>
-              <a:defRPr sz="1600"/>
-            </a:lvl6pPr>
-            <a:lvl7pPr>
-              <a:defRPr sz="1600"/>
-            </a:lvl7pPr>
-            <a:lvl8pPr>
-              <a:defRPr sz="1600"/>
-            </a:lvl8pPr>
-            <a:lvl9pPr>
-              <a:defRPr sz="1600"/>
-            </a:lvl9pPr>
-          </a:lstStyle>
-          <a:p>
-            <a:pPr lvl="0"/>
-            <a:r>
-              <a:rPr lang="en-US" smtClean="0"/>
-              <a:t>Click to edit Master text styles</a:t>
-            </a:r>
-          </a:p>
-          <a:p>
-            <a:pPr lvl="1"/>
-            <a:r>
-              <a:rPr lang="en-US" smtClean="0"/>
-              <a:t>Second level</a:t>
-            </a:r>
-          </a:p>
-          <a:p>
-            <a:pPr lvl="2"/>
-            <a:r>
-              <a:rPr lang="en-US" smtClean="0"/>
-              <a:t>Third level</a:t>
-            </a:r>
-          </a:p>
-          <a:p>
-            <a:pPr lvl="3"/>
-            <a:r>
-              <a:rPr lang="en-US" smtClean="0"/>
-              <a:t>Fourth level</a:t>
-            </a:r>
-          </a:p>
-          <a:p>
-            <a:pPr lvl="4"/>
-            <a:r>
-              <a:rPr lang="en-US" smtClean="0"/>
-              <a:t>Fifth level</a:t>
-            </a:r>
-            <a:endParaRPr lang="en-US"/>
-          </a:p>
-        </p:txBody>
-      </p:sp>
-      <p:sp>
-        <p:nvSpPr>
-          <p:cNvPr id="5" name="Text Placeholder 4"/>
-          <p:cNvSpPr>
-            <a:spLocks noGrp="1"/>
-          </p:cNvSpPr>
-          <p:nvPr>
-            <p:ph type="body" sz="quarter" idx="3"/>
-          </p:nvPr>
-        </p:nvSpPr>
-        <p:spPr>
-          <a:xfrm>
-            <a:off x="4645025" y="1535113"/>
-            <a:ext cx="4041775" cy="639762"/>
-          </a:xfrm>
-        </p:spPr>
-        <p:txBody>
-          <a:bodyPr anchor="b"/>
-          <a:lstStyle>
-            <a:lvl1pPr marL="0" indent="0">
-              <a:buNone/>
-              <a:defRPr sz="2400" b="1"/>
-            </a:lvl1pPr>
-            <a:lvl2pPr marL="457200" indent="0">
-              <a:buNone/>
-              <a:defRPr sz="2000" b="1"/>
-            </a:lvl2pPr>
-            <a:lvl3pPr marL="914400" indent="0">
-              <a:buNone/>
-              <a:defRPr sz="1800" b="1"/>
-            </a:lvl3pPr>
-            <a:lvl4pPr marL="1371600" indent="0">
-              <a:buNone/>
-              <a:defRPr sz="1600" b="1"/>
-            </a:lvl4pPr>
-            <a:lvl5pPr marL="1828800" indent="0">
-              <a:buNone/>
-              <a:defRPr sz="1600" b="1"/>
-            </a:lvl5pPr>
-            <a:lvl6pPr marL="2286000" indent="0">
-              <a:buNone/>
-              <a:defRPr sz="1600" b="1"/>
-            </a:lvl6pPr>
-            <a:lvl7pPr marL="2743200" indent="0">
-              <a:buNone/>
-              <a:defRPr sz="1600" b="1"/>
-            </a:lvl7pPr>
-            <a:lvl8pPr marL="3200400" indent="0">
-              <a:buNone/>
-              <a:defRPr sz="1600" b="1"/>
-            </a:lvl8pPr>
-            <a:lvl9pPr marL="3657600" indent="0">
-              <a:buNone/>
-              <a:defRPr sz="1600" b="1"/>
-            </a:lvl9pPr>
-          </a:lstStyle>
-          <a:p>
-            <a:pPr lvl="0"/>
-            <a:r>
-              <a:rPr lang="en-US" smtClean="0"/>
-              <a:t>Click to edit Master text styles</a:t>
-            </a:r>
-          </a:p>
-        </p:txBody>
-      </p:sp>
-      <p:sp>
-        <p:nvSpPr>
-          <p:cNvPr id="6" name="Content Placeholder 5"/>
-          <p:cNvSpPr>
-            <a:spLocks noGrp="1"/>
-          </p:cNvSpPr>
-          <p:nvPr>
-            <p:ph sz="quarter" idx="4"/>
-          </p:nvPr>
-        </p:nvSpPr>
-        <p:spPr>
-          <a:xfrm>
-            <a:off x="4645025" y="2174875"/>
-            <a:ext cx="4041775" cy="3951288"/>
-          </a:xfrm>
-        </p:spPr>
-        <p:txBody>
-          <a:bodyPr/>
-          <a:lstStyle>
-            <a:lvl1pPr>
-              <a:defRPr sz="2400"/>
-            </a:lvl1pPr>
-            <a:lvl2pPr>
-              <a:defRPr sz="2000"/>
-            </a:lvl2pPr>
-            <a:lvl3pPr>
-              <a:defRPr sz="1800"/>
-            </a:lvl3pPr>
-            <a:lvl4pPr>
-              <a:defRPr sz="1600"/>
-            </a:lvl4pPr>
-            <a:lvl5pPr>
-              <a:defRPr sz="1600"/>
-            </a:lvl5pPr>
-            <a:lvl6pPr>
-              <a:defRPr sz="1600"/>
-            </a:lvl6pPr>
-            <a:lvl7pPr>
-              <a:defRPr sz="1600"/>
-            </a:lvl7pPr>
-            <a:lvl8pPr>
-              <a:defRPr sz="1600"/>
-            </a:lvl8pPr>
-            <a:lvl9pPr>
-              <a:defRPr sz="1600"/>
-            </a:lvl9pPr>
-          </a:lstStyle>
-          <a:p>
-            <a:pPr lvl="0"/>
-            <a:r>
-              <a:rPr lang="en-US" smtClean="0"/>
-              <a:t>Click to edit Master text styles</a:t>
-            </a:r>
-          </a:p>
-          <a:p>
-            <a:pPr lvl="1"/>
-            <a:r>
-              <a:rPr lang="en-US" smtClean="0"/>
-              <a:t>Second level</a:t>
-            </a:r>
-          </a:p>
-          <a:p>
-            <a:pPr lvl="2"/>
-            <a:r>
-              <a:rPr lang="en-US" smtClean="0"/>
-              <a:t>Third level</a:t>
-            </a:r>
-          </a:p>
-          <a:p>
-            <a:pPr lvl="3"/>
-            <a:r>
-              <a:rPr lang="en-US" smtClean="0"/>
-              <a:t>Fourth level</a:t>
-            </a:r>
-          </a:p>
-          <a:p>
-            <a:pPr lvl="4"/>
-            <a:r>
-              <a:rPr lang="en-US" smtClean="0"/>
-              <a:t>Fifth level</a:t>
-            </a:r>
-            <a:endParaRPr lang="en-US"/>
-          </a:p>
-        </p:txBody>
-      </p:sp>
-      <p:sp>
-        <p:nvSpPr>
-          <p:cNvPr id="7" name="Date Placeholder 6"/>
-          <p:cNvSpPr>
-            <a:spLocks noGrp="1"/>
-          </p:cNvSpPr>
-          <p:nvPr>
-            <p:ph type="dt" sz="half" idx="10"/>
-          </p:nvPr>
-        </p:nvSpPr>
-        <p:spPr/>
-        <p:txBody>
-          <a:bodyPr/>
-          <a:lstStyle/>
-          <a:p>
-            <a:fld id="{5BCAD085-E8A6-8845-BD4E-CB4CCA059FC4}" type="datetimeFigureOut">
-              <a:rPr lang="en-US" smtClean="0"/>
-              <a:t>1/27/13</a:t>
-            </a:fld>
-            <a:endParaRPr lang="en-US"/>
-          </a:p>
-        </p:txBody>
-      </p:sp>
-      <p:sp>
-        <p:nvSpPr>
-          <p:cNvPr id="8" name="Footer Placeholder 7"/>
-          <p:cNvSpPr>
-            <a:spLocks noGrp="1"/>
-          </p:cNvSpPr>
-          <p:nvPr>
-            <p:ph type="ftr" sz="quarter" idx="11"/>
-          </p:nvPr>
-        </p:nvSpPr>
-        <p:spPr/>
-        <p:txBody>
-          <a:bodyPr/>
-          <a:lstStyle/>
-          <a:p>
-            <a:endParaRPr lang="en-US"/>
-          </a:p>
-        </p:txBody>
-      </p:sp>
-      <p:sp>
-        <p:nvSpPr>
-          <p:cNvPr id="9" name="Slide Number Placeholder 8"/>
-          <p:cNvSpPr>
-            <a:spLocks noGrp="1"/>
-          </p:cNvSpPr>
-          <p:nvPr>
-            <p:ph type="sldNum" sz="quarter" idx="12"/>
-          </p:nvPr>
-        </p:nvSpPr>
-        <p:spPr/>
-        <p:txBody>
-          <a:bodyPr/>
-          <a:lstStyle/>
-          <a:p>
-            <a:fld id="{C1FF6DA9-008F-8B48-92A6-B652298478BF}" type="slidenum">
-              <a:rPr lang="en-US" smtClean="0"/>
-              <a:t>‹#›</a:t>
-            </a:fld>
-            <a:endParaRPr lang="en-US"/>
-          </a:p>
-        </p:txBody>
-      </p:sp>
-    </p:spTree>
-    <p:extLst>
-      <p:ext uri="{BB962C8B-B14F-4D97-AF65-F5344CB8AC3E}">
-        <p14:creationId xmlns:p14="http://schemas.microsoft.com/office/powerpoint/2010/main" val="990158736"/>
-      </p:ext>
-    </p:extLst>
-  </p:cSld>
-  <p:clrMapOvr>
-    <a:masterClrMapping/>
-  </p:clrMapOvr>
-</p:sldLayout>
-</file>
-
-<file path=ppt/slideLayouts/slideLayout6.xml><?xml version="1.0" encoding="utf-8"?>
-<p:sldLayout xmlns:a="http://schemas.openxmlformats.org/drawingml/2006/main" xmlns:r="http://schemas.openxmlformats.org/officeDocument/2006/relationships" xmlns:p="http://schemas.openxmlformats.org/presentationml/2006/main" type="titleOnly" preserve="1">
-  <p:cSld name="Title Only">
-    <p:spTree>
-      <p:nvGrpSpPr>
-        <p:cNvPr id="1" name=""/>
-        <p:cNvGrpSpPr/>
-        <p:nvPr/>
-      </p:nvGrpSpPr>
-      <p:grpSpPr>
-        <a:xfrm>
-          <a:off x="0" y="0"/>
-          <a:ext cx="0" cy="0"/>
-          <a:chOff x="0" y="0"/>
-          <a:chExt cx="0" cy="0"/>
-        </a:xfrm>
-      </p:grpSpPr>
-      <p:sp>
-        <p:nvSpPr>
-          <p:cNvPr id="2" name="Title 1"/>
-          <p:cNvSpPr>
-            <a:spLocks noGrp="1"/>
-          </p:cNvSpPr>
-          <p:nvPr>
-            <p:ph type="title"/>
-          </p:nvPr>
-        </p:nvSpPr>
-        <p:spPr/>
-        <p:txBody>
-          <a:bodyPr/>
-          <a:lstStyle/>
-          <a:p>
-            <a:r>
-              <a:rPr lang="en-US" smtClean="0"/>
-              <a:t>Click to edit Master title style</a:t>
-            </a:r>
-            <a:endParaRPr lang="en-US"/>
-          </a:p>
-        </p:txBody>
-      </p:sp>
-      <p:sp>
-        <p:nvSpPr>
-          <p:cNvPr id="3" name="Date Placeholder 2"/>
-          <p:cNvSpPr>
-            <a:spLocks noGrp="1"/>
-          </p:cNvSpPr>
-          <p:nvPr>
-            <p:ph type="dt" sz="half" idx="10"/>
-          </p:nvPr>
-        </p:nvSpPr>
-        <p:spPr/>
-        <p:txBody>
-          <a:bodyPr/>
-          <a:lstStyle/>
-          <a:p>
-            <a:fld id="{5BCAD085-E8A6-8845-BD4E-CB4CCA059FC4}" type="datetimeFigureOut">
-              <a:rPr lang="en-US" smtClean="0"/>
-              <a:t>1/27/13</a:t>
-            </a:fld>
-            <a:endParaRPr lang="en-US"/>
-          </a:p>
-        </p:txBody>
-      </p:sp>
-      <p:sp>
-        <p:nvSpPr>
-          <p:cNvPr id="4" name="Footer Placeholder 3"/>
-          <p:cNvSpPr>
-            <a:spLocks noGrp="1"/>
-          </p:cNvSpPr>
-          <p:nvPr>
-            <p:ph type="ftr" sz="quarter" idx="11"/>
-          </p:nvPr>
-        </p:nvSpPr>
-        <p:spPr/>
-        <p:txBody>
-          <a:bodyPr/>
-          <a:lstStyle/>
-          <a:p>
-            <a:endParaRPr lang="en-US"/>
-          </a:p>
-        </p:txBody>
-      </p:sp>
-      <p:sp>
-        <p:nvSpPr>
-          <p:cNvPr id="5" name="Slide Number Placeholder 4"/>
-          <p:cNvSpPr>
-            <a:spLocks noGrp="1"/>
-          </p:cNvSpPr>
-          <p:nvPr>
-            <p:ph type="sldNum" sz="quarter" idx="12"/>
-          </p:nvPr>
-        </p:nvSpPr>
-        <p:spPr/>
-        <p:txBody>
-          <a:bodyPr/>
-          <a:lstStyle/>
-          <a:p>
-            <a:fld id="{C1FF6DA9-008F-8B48-92A6-B652298478BF}" type="slidenum">
-              <a:rPr lang="en-US" smtClean="0"/>
-              <a:t>‹#›</a:t>
-            </a:fld>
-            <a:endParaRPr lang="en-US"/>
-          </a:p>
-        </p:txBody>
-      </p:sp>
-    </p:spTree>
-    <p:extLst>
-      <p:ext uri="{BB962C8B-B14F-4D97-AF65-F5344CB8AC3E}">
-        <p14:creationId xmlns:p14="http://schemas.microsoft.com/office/powerpoint/2010/main" val="727027711"/>
-      </p:ext>
-    </p:extLst>
-  </p:cSld>
-  <p:clrMapOvr>
-    <a:masterClrMapping/>
-  </p:clrMapOvr>
-</p:sldLayout>
-</file>
-
-<file path=ppt/slideLayouts/slideLayout7.xml><?xml version="1.0" encoding="utf-8"?>
-<p:sldLayout xmlns:a="http://schemas.openxmlformats.org/drawingml/2006/main" xmlns:r="http://schemas.openxmlformats.org/officeDocument/2006/relationships" xmlns:p="http://schemas.openxmlformats.org/presentationml/2006/main" type="blank" preserve="1">
-  <p:cSld name="Blank">
-    <p:spTree>
-      <p:nvGrpSpPr>
-        <p:cNvPr id="1" name=""/>
-        <p:cNvGrpSpPr/>
-        <p:nvPr/>
-      </p:nvGrpSpPr>
-      <p:grpSpPr>
-        <a:xfrm>
-          <a:off x="0" y="0"/>
-          <a:ext cx="0" cy="0"/>
-          <a:chOff x="0" y="0"/>
-          <a:chExt cx="0" cy="0"/>
-        </a:xfrm>
-      </p:grpSpPr>
-      <p:sp>
-        <p:nvSpPr>
-          <p:cNvPr id="2" name="Date Placeholder 1"/>
-          <p:cNvSpPr>
-            <a:spLocks noGrp="1"/>
-          </p:cNvSpPr>
-          <p:nvPr>
-            <p:ph type="dt" sz="half" idx="10"/>
-          </p:nvPr>
-        </p:nvSpPr>
-        <p:spPr/>
-        <p:txBody>
-          <a:bodyPr/>
-          <a:lstStyle/>
-          <a:p>
-            <a:fld id="{5BCAD085-E8A6-8845-BD4E-CB4CCA059FC4}" type="datetimeFigureOut">
-              <a:rPr lang="en-US" smtClean="0"/>
-              <a:t>1/27/13</a:t>
-            </a:fld>
-            <a:endParaRPr lang="en-US"/>
-          </a:p>
-        </p:txBody>
-      </p:sp>
-      <p:sp>
-        <p:nvSpPr>
-          <p:cNvPr id="3" name="Footer Placeholder 2"/>
-          <p:cNvSpPr>
-            <a:spLocks noGrp="1"/>
-          </p:cNvSpPr>
-          <p:nvPr>
-            <p:ph type="ftr" sz="quarter" idx="11"/>
-          </p:nvPr>
-        </p:nvSpPr>
-        <p:spPr/>
-        <p:txBody>
-          <a:bodyPr/>
-          <a:lstStyle/>
-          <a:p>
-            <a:endParaRPr lang="en-US"/>
-          </a:p>
-        </p:txBody>
-      </p:sp>
-      <p:sp>
-        <p:nvSpPr>
-          <p:cNvPr id="4" name="Slide Number Placeholder 3"/>
-          <p:cNvSpPr>
-            <a:spLocks noGrp="1"/>
-          </p:cNvSpPr>
-          <p:nvPr>
-            <p:ph type="sldNum" sz="quarter" idx="12"/>
-          </p:nvPr>
-        </p:nvSpPr>
-        <p:spPr/>
-        <p:txBody>
-          <a:bodyPr/>
-          <a:lstStyle/>
-          <a:p>
-            <a:fld id="{C1FF6DA9-008F-8B48-92A6-B652298478BF}" type="slidenum">
-              <a:rPr lang="en-US" smtClean="0"/>
-              <a:t>‹#›</a:t>
-            </a:fld>
-            <a:endParaRPr lang="en-US"/>
-          </a:p>
-        </p:txBody>
-      </p:sp>
-    </p:spTree>
-    <p:extLst>
-      <p:ext uri="{BB962C8B-B14F-4D97-AF65-F5344CB8AC3E}">
-        <p14:creationId xmlns:p14="http://schemas.microsoft.com/office/powerpoint/2010/main" val="1212999818"/>
-      </p:ext>
-    </p:extLst>
-  </p:cSld>
-  <p:clrMapOvr>
-    <a:masterClrMapping/>
-  </p:clrMapOvr>
-</p:sldLayout>
-</file>
-
-<file path=ppt/slideLayouts/slideLayout8.xml><?xml version="1.0" encoding="utf-8"?>
-<p:sldLayout xmlns:a="http://schemas.openxmlformats.org/drawingml/2006/main" xmlns:r="http://schemas.openxmlformats.org/officeDocument/2006/relationships" xmlns:p="http://schemas.openxmlformats.org/presentationml/2006/main" type="objTx" preserve="1">
-  <p:cSld name="Content with Caption">
-    <p:spTree>
-      <p:nvGrpSpPr>
-        <p:cNvPr id="1" name=""/>
-        <p:cNvGrpSpPr/>
-        <p:nvPr/>
-      </p:nvGrpSpPr>
-      <p:grpSpPr>
-        <a:xfrm>
-          <a:off x="0" y="0"/>
-          <a:ext cx="0" cy="0"/>
-          <a:chOff x="0" y="0"/>
-          <a:chExt cx="0" cy="0"/>
-        </a:xfrm>
-      </p:grpSpPr>
-      <p:sp>
-        <p:nvSpPr>
-          <p:cNvPr id="2" name="Title 1"/>
-          <p:cNvSpPr>
-            <a:spLocks noGrp="1"/>
-          </p:cNvSpPr>
-          <p:nvPr>
-            <p:ph type="title"/>
-          </p:nvPr>
-        </p:nvSpPr>
-        <p:spPr>
-          <a:xfrm>
-            <a:off x="457200" y="273050"/>
-            <a:ext cx="3008313" cy="1162050"/>
-          </a:xfrm>
-        </p:spPr>
-        <p:txBody>
-          <a:bodyPr anchor="b"/>
-          <a:lstStyle>
-            <a:lvl1pPr algn="l">
-              <a:defRPr sz="2000" b="1"/>
-            </a:lvl1pPr>
-          </a:lstStyle>
-          <a:p>
-            <a:r>
-              <a:rPr lang="en-US" smtClean="0"/>
-              <a:t>Click to edit Master title style</a:t>
-            </a:r>
-            <a:endParaRPr lang="en-US"/>
-          </a:p>
-        </p:txBody>
-      </p:sp>
-      <p:sp>
-        <p:nvSpPr>
-          <p:cNvPr id="3" name="Content Placeholder 2"/>
-          <p:cNvSpPr>
-            <a:spLocks noGrp="1"/>
-          </p:cNvSpPr>
-          <p:nvPr>
-            <p:ph idx="1"/>
-          </p:nvPr>
-        </p:nvSpPr>
-        <p:spPr>
-          <a:xfrm>
-            <a:off x="3575050" y="273050"/>
-            <a:ext cx="5111750" cy="5853113"/>
-          </a:xfrm>
-        </p:spPr>
-        <p:txBody>
-          <a:bodyPr/>
-          <a:lstStyle>
-            <a:lvl1pPr>
-              <a:defRPr sz="3200"/>
-            </a:lvl1pPr>
-            <a:lvl2pPr>
-              <a:defRPr sz="2800"/>
-            </a:lvl2pPr>
-            <a:lvl3pPr>
-              <a:defRPr sz="2400"/>
-            </a:lvl3pPr>
-            <a:lvl4pPr>
-              <a:defRPr sz="2000"/>
-            </a:lvl4pPr>
-            <a:lvl5pPr>
-              <a:defRPr sz="2000"/>
-            </a:lvl5pPr>
-            <a:lvl6pPr>
-              <a:defRPr sz="2000"/>
-            </a:lvl6pPr>
-            <a:lvl7pPr>
-              <a:defRPr sz="2000"/>
-            </a:lvl7pPr>
-            <a:lvl8pPr>
-              <a:defRPr sz="2000"/>
-            </a:lvl8pPr>
-            <a:lvl9pPr>
-              <a:defRPr sz="2000"/>
-            </a:lvl9pPr>
-          </a:lstStyle>
-          <a:p>
-            <a:pPr lvl="0"/>
-            <a:r>
-              <a:rPr lang="en-US" smtClean="0"/>
-              <a:t>Click to edit Master text styles</a:t>
-            </a:r>
-          </a:p>
-          <a:p>
-            <a:pPr lvl="1"/>
-            <a:r>
-              <a:rPr lang="en-US" smtClean="0"/>
-              <a:t>Second level</a:t>
-            </a:r>
-          </a:p>
-          <a:p>
-            <a:pPr lvl="2"/>
-            <a:r>
-              <a:rPr lang="en-US" smtClean="0"/>
-              <a:t>Third level</a:t>
-            </a:r>
-          </a:p>
-          <a:p>
-            <a:pPr lvl="3"/>
-            <a:r>
-              <a:rPr lang="en-US" smtClean="0"/>
-              <a:t>Fourth level</a:t>
-            </a:r>
-          </a:p>
-          <a:p>
-            <a:pPr lvl="4"/>
-            <a:r>
-              <a:rPr lang="en-US" smtClean="0"/>
-              <a:t>Fifth level</a:t>
-            </a:r>
-            <a:endParaRPr lang="en-US"/>
-          </a:p>
-        </p:txBody>
-      </p:sp>
-      <p:sp>
-        <p:nvSpPr>
-          <p:cNvPr id="4" name="Text Placeholder 3"/>
-          <p:cNvSpPr>
-            <a:spLocks noGrp="1"/>
-          </p:cNvSpPr>
-          <p:nvPr>
-            <p:ph type="body" sz="half" idx="2"/>
-          </p:nvPr>
-        </p:nvSpPr>
-        <p:spPr>
-          <a:xfrm>
-            <a:off x="457200" y="1435100"/>
-            <a:ext cx="3008313" cy="4691063"/>
-          </a:xfrm>
-        </p:spPr>
-        <p:txBody>
-          <a:bodyPr/>
-          <a:lstStyle>
-            <a:lvl1pPr marL="0" indent="0">
-              <a:buNone/>
-              <a:defRPr sz="1400"/>
-            </a:lvl1pPr>
-            <a:lvl2pPr marL="457200" indent="0">
-              <a:buNone/>
-              <a:defRPr sz="1200"/>
-            </a:lvl2pPr>
-            <a:lvl3pPr marL="914400" indent="0">
-              <a:buNone/>
-              <a:defRPr sz="1000"/>
-            </a:lvl3pPr>
-            <a:lvl4pPr marL="1371600" indent="0">
-              <a:buNone/>
-              <a:defRPr sz="900"/>
-            </a:lvl4pPr>
-            <a:lvl5pPr marL="1828800" indent="0">
-              <a:buNone/>
-              <a:defRPr sz="900"/>
-            </a:lvl5pPr>
-            <a:lvl6pPr marL="2286000" indent="0">
-              <a:buNone/>
-              <a:defRPr sz="900"/>
-            </a:lvl6pPr>
-            <a:lvl7pPr marL="2743200" indent="0">
-              <a:buNone/>
-              <a:defRPr sz="900"/>
-            </a:lvl7pPr>
-            <a:lvl8pPr marL="3200400" indent="0">
-              <a:buNone/>
-              <a:defRPr sz="900"/>
-            </a:lvl8pPr>
-            <a:lvl9pPr marL="3657600" indent="0">
-              <a:buNone/>
-              <a:defRPr sz="900"/>
-            </a:lvl9pPr>
-          </a:lstStyle>
-          <a:p>
-            <a:pPr lvl="0"/>
-            <a:r>
-              <a:rPr lang="en-US" smtClean="0"/>
-              <a:t>Click to edit Master text styles</a:t>
-            </a:r>
-          </a:p>
-        </p:txBody>
-      </p:sp>
-      <p:sp>
-        <p:nvSpPr>
-          <p:cNvPr id="5" name="Date Placeholder 4"/>
-          <p:cNvSpPr>
-            <a:spLocks noGrp="1"/>
-          </p:cNvSpPr>
-          <p:nvPr>
-            <p:ph type="dt" sz="half" idx="10"/>
-          </p:nvPr>
-        </p:nvSpPr>
-        <p:spPr/>
-        <p:txBody>
-          <a:bodyPr/>
-          <a:lstStyle/>
-          <a:p>
-            <a:fld id="{5BCAD085-E8A6-8845-BD4E-CB4CCA059FC4}" type="datetimeFigureOut">
-              <a:rPr lang="en-US" smtClean="0"/>
-              <a:t>1/27/13</a:t>
-            </a:fld>
-            <a:endParaRPr lang="en-US"/>
-          </a:p>
-        </p:txBody>
-      </p:sp>
-      <p:sp>
-        <p:nvSpPr>
-          <p:cNvPr id="6" name="Footer Placeholder 5"/>
-          <p:cNvSpPr>
-            <a:spLocks noGrp="1"/>
-          </p:cNvSpPr>
-          <p:nvPr>
-            <p:ph type="ftr" sz="quarter" idx="11"/>
-          </p:nvPr>
-        </p:nvSpPr>
-        <p:spPr/>
-        <p:txBody>
-          <a:bodyPr/>
-          <a:lstStyle/>
-          <a:p>
-            <a:endParaRPr lang="en-US"/>
-          </a:p>
-        </p:txBody>
-      </p:sp>
-      <p:sp>
-        <p:nvSpPr>
-          <p:cNvPr id="7" name="Slide Number Placeholder 6"/>
-          <p:cNvSpPr>
-            <a:spLocks noGrp="1"/>
-          </p:cNvSpPr>
-          <p:nvPr>
-            <p:ph type="sldNum" sz="quarter" idx="12"/>
-          </p:nvPr>
-        </p:nvSpPr>
-        <p:spPr/>
-        <p:txBody>
-          <a:bodyPr/>
-          <a:lstStyle/>
-          <a:p>
-            <a:fld id="{C1FF6DA9-008F-8B48-92A6-B652298478BF}" type="slidenum">
-              <a:rPr lang="en-US" smtClean="0"/>
-              <a:t>‹#›</a:t>
-            </a:fld>
-            <a:endParaRPr lang="en-US"/>
-          </a:p>
-        </p:txBody>
-      </p:sp>
-    </p:spTree>
-    <p:extLst>
-      <p:ext uri="{BB962C8B-B14F-4D97-AF65-F5344CB8AC3E}">
-        <p14:creationId xmlns:p14="http://schemas.microsoft.com/office/powerpoint/2010/main" val="1840726560"/>
-      </p:ext>
-    </p:extLst>
-  </p:cSld>
-  <p:clrMapOvr>
-    <a:masterClrMapping/>
-  </p:clrMapOvr>
-</p:sldLayout>
-</file>
-
-<file path=ppt/slideLayouts/slideLayout9.xml><?xml version="1.0" encoding="utf-8"?>
-<p:sldLayout xmlns:a="http://schemas.openxmlformats.org/drawingml/2006/main" xmlns:r="http://schemas.openxmlformats.org/officeDocument/2006/relationships" xmlns:p="http://schemas.openxmlformats.org/presentationml/2006/main" type="picTx" preserve="1">
-  <p:cSld name="Picture with Caption">
-    <p:spTree>
-      <p:nvGrpSpPr>
-        <p:cNvPr id="1" name=""/>
-        <p:cNvGrpSpPr/>
-        <p:nvPr/>
-      </p:nvGrpSpPr>
-      <p:grpSpPr>
-        <a:xfrm>
-          <a:off x="0" y="0"/>
-          <a:ext cx="0" cy="0"/>
-          <a:chOff x="0" y="0"/>
-          <a:chExt cx="0" cy="0"/>
-        </a:xfrm>
-      </p:grpSpPr>
-      <p:sp>
-        <p:nvSpPr>
-          <p:cNvPr id="2" name="Title 1"/>
-          <p:cNvSpPr>
-            <a:spLocks noGrp="1"/>
-          </p:cNvSpPr>
-          <p:nvPr>
-            <p:ph type="title"/>
-          </p:nvPr>
-        </p:nvSpPr>
-        <p:spPr>
-          <a:xfrm>
-            <a:off x="1792288" y="4800600"/>
-            <a:ext cx="5486400" cy="566738"/>
-          </a:xfrm>
-        </p:spPr>
-        <p:txBody>
-          <a:bodyPr anchor="b"/>
-          <a:lstStyle>
-            <a:lvl1pPr algn="l">
-              <a:defRPr sz="2000" b="1"/>
-            </a:lvl1pPr>
-          </a:lstStyle>
-          <a:p>
-            <a:r>
-              <a:rPr lang="en-US" smtClean="0"/>
-              <a:t>Click to edit Master title style</a:t>
-            </a:r>
-            <a:endParaRPr lang="en-US"/>
-          </a:p>
-        </p:txBody>
-      </p:sp>
-      <p:sp>
-        <p:nvSpPr>
-          <p:cNvPr id="3" name="Picture Placeholder 2"/>
-          <p:cNvSpPr>
-            <a:spLocks noGrp="1"/>
-          </p:cNvSpPr>
-          <p:nvPr>
-            <p:ph type="pic" idx="1"/>
-          </p:nvPr>
-        </p:nvSpPr>
-        <p:spPr>
-          <a:xfrm>
-            <a:off x="1792288" y="612775"/>
-            <a:ext cx="5486400" cy="4114800"/>
-          </a:xfrm>
-        </p:spPr>
-        <p:txBody>
-          <a:bodyPr/>
-          <a:lstStyle>
-            <a:lvl1pPr marL="0" indent="0">
-              <a:buNone/>
-              <a:defRPr sz="3200"/>
-            </a:lvl1pPr>
-            <a:lvl2pPr marL="457200" indent="0">
-              <a:buNone/>
-              <a:defRPr sz="2800"/>
-            </a:lvl2pPr>
-            <a:lvl3pPr marL="914400" indent="0">
-              <a:buNone/>
-              <a:defRPr sz="2400"/>
-            </a:lvl3pPr>
-            <a:lvl4pPr marL="1371600" indent="0">
-              <a:buNone/>
-              <a:defRPr sz="2000"/>
-            </a:lvl4pPr>
-            <a:lvl5pPr marL="1828800" indent="0">
-              <a:buNone/>
-              <a:defRPr sz="2000"/>
-            </a:lvl5pPr>
-            <a:lvl6pPr marL="2286000" indent="0">
-              <a:buNone/>
-              <a:defRPr sz="2000"/>
-            </a:lvl6pPr>
-            <a:lvl7pPr marL="2743200" indent="0">
-              <a:buNone/>
-              <a:defRPr sz="2000"/>
-            </a:lvl7pPr>
-            <a:lvl8pPr marL="3200400" indent="0">
-              <a:buNone/>
-              <a:defRPr sz="2000"/>
-            </a:lvl8pPr>
-            <a:lvl9pPr marL="3657600" indent="0">
-              <a:buNone/>
-              <a:defRPr sz="2000"/>
-            </a:lvl9pPr>
-          </a:lstStyle>
-          <a:p>
-            <a:endParaRPr lang="en-US"/>
-          </a:p>
-        </p:txBody>
-      </p:sp>
-      <p:sp>
-        <p:nvSpPr>
-          <p:cNvPr id="4" name="Text Placeholder 3"/>
-          <p:cNvSpPr>
-            <a:spLocks noGrp="1"/>
-          </p:cNvSpPr>
-          <p:nvPr>
-            <p:ph type="body" sz="half" idx="2"/>
-          </p:nvPr>
-        </p:nvSpPr>
-        <p:spPr>
-          <a:xfrm>
-            <a:off x="1792288" y="5367338"/>
-            <a:ext cx="5486400" cy="804862"/>
-          </a:xfrm>
-        </p:spPr>
-        <p:txBody>
-          <a:bodyPr/>
-          <a:lstStyle>
-            <a:lvl1pPr marL="0" indent="0">
-              <a:buNone/>
-              <a:defRPr sz="1400"/>
-            </a:lvl1pPr>
-            <a:lvl2pPr marL="457200" indent="0">
-              <a:buNone/>
-              <a:defRPr sz="1200"/>
-            </a:lvl2pPr>
-            <a:lvl3pPr marL="914400" indent="0">
-              <a:buNone/>
-              <a:defRPr sz="1000"/>
-            </a:lvl3pPr>
-            <a:lvl4pPr marL="1371600" indent="0">
-              <a:buNone/>
-              <a:defRPr sz="900"/>
-            </a:lvl4pPr>
-            <a:lvl5pPr marL="1828800" indent="0">
-              <a:buNone/>
-              <a:defRPr sz="900"/>
-            </a:lvl5pPr>
-            <a:lvl6pPr marL="2286000" indent="0">
-              <a:buNone/>
-              <a:defRPr sz="900"/>
-            </a:lvl6pPr>
-            <a:lvl7pPr marL="2743200" indent="0">
-              <a:buNone/>
-              <a:defRPr sz="900"/>
-            </a:lvl7pPr>
-            <a:lvl8pPr marL="3200400" indent="0">
-              <a:buNone/>
-              <a:defRPr sz="900"/>
-            </a:lvl8pPr>
-            <a:lvl9pPr marL="3657600" indent="0">
-              <a:buNone/>
-              <a:defRPr sz="900"/>
-            </a:lvl9pPr>
-          </a:lstStyle>
-          <a:p>
-            <a:pPr lvl="0"/>
-            <a:r>
-              <a:rPr lang="en-US" smtClean="0"/>
-              <a:t>Click to edit Master text styles</a:t>
-            </a:r>
-          </a:p>
-        </p:txBody>
-      </p:sp>
-      <p:sp>
-        <p:nvSpPr>
-          <p:cNvPr id="5" name="Date Placeholder 4"/>
-          <p:cNvSpPr>
-            <a:spLocks noGrp="1"/>
-          </p:cNvSpPr>
-          <p:nvPr>
-            <p:ph type="dt" sz="half" idx="10"/>
-          </p:nvPr>
-        </p:nvSpPr>
-        <p:spPr/>
-        <p:txBody>
-          <a:bodyPr/>
-          <a:lstStyle/>
-          <a:p>
-            <a:fld id="{5BCAD085-E8A6-8845-BD4E-CB4CCA059FC4}" type="datetimeFigureOut">
-              <a:rPr lang="en-US" smtClean="0"/>
-              <a:t>1/27/13</a:t>
-            </a:fld>
-            <a:endParaRPr lang="en-US"/>
-          </a:p>
-        </p:txBody>
-      </p:sp>
-      <p:sp>
-        <p:nvSpPr>
-          <p:cNvPr id="6" name="Footer Placeholder 5"/>
-          <p:cNvSpPr>
-            <a:spLocks noGrp="1"/>
-          </p:cNvSpPr>
-          <p:nvPr>
-            <p:ph type="ftr" sz="quarter" idx="11"/>
-          </p:nvPr>
-        </p:nvSpPr>
-        <p:spPr/>
-        <p:txBody>
-          <a:bodyPr/>
-          <a:lstStyle/>
-          <a:p>
-            <a:endParaRPr lang="en-US"/>
-          </a:p>
-        </p:txBody>
-      </p:sp>
-      <p:sp>
-        <p:nvSpPr>
-          <p:cNvPr id="7" name="Slide Number Placeholder 6"/>
-          <p:cNvSpPr>
-            <a:spLocks noGrp="1"/>
-          </p:cNvSpPr>
-          <p:nvPr>
-            <p:ph type="sldNum" sz="quarter" idx="12"/>
-          </p:nvPr>
-        </p:nvSpPr>
-        <p:spPr/>
-        <p:txBody>
-          <a:bodyPr/>
-          <a:lstStyle/>
-          <a:p>
-            <a:fld id="{C1FF6DA9-008F-8B48-92A6-B652298478BF}" type="slidenum">
-              <a:rPr lang="en-US" smtClean="0"/>
-              <a:t>‹#›</a:t>
-            </a:fld>
-            <a:endParaRPr lang="en-US"/>
-          </a:p>
-        </p:txBody>
-      </p:sp>
-    </p:spTree>
-    <p:extLst>
-      <p:ext uri="{BB962C8B-B14F-4D97-AF65-F5344CB8AC3E}">
-        <p14:creationId xmlns:p14="http://schemas.microsoft.com/office/powerpoint/2010/main" val="3889236939"/>
+        <p14:creationId xmlns:p14="http://schemas.microsoft.com/office/powerpoint/2010/main" val="4007250429"/>
       </p:ext>
     </p:extLst>
   </p:cSld>
@@ -2599,9 +2186,81 @@
           <a:chExt cx="0" cy="0"/>
         </a:xfrm>
       </p:grpSpPr>
+      <p:pic>
+        <p:nvPicPr>
+          <p:cNvPr id="10" name="Picture 9" descr="A picture containing man, snow, standing&#10;&#10;Description automatically generated">
+            <a:extLst>
+              <a:ext uri="{FF2B5EF4-FFF2-40B4-BE49-F238E27FC236}">
+                <a16:creationId xmlns:a16="http://schemas.microsoft.com/office/drawing/2014/main" id="{1682BFD2-2DE1-46D1-BCC4-C3479DB007A9}"/>
+              </a:ext>
+            </a:extLst>
+          </p:cNvPr>
+          <p:cNvPicPr/>
+          <p:nvPr userDrawn="1"/>
+        </p:nvPicPr>
+        <p:blipFill rotWithShape="1">
+          <a:blip r:embed="rId6" cstate="print">
+            <a:extLst>
+              <a:ext uri="{28A0092B-C50C-407E-A947-70E740481C1C}">
+                <a14:useLocalDpi xmlns:a14="http://schemas.microsoft.com/office/drawing/2010/main" val="0"/>
+              </a:ext>
+            </a:extLst>
+          </a:blip>
+          <a:srcRect l="-1"/>
+          <a:stretch/>
+        </p:blipFill>
+        <p:spPr>
+          <a:xfrm rot="10800000">
+            <a:off x="628650" y="5547302"/>
+            <a:ext cx="8515350" cy="1310697"/>
+          </a:xfrm>
+          <a:prstGeom prst="rect">
+            <a:avLst/>
+          </a:prstGeom>
+        </p:spPr>
+      </p:pic>
+      <p:pic>
+        <p:nvPicPr>
+          <p:cNvPr id="8" name="Picture 7" descr="A picture containing man, snow, standing&#10;&#10;Description automatically generated">
+            <a:extLst>
+              <a:ext uri="{FF2B5EF4-FFF2-40B4-BE49-F238E27FC236}">
+                <a16:creationId xmlns:a16="http://schemas.microsoft.com/office/drawing/2014/main" id="{E040576E-BF26-4C17-B882-3096DEF8CE1C}"/>
+              </a:ext>
+            </a:extLst>
+          </p:cNvPr>
+          <p:cNvPicPr/>
+          <p:nvPr userDrawn="1"/>
+        </p:nvPicPr>
+        <p:blipFill rotWithShape="1">
+          <a:blip r:embed="rId7" cstate="print">
+            <a:extLst>
+              <a:ext uri="{28A0092B-C50C-407E-A947-70E740481C1C}">
+                <a14:useLocalDpi xmlns:a14="http://schemas.microsoft.com/office/drawing/2010/main" val="0"/>
+              </a:ext>
+            </a:extLst>
+          </a:blip>
+          <a:srcRect l="-130"/>
+          <a:stretch/>
+        </p:blipFill>
+        <p:spPr>
+          <a:xfrm>
+            <a:off x="-25400" y="0"/>
+            <a:ext cx="9169400" cy="2754743"/>
+          </a:xfrm>
+          <a:prstGeom prst="rect">
+            <a:avLst/>
+          </a:prstGeom>
+        </p:spPr>
+      </p:pic>
       <p:sp>
         <p:nvSpPr>
-          <p:cNvPr id="2" name="Title Placeholder 1"/>
+          <p:cNvPr id="2" name="Title Placeholder 1">
+            <a:extLst>
+              <a:ext uri="{FF2B5EF4-FFF2-40B4-BE49-F238E27FC236}">
+                <a16:creationId xmlns:a16="http://schemas.microsoft.com/office/drawing/2014/main" id="{DCB77CE2-F214-3941-9A5D-300C855B23C1}"/>
+              </a:ext>
+            </a:extLst>
+          </p:cNvPr>
           <p:cNvSpPr>
             <a:spLocks noGrp="1"/>
           </p:cNvSpPr>
@@ -2611,8 +2270,8 @@
         </p:nvSpPr>
         <p:spPr>
           <a:xfrm>
-            <a:off x="457200" y="274638"/>
-            <a:ext cx="8229600" cy="1143000"/>
+            <a:off x="628650" y="365126"/>
+            <a:ext cx="7886700" cy="1325563"/>
           </a:xfrm>
           <a:prstGeom prst="rect">
             <a:avLst/>
@@ -2620,21 +2279,26 @@
         </p:spPr>
         <p:txBody>
           <a:bodyPr vert="horz" lIns="91440" tIns="45720" rIns="91440" bIns="45720" rtlCol="0" anchor="ctr">
-            <a:normAutofit/>
+            <a:noAutofit/>
           </a:bodyPr>
           <a:lstStyle/>
           <a:p>
             <a:r>
-              <a:rPr lang="en-US" smtClean="0"/>
-              <a:t>Click to edit Master title style</a:t>
-            </a:r>
-            <a:endParaRPr lang="en-US"/>
+              <a:rPr lang="en-US" dirty="0"/>
+              <a:t>Title</a:t>
+            </a:r>
           </a:p>
         </p:txBody>
       </p:sp>
       <p:sp>
         <p:nvSpPr>
-          <p:cNvPr id="3" name="Text Placeholder 2"/>
+          <p:cNvPr id="3" name="Text Placeholder 2">
+            <a:extLst>
+              <a:ext uri="{FF2B5EF4-FFF2-40B4-BE49-F238E27FC236}">
+                <a16:creationId xmlns:a16="http://schemas.microsoft.com/office/drawing/2014/main" id="{CF618F81-30CB-394A-A37D-3131555237FC}"/>
+              </a:ext>
+            </a:extLst>
+          </p:cNvPr>
           <p:cNvSpPr>
             <a:spLocks noGrp="1"/>
           </p:cNvSpPr>
@@ -2644,8 +2308,8 @@
         </p:nvSpPr>
         <p:spPr>
           <a:xfrm>
-            <a:off x="457200" y="1600200"/>
-            <a:ext cx="8229600" cy="4525963"/>
+            <a:off x="628650" y="1825625"/>
+            <a:ext cx="7886700" cy="4351338"/>
           </a:xfrm>
           <a:prstGeom prst="rect">
             <a:avLst/>
@@ -2653,50 +2317,27 @@
         </p:spPr>
         <p:txBody>
           <a:bodyPr vert="horz" lIns="91440" tIns="45720" rIns="91440" bIns="45720" rtlCol="0">
-            <a:normAutofit/>
+            <a:noAutofit/>
           </a:bodyPr>
           <a:lstStyle/>
           <a:p>
             <a:pPr lvl="0"/>
             <a:r>
-              <a:rPr lang="en-US" smtClean="0"/>
-              <a:t>Click to edit Master text styles</a:t>
-            </a:r>
-          </a:p>
-          <a:p>
-            <a:pPr lvl="1"/>
-            <a:r>
-              <a:rPr lang="en-US" smtClean="0"/>
-              <a:t>Second level</a:t>
-            </a:r>
-          </a:p>
-          <a:p>
-            <a:pPr lvl="2"/>
-            <a:r>
-              <a:rPr lang="en-US" smtClean="0"/>
-              <a:t>Third level</a:t>
-            </a:r>
-          </a:p>
-          <a:p>
-            <a:pPr lvl="3"/>
-            <a:r>
-              <a:rPr lang="en-US" smtClean="0"/>
-              <a:t>Fourth level</a:t>
-            </a:r>
-          </a:p>
-          <a:p>
-            <a:pPr lvl="4"/>
-            <a:r>
-              <a:rPr lang="en-US" smtClean="0"/>
-              <a:t>Fifth level</a:t>
-            </a:r>
-            <a:endParaRPr lang="en-US"/>
+              <a:rPr lang="en-US" dirty="0"/>
+              <a:t>Click to add text</a:t>
+            </a:r>
           </a:p>
         </p:txBody>
       </p:sp>
       <p:sp>
         <p:nvSpPr>
-          <p:cNvPr id="4" name="Date Placeholder 3"/>
+          <p:cNvPr id="4" name="Date Placeholder 3">
+            <a:extLst>
+              <a:ext uri="{FF2B5EF4-FFF2-40B4-BE49-F238E27FC236}">
+                <a16:creationId xmlns:a16="http://schemas.microsoft.com/office/drawing/2014/main" id="{C5EF2629-9BBE-8846-A0BC-DE7BCDC7531B}"/>
+              </a:ext>
+            </a:extLst>
+          </p:cNvPr>
           <p:cNvSpPr>
             <a:spLocks noGrp="1"/>
           </p:cNvSpPr>
@@ -2706,8 +2347,8 @@
         </p:nvSpPr>
         <p:spPr>
           <a:xfrm>
-            <a:off x="457200" y="6356350"/>
-            <a:ext cx="2133600" cy="365125"/>
+            <a:off x="628650" y="6356351"/>
+            <a:ext cx="2057400" cy="365125"/>
           </a:xfrm>
           <a:prstGeom prst="rect">
             <a:avLst/>
@@ -2716,28 +2357,33 @@
         <p:txBody>
           <a:bodyPr vert="horz" lIns="91440" tIns="45720" rIns="91440" bIns="45720" rtlCol="0" anchor="ctr"/>
           <a:lstStyle>
-            <a:lvl1pPr algn="l">
-              <a:defRPr sz="1200">
-                <a:solidFill>
-                  <a:schemeClr val="tx1">
-                    <a:tint val="75000"/>
-                  </a:schemeClr>
+            <a:lvl1pPr algn="ctr">
+              <a:defRPr sz="900">
+                <a:solidFill>
+                  <a:schemeClr val="accent1"/>
                 </a:solidFill>
               </a:defRPr>
             </a:lvl1pPr>
           </a:lstStyle>
           <a:p>
-            <a:fld id="{5BCAD085-E8A6-8845-BD4E-CB4CCA059FC4}" type="datetimeFigureOut">
+            <a:fld id="{3DF77599-03F9-E543-8172-8365D59F4986}" type="datetimeFigureOut">
               <a:rPr lang="en-US" smtClean="0"/>
-              <a:t>1/27/13</a:t>
+              <a:pPr/>
+              <a:t>6/4/2025</a:t>
             </a:fld>
-            <a:endParaRPr lang="en-US"/>
+            <a:endParaRPr lang="en-US" dirty="0"/>
           </a:p>
         </p:txBody>
       </p:sp>
       <p:sp>
         <p:nvSpPr>
-          <p:cNvPr id="5" name="Footer Placeholder 4"/>
+          <p:cNvPr id="5" name="Footer Placeholder 4">
+            <a:extLst>
+              <a:ext uri="{FF2B5EF4-FFF2-40B4-BE49-F238E27FC236}">
+                <a16:creationId xmlns:a16="http://schemas.microsoft.com/office/drawing/2014/main" id="{6755C7B9-80B3-F54C-ABD0-B84CE8954872}"/>
+              </a:ext>
+            </a:extLst>
+          </p:cNvPr>
           <p:cNvSpPr>
             <a:spLocks noGrp="1"/>
           </p:cNvSpPr>
@@ -2747,8 +2393,8 @@
         </p:nvSpPr>
         <p:spPr>
           <a:xfrm>
-            <a:off x="3124200" y="6356350"/>
-            <a:ext cx="2895600" cy="365125"/>
+            <a:off x="3028950" y="6356351"/>
+            <a:ext cx="3086100" cy="365125"/>
           </a:xfrm>
           <a:prstGeom prst="rect">
             <a:avLst/>
@@ -2758,23 +2404,27 @@
           <a:bodyPr vert="horz" lIns="91440" tIns="45720" rIns="91440" bIns="45720" rtlCol="0" anchor="ctr"/>
           <a:lstStyle>
             <a:lvl1pPr algn="ctr">
-              <a:defRPr sz="1200">
-                <a:solidFill>
-                  <a:schemeClr val="tx1">
-                    <a:tint val="75000"/>
-                  </a:schemeClr>
+              <a:defRPr sz="900">
+                <a:solidFill>
+                  <a:schemeClr val="accent1"/>
                 </a:solidFill>
               </a:defRPr>
             </a:lvl1pPr>
           </a:lstStyle>
           <a:p>
-            <a:endParaRPr lang="en-US"/>
+            <a:endParaRPr lang="en-US" dirty="0"/>
           </a:p>
         </p:txBody>
       </p:sp>
       <p:sp>
         <p:nvSpPr>
-          <p:cNvPr id="6" name="Slide Number Placeholder 5"/>
+          <p:cNvPr id="6" name="Slide Number Placeholder 5">
+            <a:extLst>
+              <a:ext uri="{FF2B5EF4-FFF2-40B4-BE49-F238E27FC236}">
+                <a16:creationId xmlns:a16="http://schemas.microsoft.com/office/drawing/2014/main" id="{CEA8FB6E-9C6C-D444-B3F4-4D447291E8A5}"/>
+              </a:ext>
+            </a:extLst>
+          </p:cNvPr>
           <p:cNvSpPr>
             <a:spLocks noGrp="1"/>
           </p:cNvSpPr>
@@ -2784,8 +2434,8 @@
         </p:nvSpPr>
         <p:spPr>
           <a:xfrm>
-            <a:off x="6553200" y="6356350"/>
-            <a:ext cx="2133600" cy="365125"/>
+            <a:off x="6457950" y="6356351"/>
+            <a:ext cx="2057400" cy="365125"/>
           </a:xfrm>
           <a:prstGeom prst="rect">
             <a:avLst/>
@@ -2794,71 +2444,125 @@
         <p:txBody>
           <a:bodyPr vert="horz" lIns="91440" tIns="45720" rIns="91440" bIns="45720" rtlCol="0" anchor="ctr"/>
           <a:lstStyle>
-            <a:lvl1pPr algn="r">
-              <a:defRPr sz="1200">
-                <a:solidFill>
-                  <a:schemeClr val="tx1">
-                    <a:tint val="75000"/>
-                  </a:schemeClr>
+            <a:lvl1pPr algn="ctr">
+              <a:defRPr sz="900">
+                <a:solidFill>
+                  <a:schemeClr val="accent1"/>
                 </a:solidFill>
               </a:defRPr>
             </a:lvl1pPr>
           </a:lstStyle>
           <a:p>
-            <a:fld id="{C1FF6DA9-008F-8B48-92A6-B652298478BF}" type="slidenum">
+            <a:fld id="{9607A8EA-B714-0743-99B8-C9D6EFC8C297}" type="slidenum">
               <a:rPr lang="en-US" smtClean="0"/>
+              <a:pPr/>
               <a:t>‹#›</a:t>
             </a:fld>
-            <a:endParaRPr lang="en-US"/>
+            <a:endParaRPr lang="en-US" dirty="0"/>
           </a:p>
         </p:txBody>
       </p:sp>
     </p:spTree>
     <p:extLst>
       <p:ext uri="{BB962C8B-B14F-4D97-AF65-F5344CB8AC3E}">
-        <p14:creationId xmlns:p14="http://schemas.microsoft.com/office/powerpoint/2010/main" val="2209977519"/>
+        <p14:creationId xmlns:p14="http://schemas.microsoft.com/office/powerpoint/2010/main" val="537333585"/>
       </p:ext>
     </p:extLst>
   </p:cSld>
   <p:clrMap bg1="lt1" tx1="dk1" bg2="lt2" tx2="dk2" accent1="accent1" accent2="accent2" accent3="accent3" accent4="accent4" accent5="accent5" accent6="accent6" hlink="hlink" folHlink="folHlink"/>
   <p:sldLayoutIdLst>
-    <p:sldLayoutId id="2147483649" r:id="rId1"/>
-    <p:sldLayoutId id="2147483650" r:id="rId2"/>
-    <p:sldLayoutId id="2147483651" r:id="rId3"/>
-    <p:sldLayoutId id="2147483652" r:id="rId4"/>
-    <p:sldLayoutId id="2147483653" r:id="rId5"/>
-    <p:sldLayoutId id="2147483654" r:id="rId6"/>
-    <p:sldLayoutId id="2147483655" r:id="rId7"/>
-    <p:sldLayoutId id="2147483656" r:id="rId8"/>
-    <p:sldLayoutId id="2147483657" r:id="rId9"/>
-    <p:sldLayoutId id="2147483658" r:id="rId10"/>
-    <p:sldLayoutId id="2147483659" r:id="rId11"/>
+    <p:sldLayoutId id="2147483690" r:id="rId1"/>
+    <p:sldLayoutId id="2147483691" r:id="rId2"/>
+    <p:sldLayoutId id="2147483686" r:id="rId3"/>
+    <p:sldLayoutId id="2147483689" r:id="rId4"/>
   </p:sldLayoutIdLst>
   <p:txStyles>
     <p:titleStyle>
-      <a:lvl1pPr algn="ctr" defTabSz="457200" rtl="0" eaLnBrk="1" latinLnBrk="0" hangingPunct="1">
+      <a:lvl1pPr algn="ctr" defTabSz="685800" rtl="0" eaLnBrk="1" latinLnBrk="0" hangingPunct="1">
+        <a:lnSpc>
+          <a:spcPct val="90000"/>
+        </a:lnSpc>
         <a:spcBef>
           <a:spcPct val="0"/>
         </a:spcBef>
         <a:buNone/>
-        <a:defRPr sz="4400" kern="1200">
+        <a:defRPr sz="6000" kern="1200" cap="all" spc="0" baseline="0">
           <a:solidFill>
-            <a:schemeClr val="tx1"/>
+            <a:schemeClr val="tx2"/>
           </a:solidFill>
           <a:latin typeface="+mj-lt"/>
           <a:ea typeface="+mj-ea"/>
           <a:cs typeface="+mj-cs"/>
         </a:defRPr>
       </a:lvl1pPr>
+      <a:lvl2pPr eaLnBrk="1" hangingPunct="1">
+        <a:defRPr>
+          <a:solidFill>
+            <a:schemeClr val="tx2"/>
+          </a:solidFill>
+        </a:defRPr>
+      </a:lvl2pPr>
+      <a:lvl3pPr eaLnBrk="1" hangingPunct="1">
+        <a:defRPr>
+          <a:solidFill>
+            <a:schemeClr val="tx2"/>
+          </a:solidFill>
+        </a:defRPr>
+      </a:lvl3pPr>
+      <a:lvl4pPr eaLnBrk="1" hangingPunct="1">
+        <a:defRPr>
+          <a:solidFill>
+            <a:schemeClr val="tx2"/>
+          </a:solidFill>
+        </a:defRPr>
+      </a:lvl4pPr>
+      <a:lvl5pPr eaLnBrk="1" hangingPunct="1">
+        <a:defRPr>
+          <a:solidFill>
+            <a:schemeClr val="tx2"/>
+          </a:solidFill>
+        </a:defRPr>
+      </a:lvl5pPr>
+      <a:lvl6pPr eaLnBrk="1" hangingPunct="1">
+        <a:defRPr>
+          <a:solidFill>
+            <a:schemeClr val="tx2"/>
+          </a:solidFill>
+        </a:defRPr>
+      </a:lvl6pPr>
+      <a:lvl7pPr eaLnBrk="1" hangingPunct="1">
+        <a:defRPr>
+          <a:solidFill>
+            <a:schemeClr val="tx2"/>
+          </a:solidFill>
+        </a:defRPr>
+      </a:lvl7pPr>
+      <a:lvl8pPr eaLnBrk="1" hangingPunct="1">
+        <a:defRPr>
+          <a:solidFill>
+            <a:schemeClr val="tx2"/>
+          </a:solidFill>
+        </a:defRPr>
+      </a:lvl8pPr>
+      <a:lvl9pPr eaLnBrk="1" hangingPunct="1">
+        <a:defRPr>
+          <a:solidFill>
+            <a:schemeClr val="tx2"/>
+          </a:solidFill>
+        </a:defRPr>
+      </a:lvl9pPr>
     </p:titleStyle>
     <p:bodyStyle>
-      <a:lvl1pPr marL="342900" indent="-342900" algn="l" defTabSz="457200" rtl="0" eaLnBrk="1" latinLnBrk="0" hangingPunct="1">
+      <a:lvl1pPr marL="0" indent="0" algn="ctr" defTabSz="685800" rtl="0" eaLnBrk="1" latinLnBrk="0" hangingPunct="1">
+        <a:lnSpc>
+          <a:spcPct val="90000"/>
+        </a:lnSpc>
         <a:spcBef>
-          <a:spcPct val="20000"/>
+          <a:spcPts val="750"/>
         </a:spcBef>
-        <a:buFont typeface="Arial"/>
-        <a:buChar char="•"/>
-        <a:defRPr sz="3200" kern="1200">
+        <a:buFont typeface="Arial" panose="020B0604020202020204" pitchFamily="34" charset="0"/>
+        <a:buNone/>
+        <a:defRPr sz="2100" kern="1200">
           <a:solidFill>
             <a:schemeClr val="tx1"/>
           </a:solidFill>
@@ -2867,73 +2571,88 @@
           <a:cs typeface="+mn-cs"/>
         </a:defRPr>
       </a:lvl1pPr>
-      <a:lvl2pPr marL="742950" indent="-285750" algn="l" defTabSz="457200" rtl="0" eaLnBrk="1" latinLnBrk="0" hangingPunct="1">
+      <a:lvl2pPr marL="514350" indent="-171450" algn="l" defTabSz="685800" rtl="0" eaLnBrk="1" latinLnBrk="0" hangingPunct="1">
+        <a:lnSpc>
+          <a:spcPct val="90000"/>
+        </a:lnSpc>
         <a:spcBef>
-          <a:spcPct val="20000"/>
+          <a:spcPts val="375"/>
         </a:spcBef>
-        <a:buFont typeface="Arial"/>
-        <a:buChar char="–"/>
-        <a:defRPr sz="2800" kern="1200">
+        <a:buFont typeface="Arial" panose="020B0604020202020204" pitchFamily="34" charset="0"/>
+        <a:buChar char="•"/>
+        <a:defRPr sz="1800" kern="1200">
           <a:solidFill>
-            <a:schemeClr val="tx1"/>
+            <a:schemeClr val="accent1"/>
           </a:solidFill>
           <a:latin typeface="+mn-lt"/>
           <a:ea typeface="+mn-ea"/>
           <a:cs typeface="+mn-cs"/>
         </a:defRPr>
       </a:lvl2pPr>
-      <a:lvl3pPr marL="1143000" indent="-228600" algn="l" defTabSz="457200" rtl="0" eaLnBrk="1" latinLnBrk="0" hangingPunct="1">
+      <a:lvl3pPr marL="857250" indent="-171450" algn="l" defTabSz="685800" rtl="0" eaLnBrk="1" latinLnBrk="0" hangingPunct="1">
+        <a:lnSpc>
+          <a:spcPct val="90000"/>
+        </a:lnSpc>
         <a:spcBef>
-          <a:spcPct val="20000"/>
+          <a:spcPts val="375"/>
         </a:spcBef>
-        <a:buFont typeface="Arial"/>
+        <a:buFont typeface="Arial" panose="020B0604020202020204" pitchFamily="34" charset="0"/>
         <a:buChar char="•"/>
-        <a:defRPr sz="2400" kern="1200">
+        <a:defRPr sz="1500" kern="1200">
           <a:solidFill>
-            <a:schemeClr val="tx1"/>
+            <a:schemeClr val="accent1"/>
           </a:solidFill>
           <a:latin typeface="+mn-lt"/>
           <a:ea typeface="+mn-ea"/>
           <a:cs typeface="+mn-cs"/>
         </a:defRPr>
       </a:lvl3pPr>
-      <a:lvl4pPr marL="1600200" indent="-228600" algn="l" defTabSz="457200" rtl="0" eaLnBrk="1" latinLnBrk="0" hangingPunct="1">
+      <a:lvl4pPr marL="1200150" indent="-171450" algn="l" defTabSz="685800" rtl="0" eaLnBrk="1" latinLnBrk="0" hangingPunct="1">
+        <a:lnSpc>
+          <a:spcPct val="90000"/>
+        </a:lnSpc>
         <a:spcBef>
-          <a:spcPct val="20000"/>
+          <a:spcPts val="375"/>
         </a:spcBef>
-        <a:buFont typeface="Arial"/>
-        <a:buChar char="–"/>
-        <a:defRPr sz="2000" kern="1200">
+        <a:buFont typeface="Arial" panose="020B0604020202020204" pitchFamily="34" charset="0"/>
+        <a:buChar char="•"/>
+        <a:defRPr sz="1350" kern="1200">
           <a:solidFill>
-            <a:schemeClr val="tx1"/>
+            <a:schemeClr val="accent1"/>
           </a:solidFill>
           <a:latin typeface="+mn-lt"/>
           <a:ea typeface="+mn-ea"/>
           <a:cs typeface="+mn-cs"/>
         </a:defRPr>
       </a:lvl4pPr>
-      <a:lvl5pPr marL="2057400" indent="-228600" algn="l" defTabSz="457200" rtl="0" eaLnBrk="1" latinLnBrk="0" hangingPunct="1">
+      <a:lvl5pPr marL="1543050" indent="-171450" algn="l" defTabSz="685800" rtl="0" eaLnBrk="1" latinLnBrk="0" hangingPunct="1">
+        <a:lnSpc>
+          <a:spcPct val="90000"/>
+        </a:lnSpc>
         <a:spcBef>
-          <a:spcPct val="20000"/>
+          <a:spcPts val="375"/>
         </a:spcBef>
-        <a:buFont typeface="Arial"/>
-        <a:buChar char="»"/>
-        <a:defRPr sz="2000" kern="1200">
+        <a:buFont typeface="Arial" panose="020B0604020202020204" pitchFamily="34" charset="0"/>
+        <a:buChar char="•"/>
+        <a:defRPr sz="1350" kern="1200">
           <a:solidFill>
-            <a:schemeClr val="tx1"/>
+            <a:schemeClr val="accent1"/>
           </a:solidFill>
           <a:latin typeface="+mn-lt"/>
           <a:ea typeface="+mn-ea"/>
           <a:cs typeface="+mn-cs"/>
         </a:defRPr>
       </a:lvl5pPr>
-      <a:lvl6pPr marL="2514600" indent="-228600" algn="l" defTabSz="457200" rtl="0" eaLnBrk="1" latinLnBrk="0" hangingPunct="1">
+      <a:lvl6pPr marL="1885950" indent="-171450" algn="l" defTabSz="685800" rtl="0" eaLnBrk="1" latinLnBrk="0" hangingPunct="1">
+        <a:lnSpc>
+          <a:spcPct val="90000"/>
+        </a:lnSpc>
         <a:spcBef>
-          <a:spcPct val="20000"/>
+          <a:spcPts val="375"/>
         </a:spcBef>
-        <a:buFont typeface="Arial"/>
+        <a:buFont typeface="Arial" panose="020B0604020202020204" pitchFamily="34" charset="0"/>
         <a:buChar char="•"/>
-        <a:defRPr sz="2000" kern="1200">
+        <a:defRPr sz="1350" kern="1200">
           <a:solidFill>
             <a:schemeClr val="tx1"/>
           </a:solidFill>
@@ -2942,13 +2661,16 @@
           <a:cs typeface="+mn-cs"/>
         </a:defRPr>
       </a:lvl6pPr>
-      <a:lvl7pPr marL="2971800" indent="-228600" algn="l" defTabSz="457200" rtl="0" eaLnBrk="1" latinLnBrk="0" hangingPunct="1">
+      <a:lvl7pPr marL="2228850" indent="-171450" algn="l" defTabSz="685800" rtl="0" eaLnBrk="1" latinLnBrk="0" hangingPunct="1">
+        <a:lnSpc>
+          <a:spcPct val="90000"/>
+        </a:lnSpc>
         <a:spcBef>
-          <a:spcPct val="20000"/>
+          <a:spcPts val="375"/>
         </a:spcBef>
-        <a:buFont typeface="Arial"/>
+        <a:buFont typeface="Arial" panose="020B0604020202020204" pitchFamily="34" charset="0"/>
         <a:buChar char="•"/>
-        <a:defRPr sz="2000" kern="1200">
+        <a:defRPr sz="1350" kern="1200">
           <a:solidFill>
             <a:schemeClr val="tx1"/>
           </a:solidFill>
@@ -2957,13 +2679,16 @@
           <a:cs typeface="+mn-cs"/>
         </a:defRPr>
       </a:lvl7pPr>
-      <a:lvl8pPr marL="3429000" indent="-228600" algn="l" defTabSz="457200" rtl="0" eaLnBrk="1" latinLnBrk="0" hangingPunct="1">
+      <a:lvl8pPr marL="2571750" indent="-171450" algn="l" defTabSz="685800" rtl="0" eaLnBrk="1" latinLnBrk="0" hangingPunct="1">
+        <a:lnSpc>
+          <a:spcPct val="90000"/>
+        </a:lnSpc>
         <a:spcBef>
-          <a:spcPct val="20000"/>
+          <a:spcPts val="375"/>
         </a:spcBef>
-        <a:buFont typeface="Arial"/>
+        <a:buFont typeface="Arial" panose="020B0604020202020204" pitchFamily="34" charset="0"/>
         <a:buChar char="•"/>
-        <a:defRPr sz="2000" kern="1200">
+        <a:defRPr sz="1350" kern="1200">
           <a:solidFill>
             <a:schemeClr val="tx1"/>
           </a:solidFill>
@@ -2972,13 +2697,16 @@
           <a:cs typeface="+mn-cs"/>
         </a:defRPr>
       </a:lvl8pPr>
-      <a:lvl9pPr marL="3886200" indent="-228600" algn="l" defTabSz="457200" rtl="0" eaLnBrk="1" latinLnBrk="0" hangingPunct="1">
+      <a:lvl9pPr marL="2914650" indent="-171450" algn="l" defTabSz="685800" rtl="0" eaLnBrk="1" latinLnBrk="0" hangingPunct="1">
+        <a:lnSpc>
+          <a:spcPct val="90000"/>
+        </a:lnSpc>
         <a:spcBef>
-          <a:spcPct val="20000"/>
+          <a:spcPts val="375"/>
         </a:spcBef>
-        <a:buFont typeface="Arial"/>
+        <a:buFont typeface="Arial" panose="020B0604020202020204" pitchFamily="34" charset="0"/>
         <a:buChar char="•"/>
-        <a:defRPr sz="2000" kern="1200">
+        <a:defRPr sz="1350" kern="1200">
           <a:solidFill>
             <a:schemeClr val="tx1"/>
           </a:solidFill>
@@ -2992,8 +2720,8 @@
       <a:defPPr>
         <a:defRPr lang="en-US"/>
       </a:defPPr>
-      <a:lvl1pPr marL="0" algn="l" defTabSz="457200" rtl="0" eaLnBrk="1" latinLnBrk="0" hangingPunct="1">
-        <a:defRPr sz="1800" kern="1200">
+      <a:lvl1pPr marL="0" algn="l" defTabSz="685800" rtl="0" eaLnBrk="1" latinLnBrk="0" hangingPunct="1">
+        <a:defRPr sz="1350" kern="1200">
           <a:solidFill>
             <a:schemeClr val="tx1"/>
           </a:solidFill>
@@ -3002,8 +2730,8 @@
           <a:cs typeface="+mn-cs"/>
         </a:defRPr>
       </a:lvl1pPr>
-      <a:lvl2pPr marL="457200" algn="l" defTabSz="457200" rtl="0" eaLnBrk="1" latinLnBrk="0" hangingPunct="1">
-        <a:defRPr sz="1800" kern="1200">
+      <a:lvl2pPr marL="342900" algn="l" defTabSz="685800" rtl="0" eaLnBrk="1" latinLnBrk="0" hangingPunct="1">
+        <a:defRPr sz="1350" kern="1200">
           <a:solidFill>
             <a:schemeClr val="tx1"/>
           </a:solidFill>
@@ -3012,8 +2740,8 @@
           <a:cs typeface="+mn-cs"/>
         </a:defRPr>
       </a:lvl2pPr>
-      <a:lvl3pPr marL="914400" algn="l" defTabSz="457200" rtl="0" eaLnBrk="1" latinLnBrk="0" hangingPunct="1">
-        <a:defRPr sz="1800" kern="1200">
+      <a:lvl3pPr marL="685800" algn="l" defTabSz="685800" rtl="0" eaLnBrk="1" latinLnBrk="0" hangingPunct="1">
+        <a:defRPr sz="1350" kern="1200">
           <a:solidFill>
             <a:schemeClr val="tx1"/>
           </a:solidFill>
@@ -3022,8 +2750,8 @@
           <a:cs typeface="+mn-cs"/>
         </a:defRPr>
       </a:lvl3pPr>
-      <a:lvl4pPr marL="1371600" algn="l" defTabSz="457200" rtl="0" eaLnBrk="1" latinLnBrk="0" hangingPunct="1">
-        <a:defRPr sz="1800" kern="1200">
+      <a:lvl4pPr marL="1028700" algn="l" defTabSz="685800" rtl="0" eaLnBrk="1" latinLnBrk="0" hangingPunct="1">
+        <a:defRPr sz="1350" kern="1200">
           <a:solidFill>
             <a:schemeClr val="tx1"/>
           </a:solidFill>
@@ -3032,8 +2760,8 @@
           <a:cs typeface="+mn-cs"/>
         </a:defRPr>
       </a:lvl4pPr>
-      <a:lvl5pPr marL="1828800" algn="l" defTabSz="457200" rtl="0" eaLnBrk="1" latinLnBrk="0" hangingPunct="1">
-        <a:defRPr sz="1800" kern="1200">
+      <a:lvl5pPr marL="1371600" algn="l" defTabSz="685800" rtl="0" eaLnBrk="1" latinLnBrk="0" hangingPunct="1">
+        <a:defRPr sz="1350" kern="1200">
           <a:solidFill>
             <a:schemeClr val="tx1"/>
           </a:solidFill>
@@ -3042,8 +2770,8 @@
           <a:cs typeface="+mn-cs"/>
         </a:defRPr>
       </a:lvl5pPr>
-      <a:lvl6pPr marL="2286000" algn="l" defTabSz="457200" rtl="0" eaLnBrk="1" latinLnBrk="0" hangingPunct="1">
-        <a:defRPr sz="1800" kern="1200">
+      <a:lvl6pPr marL="1714500" algn="l" defTabSz="685800" rtl="0" eaLnBrk="1" latinLnBrk="0" hangingPunct="1">
+        <a:defRPr sz="1350" kern="1200">
           <a:solidFill>
             <a:schemeClr val="tx1"/>
           </a:solidFill>
@@ -3052,8 +2780,8 @@
           <a:cs typeface="+mn-cs"/>
         </a:defRPr>
       </a:lvl6pPr>
-      <a:lvl7pPr marL="2743200" algn="l" defTabSz="457200" rtl="0" eaLnBrk="1" latinLnBrk="0" hangingPunct="1">
-        <a:defRPr sz="1800" kern="1200">
+      <a:lvl7pPr marL="2057400" algn="l" defTabSz="685800" rtl="0" eaLnBrk="1" latinLnBrk="0" hangingPunct="1">
+        <a:defRPr sz="1350" kern="1200">
           <a:solidFill>
             <a:schemeClr val="tx1"/>
           </a:solidFill>
@@ -3062,8 +2790,8 @@
           <a:cs typeface="+mn-cs"/>
         </a:defRPr>
       </a:lvl7pPr>
-      <a:lvl8pPr marL="3200400" algn="l" defTabSz="457200" rtl="0" eaLnBrk="1" latinLnBrk="0" hangingPunct="1">
-        <a:defRPr sz="1800" kern="1200">
+      <a:lvl8pPr marL="2400300" algn="l" defTabSz="685800" rtl="0" eaLnBrk="1" latinLnBrk="0" hangingPunct="1">
+        <a:defRPr sz="1350" kern="1200">
           <a:solidFill>
             <a:schemeClr val="tx1"/>
           </a:solidFill>
@@ -3072,8 +2800,8 @@
           <a:cs typeface="+mn-cs"/>
         </a:defRPr>
       </a:lvl8pPr>
-      <a:lvl9pPr marL="3657600" algn="l" defTabSz="457200" rtl="0" eaLnBrk="1" latinLnBrk="0" hangingPunct="1">
-        <a:defRPr sz="1800" kern="1200">
+      <a:lvl9pPr marL="2743200" algn="l" defTabSz="685800" rtl="0" eaLnBrk="1" latinLnBrk="0" hangingPunct="1">
+        <a:defRPr sz="1350" kern="1200">
           <a:solidFill>
             <a:schemeClr val="tx1"/>
           </a:solidFill>
@@ -3252,7 +2980,7 @@
                         <a:defRPr b="1" sz="1400"/>
                       </a:pPr>
                       <a:r>
-                        <a:t>Price</a:t>
+                        <a:t>Price (JPY)</a:t>
                       </a:r>
                     </a:p>
                   </a:txBody>
@@ -3359,7 +3087,7 @@
                         <a:defRPr sz="1200"/>
                       </a:pPr>
                       <a:r>
-                        <a:t>$450.00</a:t>
+                        <a:t>7,500</a:t>
                       </a:r>
                     </a:p>
                   </a:txBody>
@@ -3374,7 +3102,7 @@
                         <a:defRPr sz="1200"/>
                       </a:pPr>
                       <a:r>
-                        <a:t>Quad-core processor</a:t>
+                        <a:t>N/A</a:t>
                       </a:r>
                     </a:p>
                   </a:txBody>
@@ -3389,7 +3117,7 @@
                         <a:defRPr sz="1200"/>
                       </a:pPr>
                       <a:r>
-                        <a:t>4GB RAM (expandable)</a:t>
+                        <a:t>N/A</a:t>
                       </a:r>
                     </a:p>
                   </a:txBody>
@@ -3404,7 +3132,7 @@
                         <a:defRPr sz="1200"/>
                       </a:pPr>
                       <a:r>
-                        <a:t>16TB (4x4TB) RAID 6</a:t>
+                        <a:t>N/A</a:t>
                       </a:r>
                     </a:p>
                   </a:txBody>
@@ -3419,7 +3147,7 @@
                         <a:defRPr sz="1200"/>
                       </a:pPr>
                       <a:r>
-                        <a:t>Manufacturer hardware warranty</a:t>
+                        <a:t>仕様変更の可能性あり。返品不可。</a:t>
                       </a:r>
                     </a:p>
                   </a:txBody>
@@ -3434,7 +3162,7 @@
                         <a:defRPr sz="1200"/>
                       </a:pPr>
                       <a:r>
-                        <a:t>30 days installation &amp; configuration service guarantee</a:t>
+                        <a:t>注文確定後3営業日以内発送、追跡可能</a:t>
                       </a:r>
                     </a:p>
                   </a:txBody>
@@ -3466,7 +3194,7 @@
                         <a:defRPr sz="1200"/>
                       </a:pPr>
                       <a:r>
-                        <a:t>$450.00</a:t>
+                        <a:t>7,500</a:t>
                       </a:r>
                     </a:p>
                   </a:txBody>
@@ -3481,7 +3209,7 @@
                         <a:defRPr sz="1200"/>
                       </a:pPr>
                       <a:r>
-                        <a:t>Quad-core processor</a:t>
+                        <a:t>N/A</a:t>
                       </a:r>
                     </a:p>
                   </a:txBody>
@@ -3496,7 +3224,7 @@
                         <a:defRPr sz="1200"/>
                       </a:pPr>
                       <a:r>
-                        <a:t>4GB RAM (expandable)</a:t>
+                        <a:t>N/A</a:t>
                       </a:r>
                     </a:p>
                   </a:txBody>
@@ -3511,7 +3239,7 @@
                         <a:defRPr sz="1200"/>
                       </a:pPr>
                       <a:r>
-                        <a:t>16TB (4x4TB) RAID 6</a:t>
+                        <a:t>N/A</a:t>
                       </a:r>
                     </a:p>
                   </a:txBody>
@@ -3526,7 +3254,7 @@
                         <a:defRPr sz="1200"/>
                       </a:pPr>
                       <a:r>
-                        <a:t>Manufacturer hardware warranty</a:t>
+                        <a:t>仕様変更の可能性あり。返品不可。</a:t>
                       </a:r>
                     </a:p>
                   </a:txBody>
@@ -3541,7 +3269,7 @@
                         <a:defRPr sz="1200"/>
                       </a:pPr>
                       <a:r>
-                        <a:t>30 days installation &amp; configuration service guarantee</a:t>
+                        <a:t>注文確定後3営業日以内発送、追跡可能</a:t>
                       </a:r>
                     </a:p>
                   </a:txBody>
@@ -3573,7 +3301,7 @@
                         <a:defRPr sz="1200"/>
                       </a:pPr>
                       <a:r>
-                        <a:t>$450.00</a:t>
+                        <a:t>7,500</a:t>
                       </a:r>
                     </a:p>
                   </a:txBody>
@@ -3588,7 +3316,7 @@
                         <a:defRPr sz="1200"/>
                       </a:pPr>
                       <a:r>
-                        <a:t>Quad-core processor</a:t>
+                        <a:t>N/A</a:t>
                       </a:r>
                     </a:p>
                   </a:txBody>
@@ -3603,7 +3331,7 @@
                         <a:defRPr sz="1200"/>
                       </a:pPr>
                       <a:r>
-                        <a:t>4GB RAM (expandable)</a:t>
+                        <a:t>N/A</a:t>
                       </a:r>
                     </a:p>
                   </a:txBody>
@@ -3618,7 +3346,7 @@
                         <a:defRPr sz="1200"/>
                       </a:pPr>
                       <a:r>
-                        <a:t>16TB (4x4TB) RAID 6</a:t>
+                        <a:t>N/A</a:t>
                       </a:r>
                     </a:p>
                   </a:txBody>
@@ -3633,7 +3361,7 @@
                         <a:defRPr sz="1200"/>
                       </a:pPr>
                       <a:r>
-                        <a:t>Manufacturer hardware warranty</a:t>
+                        <a:t>仕様変更の可能性あり。返品不可。</a:t>
                       </a:r>
                     </a:p>
                   </a:txBody>
@@ -3648,7 +3376,7 @@
                         <a:defRPr sz="1200"/>
                       </a:pPr>
                       <a:r>
-                        <a:t>30 days installation &amp; configuration service guarantee</a:t>
+                        <a:t>注文確定後3営業日以内発送、追跡可能</a:t>
                       </a:r>
                     </a:p>
                   </a:txBody>
@@ -3790,7 +3518,7 @@
               </a:defRPr>
             </a:pPr>
             <a:r>
-              <a:t>• Otsuka Corporation requires a reliable NAS server solution to support video backup operations.</a:t>
+              <a:t>• 顧客はゲーミングマウスの購入を希望しています。</a:t>
             </a:r>
           </a:p>
           <a:p>
@@ -3806,7 +3534,7 @@
               </a:defRPr>
             </a:pPr>
             <a:r>
-              <a:t>• Supports an IT environment with 200 employees requiring efficient data storage and protection.</a:t>
+              <a:t>• ゲームプレイの快適さと性能向上を重視しています。</a:t>
             </a:r>
           </a:p>
           <a:p>
@@ -3822,7 +3550,7 @@
               </a:defRPr>
             </a:pPr>
             <a:r>
-              <a:t>• Needs a storage capacity of 16TB configured in RAID 6 for data redundancy and security.</a:t>
+              <a:t>• 高精度な操作性で勝率アップを目指しています。</a:t>
             </a:r>
           </a:p>
           <a:p>
@@ -3838,7 +3566,7 @@
               </a:defRPr>
             </a:pPr>
             <a:r>
-              <a:t>• Requires a transfer speed of 2.5 Gbps to ensure efficient handling of large video files.</a:t>
+              <a:t>• カスタマイズ可能なボタンで操作性を最適化したい。</a:t>
             </a:r>
           </a:p>
           <a:p>
@@ -3854,7 +3582,7 @@
               </a:defRPr>
             </a:pPr>
             <a:r>
-              <a:t>• Solution must be scalable, secure, and optimized for video backup infrastructure.</a:t>
+              <a:t>• 快適なグリップで長時間プレイでも疲れにくい製品を求めています。</a:t>
             </a:r>
           </a:p>
         </p:txBody>
@@ -3990,7 +3718,7 @@
               </a:defRPr>
             </a:pPr>
             <a:r>
-              <a:t>• A tailored NAS server solution designed specifically for video backup needs.</a:t>
+              <a:t>• 高精度センサー搭載のゲーミングマウスをご提案。</a:t>
             </a:r>
           </a:p>
           <a:p>
@@ -4006,7 +3734,7 @@
               </a:defRPr>
             </a:pPr>
             <a:r>
-              <a:t>• Includes high-performance NAS device with built-in 2.5 Gigabit Ethernet ports.</a:t>
+              <a:t>• 快適なグリップ設計で長時間の使用も快適。</a:t>
             </a:r>
           </a:p>
           <a:p>
@@ -4022,7 +3750,7 @@
               </a:defRPr>
             </a:pPr>
             <a:r>
-              <a:t>• Configured RAID 6 setup for enhanced data protection and fault tolerance.</a:t>
+              <a:t>• ボタンのカスタマイズで操作性を自由に設定可能。</a:t>
             </a:r>
           </a:p>
           <a:p>
@@ -4038,7 +3766,7 @@
               </a:defRPr>
             </a:pPr>
             <a:r>
-              <a:t>• Comprehensive setup and configuration service to optimize network and backup environment.</a:t>
+              <a:t>• 高性能かつ耐久性のあるハードウェアを採用。</a:t>
             </a:r>
           </a:p>
           <a:p>
@@ -4054,7 +3782,7 @@
               </a:defRPr>
             </a:pPr>
             <a:r>
-              <a:t>• Reliable UPS system included to maintain data integrity during power disruptions.</a:t>
+              <a:t>• 最高のゲーム体験をサポートし、プレイの質を向上させます。</a:t>
             </a:r>
           </a:p>
         </p:txBody>
@@ -4190,7 +3918,7 @@
               </a:defRPr>
             </a:pPr>
             <a:r>
-              <a:t>• NAS Device: Asustor AS5304T with quad-core processor and 4GB RAM (expandable).</a:t>
+              <a:t>• 製品名: ゲーミングマウス</a:t>
             </a:r>
           </a:p>
           <a:p>
@@ -4206,7 +3934,7 @@
               </a:defRPr>
             </a:pPr>
             <a:r>
-              <a:t>• Storage: Four Seagate IronWolf 4TB NAS hard drives totaling 16TB, RAID 6 configured.</a:t>
+              <a:t>• 高精度センサー搭載で正確な操作が可能。</a:t>
             </a:r>
           </a:p>
           <a:p>
@@ -4222,7 +3950,7 @@
               </a:defRPr>
             </a:pPr>
             <a:r>
-              <a:t>• Network: Built-in 2.5 Gigabit Ethernet ports for high-speed data transfer.</a:t>
+              <a:t>• 快適なグリップ設計により長時間の使用でも疲れにくい。</a:t>
             </a:r>
           </a:p>
           <a:p>
@@ -4238,7 +3966,7 @@
               </a:defRPr>
             </a:pPr>
             <a:r>
-              <a:t>• Backup Protection: APC Back-UPS Pro 1500VA for power backup and surge protection.</a:t>
+              <a:t>• カスタマイズ可能なボタンを複数搭載。</a:t>
             </a:r>
           </a:p>
           <a:p>
@@ -4254,7 +3982,7 @@
               </a:defRPr>
             </a:pPr>
             <a:r>
-              <a:t>• Service: Professional NAS setup, RAID configuration, and network optimization.</a:t>
+              <a:t>• ハードウェアカテゴリに属する高性能ゲーミング機器。</a:t>
             </a:r>
           </a:p>
         </p:txBody>
@@ -4390,7 +4118,7 @@
               </a:defRPr>
             </a:pPr>
             <a:r>
-              <a:t>• Asustor AS5304T NAS Device: $450.00</a:t>
+              <a:t>• 製品単価: 7,500円 (税込前)</a:t>
             </a:r>
           </a:p>
           <a:p>
@@ -4406,7 +4134,7 @@
               </a:defRPr>
             </a:pPr>
             <a:r>
-              <a:t>• Seagate IronWolf 4TB NAS Hard Drives (4 units): $440.00</a:t>
+              <a:t>• 消費税(10%): 750円</a:t>
             </a:r>
           </a:p>
           <a:p>
@@ -4422,7 +4150,7 @@
               </a:defRPr>
             </a:pPr>
             <a:r>
-              <a:t>• APC Back-UPS Pro 1500VA UPS: $220.00</a:t>
+              <a:t>• 合計金額: 8,250円（税込）</a:t>
             </a:r>
           </a:p>
           <a:p>
@@ -4438,7 +4166,7 @@
               </a:defRPr>
             </a:pPr>
             <a:r>
-              <a:t>• NAS Setup and Configuration Service: $300.00</a:t>
+              <a:t>• コストパフォーマンスに優れた高性能ゲーミングマウス。</a:t>
             </a:r>
           </a:p>
           <a:p>
@@ -4454,7 +4182,7 @@
               </a:defRPr>
             </a:pPr>
             <a:r>
-              <a:t>• Subtotal: $1,410.00 | Tax (8%): $112.80 | Total: $1,522.80 USD</a:t>
+              <a:t>• 見積有効期限は2024年7月27日まで。</a:t>
             </a:r>
           </a:p>
         </p:txBody>
@@ -4590,7 +4318,7 @@
               </a:defRPr>
             </a:pPr>
             <a:r>
-              <a:t>• Hardware warranty provided by respective manufacturers for all devices.</a:t>
+              <a:t>• 製品仕様は予告なく変更される場合があります。</a:t>
             </a:r>
           </a:p>
           <a:p>
@@ -4606,7 +4334,7 @@
               </a:defRPr>
             </a:pPr>
             <a:r>
-              <a:t>• Installation and configuration services guaranteed for 30 days post-completion.</a:t>
+              <a:t>• 納品後の返品は原則としてお受けできません。</a:t>
             </a:r>
           </a:p>
           <a:p>
@@ -4622,7 +4350,7 @@
               </a:defRPr>
             </a:pPr>
             <a:r>
-              <a:t>• Technical support available for setup and network optimization.</a:t>
+              <a:t>• 注文確定後、3営業日以内に発送。</a:t>
             </a:r>
           </a:p>
           <a:p>
@@ -4638,7 +4366,7 @@
               </a:defRPr>
             </a:pPr>
             <a:r>
-              <a:t>• Power backup ensures data integrity during outages and fluctuations.</a:t>
+              <a:t>• 配送状況は追跡番号でご確認可能。</a:t>
             </a:r>
           </a:p>
           <a:p>
@@ -4654,7 +4382,7 @@
               </a:defRPr>
             </a:pPr>
             <a:r>
-              <a:t>• Additional hardware or software needs can be quoted separately.</a:t>
+              <a:t>• ご注文確定後、請求書を発行いたします。</a:t>
             </a:r>
           </a:p>
         </p:txBody>
@@ -4790,7 +4518,7 @@
               </a:defRPr>
             </a:pPr>
             <a:r>
-              <a:t>• Compare three variants of our NAS solution tailored for video backup.</a:t>
+              <a:t>• 3つのバリエーションで仕様は同一、価格も同様。</a:t>
             </a:r>
           </a:p>
           <a:p>
@@ -4806,7 +4534,7 @@
               </a:defRPr>
             </a:pPr>
             <a:r>
-              <a:t>• All variants offer identical high performance and reliability.</a:t>
+              <a:t>• 全て高精度センサー搭載の高性能ゲーミングマウス。</a:t>
             </a:r>
           </a:p>
           <a:p>
@@ -4822,7 +4550,7 @@
               </a:defRPr>
             </a:pPr>
             <a:r>
-              <a:t>• Choose based on preferred product naming or internal cataloging.</a:t>
+              <a:t>• 快適なグリップとカスタマイズ可能なボタンを装備。</a:t>
             </a:r>
           </a:p>
           <a:p>
@@ -4838,7 +4566,7 @@
               </a:defRPr>
             </a:pPr>
             <a:r>
-              <a:t>• Consistent pricing and specifications ensure uniform quality.</a:t>
+              <a:t>• 用途や好みに応じて名称を選択可能。</a:t>
             </a:r>
           </a:p>
           <a:p>
@@ -4854,7 +4582,7 @@
               </a:defRPr>
             </a:pPr>
             <a:r>
-              <a:t>• Helps in decision making with clear and transparent comparison.</a:t>
+              <a:t>• コストパフォーマンスに優れた製品群です。</a:t>
             </a:r>
           </a:p>
         </p:txBody>
@@ -4990,7 +4718,7 @@
               </a:defRPr>
             </a:pPr>
             <a:r>
-              <a:t>• Coordinate delivery of NAS device and hard drives to Otsuka Corporation IT department.</a:t>
+              <a:t>• 注文確定後、3営業日以内に発送いたします。</a:t>
             </a:r>
           </a:p>
           <a:p>
@@ -5006,7 +4734,7 @@
               </a:defRPr>
             </a:pPr>
             <a:r>
-              <a:t>• Schedule installation and configuration service within 2 weeks of order confirmation.</a:t>
+              <a:t>• 配送状況は追跡番号にてリアルタイムで確認可能。</a:t>
             </a:r>
           </a:p>
           <a:p>
@@ -5022,7 +4750,7 @@
               </a:defRPr>
             </a:pPr>
             <a:r>
-              <a:t>• Ensure network infrastructure supports 2.5 Gbps transfer speeds before setup.</a:t>
+              <a:t>• 迅速な対応でお客様のゲーム体験をすぐにサポート。</a:t>
             </a:r>
           </a:p>
           <a:p>
@@ -5038,7 +4766,7 @@
               </a:defRPr>
             </a:pPr>
             <a:r>
-              <a:t>• Perform RAID 6 configuration and verify data redundancy and backup functionality.</a:t>
+              <a:t>• 見積書の有効期限は発行日より30日間です。</a:t>
             </a:r>
           </a:p>
           <a:p>
@@ -5054,7 +4782,7 @@
               </a:defRPr>
             </a:pPr>
             <a:r>
-              <a:t>• Timely delivery ensures minimal disruption to video backup operations.</a:t>
+              <a:t>• ご注文はお早めにご検討ください。</a:t>
             </a:r>
           </a:p>
         </p:txBody>
@@ -5190,7 +4918,7 @@
               </a:defRPr>
             </a:pPr>
             <a:r>
-              <a:t>• Review and approve the quotation to proceed with the order.</a:t>
+              <a:t>• 見積内容をご確認の上、ご注文の意思をお知らせください。</a:t>
             </a:r>
           </a:p>
           <a:p>
@@ -5206,7 +4934,7 @@
               </a:defRPr>
             </a:pPr>
             <a:r>
-              <a:t>• Confirm delivery address and provide accurate contact details.</a:t>
+              <a:t>• ご注文確定後、請求書を速やかに発行いたします。</a:t>
             </a:r>
           </a:p>
           <a:p>
@@ -5222,7 +4950,7 @@
               </a:defRPr>
             </a:pPr>
             <a:r>
-              <a:t>• Schedule installation date with our technical team at your convenience.</a:t>
+              <a:t>• 最高のゲーム体験を実現するための第一歩です。</a:t>
             </a:r>
           </a:p>
           <a:p>
@@ -5238,7 +4966,7 @@
               </a:defRPr>
             </a:pPr>
             <a:r>
-              <a:t>• Communicate any additional requirements or questions to our sales representative.</a:t>
+              <a:t>• ご不明点やご相談はお気軽にお問い合わせください。</a:t>
             </a:r>
           </a:p>
           <a:p>
@@ -5254,7 +4982,7 @@
               </a:defRPr>
             </a:pPr>
             <a:r>
-              <a:t>• Secure your reliable NAS server solution tailored for your video backup needs.</a:t>
+              <a:t>• 今すぐご注文いただき、ゲームプレイを向上させましょう！</a:t>
             </a:r>
           </a:p>
         </p:txBody>
@@ -5268,119 +4996,59 @@
 </file>
 
 <file path=ppt/theme/theme1.xml><?xml version="1.0" encoding="utf-8"?>
-<a:theme xmlns:a="http://schemas.openxmlformats.org/drawingml/2006/main" name="Office Theme">
+<a:theme xmlns:a="http://schemas.openxmlformats.org/drawingml/2006/main" name="Watercolor Theme">
   <a:themeElements>
-    <a:clrScheme name="Office">
+    <a:clrScheme name="Watercolor Wedding">
       <a:dk1>
-        <a:sysClr val="windowText" lastClr="000000"/>
+        <a:srgbClr val="818B8A"/>
       </a:dk1>
       <a:lt1>
-        <a:sysClr val="window" lastClr="FFFFFF"/>
+        <a:srgbClr val="FFFFFF"/>
       </a:lt1>
       <a:dk2>
-        <a:srgbClr val="1F497D"/>
+        <a:srgbClr val="17A1AB"/>
       </a:dk2>
       <a:lt2>
-        <a:srgbClr val="EEECE1"/>
+        <a:srgbClr val="D6D5D5"/>
       </a:lt2>
       <a:accent1>
-        <a:srgbClr val="4F81BD"/>
+        <a:srgbClr val="0C4A80"/>
       </a:accent1>
       <a:accent2>
-        <a:srgbClr val="C0504D"/>
+        <a:srgbClr val="0D6397"/>
       </a:accent2>
       <a:accent3>
-        <a:srgbClr val="9BBB59"/>
+        <a:srgbClr val="1E83A9"/>
       </a:accent3>
       <a:accent4>
-        <a:srgbClr val="8064A2"/>
+        <a:srgbClr val="478FB1"/>
       </a:accent4>
       <a:accent5>
-        <a:srgbClr val="4BACC6"/>
+        <a:srgbClr val="8CB8D1"/>
       </a:accent5>
       <a:accent6>
-        <a:srgbClr val="F79646"/>
+        <a:srgbClr val="C9E6F1"/>
       </a:accent6>
       <a:hlink>
         <a:srgbClr val="0000FF"/>
       </a:hlink>
       <a:folHlink>
-        <a:srgbClr val="800080"/>
+        <a:srgbClr val="FF00FF"/>
       </a:folHlink>
     </a:clrScheme>
-    <a:fontScheme name="Office">
+    <a:fontScheme name="_Water color Wash 2">
       <a:majorFont>
-        <a:latin typeface="Calibri"/>
-        <a:ea typeface=""/>
-        <a:cs typeface=""/>
-        <a:font script="Jpan" typeface="ＭＳ Ｐゴシック"/>
-        <a:font script="Hang" typeface="맑은 고딕"/>
-        <a:font script="Hans" typeface="宋体"/>
-        <a:font script="Hant" typeface="新細明體"/>
-        <a:font script="Arab" typeface="Times New Roman"/>
-        <a:font script="Hebr" typeface="Times New Roman"/>
-        <a:font script="Thai" typeface="Angsana New"/>
-        <a:font script="Ethi" typeface="Nyala"/>
-        <a:font script="Beng" typeface="Vrinda"/>
-        <a:font script="Gujr" typeface="Shruti"/>
-        <a:font script="Khmr" typeface="MoolBoran"/>
-        <a:font script="Knda" typeface="Tunga"/>
-        <a:font script="Guru" typeface="Raavi"/>
-        <a:font script="Cans" typeface="Euphemia"/>
-        <a:font script="Cher" typeface="Plantagenet Cherokee"/>
-        <a:font script="Yiii" typeface="Microsoft Yi Baiti"/>
-        <a:font script="Tibt" typeface="Microsoft Himalaya"/>
-        <a:font script="Thaa" typeface="MV Boli"/>
-        <a:font script="Deva" typeface="Mangal"/>
-        <a:font script="Telu" typeface="Gautami"/>
-        <a:font script="Taml" typeface="Latha"/>
-        <a:font script="Syrc" typeface="Estrangelo Edessa"/>
-        <a:font script="Orya" typeface="Kalinga"/>
-        <a:font script="Mlym" typeface="Kartika"/>
-        <a:font script="Laoo" typeface="DokChampa"/>
-        <a:font script="Sinh" typeface="Iskoola Pota"/>
-        <a:font script="Mong" typeface="Mongolian Baiti"/>
-        <a:font script="Viet" typeface="Times New Roman"/>
-        <a:font script="Uigh" typeface="Microsoft Uighur"/>
-        <a:font script="Geor" typeface="Sylfaen"/>
+        <a:latin typeface="Franklin Gothic Medium Cond"/>
+        <a:ea typeface="Gill Sans"/>
+        <a:cs typeface="Gill Sans"/>
       </a:majorFont>
       <a:minorFont>
-        <a:latin typeface="Calibri"/>
-        <a:ea typeface=""/>
-        <a:cs typeface=""/>
-        <a:font script="Jpan" typeface="ＭＳ Ｐゴシック"/>
-        <a:font script="Hang" typeface="맑은 고딕"/>
-        <a:font script="Hans" typeface="宋体"/>
-        <a:font script="Hant" typeface="新細明體"/>
-        <a:font script="Arab" typeface="Arial"/>
-        <a:font script="Hebr" typeface="Arial"/>
-        <a:font script="Thai" typeface="Cordia New"/>
-        <a:font script="Ethi" typeface="Nyala"/>
-        <a:font script="Beng" typeface="Vrinda"/>
-        <a:font script="Gujr" typeface="Shruti"/>
-        <a:font script="Khmr" typeface="DaunPenh"/>
-        <a:font script="Knda" typeface="Tunga"/>
-        <a:font script="Guru" typeface="Raavi"/>
-        <a:font script="Cans" typeface="Euphemia"/>
-        <a:font script="Cher" typeface="Plantagenet Cherokee"/>
-        <a:font script="Yiii" typeface="Microsoft Yi Baiti"/>
-        <a:font script="Tibt" typeface="Microsoft Himalaya"/>
-        <a:font script="Thaa" typeface="MV Boli"/>
-        <a:font script="Deva" typeface="Mangal"/>
-        <a:font script="Telu" typeface="Gautami"/>
-        <a:font script="Taml" typeface="Latha"/>
-        <a:font script="Syrc" typeface="Estrangelo Edessa"/>
-        <a:font script="Orya" typeface="Kalinga"/>
-        <a:font script="Mlym" typeface="Kartika"/>
-        <a:font script="Laoo" typeface="DokChampa"/>
-        <a:font script="Sinh" typeface="Iskoola Pota"/>
-        <a:font script="Mong" typeface="Mongolian Baiti"/>
-        <a:font script="Viet" typeface="Arial"/>
-        <a:font script="Uigh" typeface="Microsoft Uighur"/>
-        <a:font script="Geor" typeface="Sylfaen"/>
+        <a:latin typeface="Franklin Gothic Book"/>
+        <a:ea typeface="Gill Sans"/>
+        <a:cs typeface="Gill Sans"/>
       </a:minorFont>
     </a:fontScheme>
-    <a:fmtScheme name="Office">
+    <a:fmtScheme name="White">
       <a:fillStyleLst>
         <a:solidFill>
           <a:schemeClr val="phClr"/>
@@ -5414,7 +5082,7 @@
               <a:schemeClr val="phClr">
                 <a:tint val="100000"/>
                 <a:shade val="100000"/>
-                <a:satMod val="130000"/>
+                <a:satMod val="129999"/>
               </a:schemeClr>
             </a:gs>
             <a:gs pos="100000">
@@ -5433,7 +5101,7 @@
           <a:solidFill>
             <a:schemeClr val="phClr">
               <a:shade val="95000"/>
-              <a:satMod val="105000"/>
+              <a:satMod val="104999"/>
             </a:schemeClr>
           </a:solidFill>
           <a:prstDash val="solid"/>
@@ -5453,42 +5121,13 @@
       </a:lnStyleLst>
       <a:effectStyleLst>
         <a:effectStyle>
-          <a:effectLst>
-            <a:outerShdw blurRad="40000" dist="20000" dir="5400000" rotWithShape="0">
-              <a:srgbClr val="000000">
-                <a:alpha val="38000"/>
-              </a:srgbClr>
-            </a:outerShdw>
-          </a:effectLst>
+          <a:effectLst/>
         </a:effectStyle>
         <a:effectStyle>
-          <a:effectLst>
-            <a:outerShdw blurRad="40000" dist="23000" dir="5400000" rotWithShape="0">
-              <a:srgbClr val="000000">
-                <a:alpha val="35000"/>
-              </a:srgbClr>
-            </a:outerShdw>
-          </a:effectLst>
+          <a:effectLst/>
         </a:effectStyle>
         <a:effectStyle>
-          <a:effectLst>
-            <a:outerShdw blurRad="40000" dist="23000" dir="5400000" rotWithShape="0">
-              <a:srgbClr val="000000">
-                <a:alpha val="35000"/>
-              </a:srgbClr>
-            </a:outerShdw>
-          </a:effectLst>
-          <a:scene3d>
-            <a:camera prst="orthographicFront">
-              <a:rot lat="0" lon="0" rev="0"/>
-            </a:camera>
-            <a:lightRig rig="threePt" dir="t">
-              <a:rot lat="0" lon="0" rev="1200000"/>
-            </a:lightRig>
-          </a:scene3d>
-          <a:sp3d>
-            <a:bevelT w="63500" h="25400"/>
-          </a:sp3d>
+          <a:effectLst/>
         </a:effectStyle>
       </a:effectStyleLst>
       <a:bgFillStyleLst>
@@ -5545,44 +5184,1843 @@
   </a:themeElements>
   <a:objectDefaults>
     <a:spDef>
-      <a:spPr/>
-      <a:bodyPr/>
-      <a:lstStyle/>
+      <a:spPr>
+        <a:noFill/>
+        <a:ln w="25400" cap="flat">
+          <a:solidFill>
+            <a:srgbClr val="000000"/>
+          </a:solidFill>
+          <a:prstDash val="solid"/>
+          <a:miter lim="400000"/>
+        </a:ln>
+        <a:effectLst/>
+        <a:sp3d/>
+      </a:spPr>
+      <a:bodyPr rot="0" spcFirstLastPara="1" vertOverflow="overflow" horzOverflow="overflow" vert="horz" wrap="square" lIns="38100" tIns="38100" rIns="38100" bIns="38100" numCol="1" spcCol="38100" rtlCol="0" anchor="ctr">
+        <a:spAutoFit/>
+      </a:bodyPr>
+      <a:lstStyle>
+        <a:defPPr marL="0" marR="0" indent="0" algn="ctr" defTabSz="457200" rtl="0" fontAlgn="auto" latinLnBrk="0" hangingPunct="0">
+          <a:lnSpc>
+            <a:spcPct val="100000"/>
+          </a:lnSpc>
+          <a:spcBef>
+            <a:spcPts val="0"/>
+          </a:spcBef>
+          <a:spcAft>
+            <a:spcPts val="0"/>
+          </a:spcAft>
+          <a:buClrTx/>
+          <a:buSzTx/>
+          <a:buFontTx/>
+          <a:buNone/>
+          <a:tabLst/>
+          <a:defRPr kumimoji="0" sz="3000" b="0" i="0" u="none" strike="noStrike" cap="none" spc="0" normalizeH="0" baseline="0">
+            <a:ln>
+              <a:noFill/>
+            </a:ln>
+            <a:solidFill>
+              <a:srgbClr val="FFFFFF"/>
+            </a:solidFill>
+            <a:effectLst>
+              <a:outerShdw blurRad="38100" dist="12700" dir="5400000" rotWithShape="0">
+                <a:srgbClr val="000000">
+                  <a:alpha val="50000"/>
+                </a:srgbClr>
+              </a:outerShdw>
+            </a:effectLst>
+            <a:uFillTx/>
+            <a:latin typeface="+mn-lt"/>
+            <a:ea typeface="+mn-ea"/>
+            <a:cs typeface="+mn-cs"/>
+            <a:sym typeface="Gill Sans"/>
+          </a:defRPr>
+        </a:defPPr>
+        <a:lvl1pPr marL="0" marR="0" indent="0" algn="l" defTabSz="914400" rtl="0" fontAlgn="auto" latinLnBrk="1" hangingPunct="0">
+          <a:lnSpc>
+            <a:spcPct val="100000"/>
+          </a:lnSpc>
+          <a:spcBef>
+            <a:spcPts val="0"/>
+          </a:spcBef>
+          <a:spcAft>
+            <a:spcPts val="0"/>
+          </a:spcAft>
+          <a:buClrTx/>
+          <a:buSzTx/>
+          <a:buFontTx/>
+          <a:buNone/>
+          <a:tabLst/>
+          <a:defRPr kumimoji="0" sz="1800" b="0" i="0" u="none" strike="noStrike" cap="none" spc="0" normalizeH="0" baseline="0">
+            <a:ln>
+              <a:noFill/>
+            </a:ln>
+            <a:solidFill>
+              <a:srgbClr val="000000"/>
+            </a:solidFill>
+            <a:effectLst/>
+            <a:uFillTx/>
+          </a:defRPr>
+        </a:lvl1pPr>
+        <a:lvl2pPr marL="0" marR="0" indent="0" algn="l" defTabSz="914400" rtl="0" fontAlgn="auto" latinLnBrk="1" hangingPunct="0">
+          <a:lnSpc>
+            <a:spcPct val="100000"/>
+          </a:lnSpc>
+          <a:spcBef>
+            <a:spcPts val="0"/>
+          </a:spcBef>
+          <a:spcAft>
+            <a:spcPts val="0"/>
+          </a:spcAft>
+          <a:buClrTx/>
+          <a:buSzTx/>
+          <a:buFontTx/>
+          <a:buNone/>
+          <a:tabLst/>
+          <a:defRPr kumimoji="0" sz="1800" b="0" i="0" u="none" strike="noStrike" cap="none" spc="0" normalizeH="0" baseline="0">
+            <a:ln>
+              <a:noFill/>
+            </a:ln>
+            <a:solidFill>
+              <a:srgbClr val="000000"/>
+            </a:solidFill>
+            <a:effectLst/>
+            <a:uFillTx/>
+          </a:defRPr>
+        </a:lvl2pPr>
+        <a:lvl3pPr marL="0" marR="0" indent="0" algn="l" defTabSz="914400" rtl="0" fontAlgn="auto" latinLnBrk="1" hangingPunct="0">
+          <a:lnSpc>
+            <a:spcPct val="100000"/>
+          </a:lnSpc>
+          <a:spcBef>
+            <a:spcPts val="0"/>
+          </a:spcBef>
+          <a:spcAft>
+            <a:spcPts val="0"/>
+          </a:spcAft>
+          <a:buClrTx/>
+          <a:buSzTx/>
+          <a:buFontTx/>
+          <a:buNone/>
+          <a:tabLst/>
+          <a:defRPr kumimoji="0" sz="1800" b="0" i="0" u="none" strike="noStrike" cap="none" spc="0" normalizeH="0" baseline="0">
+            <a:ln>
+              <a:noFill/>
+            </a:ln>
+            <a:solidFill>
+              <a:srgbClr val="000000"/>
+            </a:solidFill>
+            <a:effectLst/>
+            <a:uFillTx/>
+          </a:defRPr>
+        </a:lvl3pPr>
+        <a:lvl4pPr marL="0" marR="0" indent="0" algn="l" defTabSz="914400" rtl="0" fontAlgn="auto" latinLnBrk="1" hangingPunct="0">
+          <a:lnSpc>
+            <a:spcPct val="100000"/>
+          </a:lnSpc>
+          <a:spcBef>
+            <a:spcPts val="0"/>
+          </a:spcBef>
+          <a:spcAft>
+            <a:spcPts val="0"/>
+          </a:spcAft>
+          <a:buClrTx/>
+          <a:buSzTx/>
+          <a:buFontTx/>
+          <a:buNone/>
+          <a:tabLst/>
+          <a:defRPr kumimoji="0" sz="1800" b="0" i="0" u="none" strike="noStrike" cap="none" spc="0" normalizeH="0" baseline="0">
+            <a:ln>
+              <a:noFill/>
+            </a:ln>
+            <a:solidFill>
+              <a:srgbClr val="000000"/>
+            </a:solidFill>
+            <a:effectLst/>
+            <a:uFillTx/>
+          </a:defRPr>
+        </a:lvl4pPr>
+        <a:lvl5pPr marL="0" marR="0" indent="0" algn="l" defTabSz="914400" rtl="0" fontAlgn="auto" latinLnBrk="1" hangingPunct="0">
+          <a:lnSpc>
+            <a:spcPct val="100000"/>
+          </a:lnSpc>
+          <a:spcBef>
+            <a:spcPts val="0"/>
+          </a:spcBef>
+          <a:spcAft>
+            <a:spcPts val="0"/>
+          </a:spcAft>
+          <a:buClrTx/>
+          <a:buSzTx/>
+          <a:buFontTx/>
+          <a:buNone/>
+          <a:tabLst/>
+          <a:defRPr kumimoji="0" sz="1800" b="0" i="0" u="none" strike="noStrike" cap="none" spc="0" normalizeH="0" baseline="0">
+            <a:ln>
+              <a:noFill/>
+            </a:ln>
+            <a:solidFill>
+              <a:srgbClr val="000000"/>
+            </a:solidFill>
+            <a:effectLst/>
+            <a:uFillTx/>
+          </a:defRPr>
+        </a:lvl5pPr>
+        <a:lvl6pPr marL="0" marR="0" indent="0" algn="l" defTabSz="914400" rtl="0" fontAlgn="auto" latinLnBrk="1" hangingPunct="0">
+          <a:lnSpc>
+            <a:spcPct val="100000"/>
+          </a:lnSpc>
+          <a:spcBef>
+            <a:spcPts val="0"/>
+          </a:spcBef>
+          <a:spcAft>
+            <a:spcPts val="0"/>
+          </a:spcAft>
+          <a:buClrTx/>
+          <a:buSzTx/>
+          <a:buFontTx/>
+          <a:buNone/>
+          <a:tabLst/>
+          <a:defRPr kumimoji="0" sz="1800" b="0" i="0" u="none" strike="noStrike" cap="none" spc="0" normalizeH="0" baseline="0">
+            <a:ln>
+              <a:noFill/>
+            </a:ln>
+            <a:solidFill>
+              <a:srgbClr val="000000"/>
+            </a:solidFill>
+            <a:effectLst/>
+            <a:uFillTx/>
+          </a:defRPr>
+        </a:lvl6pPr>
+        <a:lvl7pPr marL="0" marR="0" indent="0" algn="l" defTabSz="914400" rtl="0" fontAlgn="auto" latinLnBrk="1" hangingPunct="0">
+          <a:lnSpc>
+            <a:spcPct val="100000"/>
+          </a:lnSpc>
+          <a:spcBef>
+            <a:spcPts val="0"/>
+          </a:spcBef>
+          <a:spcAft>
+            <a:spcPts val="0"/>
+          </a:spcAft>
+          <a:buClrTx/>
+          <a:buSzTx/>
+          <a:buFontTx/>
+          <a:buNone/>
+          <a:tabLst/>
+          <a:defRPr kumimoji="0" sz="1800" b="0" i="0" u="none" strike="noStrike" cap="none" spc="0" normalizeH="0" baseline="0">
+            <a:ln>
+              <a:noFill/>
+            </a:ln>
+            <a:solidFill>
+              <a:srgbClr val="000000"/>
+            </a:solidFill>
+            <a:effectLst/>
+            <a:uFillTx/>
+          </a:defRPr>
+        </a:lvl7pPr>
+        <a:lvl8pPr marL="0" marR="0" indent="0" algn="l" defTabSz="914400" rtl="0" fontAlgn="auto" latinLnBrk="1" hangingPunct="0">
+          <a:lnSpc>
+            <a:spcPct val="100000"/>
+          </a:lnSpc>
+          <a:spcBef>
+            <a:spcPts val="0"/>
+          </a:spcBef>
+          <a:spcAft>
+            <a:spcPts val="0"/>
+          </a:spcAft>
+          <a:buClrTx/>
+          <a:buSzTx/>
+          <a:buFontTx/>
+          <a:buNone/>
+          <a:tabLst/>
+          <a:defRPr kumimoji="0" sz="1800" b="0" i="0" u="none" strike="noStrike" cap="none" spc="0" normalizeH="0" baseline="0">
+            <a:ln>
+              <a:noFill/>
+            </a:ln>
+            <a:solidFill>
+              <a:srgbClr val="000000"/>
+            </a:solidFill>
+            <a:effectLst/>
+            <a:uFillTx/>
+          </a:defRPr>
+        </a:lvl8pPr>
+        <a:lvl9pPr marL="0" marR="0" indent="0" algn="l" defTabSz="914400" rtl="0" fontAlgn="auto" latinLnBrk="1" hangingPunct="0">
+          <a:lnSpc>
+            <a:spcPct val="100000"/>
+          </a:lnSpc>
+          <a:spcBef>
+            <a:spcPts val="0"/>
+          </a:spcBef>
+          <a:spcAft>
+            <a:spcPts val="0"/>
+          </a:spcAft>
+          <a:buClrTx/>
+          <a:buSzTx/>
+          <a:buFontTx/>
+          <a:buNone/>
+          <a:tabLst/>
+          <a:defRPr kumimoji="0" sz="1800" b="0" i="0" u="none" strike="noStrike" cap="none" spc="0" normalizeH="0" baseline="0">
+            <a:ln>
+              <a:noFill/>
+            </a:ln>
+            <a:solidFill>
+              <a:srgbClr val="000000"/>
+            </a:solidFill>
+            <a:effectLst/>
+            <a:uFillTx/>
+          </a:defRPr>
+        </a:lvl9pPr>
+      </a:lstStyle>
       <a:style>
-        <a:lnRef idx="1">
-          <a:schemeClr val="accent1"/>
+        <a:lnRef idx="0">
+          <a:scrgbClr r="0" g="0" b="0"/>
         </a:lnRef>
-        <a:fillRef idx="3">
-          <a:schemeClr val="accent1"/>
+        <a:fillRef idx="0">
+          <a:scrgbClr r="0" g="0" b="0"/>
         </a:fillRef>
-        <a:effectRef idx="2">
-          <a:schemeClr val="accent1"/>
+        <a:effectRef idx="0">
+          <a:scrgbClr r="0" g="0" b="0"/>
         </a:effectRef>
-        <a:fontRef idx="minor">
-          <a:schemeClr val="lt1"/>
-        </a:fontRef>
+        <a:fontRef idx="none"/>
       </a:style>
     </a:spDef>
     <a:lnDef>
-      <a:spPr/>
-      <a:bodyPr/>
-      <a:lstStyle/>
+      <a:spPr>
+        <a:noFill/>
+        <a:ln w="38100" cap="flat">
+          <a:solidFill>
+            <a:srgbClr val="000000"/>
+          </a:solidFill>
+          <a:prstDash val="solid"/>
+          <a:miter lim="400000"/>
+        </a:ln>
+        <a:effectLst/>
+        <a:sp3d/>
+      </a:spPr>
+      <a:bodyPr rot="0" spcFirstLastPara="1" vertOverflow="overflow" horzOverflow="overflow" vert="horz" wrap="square" lIns="91439" tIns="45719" rIns="91439" bIns="45719" numCol="1" spcCol="38100" rtlCol="0" anchor="t">
+        <a:noAutofit/>
+      </a:bodyPr>
+      <a:lstStyle>
+        <a:defPPr marL="0" marR="0" indent="0" algn="l" defTabSz="914400" rtl="0" fontAlgn="auto" latinLnBrk="1" hangingPunct="0">
+          <a:lnSpc>
+            <a:spcPct val="100000"/>
+          </a:lnSpc>
+          <a:spcBef>
+            <a:spcPts val="0"/>
+          </a:spcBef>
+          <a:spcAft>
+            <a:spcPts val="0"/>
+          </a:spcAft>
+          <a:buClrTx/>
+          <a:buSzTx/>
+          <a:buFontTx/>
+          <a:buNone/>
+          <a:tabLst/>
+          <a:defRPr kumimoji="0" sz="1800" b="0" i="0" u="none" strike="noStrike" cap="none" spc="0" normalizeH="0" baseline="0">
+            <a:ln>
+              <a:noFill/>
+            </a:ln>
+            <a:solidFill>
+              <a:srgbClr val="000000"/>
+            </a:solidFill>
+            <a:effectLst/>
+            <a:uFillTx/>
+          </a:defRPr>
+        </a:defPPr>
+        <a:lvl1pPr marL="0" marR="0" indent="0" algn="l" defTabSz="914400" rtl="0" fontAlgn="auto" latinLnBrk="1" hangingPunct="0">
+          <a:lnSpc>
+            <a:spcPct val="100000"/>
+          </a:lnSpc>
+          <a:spcBef>
+            <a:spcPts val="0"/>
+          </a:spcBef>
+          <a:spcAft>
+            <a:spcPts val="0"/>
+          </a:spcAft>
+          <a:buClrTx/>
+          <a:buSzTx/>
+          <a:buFontTx/>
+          <a:buNone/>
+          <a:tabLst/>
+          <a:defRPr kumimoji="0" sz="1800" b="0" i="0" u="none" strike="noStrike" cap="none" spc="0" normalizeH="0" baseline="0">
+            <a:ln>
+              <a:noFill/>
+            </a:ln>
+            <a:solidFill>
+              <a:srgbClr val="000000"/>
+            </a:solidFill>
+            <a:effectLst/>
+            <a:uFillTx/>
+          </a:defRPr>
+        </a:lvl1pPr>
+        <a:lvl2pPr marL="0" marR="0" indent="0" algn="l" defTabSz="914400" rtl="0" fontAlgn="auto" latinLnBrk="1" hangingPunct="0">
+          <a:lnSpc>
+            <a:spcPct val="100000"/>
+          </a:lnSpc>
+          <a:spcBef>
+            <a:spcPts val="0"/>
+          </a:spcBef>
+          <a:spcAft>
+            <a:spcPts val="0"/>
+          </a:spcAft>
+          <a:buClrTx/>
+          <a:buSzTx/>
+          <a:buFontTx/>
+          <a:buNone/>
+          <a:tabLst/>
+          <a:defRPr kumimoji="0" sz="1800" b="0" i="0" u="none" strike="noStrike" cap="none" spc="0" normalizeH="0" baseline="0">
+            <a:ln>
+              <a:noFill/>
+            </a:ln>
+            <a:solidFill>
+              <a:srgbClr val="000000"/>
+            </a:solidFill>
+            <a:effectLst/>
+            <a:uFillTx/>
+          </a:defRPr>
+        </a:lvl2pPr>
+        <a:lvl3pPr marL="0" marR="0" indent="0" algn="l" defTabSz="914400" rtl="0" fontAlgn="auto" latinLnBrk="1" hangingPunct="0">
+          <a:lnSpc>
+            <a:spcPct val="100000"/>
+          </a:lnSpc>
+          <a:spcBef>
+            <a:spcPts val="0"/>
+          </a:spcBef>
+          <a:spcAft>
+            <a:spcPts val="0"/>
+          </a:spcAft>
+          <a:buClrTx/>
+          <a:buSzTx/>
+          <a:buFontTx/>
+          <a:buNone/>
+          <a:tabLst/>
+          <a:defRPr kumimoji="0" sz="1800" b="0" i="0" u="none" strike="noStrike" cap="none" spc="0" normalizeH="0" baseline="0">
+            <a:ln>
+              <a:noFill/>
+            </a:ln>
+            <a:solidFill>
+              <a:srgbClr val="000000"/>
+            </a:solidFill>
+            <a:effectLst/>
+            <a:uFillTx/>
+          </a:defRPr>
+        </a:lvl3pPr>
+        <a:lvl4pPr marL="0" marR="0" indent="0" algn="l" defTabSz="914400" rtl="0" fontAlgn="auto" latinLnBrk="1" hangingPunct="0">
+          <a:lnSpc>
+            <a:spcPct val="100000"/>
+          </a:lnSpc>
+          <a:spcBef>
+            <a:spcPts val="0"/>
+          </a:spcBef>
+          <a:spcAft>
+            <a:spcPts val="0"/>
+          </a:spcAft>
+          <a:buClrTx/>
+          <a:buSzTx/>
+          <a:buFontTx/>
+          <a:buNone/>
+          <a:tabLst/>
+          <a:defRPr kumimoji="0" sz="1800" b="0" i="0" u="none" strike="noStrike" cap="none" spc="0" normalizeH="0" baseline="0">
+            <a:ln>
+              <a:noFill/>
+            </a:ln>
+            <a:solidFill>
+              <a:srgbClr val="000000"/>
+            </a:solidFill>
+            <a:effectLst/>
+            <a:uFillTx/>
+          </a:defRPr>
+        </a:lvl4pPr>
+        <a:lvl5pPr marL="0" marR="0" indent="0" algn="l" defTabSz="914400" rtl="0" fontAlgn="auto" latinLnBrk="1" hangingPunct="0">
+          <a:lnSpc>
+            <a:spcPct val="100000"/>
+          </a:lnSpc>
+          <a:spcBef>
+            <a:spcPts val="0"/>
+          </a:spcBef>
+          <a:spcAft>
+            <a:spcPts val="0"/>
+          </a:spcAft>
+          <a:buClrTx/>
+          <a:buSzTx/>
+          <a:buFontTx/>
+          <a:buNone/>
+          <a:tabLst/>
+          <a:defRPr kumimoji="0" sz="1800" b="0" i="0" u="none" strike="noStrike" cap="none" spc="0" normalizeH="0" baseline="0">
+            <a:ln>
+              <a:noFill/>
+            </a:ln>
+            <a:solidFill>
+              <a:srgbClr val="000000"/>
+            </a:solidFill>
+            <a:effectLst/>
+            <a:uFillTx/>
+          </a:defRPr>
+        </a:lvl5pPr>
+        <a:lvl6pPr marL="0" marR="0" indent="0" algn="l" defTabSz="914400" rtl="0" fontAlgn="auto" latinLnBrk="1" hangingPunct="0">
+          <a:lnSpc>
+            <a:spcPct val="100000"/>
+          </a:lnSpc>
+          <a:spcBef>
+            <a:spcPts val="0"/>
+          </a:spcBef>
+          <a:spcAft>
+            <a:spcPts val="0"/>
+          </a:spcAft>
+          <a:buClrTx/>
+          <a:buSzTx/>
+          <a:buFontTx/>
+          <a:buNone/>
+          <a:tabLst/>
+          <a:defRPr kumimoji="0" sz="1800" b="0" i="0" u="none" strike="noStrike" cap="none" spc="0" normalizeH="0" baseline="0">
+            <a:ln>
+              <a:noFill/>
+            </a:ln>
+            <a:solidFill>
+              <a:srgbClr val="000000"/>
+            </a:solidFill>
+            <a:effectLst/>
+            <a:uFillTx/>
+          </a:defRPr>
+        </a:lvl6pPr>
+        <a:lvl7pPr marL="0" marR="0" indent="0" algn="l" defTabSz="914400" rtl="0" fontAlgn="auto" latinLnBrk="1" hangingPunct="0">
+          <a:lnSpc>
+            <a:spcPct val="100000"/>
+          </a:lnSpc>
+          <a:spcBef>
+            <a:spcPts val="0"/>
+          </a:spcBef>
+          <a:spcAft>
+            <a:spcPts val="0"/>
+          </a:spcAft>
+          <a:buClrTx/>
+          <a:buSzTx/>
+          <a:buFontTx/>
+          <a:buNone/>
+          <a:tabLst/>
+          <a:defRPr kumimoji="0" sz="1800" b="0" i="0" u="none" strike="noStrike" cap="none" spc="0" normalizeH="0" baseline="0">
+            <a:ln>
+              <a:noFill/>
+            </a:ln>
+            <a:solidFill>
+              <a:srgbClr val="000000"/>
+            </a:solidFill>
+            <a:effectLst/>
+            <a:uFillTx/>
+          </a:defRPr>
+        </a:lvl7pPr>
+        <a:lvl8pPr marL="0" marR="0" indent="0" algn="l" defTabSz="914400" rtl="0" fontAlgn="auto" latinLnBrk="1" hangingPunct="0">
+          <a:lnSpc>
+            <a:spcPct val="100000"/>
+          </a:lnSpc>
+          <a:spcBef>
+            <a:spcPts val="0"/>
+          </a:spcBef>
+          <a:spcAft>
+            <a:spcPts val="0"/>
+          </a:spcAft>
+          <a:buClrTx/>
+          <a:buSzTx/>
+          <a:buFontTx/>
+          <a:buNone/>
+          <a:tabLst/>
+          <a:defRPr kumimoji="0" sz="1800" b="0" i="0" u="none" strike="noStrike" cap="none" spc="0" normalizeH="0" baseline="0">
+            <a:ln>
+              <a:noFill/>
+            </a:ln>
+            <a:solidFill>
+              <a:srgbClr val="000000"/>
+            </a:solidFill>
+            <a:effectLst/>
+            <a:uFillTx/>
+          </a:defRPr>
+        </a:lvl8pPr>
+        <a:lvl9pPr marL="0" marR="0" indent="0" algn="l" defTabSz="914400" rtl="0" fontAlgn="auto" latinLnBrk="1" hangingPunct="0">
+          <a:lnSpc>
+            <a:spcPct val="100000"/>
+          </a:lnSpc>
+          <a:spcBef>
+            <a:spcPts val="0"/>
+          </a:spcBef>
+          <a:spcAft>
+            <a:spcPts val="0"/>
+          </a:spcAft>
+          <a:buClrTx/>
+          <a:buSzTx/>
+          <a:buFontTx/>
+          <a:buNone/>
+          <a:tabLst/>
+          <a:defRPr kumimoji="0" sz="1800" b="0" i="0" u="none" strike="noStrike" cap="none" spc="0" normalizeH="0" baseline="0">
+            <a:ln>
+              <a:noFill/>
+            </a:ln>
+            <a:solidFill>
+              <a:srgbClr val="000000"/>
+            </a:solidFill>
+            <a:effectLst/>
+            <a:uFillTx/>
+          </a:defRPr>
+        </a:lvl9pPr>
+      </a:lstStyle>
       <a:style>
-        <a:lnRef idx="2">
-          <a:schemeClr val="accent1"/>
+        <a:lnRef idx="0">
+          <a:scrgbClr r="0" g="0" b="0"/>
         </a:lnRef>
         <a:fillRef idx="0">
-          <a:schemeClr val="accent1"/>
+          <a:scrgbClr r="0" g="0" b="0"/>
         </a:fillRef>
-        <a:effectRef idx="1">
-          <a:schemeClr val="accent1"/>
+        <a:effectRef idx="0">
+          <a:scrgbClr r="0" g="0" b="0"/>
         </a:effectRef>
-        <a:fontRef idx="minor">
-          <a:schemeClr val="tx1"/>
-        </a:fontRef>
+        <a:fontRef idx="none"/>
       </a:style>
     </a:lnDef>
+    <a:txDef>
+      <a:spPr>
+        <a:noFill/>
+        <a:ln w="12700" cap="flat">
+          <a:noFill/>
+          <a:miter lim="400000"/>
+        </a:ln>
+        <a:effectLst/>
+        <a:sp3d/>
+      </a:spPr>
+      <a:bodyPr rot="0" spcFirstLastPara="1" vertOverflow="overflow" horzOverflow="overflow" vert="horz" wrap="square" lIns="50800" tIns="50800" rIns="50800" bIns="50800" numCol="1" spcCol="38100" rtlCol="0" anchor="ctr">
+        <a:spAutoFit/>
+      </a:bodyPr>
+      <a:lstStyle>
+        <a:defPPr marL="0" marR="0" indent="0" algn="ctr" defTabSz="457200" rtl="0" fontAlgn="auto" latinLnBrk="0" hangingPunct="0">
+          <a:lnSpc>
+            <a:spcPct val="100000"/>
+          </a:lnSpc>
+          <a:spcBef>
+            <a:spcPts val="0"/>
+          </a:spcBef>
+          <a:spcAft>
+            <a:spcPts val="0"/>
+          </a:spcAft>
+          <a:buClrTx/>
+          <a:buSzTx/>
+          <a:buFontTx/>
+          <a:buNone/>
+          <a:tabLst/>
+          <a:defRPr kumimoji="0" sz="3200" b="0" i="0" u="none" strike="noStrike" cap="none" spc="0" normalizeH="0" baseline="0">
+            <a:ln>
+              <a:noFill/>
+            </a:ln>
+            <a:solidFill>
+              <a:srgbClr val="000000"/>
+            </a:solidFill>
+            <a:effectLst/>
+            <a:uFillTx/>
+            <a:latin typeface="+mn-lt"/>
+            <a:ea typeface="+mn-ea"/>
+            <a:cs typeface="+mn-cs"/>
+            <a:sym typeface="Gill Sans"/>
+          </a:defRPr>
+        </a:defPPr>
+        <a:lvl1pPr marL="0" marR="0" indent="0" algn="l" defTabSz="914400" rtl="0" fontAlgn="auto" latinLnBrk="1" hangingPunct="0">
+          <a:lnSpc>
+            <a:spcPct val="100000"/>
+          </a:lnSpc>
+          <a:spcBef>
+            <a:spcPts val="0"/>
+          </a:spcBef>
+          <a:spcAft>
+            <a:spcPts val="0"/>
+          </a:spcAft>
+          <a:buClrTx/>
+          <a:buSzTx/>
+          <a:buFontTx/>
+          <a:buNone/>
+          <a:tabLst/>
+          <a:defRPr kumimoji="0" sz="1800" b="0" i="0" u="none" strike="noStrike" cap="none" spc="0" normalizeH="0" baseline="0">
+            <a:ln>
+              <a:noFill/>
+            </a:ln>
+            <a:solidFill>
+              <a:srgbClr val="000000"/>
+            </a:solidFill>
+            <a:effectLst/>
+            <a:uFillTx/>
+          </a:defRPr>
+        </a:lvl1pPr>
+        <a:lvl2pPr marL="0" marR="0" indent="0" algn="l" defTabSz="914400" rtl="0" fontAlgn="auto" latinLnBrk="1" hangingPunct="0">
+          <a:lnSpc>
+            <a:spcPct val="100000"/>
+          </a:lnSpc>
+          <a:spcBef>
+            <a:spcPts val="0"/>
+          </a:spcBef>
+          <a:spcAft>
+            <a:spcPts val="0"/>
+          </a:spcAft>
+          <a:buClrTx/>
+          <a:buSzTx/>
+          <a:buFontTx/>
+          <a:buNone/>
+          <a:tabLst/>
+          <a:defRPr kumimoji="0" sz="1800" b="0" i="0" u="none" strike="noStrike" cap="none" spc="0" normalizeH="0" baseline="0">
+            <a:ln>
+              <a:noFill/>
+            </a:ln>
+            <a:solidFill>
+              <a:srgbClr val="000000"/>
+            </a:solidFill>
+            <a:effectLst/>
+            <a:uFillTx/>
+          </a:defRPr>
+        </a:lvl2pPr>
+        <a:lvl3pPr marL="0" marR="0" indent="0" algn="l" defTabSz="914400" rtl="0" fontAlgn="auto" latinLnBrk="1" hangingPunct="0">
+          <a:lnSpc>
+            <a:spcPct val="100000"/>
+          </a:lnSpc>
+          <a:spcBef>
+            <a:spcPts val="0"/>
+          </a:spcBef>
+          <a:spcAft>
+            <a:spcPts val="0"/>
+          </a:spcAft>
+          <a:buClrTx/>
+          <a:buSzTx/>
+          <a:buFontTx/>
+          <a:buNone/>
+          <a:tabLst/>
+          <a:defRPr kumimoji="0" sz="1800" b="0" i="0" u="none" strike="noStrike" cap="none" spc="0" normalizeH="0" baseline="0">
+            <a:ln>
+              <a:noFill/>
+            </a:ln>
+            <a:solidFill>
+              <a:srgbClr val="000000"/>
+            </a:solidFill>
+            <a:effectLst/>
+            <a:uFillTx/>
+          </a:defRPr>
+        </a:lvl3pPr>
+        <a:lvl4pPr marL="0" marR="0" indent="0" algn="l" defTabSz="914400" rtl="0" fontAlgn="auto" latinLnBrk="1" hangingPunct="0">
+          <a:lnSpc>
+            <a:spcPct val="100000"/>
+          </a:lnSpc>
+          <a:spcBef>
+            <a:spcPts val="0"/>
+          </a:spcBef>
+          <a:spcAft>
+            <a:spcPts val="0"/>
+          </a:spcAft>
+          <a:buClrTx/>
+          <a:buSzTx/>
+          <a:buFontTx/>
+          <a:buNone/>
+          <a:tabLst/>
+          <a:defRPr kumimoji="0" sz="1800" b="0" i="0" u="none" strike="noStrike" cap="none" spc="0" normalizeH="0" baseline="0">
+            <a:ln>
+              <a:noFill/>
+            </a:ln>
+            <a:solidFill>
+              <a:srgbClr val="000000"/>
+            </a:solidFill>
+            <a:effectLst/>
+            <a:uFillTx/>
+          </a:defRPr>
+        </a:lvl4pPr>
+        <a:lvl5pPr marL="0" marR="0" indent="0" algn="l" defTabSz="914400" rtl="0" fontAlgn="auto" latinLnBrk="1" hangingPunct="0">
+          <a:lnSpc>
+            <a:spcPct val="100000"/>
+          </a:lnSpc>
+          <a:spcBef>
+            <a:spcPts val="0"/>
+          </a:spcBef>
+          <a:spcAft>
+            <a:spcPts val="0"/>
+          </a:spcAft>
+          <a:buClrTx/>
+          <a:buSzTx/>
+          <a:buFontTx/>
+          <a:buNone/>
+          <a:tabLst/>
+          <a:defRPr kumimoji="0" sz="1800" b="0" i="0" u="none" strike="noStrike" cap="none" spc="0" normalizeH="0" baseline="0">
+            <a:ln>
+              <a:noFill/>
+            </a:ln>
+            <a:solidFill>
+              <a:srgbClr val="000000"/>
+            </a:solidFill>
+            <a:effectLst/>
+            <a:uFillTx/>
+          </a:defRPr>
+        </a:lvl5pPr>
+        <a:lvl6pPr marL="0" marR="0" indent="0" algn="l" defTabSz="914400" rtl="0" fontAlgn="auto" latinLnBrk="1" hangingPunct="0">
+          <a:lnSpc>
+            <a:spcPct val="100000"/>
+          </a:lnSpc>
+          <a:spcBef>
+            <a:spcPts val="0"/>
+          </a:spcBef>
+          <a:spcAft>
+            <a:spcPts val="0"/>
+          </a:spcAft>
+          <a:buClrTx/>
+          <a:buSzTx/>
+          <a:buFontTx/>
+          <a:buNone/>
+          <a:tabLst/>
+          <a:defRPr kumimoji="0" sz="1800" b="0" i="0" u="none" strike="noStrike" cap="none" spc="0" normalizeH="0" baseline="0">
+            <a:ln>
+              <a:noFill/>
+            </a:ln>
+            <a:solidFill>
+              <a:srgbClr val="000000"/>
+            </a:solidFill>
+            <a:effectLst/>
+            <a:uFillTx/>
+          </a:defRPr>
+        </a:lvl6pPr>
+        <a:lvl7pPr marL="0" marR="0" indent="0" algn="l" defTabSz="914400" rtl="0" fontAlgn="auto" latinLnBrk="1" hangingPunct="0">
+          <a:lnSpc>
+            <a:spcPct val="100000"/>
+          </a:lnSpc>
+          <a:spcBef>
+            <a:spcPts val="0"/>
+          </a:spcBef>
+          <a:spcAft>
+            <a:spcPts val="0"/>
+          </a:spcAft>
+          <a:buClrTx/>
+          <a:buSzTx/>
+          <a:buFontTx/>
+          <a:buNone/>
+          <a:tabLst/>
+          <a:defRPr kumimoji="0" sz="1800" b="0" i="0" u="none" strike="noStrike" cap="none" spc="0" normalizeH="0" baseline="0">
+            <a:ln>
+              <a:noFill/>
+            </a:ln>
+            <a:solidFill>
+              <a:srgbClr val="000000"/>
+            </a:solidFill>
+            <a:effectLst/>
+            <a:uFillTx/>
+          </a:defRPr>
+        </a:lvl7pPr>
+        <a:lvl8pPr marL="0" marR="0" indent="0" algn="l" defTabSz="914400" rtl="0" fontAlgn="auto" latinLnBrk="1" hangingPunct="0">
+          <a:lnSpc>
+            <a:spcPct val="100000"/>
+          </a:lnSpc>
+          <a:spcBef>
+            <a:spcPts val="0"/>
+          </a:spcBef>
+          <a:spcAft>
+            <a:spcPts val="0"/>
+          </a:spcAft>
+          <a:buClrTx/>
+          <a:buSzTx/>
+          <a:buFontTx/>
+          <a:buNone/>
+          <a:tabLst/>
+          <a:defRPr kumimoji="0" sz="1800" b="0" i="0" u="none" strike="noStrike" cap="none" spc="0" normalizeH="0" baseline="0">
+            <a:ln>
+              <a:noFill/>
+            </a:ln>
+            <a:solidFill>
+              <a:srgbClr val="000000"/>
+            </a:solidFill>
+            <a:effectLst/>
+            <a:uFillTx/>
+          </a:defRPr>
+        </a:lvl8pPr>
+        <a:lvl9pPr marL="0" marR="0" indent="0" algn="l" defTabSz="914400" rtl="0" fontAlgn="auto" latinLnBrk="1" hangingPunct="0">
+          <a:lnSpc>
+            <a:spcPct val="100000"/>
+          </a:lnSpc>
+          <a:spcBef>
+            <a:spcPts val="0"/>
+          </a:spcBef>
+          <a:spcAft>
+            <a:spcPts val="0"/>
+          </a:spcAft>
+          <a:buClrTx/>
+          <a:buSzTx/>
+          <a:buFontTx/>
+          <a:buNone/>
+          <a:tabLst/>
+          <a:defRPr kumimoji="0" sz="1800" b="0" i="0" u="none" strike="noStrike" cap="none" spc="0" normalizeH="0" baseline="0">
+            <a:ln>
+              <a:noFill/>
+            </a:ln>
+            <a:solidFill>
+              <a:srgbClr val="000000"/>
+            </a:solidFill>
+            <a:effectLst/>
+            <a:uFillTx/>
+          </a:defRPr>
+        </a:lvl9pPr>
+      </a:lstStyle>
+      <a:style>
+        <a:lnRef idx="0">
+          <a:scrgbClr r="0" g="0" b="0"/>
+        </a:lnRef>
+        <a:fillRef idx="0">
+          <a:scrgbClr r="0" g="0" b="0"/>
+        </a:fillRef>
+        <a:effectRef idx="0">
+          <a:scrgbClr r="0" g="0" b="0"/>
+        </a:effectRef>
+        <a:fontRef idx="none"/>
+      </a:style>
+    </a:txDef>
   </a:objectDefaults>
   <a:extraClrSchemeLst/>
+  <a:extLst>
+    <a:ext uri="{05A4C25C-085E-4340-85A3-A5531E510DB2}">
+      <thm15:themeFamily xmlns:thm15="http://schemas.microsoft.com/office/thememl/2012/main" name="tf56550644_win32_fixed" id="{627B62D5-4D79-4A6D-99BA-54E059AD6215}" vid="{B374CE13-22A3-412A-9793-F013EE1726FD}"/>
+    </a:ext>
+  </a:extLst>
 </a:theme>
+</file>
+
+<file path=ppt/theme/theme2.xml><?xml version="1.0" encoding="utf-8"?>
+<a:theme xmlns:a="http://schemas.openxmlformats.org/drawingml/2006/main" name="Office Theme">
+  <a:themeElements>
+    <a:clrScheme name="Office">
+      <a:dk1>
+        <a:sysClr val="windowText" lastClr="000000"/>
+      </a:dk1>
+      <a:lt1>
+        <a:sysClr val="window" lastClr="FFFFFF"/>
+      </a:lt1>
+      <a:dk2>
+        <a:srgbClr val="44546A"/>
+      </a:dk2>
+      <a:lt2>
+        <a:srgbClr val="E7E6E6"/>
+      </a:lt2>
+      <a:accent1>
+        <a:srgbClr val="4472C4"/>
+      </a:accent1>
+      <a:accent2>
+        <a:srgbClr val="ED7D31"/>
+      </a:accent2>
+      <a:accent3>
+        <a:srgbClr val="A5A5A5"/>
+      </a:accent3>
+      <a:accent4>
+        <a:srgbClr val="FFC000"/>
+      </a:accent4>
+      <a:accent5>
+        <a:srgbClr val="5B9BD5"/>
+      </a:accent5>
+      <a:accent6>
+        <a:srgbClr val="70AD47"/>
+      </a:accent6>
+      <a:hlink>
+        <a:srgbClr val="0563C1"/>
+      </a:hlink>
+      <a:folHlink>
+        <a:srgbClr val="954F72"/>
+      </a:folHlink>
+    </a:clrScheme>
+    <a:fontScheme name="Office">
+      <a:majorFont>
+        <a:latin typeface="Calibri Light" panose="020F0302020204030204"/>
+        <a:ea typeface=""/>
+        <a:cs typeface=""/>
+        <a:font script="Jpan" typeface="游ゴシック Light"/>
+        <a:font script="Hang" typeface="맑은 고딕"/>
+        <a:font script="Hans" typeface="等线 Light"/>
+        <a:font script="Hant" typeface="新細明體"/>
+        <a:font script="Arab" typeface="Times New Roman"/>
+        <a:font script="Hebr" typeface="Times New Roman"/>
+        <a:font script="Thai" typeface="Angsana New"/>
+        <a:font script="Ethi" typeface="Nyala"/>
+        <a:font script="Beng" typeface="Vrinda"/>
+        <a:font script="Gujr" typeface="Shruti"/>
+        <a:font script="Khmr" typeface="MoolBoran"/>
+        <a:font script="Knda" typeface="Tunga"/>
+        <a:font script="Guru" typeface="Raavi"/>
+        <a:font script="Cans" typeface="Euphemia"/>
+        <a:font script="Cher" typeface="Plantagenet Cherokee"/>
+        <a:font script="Yiii" typeface="Microsoft Yi Baiti"/>
+        <a:font script="Tibt" typeface="Microsoft Himalaya"/>
+        <a:font script="Thaa" typeface="MV Boli"/>
+        <a:font script="Deva" typeface="Mangal"/>
+        <a:font script="Telu" typeface="Gautami"/>
+        <a:font script="Taml" typeface="Latha"/>
+        <a:font script="Syrc" typeface="Estrangelo Edessa"/>
+        <a:font script="Orya" typeface="Kalinga"/>
+        <a:font script="Mlym" typeface="Kartika"/>
+        <a:font script="Laoo" typeface="DokChampa"/>
+        <a:font script="Sinh" typeface="Iskoola Pota"/>
+        <a:font script="Mong" typeface="Mongolian Baiti"/>
+        <a:font script="Viet" typeface="Times New Roman"/>
+        <a:font script="Uigh" typeface="Microsoft Uighur"/>
+        <a:font script="Geor" typeface="Sylfaen"/>
+        <a:font script="Armn" typeface="Arial"/>
+        <a:font script="Bugi" typeface="Leelawadee UI"/>
+        <a:font script="Bopo" typeface="Microsoft JhengHei"/>
+        <a:font script="Java" typeface="Javanese Text"/>
+        <a:font script="Lisu" typeface="Segoe UI"/>
+        <a:font script="Mymr" typeface="Myanmar Text"/>
+        <a:font script="Nkoo" typeface="Ebrima"/>
+        <a:font script="Olck" typeface="Nirmala UI"/>
+        <a:font script="Osma" typeface="Ebrima"/>
+        <a:font script="Phag" typeface="Phagspa"/>
+        <a:font script="Syrn" typeface="Estrangelo Edessa"/>
+        <a:font script="Syrj" typeface="Estrangelo Edessa"/>
+        <a:font script="Syre" typeface="Estrangelo Edessa"/>
+        <a:font script="Sora" typeface="Nirmala UI"/>
+        <a:font script="Tale" typeface="Microsoft Tai Le"/>
+        <a:font script="Talu" typeface="Microsoft New Tai Lue"/>
+        <a:font script="Tfng" typeface="Ebrima"/>
+      </a:majorFont>
+      <a:minorFont>
+        <a:latin typeface="Calibri" panose="020F0502020204030204"/>
+        <a:ea typeface=""/>
+        <a:cs typeface=""/>
+        <a:font script="Jpan" typeface="游ゴシック"/>
+        <a:font script="Hang" typeface="맑은 고딕"/>
+        <a:font script="Hans" typeface="等线"/>
+        <a:font script="Hant" typeface="新細明體"/>
+        <a:font script="Arab" typeface="Arial"/>
+        <a:font script="Hebr" typeface="Arial"/>
+        <a:font script="Thai" typeface="Cordia New"/>
+        <a:font script="Ethi" typeface="Nyala"/>
+        <a:font script="Beng" typeface="Vrinda"/>
+        <a:font script="Gujr" typeface="Shruti"/>
+        <a:font script="Khmr" typeface="DaunPenh"/>
+        <a:font script="Knda" typeface="Tunga"/>
+        <a:font script="Guru" typeface="Raavi"/>
+        <a:font script="Cans" typeface="Euphemia"/>
+        <a:font script="Cher" typeface="Plantagenet Cherokee"/>
+        <a:font script="Yiii" typeface="Microsoft Yi Baiti"/>
+        <a:font script="Tibt" typeface="Microsoft Himalaya"/>
+        <a:font script="Thaa" typeface="MV Boli"/>
+        <a:font script="Deva" typeface="Mangal"/>
+        <a:font script="Telu" typeface="Gautami"/>
+        <a:font script="Taml" typeface="Latha"/>
+        <a:font script="Syrc" typeface="Estrangelo Edessa"/>
+        <a:font script="Orya" typeface="Kalinga"/>
+        <a:font script="Mlym" typeface="Kartika"/>
+        <a:font script="Laoo" typeface="DokChampa"/>
+        <a:font script="Sinh" typeface="Iskoola Pota"/>
+        <a:font script="Mong" typeface="Mongolian Baiti"/>
+        <a:font script="Viet" typeface="Arial"/>
+        <a:font script="Uigh" typeface="Microsoft Uighur"/>
+        <a:font script="Geor" typeface="Sylfaen"/>
+        <a:font script="Armn" typeface="Arial"/>
+        <a:font script="Bugi" typeface="Leelawadee UI"/>
+        <a:font script="Bopo" typeface="Microsoft JhengHei"/>
+        <a:font script="Java" typeface="Javanese Text"/>
+        <a:font script="Lisu" typeface="Segoe UI"/>
+        <a:font script="Mymr" typeface="Myanmar Text"/>
+        <a:font script="Nkoo" typeface="Ebrima"/>
+        <a:font script="Olck" typeface="Nirmala UI"/>
+        <a:font script="Osma" typeface="Ebrima"/>
+        <a:font script="Phag" typeface="Phagspa"/>
+        <a:font script="Syrn" typeface="Estrangelo Edessa"/>
+        <a:font script="Syrj" typeface="Estrangelo Edessa"/>
+        <a:font script="Syre" typeface="Estrangelo Edessa"/>
+        <a:font script="Sora" typeface="Nirmala UI"/>
+        <a:font script="Tale" typeface="Microsoft Tai Le"/>
+        <a:font script="Talu" typeface="Microsoft New Tai Lue"/>
+        <a:font script="Tfng" typeface="Ebrima"/>
+      </a:minorFont>
+    </a:fontScheme>
+    <a:fmtScheme name="Office">
+      <a:fillStyleLst>
+        <a:solidFill>
+          <a:schemeClr val="phClr"/>
+        </a:solidFill>
+        <a:gradFill rotWithShape="1">
+          <a:gsLst>
+            <a:gs pos="0">
+              <a:schemeClr val="phClr">
+                <a:lumMod val="110000"/>
+                <a:satMod val="105000"/>
+                <a:tint val="67000"/>
+              </a:schemeClr>
+            </a:gs>
+            <a:gs pos="50000">
+              <a:schemeClr val="phClr">
+                <a:lumMod val="105000"/>
+                <a:satMod val="103000"/>
+                <a:tint val="73000"/>
+              </a:schemeClr>
+            </a:gs>
+            <a:gs pos="100000">
+              <a:schemeClr val="phClr">
+                <a:lumMod val="105000"/>
+                <a:satMod val="109000"/>
+                <a:tint val="81000"/>
+              </a:schemeClr>
+            </a:gs>
+          </a:gsLst>
+          <a:lin ang="5400000" scaled="0"/>
+        </a:gradFill>
+        <a:gradFill rotWithShape="1">
+          <a:gsLst>
+            <a:gs pos="0">
+              <a:schemeClr val="phClr">
+                <a:satMod val="103000"/>
+                <a:lumMod val="102000"/>
+                <a:tint val="94000"/>
+              </a:schemeClr>
+            </a:gs>
+            <a:gs pos="50000">
+              <a:schemeClr val="phClr">
+                <a:satMod val="110000"/>
+                <a:lumMod val="100000"/>
+                <a:shade val="100000"/>
+              </a:schemeClr>
+            </a:gs>
+            <a:gs pos="100000">
+              <a:schemeClr val="phClr">
+                <a:lumMod val="99000"/>
+                <a:satMod val="120000"/>
+                <a:shade val="78000"/>
+              </a:schemeClr>
+            </a:gs>
+          </a:gsLst>
+          <a:lin ang="5400000" scaled="0"/>
+        </a:gradFill>
+      </a:fillStyleLst>
+      <a:lnStyleLst>
+        <a:ln w="6350" cap="flat" cmpd="sng" algn="ctr">
+          <a:solidFill>
+            <a:schemeClr val="phClr"/>
+          </a:solidFill>
+          <a:prstDash val="solid"/>
+          <a:miter lim="800000"/>
+        </a:ln>
+        <a:ln w="12700" cap="flat" cmpd="sng" algn="ctr">
+          <a:solidFill>
+            <a:schemeClr val="phClr"/>
+          </a:solidFill>
+          <a:prstDash val="solid"/>
+          <a:miter lim="800000"/>
+        </a:ln>
+        <a:ln w="19050" cap="flat" cmpd="sng" algn="ctr">
+          <a:solidFill>
+            <a:schemeClr val="phClr"/>
+          </a:solidFill>
+          <a:prstDash val="solid"/>
+          <a:miter lim="800000"/>
+        </a:ln>
+      </a:lnStyleLst>
+      <a:effectStyleLst>
+        <a:effectStyle>
+          <a:effectLst/>
+        </a:effectStyle>
+        <a:effectStyle>
+          <a:effectLst/>
+        </a:effectStyle>
+        <a:effectStyle>
+          <a:effectLst>
+            <a:outerShdw blurRad="57150" dist="19050" dir="5400000" algn="ctr" rotWithShape="0">
+              <a:srgbClr val="000000">
+                <a:alpha val="63000"/>
+              </a:srgbClr>
+            </a:outerShdw>
+          </a:effectLst>
+        </a:effectStyle>
+      </a:effectStyleLst>
+      <a:bgFillStyleLst>
+        <a:solidFill>
+          <a:schemeClr val="phClr"/>
+        </a:solidFill>
+        <a:solidFill>
+          <a:schemeClr val="phClr">
+            <a:tint val="95000"/>
+            <a:satMod val="170000"/>
+          </a:schemeClr>
+        </a:solidFill>
+        <a:gradFill rotWithShape="1">
+          <a:gsLst>
+            <a:gs pos="0">
+              <a:schemeClr val="phClr">
+                <a:tint val="93000"/>
+                <a:satMod val="150000"/>
+                <a:shade val="98000"/>
+                <a:lumMod val="102000"/>
+              </a:schemeClr>
+            </a:gs>
+            <a:gs pos="50000">
+              <a:schemeClr val="phClr">
+                <a:tint val="98000"/>
+                <a:satMod val="130000"/>
+                <a:shade val="90000"/>
+                <a:lumMod val="103000"/>
+              </a:schemeClr>
+            </a:gs>
+            <a:gs pos="100000">
+              <a:schemeClr val="phClr">
+                <a:shade val="63000"/>
+                <a:satMod val="120000"/>
+              </a:schemeClr>
+            </a:gs>
+          </a:gsLst>
+          <a:lin ang="5400000" scaled="0"/>
+        </a:gradFill>
+      </a:bgFillStyleLst>
+    </a:fmtScheme>
+  </a:themeElements>
+  <a:objectDefaults/>
+  <a:extraClrSchemeLst/>
+  <a:extLst>
+    <a:ext uri="{05A4C25C-085E-4340-85A3-A5531E510DB2}">
+      <thm15:themeFamily xmlns:thm15="http://schemas.microsoft.com/office/thememl/2012/main" name="Office Theme" id="{62F939B6-93AF-4DB8-9C6B-D6C7DFDC589F}" vid="{4A3C46E8-61CC-4603-A589-7422A47A8E4A}"/>
+    </a:ext>
+  </a:extLst>
+</a:theme>
+</file>
+
+<file path=ppt/theme/theme3.xml><?xml version="1.0" encoding="utf-8"?>
+<a:theme xmlns:a="http://schemas.openxmlformats.org/drawingml/2006/main" name="Office Theme">
+  <a:themeElements>
+    <a:clrScheme name="Office">
+      <a:dk1>
+        <a:sysClr val="windowText" lastClr="000000"/>
+      </a:dk1>
+      <a:lt1>
+        <a:sysClr val="window" lastClr="FFFFFF"/>
+      </a:lt1>
+      <a:dk2>
+        <a:srgbClr val="44546A"/>
+      </a:dk2>
+      <a:lt2>
+        <a:srgbClr val="E7E6E6"/>
+      </a:lt2>
+      <a:accent1>
+        <a:srgbClr val="4472C4"/>
+      </a:accent1>
+      <a:accent2>
+        <a:srgbClr val="ED7D31"/>
+      </a:accent2>
+      <a:accent3>
+        <a:srgbClr val="A5A5A5"/>
+      </a:accent3>
+      <a:accent4>
+        <a:srgbClr val="FFC000"/>
+      </a:accent4>
+      <a:accent5>
+        <a:srgbClr val="5B9BD5"/>
+      </a:accent5>
+      <a:accent6>
+        <a:srgbClr val="70AD47"/>
+      </a:accent6>
+      <a:hlink>
+        <a:srgbClr val="0563C1"/>
+      </a:hlink>
+      <a:folHlink>
+        <a:srgbClr val="954F72"/>
+      </a:folHlink>
+    </a:clrScheme>
+    <a:fontScheme name="Office">
+      <a:majorFont>
+        <a:latin typeface="Calibri Light" panose="020F0302020204030204"/>
+        <a:ea typeface=""/>
+        <a:cs typeface=""/>
+        <a:font script="Jpan" typeface="游ゴシック Light"/>
+        <a:font script="Hang" typeface="맑은 고딕"/>
+        <a:font script="Hans" typeface="等线 Light"/>
+        <a:font script="Hant" typeface="新細明體"/>
+        <a:font script="Arab" typeface="Times New Roman"/>
+        <a:font script="Hebr" typeface="Times New Roman"/>
+        <a:font script="Thai" typeface="Angsana New"/>
+        <a:font script="Ethi" typeface="Nyala"/>
+        <a:font script="Beng" typeface="Vrinda"/>
+        <a:font script="Gujr" typeface="Shruti"/>
+        <a:font script="Khmr" typeface="MoolBoran"/>
+        <a:font script="Knda" typeface="Tunga"/>
+        <a:font script="Guru" typeface="Raavi"/>
+        <a:font script="Cans" typeface="Euphemia"/>
+        <a:font script="Cher" typeface="Plantagenet Cherokee"/>
+        <a:font script="Yiii" typeface="Microsoft Yi Baiti"/>
+        <a:font script="Tibt" typeface="Microsoft Himalaya"/>
+        <a:font script="Thaa" typeface="MV Boli"/>
+        <a:font script="Deva" typeface="Mangal"/>
+        <a:font script="Telu" typeface="Gautami"/>
+        <a:font script="Taml" typeface="Latha"/>
+        <a:font script="Syrc" typeface="Estrangelo Edessa"/>
+        <a:font script="Orya" typeface="Kalinga"/>
+        <a:font script="Mlym" typeface="Kartika"/>
+        <a:font script="Laoo" typeface="DokChampa"/>
+        <a:font script="Sinh" typeface="Iskoola Pota"/>
+        <a:font script="Mong" typeface="Mongolian Baiti"/>
+        <a:font script="Viet" typeface="Times New Roman"/>
+        <a:font script="Uigh" typeface="Microsoft Uighur"/>
+        <a:font script="Geor" typeface="Sylfaen"/>
+        <a:font script="Armn" typeface="Arial"/>
+        <a:font script="Bugi" typeface="Leelawadee UI"/>
+        <a:font script="Bopo" typeface="Microsoft JhengHei"/>
+        <a:font script="Java" typeface="Javanese Text"/>
+        <a:font script="Lisu" typeface="Segoe UI"/>
+        <a:font script="Mymr" typeface="Myanmar Text"/>
+        <a:font script="Nkoo" typeface="Ebrima"/>
+        <a:font script="Olck" typeface="Nirmala UI"/>
+        <a:font script="Osma" typeface="Ebrima"/>
+        <a:font script="Phag" typeface="Phagspa"/>
+        <a:font script="Syrn" typeface="Estrangelo Edessa"/>
+        <a:font script="Syrj" typeface="Estrangelo Edessa"/>
+        <a:font script="Syre" typeface="Estrangelo Edessa"/>
+        <a:font script="Sora" typeface="Nirmala UI"/>
+        <a:font script="Tale" typeface="Microsoft Tai Le"/>
+        <a:font script="Talu" typeface="Microsoft New Tai Lue"/>
+        <a:font script="Tfng" typeface="Ebrima"/>
+      </a:majorFont>
+      <a:minorFont>
+        <a:latin typeface="Calibri" panose="020F0502020204030204"/>
+        <a:ea typeface=""/>
+        <a:cs typeface=""/>
+        <a:font script="Jpan" typeface="游ゴシック"/>
+        <a:font script="Hang" typeface="맑은 고딕"/>
+        <a:font script="Hans" typeface="等线"/>
+        <a:font script="Hant" typeface="新細明體"/>
+        <a:font script="Arab" typeface="Arial"/>
+        <a:font script="Hebr" typeface="Arial"/>
+        <a:font script="Thai" typeface="Cordia New"/>
+        <a:font script="Ethi" typeface="Nyala"/>
+        <a:font script="Beng" typeface="Vrinda"/>
+        <a:font script="Gujr" typeface="Shruti"/>
+        <a:font script="Khmr" typeface="DaunPenh"/>
+        <a:font script="Knda" typeface="Tunga"/>
+        <a:font script="Guru" typeface="Raavi"/>
+        <a:font script="Cans" typeface="Euphemia"/>
+        <a:font script="Cher" typeface="Plantagenet Cherokee"/>
+        <a:font script="Yiii" typeface="Microsoft Yi Baiti"/>
+        <a:font script="Tibt" typeface="Microsoft Himalaya"/>
+        <a:font script="Thaa" typeface="MV Boli"/>
+        <a:font script="Deva" typeface="Mangal"/>
+        <a:font script="Telu" typeface="Gautami"/>
+        <a:font script="Taml" typeface="Latha"/>
+        <a:font script="Syrc" typeface="Estrangelo Edessa"/>
+        <a:font script="Orya" typeface="Kalinga"/>
+        <a:font script="Mlym" typeface="Kartika"/>
+        <a:font script="Laoo" typeface="DokChampa"/>
+        <a:font script="Sinh" typeface="Iskoola Pota"/>
+        <a:font script="Mong" typeface="Mongolian Baiti"/>
+        <a:font script="Viet" typeface="Arial"/>
+        <a:font script="Uigh" typeface="Microsoft Uighur"/>
+        <a:font script="Geor" typeface="Sylfaen"/>
+        <a:font script="Armn" typeface="Arial"/>
+        <a:font script="Bugi" typeface="Leelawadee UI"/>
+        <a:font script="Bopo" typeface="Microsoft JhengHei"/>
+        <a:font script="Java" typeface="Javanese Text"/>
+        <a:font script="Lisu" typeface="Segoe UI"/>
+        <a:font script="Mymr" typeface="Myanmar Text"/>
+        <a:font script="Nkoo" typeface="Ebrima"/>
+        <a:font script="Olck" typeface="Nirmala UI"/>
+        <a:font script="Osma" typeface="Ebrima"/>
+        <a:font script="Phag" typeface="Phagspa"/>
+        <a:font script="Syrn" typeface="Estrangelo Edessa"/>
+        <a:font script="Syrj" typeface="Estrangelo Edessa"/>
+        <a:font script="Syre" typeface="Estrangelo Edessa"/>
+        <a:font script="Sora" typeface="Nirmala UI"/>
+        <a:font script="Tale" typeface="Microsoft Tai Le"/>
+        <a:font script="Talu" typeface="Microsoft New Tai Lue"/>
+        <a:font script="Tfng" typeface="Ebrima"/>
+      </a:minorFont>
+    </a:fontScheme>
+    <a:fmtScheme name="Office">
+      <a:fillStyleLst>
+        <a:solidFill>
+          <a:schemeClr val="phClr"/>
+        </a:solidFill>
+        <a:gradFill rotWithShape="1">
+          <a:gsLst>
+            <a:gs pos="0">
+              <a:schemeClr val="phClr">
+                <a:lumMod val="110000"/>
+                <a:satMod val="105000"/>
+                <a:tint val="67000"/>
+              </a:schemeClr>
+            </a:gs>
+            <a:gs pos="50000">
+              <a:schemeClr val="phClr">
+                <a:lumMod val="105000"/>
+                <a:satMod val="103000"/>
+                <a:tint val="73000"/>
+              </a:schemeClr>
+            </a:gs>
+            <a:gs pos="100000">
+              <a:schemeClr val="phClr">
+                <a:lumMod val="105000"/>
+                <a:satMod val="109000"/>
+                <a:tint val="81000"/>
+              </a:schemeClr>
+            </a:gs>
+          </a:gsLst>
+          <a:lin ang="5400000" scaled="0"/>
+        </a:gradFill>
+        <a:gradFill rotWithShape="1">
+          <a:gsLst>
+            <a:gs pos="0">
+              <a:schemeClr val="phClr">
+                <a:satMod val="103000"/>
+                <a:lumMod val="102000"/>
+                <a:tint val="94000"/>
+              </a:schemeClr>
+            </a:gs>
+            <a:gs pos="50000">
+              <a:schemeClr val="phClr">
+                <a:satMod val="110000"/>
+                <a:lumMod val="100000"/>
+                <a:shade val="100000"/>
+              </a:schemeClr>
+            </a:gs>
+            <a:gs pos="100000">
+              <a:schemeClr val="phClr">
+                <a:lumMod val="99000"/>
+                <a:satMod val="120000"/>
+                <a:shade val="78000"/>
+              </a:schemeClr>
+            </a:gs>
+          </a:gsLst>
+          <a:lin ang="5400000" scaled="0"/>
+        </a:gradFill>
+      </a:fillStyleLst>
+      <a:lnStyleLst>
+        <a:ln w="6350" cap="flat" cmpd="sng" algn="ctr">
+          <a:solidFill>
+            <a:schemeClr val="phClr"/>
+          </a:solidFill>
+          <a:prstDash val="solid"/>
+          <a:miter lim="800000"/>
+        </a:ln>
+        <a:ln w="12700" cap="flat" cmpd="sng" algn="ctr">
+          <a:solidFill>
+            <a:schemeClr val="phClr"/>
+          </a:solidFill>
+          <a:prstDash val="solid"/>
+          <a:miter lim="800000"/>
+        </a:ln>
+        <a:ln w="19050" cap="flat" cmpd="sng" algn="ctr">
+          <a:solidFill>
+            <a:schemeClr val="phClr"/>
+          </a:solidFill>
+          <a:prstDash val="solid"/>
+          <a:miter lim="800000"/>
+        </a:ln>
+      </a:lnStyleLst>
+      <a:effectStyleLst>
+        <a:effectStyle>
+          <a:effectLst/>
+        </a:effectStyle>
+        <a:effectStyle>
+          <a:effectLst/>
+        </a:effectStyle>
+        <a:effectStyle>
+          <a:effectLst>
+            <a:outerShdw blurRad="57150" dist="19050" dir="5400000" algn="ctr" rotWithShape="0">
+              <a:srgbClr val="000000">
+                <a:alpha val="63000"/>
+              </a:srgbClr>
+            </a:outerShdw>
+          </a:effectLst>
+        </a:effectStyle>
+      </a:effectStyleLst>
+      <a:bgFillStyleLst>
+        <a:solidFill>
+          <a:schemeClr val="phClr"/>
+        </a:solidFill>
+        <a:solidFill>
+          <a:schemeClr val="phClr">
+            <a:tint val="95000"/>
+            <a:satMod val="170000"/>
+          </a:schemeClr>
+        </a:solidFill>
+        <a:gradFill rotWithShape="1">
+          <a:gsLst>
+            <a:gs pos="0">
+              <a:schemeClr val="phClr">
+                <a:tint val="93000"/>
+                <a:satMod val="150000"/>
+                <a:shade val="98000"/>
+                <a:lumMod val="102000"/>
+              </a:schemeClr>
+            </a:gs>
+            <a:gs pos="50000">
+              <a:schemeClr val="phClr">
+                <a:tint val="98000"/>
+                <a:satMod val="130000"/>
+                <a:shade val="90000"/>
+                <a:lumMod val="103000"/>
+              </a:schemeClr>
+            </a:gs>
+            <a:gs pos="100000">
+              <a:schemeClr val="phClr">
+                <a:shade val="63000"/>
+                <a:satMod val="120000"/>
+              </a:schemeClr>
+            </a:gs>
+          </a:gsLst>
+          <a:lin ang="5400000" scaled="0"/>
+        </a:gradFill>
+      </a:bgFillStyleLst>
+    </a:fmtScheme>
+  </a:themeElements>
+  <a:objectDefaults/>
+  <a:extraClrSchemeLst/>
+  <a:extLst>
+    <a:ext uri="{05A4C25C-085E-4340-85A3-A5531E510DB2}">
+      <thm15:themeFamily xmlns:thm15="http://schemas.microsoft.com/office/thememl/2012/main" name="Office Theme" id="{62F939B6-93AF-4DB8-9C6B-D6C7DFDC589F}" vid="{4A3C46E8-61CC-4603-A589-7422A47A8E4A}"/>
+    </a:ext>
+  </a:extLst>
+</a:theme>
+</file>
+
+<file path=customXml/item1.xml><?xml version="1.0" encoding="utf-8"?>
+<p:properties xmlns:p="http://schemas.microsoft.com/office/2006/metadata/properties" xmlns:xsi="http://www.w3.org/2001/XMLSchema-instance" xmlns:pc="http://schemas.microsoft.com/office/infopath/2007/PartnerControls">
+  <documentManagement>
+    <_ip_UnifiedCompliancePolicyUIAction xmlns="http://schemas.microsoft.com/sharepoint/v3" xsi:nil="true"/>
+    <Image xmlns="71af3243-3dd4-4a8d-8c0d-dd76da1f02a5">
+      <Url xsi:nil="true"/>
+      <Description xsi:nil="true"/>
+    </Image>
+    <Status xmlns="71af3243-3dd4-4a8d-8c0d-dd76da1f02a5">Not started</Status>
+    <Background xmlns="71af3243-3dd4-4a8d-8c0d-dd76da1f02a5">false</Background>
+    <_ip_UnifiedCompliancePolicyProperties xmlns="http://schemas.microsoft.com/sharepoint/v3" xsi:nil="true"/>
+    <ImageTagsTaxHTField xmlns="71af3243-3dd4-4a8d-8c0d-dd76da1f02a5">
+      <Terms xmlns="http://schemas.microsoft.com/office/infopath/2007/PartnerControls"/>
+    </ImageTagsTaxHTField>
+    <TaxCatchAll xmlns="230e9df3-be65-4c73-a93b-d1236ebd677e" xsi:nil="true"/>
+    <MediaServiceKeyPoints xmlns="71af3243-3dd4-4a8d-8c0d-dd76da1f02a5" xsi:nil="true"/>
+  </documentManagement>
+</p:properties>
+</file>
+
+<file path=customXml/item2.xml><?xml version="1.0" encoding="utf-8"?>
+<ct:contentTypeSchema xmlns:ct="http://schemas.microsoft.com/office/2006/metadata/contentType" xmlns:ma="http://schemas.microsoft.com/office/2006/metadata/properties/metaAttributes" ct:_="" ma:_="" ma:contentTypeName="Document" ma:contentTypeID="0x01010079F111ED35F8CC479449609E8A0923A6" ma:contentTypeVersion="24" ma:contentTypeDescription="Create a new document." ma:contentTypeScope="" ma:versionID="2d714a3296df14eba7a100bb665443ca">
+  <xsd:schema xmlns:xsd="http://www.w3.org/2001/XMLSchema" xmlns:xs="http://www.w3.org/2001/XMLSchema" xmlns:p="http://schemas.microsoft.com/office/2006/metadata/properties" xmlns:ns1="http://schemas.microsoft.com/sharepoint/v3" xmlns:ns2="71af3243-3dd4-4a8d-8c0d-dd76da1f02a5" xmlns:ns3="16c05727-aa75-4e4a-9b5f-8a80a1165891" xmlns:ns4="230e9df3-be65-4c73-a93b-d1236ebd677e" targetNamespace="http://schemas.microsoft.com/office/2006/metadata/properties" ma:root="true" ma:fieldsID="49549bf45bfbbfb6cffed527380e77e1" ns1:_="" ns2:_="" ns3:_="" ns4:_="">
+    <xsd:import namespace="http://schemas.microsoft.com/sharepoint/v3"/>
+    <xsd:import namespace="71af3243-3dd4-4a8d-8c0d-dd76da1f02a5"/>
+    <xsd:import namespace="16c05727-aa75-4e4a-9b5f-8a80a1165891"/>
+    <xsd:import namespace="230e9df3-be65-4c73-a93b-d1236ebd677e"/>
+    <xsd:element name="properties">
+      <xsd:complexType>
+        <xsd:sequence>
+          <xsd:element name="documentManagement">
+            <xsd:complexType>
+              <xsd:all>
+                <xsd:element ref="ns2:Status" minOccurs="0"/>
+                <xsd:element ref="ns2:Image" minOccurs="0"/>
+                <xsd:element ref="ns2:MediaServiceMetadata" minOccurs="0"/>
+                <xsd:element ref="ns2:MediaServiceFastMetadata" minOccurs="0"/>
+                <xsd:element ref="ns2:MediaServiceOCR" minOccurs="0"/>
+                <xsd:element ref="ns2:MediaServiceAutoTags" minOccurs="0"/>
+                <xsd:element ref="ns2:MediaServiceEventHashCode" minOccurs="0"/>
+                <xsd:element ref="ns2:MediaServiceGenerationTime" minOccurs="0"/>
+                <xsd:element ref="ns3:SharedWithUsers" minOccurs="0"/>
+                <xsd:element ref="ns3:SharedWithDetails" minOccurs="0"/>
+                <xsd:element ref="ns2:MediaServiceAutoKeyPoints" minOccurs="0"/>
+                <xsd:element ref="ns2:MediaServiceKeyPoints" minOccurs="0"/>
+                <xsd:element ref="ns2:MediaServiceDateTaken" minOccurs="0"/>
+                <xsd:element ref="ns1:_ip_UnifiedCompliancePolicyProperties" minOccurs="0"/>
+                <xsd:element ref="ns1:_ip_UnifiedCompliancePolicyUIAction" minOccurs="0"/>
+                <xsd:element ref="ns4:TaxCatchAll" minOccurs="0"/>
+                <xsd:element ref="ns2:ImageTagsTaxHTField" minOccurs="0"/>
+                <xsd:element ref="ns2:MediaServiceLocation" minOccurs="0"/>
+                <xsd:element ref="ns2:MediaLengthInSeconds" minOccurs="0"/>
+                <xsd:element ref="ns2:Background" minOccurs="0"/>
+              </xsd:all>
+            </xsd:complexType>
+          </xsd:element>
+        </xsd:sequence>
+      </xsd:complexType>
+    </xsd:element>
+  </xsd:schema>
+  <xsd:schema xmlns:xsd="http://www.w3.org/2001/XMLSchema" xmlns:xs="http://www.w3.org/2001/XMLSchema" xmlns:dms="http://schemas.microsoft.com/office/2006/documentManagement/types" xmlns:pc="http://schemas.microsoft.com/office/infopath/2007/PartnerControls" targetNamespace="http://schemas.microsoft.com/sharepoint/v3" elementFormDefault="qualified">
+    <xsd:import namespace="http://schemas.microsoft.com/office/2006/documentManagement/types"/>
+    <xsd:import namespace="http://schemas.microsoft.com/office/infopath/2007/PartnerControls"/>
+    <xsd:element name="_ip_UnifiedCompliancePolicyProperties" ma:index="20" nillable="true" ma:displayName="Unified Compliance Policy Properties" ma:hidden="true" ma:internalName="_ip_UnifiedCompliancePolicyProperties" ma:readOnly="false">
+      <xsd:simpleType>
+        <xsd:restriction base="dms:Note"/>
+      </xsd:simpleType>
+    </xsd:element>
+    <xsd:element name="_ip_UnifiedCompliancePolicyUIAction" ma:index="21" nillable="true" ma:displayName="Unified Compliance Policy UI Action" ma:hidden="true" ma:internalName="_ip_UnifiedCompliancePolicyUIAction" ma:readOnly="false">
+      <xsd:simpleType>
+        <xsd:restriction base="dms:Text"/>
+      </xsd:simpleType>
+    </xsd:element>
+  </xsd:schema>
+  <xsd:schema xmlns:xsd="http://www.w3.org/2001/XMLSchema" xmlns:xs="http://www.w3.org/2001/XMLSchema" xmlns:dms="http://schemas.microsoft.com/office/2006/documentManagement/types" xmlns:pc="http://schemas.microsoft.com/office/infopath/2007/PartnerControls" targetNamespace="71af3243-3dd4-4a8d-8c0d-dd76da1f02a5" elementFormDefault="qualified">
+    <xsd:import namespace="http://schemas.microsoft.com/office/2006/documentManagement/types"/>
+    <xsd:import namespace="http://schemas.microsoft.com/office/infopath/2007/PartnerControls"/>
+    <xsd:element name="Status" ma:index="2" nillable="true" ma:displayName="Status" ma:default="Not started" ma:format="Dropdown" ma:internalName="Status" ma:readOnly="false">
+      <xsd:simpleType>
+        <xsd:restriction base="dms:Choice">
+          <xsd:enumeration value="Not started"/>
+          <xsd:enumeration value="In Progress"/>
+          <xsd:enumeration value="Completed"/>
+        </xsd:restriction>
+      </xsd:simpleType>
+    </xsd:element>
+    <xsd:element name="Image" ma:index="3" nillable="true" ma:displayName="Image" ma:format="Image" ma:internalName="Image" ma:readOnly="false">
+      <xsd:complexType>
+        <xsd:complexContent>
+          <xsd:extension base="dms:URL">
+            <xsd:sequence>
+              <xsd:element name="Url" type="dms:ValidUrl" minOccurs="0" nillable="true"/>
+              <xsd:element name="Description" type="xsd:string" nillable="true"/>
+            </xsd:sequence>
+          </xsd:extension>
+        </xsd:complexContent>
+      </xsd:complexType>
+    </xsd:element>
+    <xsd:element name="MediaServiceMetadata" ma:index="8" nillable="true" ma:displayName="MediaServiceMetadata" ma:hidden="true" ma:internalName="MediaServiceMetadata" ma:readOnly="true">
+      <xsd:simpleType>
+        <xsd:restriction base="dms:Note"/>
+      </xsd:simpleType>
+    </xsd:element>
+    <xsd:element name="MediaServiceFastMetadata" ma:index="9" nillable="true" ma:displayName="MediaServiceFastMetadata" ma:hidden="true" ma:internalName="MediaServiceFastMetadata" ma:readOnly="true">
+      <xsd:simpleType>
+        <xsd:restriction base="dms:Note"/>
+      </xsd:simpleType>
+    </xsd:element>
+    <xsd:element name="MediaServiceOCR" ma:index="10" nillable="true" ma:displayName="MediaServiceOCR" ma:hidden="true" ma:internalName="MediaServiceOCR" ma:readOnly="true">
+      <xsd:simpleType>
+        <xsd:restriction base="dms:Note"/>
+      </xsd:simpleType>
+    </xsd:element>
+    <xsd:element name="MediaServiceAutoTags" ma:index="11" nillable="true" ma:displayName="MediaServiceAutoTags" ma:hidden="true" ma:internalName="MediaServiceAutoTags" ma:readOnly="true">
+      <xsd:simpleType>
+        <xsd:restriction base="dms:Text"/>
+      </xsd:simpleType>
+    </xsd:element>
+    <xsd:element name="MediaServiceEventHashCode" ma:index="12" nillable="true" ma:displayName="MediaServiceEventHashCode" ma:hidden="true" ma:internalName="MediaServiceEventHashCode" ma:readOnly="true">
+      <xsd:simpleType>
+        <xsd:restriction base="dms:Text"/>
+      </xsd:simpleType>
+    </xsd:element>
+    <xsd:element name="MediaServiceGenerationTime" ma:index="13" nillable="true" ma:displayName="MediaServiceGenerationTime" ma:hidden="true" ma:internalName="MediaServiceGenerationTime" ma:readOnly="true">
+      <xsd:simpleType>
+        <xsd:restriction base="dms:Text"/>
+      </xsd:simpleType>
+    </xsd:element>
+    <xsd:element name="MediaServiceAutoKeyPoints" ma:index="16" nillable="true" ma:displayName="MediaServiceAutoKeyPoints" ma:hidden="true" ma:internalName="MediaServiceAutoKeyPoints" ma:readOnly="true">
+      <xsd:simpleType>
+        <xsd:restriction base="dms:Note"/>
+      </xsd:simpleType>
+    </xsd:element>
+    <xsd:element name="MediaServiceKeyPoints" ma:index="17" nillable="true" ma:displayName="KeyPoints" ma:hidden="true" ma:internalName="MediaServiceKeyPoints" ma:readOnly="false">
+      <xsd:simpleType>
+        <xsd:restriction base="dms:Note"/>
+      </xsd:simpleType>
+    </xsd:element>
+    <xsd:element name="MediaServiceDateTaken" ma:index="18" nillable="true" ma:displayName="MediaServiceDateTaken" ma:hidden="true" ma:internalName="MediaServiceDateTaken" ma:readOnly="true">
+      <xsd:simpleType>
+        <xsd:restriction base="dms:Text"/>
+      </xsd:simpleType>
+    </xsd:element>
+    <xsd:element name="ImageTagsTaxHTField" ma:index="25" nillable="true" ma:taxonomy="true" ma:internalName="ImageTagsTaxHTField" ma:taxonomyFieldName="MediaServiceImageTags" ma:displayName="Image Tags" ma:readOnly="false" ma:fieldId="{5cf76f15-5ced-4ddc-b409-7134ff3c332f}" ma:taxonomyMulti="true" ma:sspId="e385fb40-52d4-4fae-9c5b-3e8ff8a5878e" ma:termSetId="09814cd3-568e-fe90-9814-8d621ff8fb84" ma:anchorId="fba54fb3-c3e1-fe81-a776-ca4b69148c4d" ma:open="true" ma:isKeyword="false">
+      <xsd:complexType>
+        <xsd:sequence>
+          <xsd:element ref="pc:Terms" minOccurs="0" maxOccurs="1"/>
+        </xsd:sequence>
+      </xsd:complexType>
+    </xsd:element>
+    <xsd:element name="MediaServiceLocation" ma:index="26" nillable="true" ma:displayName="Location" ma:hidden="true" ma:internalName="MediaServiceLocation" ma:readOnly="true">
+      <xsd:simpleType>
+        <xsd:restriction base="dms:Text"/>
+      </xsd:simpleType>
+    </xsd:element>
+    <xsd:element name="MediaLengthInSeconds" ma:index="27" nillable="true" ma:displayName="MediaLengthInSeconds" ma:hidden="true" ma:internalName="MediaLengthInSeconds" ma:readOnly="true">
+      <xsd:simpleType>
+        <xsd:restriction base="dms:Unknown"/>
+      </xsd:simpleType>
+    </xsd:element>
+    <xsd:element name="Background" ma:index="28" nillable="true" ma:displayName="Background" ma:default="0" ma:format="Dropdown" ma:internalName="Background">
+      <xsd:simpleType>
+        <xsd:restriction base="dms:Boolean"/>
+      </xsd:simpleType>
+    </xsd:element>
+  </xsd:schema>
+  <xsd:schema xmlns:xsd="http://www.w3.org/2001/XMLSchema" xmlns:xs="http://www.w3.org/2001/XMLSchema" xmlns:dms="http://schemas.microsoft.com/office/2006/documentManagement/types" xmlns:pc="http://schemas.microsoft.com/office/infopath/2007/PartnerControls" targetNamespace="16c05727-aa75-4e4a-9b5f-8a80a1165891" elementFormDefault="qualified">
+    <xsd:import namespace="http://schemas.microsoft.com/office/2006/documentManagement/types"/>
+    <xsd:import namespace="http://schemas.microsoft.com/office/infopath/2007/PartnerControls"/>
+    <xsd:element name="SharedWithUsers" ma:index="14" nillable="true" ma:displayName="Shared With" ma:hidden="true" ma:internalName="SharedWithUsers" ma:readOnly="true">
+      <xsd:complexType>
+        <xsd:complexContent>
+          <xsd:extension base="dms:UserMulti">
+            <xsd:sequence>
+              <xsd:element name="UserInfo" minOccurs="0" maxOccurs="unbounded">
+                <xsd:complexType>
+                  <xsd:sequence>
+                    <xsd:element name="DisplayName" type="xsd:string" minOccurs="0"/>
+                    <xsd:element name="AccountId" type="dms:UserId" minOccurs="0" nillable="true"/>
+                    <xsd:element name="AccountType" type="xsd:string" minOccurs="0"/>
+                  </xsd:sequence>
+                </xsd:complexType>
+              </xsd:element>
+            </xsd:sequence>
+          </xsd:extension>
+        </xsd:complexContent>
+      </xsd:complexType>
+    </xsd:element>
+    <xsd:element name="SharedWithDetails" ma:index="15" nillable="true" ma:displayName="Shared With Details" ma:hidden="true" ma:internalName="SharedWithDetails" ma:readOnly="true">
+      <xsd:simpleType>
+        <xsd:restriction base="dms:Note"/>
+      </xsd:simpleType>
+    </xsd:element>
+  </xsd:schema>
+  <xsd:schema xmlns:xsd="http://www.w3.org/2001/XMLSchema" xmlns:xs="http://www.w3.org/2001/XMLSchema" xmlns:dms="http://schemas.microsoft.com/office/2006/documentManagement/types" xmlns:pc="http://schemas.microsoft.com/office/infopath/2007/PartnerControls" targetNamespace="230e9df3-be65-4c73-a93b-d1236ebd677e" elementFormDefault="qualified">
+    <xsd:import namespace="http://schemas.microsoft.com/office/2006/documentManagement/types"/>
+    <xsd:import namespace="http://schemas.microsoft.com/office/infopath/2007/PartnerControls"/>
+    <xsd:element name="TaxCatchAll" ma:index="23" nillable="true" ma:displayName="Taxonomy Catch All Column" ma:hidden="true" ma:list="{3f6bfcbc-3db3-4ae6-bd76-326f0798ad28}" ma:internalName="TaxCatchAll" ma:readOnly="false" ma:showField="CatchAllData" ma:web="16c05727-aa75-4e4a-9b5f-8a80a1165891">
+      <xsd:complexType>
+        <xsd:complexContent>
+          <xsd:extension base="dms:MultiChoiceLookup">
+            <xsd:sequence>
+              <xsd:element name="Value" type="dms:Lookup" maxOccurs="unbounded" minOccurs="0" nillable="true"/>
+            </xsd:sequence>
+          </xsd:extension>
+        </xsd:complexContent>
+      </xsd:complexType>
+    </xsd:element>
+  </xsd:schema>
+  <xsd:schema xmlns="http://schemas.openxmlformats.org/package/2006/metadata/core-properties" xmlns:xsd="http://www.w3.org/2001/XMLSchema" xmlns:xsi="http://www.w3.org/2001/XMLSchema-instance" xmlns:dc="http://purl.org/dc/elements/1.1/" xmlns:dcterms="http://purl.org/dc/terms/" xmlns:odoc="http://schemas.microsoft.com/internal/obd" targetNamespace="http://schemas.openxmlformats.org/package/2006/metadata/core-properties" elementFormDefault="qualified" attributeFormDefault="unqualified" blockDefault="#all">
+    <xsd:import namespace="http://purl.org/dc/elements/1.1/" schemaLocation="http://dublincore.org/schemas/xmls/qdc/2003/04/02/dc.xsd"/>
+    <xsd:import namespace="http://purl.org/dc/terms/" schemaLocation="http://dublincore.org/schemas/xmls/qdc/2003/04/02/dcterms.xsd"/>
+    <xsd:element name="coreProperties" type="CT_coreProperties"/>
+    <xsd:complexType name="CT_coreProperties">
+      <xsd:all>
+        <xsd:element ref="dc:creator" minOccurs="0" maxOccurs="1"/>
+        <xsd:element ref="dcterms:created" minOccurs="0" maxOccurs="1"/>
+        <xsd:element ref="dc:identifier" minOccurs="0" maxOccurs="1"/>
+        <xsd:element name="contentType" minOccurs="0" maxOccurs="1" type="xsd:string" ma:displayName="Content Type"/>
+        <xsd:element ref="dc:title" minOccurs="0" maxOccurs="1" ma:index="1" ma:displayName="Title"/>
+        <xsd:element ref="dc:subject" minOccurs="0" maxOccurs="1"/>
+        <xsd:element ref="dc:description" minOccurs="0" maxOccurs="1"/>
+        <xsd:element name="keywords" minOccurs="0" maxOccurs="1" type="xsd:string"/>
+        <xsd:element ref="dc:language" minOccurs="0" maxOccurs="1"/>
+        <xsd:element name="category" minOccurs="0" maxOccurs="1" type="xsd:string"/>
+        <xsd:element name="version" minOccurs="0" maxOccurs="1" type="xsd:string"/>
+        <xsd:element name="revision" minOccurs="0" maxOccurs="1" type="xsd:string">
+          <xsd:annotation>
+            <xsd:documentation>
+                        This value indicates the number of saves or revisions. The application is responsible for updating this value after each revision.
+                    </xsd:documentation>
+          </xsd:annotation>
+        </xsd:element>
+        <xsd:element name="lastModifiedBy" minOccurs="0" maxOccurs="1" type="xsd:string"/>
+        <xsd:element ref="dcterms:modified" minOccurs="0" maxOccurs="1"/>
+        <xsd:element name="contentStatus" minOccurs="0" maxOccurs="1" type="xsd:string"/>
+      </xsd:all>
+    </xsd:complexType>
+  </xsd:schema>
+  <xs:schema xmlns:pc="http://schemas.microsoft.com/office/infopath/2007/PartnerControls" xmlns:xs="http://www.w3.org/2001/XMLSchema" targetNamespace="http://schemas.microsoft.com/office/infopath/2007/PartnerControls" elementFormDefault="qualified" attributeFormDefault="unqualified">
+    <xs:element name="Person">
+      <xs:complexType>
+        <xs:sequence>
+          <xs:element ref="pc:DisplayName" minOccurs="0"/>
+          <xs:element ref="pc:AccountId" minOccurs="0"/>
+          <xs:element ref="pc:AccountType" minOccurs="0"/>
+        </xs:sequence>
+      </xs:complexType>
+    </xs:element>
+    <xs:element name="DisplayName" type="xs:string"/>
+    <xs:element name="AccountId" type="xs:string"/>
+    <xs:element name="AccountType" type="xs:string"/>
+    <xs:element name="BDCAssociatedEntity">
+      <xs:complexType>
+        <xs:sequence>
+          <xs:element ref="pc:BDCEntity" minOccurs="0" maxOccurs="unbounded"/>
+        </xs:sequence>
+        <xs:attribute ref="pc:EntityNamespace"/>
+        <xs:attribute ref="pc:EntityName"/>
+        <xs:attribute ref="pc:SystemInstanceName"/>
+        <xs:attribute ref="pc:AssociationName"/>
+      </xs:complexType>
+    </xs:element>
+    <xs:attribute name="EntityNamespace" type="xs:string"/>
+    <xs:attribute name="EntityName" type="xs:string"/>
+    <xs:attribute name="SystemInstanceName" type="xs:string"/>
+    <xs:attribute name="AssociationName" type="xs:string"/>
+    <xs:element name="BDCEntity">
+      <xs:complexType>
+        <xs:sequence>
+          <xs:element ref="pc:EntityDisplayName" minOccurs="0"/>
+          <xs:element ref="pc:EntityInstanceReference" minOccurs="0"/>
+          <xs:element ref="pc:EntityId1" minOccurs="0"/>
+          <xs:element ref="pc:EntityId2" minOccurs="0"/>
+          <xs:element ref="pc:EntityId3" minOccurs="0"/>
+          <xs:element ref="pc:EntityId4" minOccurs="0"/>
+          <xs:element ref="pc:EntityId5" minOccurs="0"/>
+        </xs:sequence>
+      </xs:complexType>
+    </xs:element>
+    <xs:element name="EntityDisplayName" type="xs:string"/>
+    <xs:element name="EntityInstanceReference" type="xs:string"/>
+    <xs:element name="EntityId1" type="xs:string"/>
+    <xs:element name="EntityId2" type="xs:string"/>
+    <xs:element name="EntityId3" type="xs:string"/>
+    <xs:element name="EntityId4" type="xs:string"/>
+    <xs:element name="EntityId5" type="xs:string"/>
+    <xs:element name="Terms">
+      <xs:complexType>
+        <xs:sequence>
+          <xs:element ref="pc:TermInfo" minOccurs="0" maxOccurs="unbounded"/>
+        </xs:sequence>
+      </xs:complexType>
+    </xs:element>
+    <xs:element name="TermInfo">
+      <xs:complexType>
+        <xs:sequence>
+          <xs:element ref="pc:TermName" minOccurs="0"/>
+          <xs:element ref="pc:TermId" minOccurs="0"/>
+        </xs:sequence>
+      </xs:complexType>
+    </xs:element>
+    <xs:element name="TermName" type="xs:string"/>
+    <xs:element name="TermId" type="xs:string"/>
+  </xs:schema>
+</ct:contentTypeSchema>
+</file>
+
+<file path=customXml/item3.xml><?xml version="1.0" encoding="utf-8"?>
+<?mso-contentType ?>
+<FormTemplates xmlns="http://schemas.microsoft.com/sharepoint/v3/contenttype/forms">
+  <Display>DocumentLibraryForm</Display>
+  <Edit>DocumentLibraryForm</Edit>
+  <New>DocumentLibraryForm</New>
+</FormTemplates>
+</file>
+
+<file path=customXml/itemProps1.xml><?xml version="1.0" encoding="utf-8"?>
+<ds:datastoreItem xmlns:ds="http://schemas.openxmlformats.org/officeDocument/2006/customXml" ds:itemID="{F3A40627-4075-46BD-A9BE-DC3C2A67087C}">
+  <ds:schemaRefs>
+    <ds:schemaRef ds:uri="http://schemas.microsoft.com/office/2006/metadata/properties"/>
+    <ds:schemaRef ds:uri="http://schemas.microsoft.com/office/infopath/2007/PartnerControls"/>
+    <ds:schemaRef ds:uri="http://schemas.microsoft.com/sharepoint/v3"/>
+    <ds:schemaRef ds:uri="71af3243-3dd4-4a8d-8c0d-dd76da1f02a5"/>
+    <ds:schemaRef ds:uri="230e9df3-be65-4c73-a93b-d1236ebd677e"/>
+  </ds:schemaRefs>
+</ds:datastoreItem>
+</file>
+
+<file path=customXml/itemProps2.xml><?xml version="1.0" encoding="utf-8"?>
+<ds:datastoreItem xmlns:ds="http://schemas.openxmlformats.org/officeDocument/2006/customXml" ds:itemID="{F02D24AA-DCC5-4B9B-81ED-FE092F6A34C6}">
+  <ds:schemaRefs>
+    <ds:schemaRef ds:uri="http://schemas.microsoft.com/office/2006/metadata/contentType"/>
+    <ds:schemaRef ds:uri="http://schemas.microsoft.com/office/2006/metadata/properties/metaAttributes"/>
+    <ds:schemaRef ds:uri="http://www.w3.org/2001/XMLSchema"/>
+    <ds:schemaRef ds:uri="http://schemas.microsoft.com/office/2006/metadata/properties"/>
+    <ds:schemaRef ds:uri="http://schemas.microsoft.com/sharepoint/v3"/>
+    <ds:schemaRef ds:uri="71af3243-3dd4-4a8d-8c0d-dd76da1f02a5"/>
+    <ds:schemaRef ds:uri="16c05727-aa75-4e4a-9b5f-8a80a1165891"/>
+    <ds:schemaRef ds:uri="230e9df3-be65-4c73-a93b-d1236ebd677e"/>
+    <ds:schemaRef ds:uri="http://schemas.microsoft.com/office/2006/documentManagement/types"/>
+    <ds:schemaRef ds:uri="http://schemas.microsoft.com/office/infopath/2007/PartnerControls"/>
+    <ds:schemaRef ds:uri="http://schemas.openxmlformats.org/package/2006/metadata/core-properties"/>
+    <ds:schemaRef ds:uri="http://purl.org/dc/elements/1.1/"/>
+    <ds:schemaRef ds:uri="http://purl.org/dc/terms/"/>
+    <ds:schemaRef ds:uri="http://schemas.microsoft.com/internal/obd"/>
+  </ds:schemaRefs>
+</ds:datastoreItem>
+</file>
+
+<file path=customXml/itemProps3.xml><?xml version="1.0" encoding="utf-8"?>
+<ds:datastoreItem xmlns:ds="http://schemas.openxmlformats.org/officeDocument/2006/customXml" ds:itemID="{2499F06F-110D-421D-8209-69F6D19CE941}">
+  <ds:schemaRefs>
+    <ds:schemaRef ds:uri="http://schemas.microsoft.com/sharepoint/v3/contenttype/forms"/>
+  </ds:schemaRefs>
+</ds:datastoreItem>
 </file>
--- a/Data/pitch_decks/pitch_deck_001.pptx
+++ b/Data/pitch_decks/pitch_deck_001.pptx
@@ -3359,7 +3359,7 @@
                         <a:defRPr sz="1200"/>
                       </a:pPr>
                       <a:r>
-                        <a:t>$450.00</a:t>
+                        <a:t>¥165,000</a:t>
                       </a:r>
                     </a:p>
                   </a:txBody>
@@ -3374,7 +3374,7 @@
                         <a:defRPr sz="1200"/>
                       </a:pPr>
                       <a:r>
-                        <a:t>Quad-core processor</a:t>
+                        <a:t>高性能CPU</a:t>
                       </a:r>
                     </a:p>
                   </a:txBody>
@@ -3389,7 +3389,7 @@
                         <a:defRPr sz="1200"/>
                       </a:pPr>
                       <a:r>
-                        <a:t>4GB RAM (expandable)</a:t>
+                        <a:t>16GB</a:t>
                       </a:r>
                     </a:p>
                   </a:txBody>
@@ -3404,7 +3404,7 @@
                         <a:defRPr sz="1200"/>
                       </a:pPr>
                       <a:r>
-                        <a:t>16TB (4x4TB) RAID 6</a:t>
+                        <a:t>512GB SSD</a:t>
                       </a:r>
                     </a:p>
                   </a:txBody>
@@ -3419,7 +3419,7 @@
                         <a:defRPr sz="1200"/>
                       </a:pPr>
                       <a:r>
-                        <a:t>Manufacturer hardware warranty</a:t>
+                        <a:t>1年間</a:t>
                       </a:r>
                     </a:p>
                   </a:txBody>
@@ -3434,7 +3434,7 @@
                         <a:defRPr sz="1200"/>
                       </a:pPr>
                       <a:r>
-                        <a:t>30 days installation &amp; configuration service guarantee</a:t>
+                        <a:t>初期設定サポート、動作確認</a:t>
                       </a:r>
                     </a:p>
                   </a:txBody>
@@ -3466,7 +3466,7 @@
                         <a:defRPr sz="1200"/>
                       </a:pPr>
                       <a:r>
-                        <a:t>$450.00</a:t>
+                        <a:t>¥165,000</a:t>
                       </a:r>
                     </a:p>
                   </a:txBody>
@@ -3481,7 +3481,7 @@
                         <a:defRPr sz="1200"/>
                       </a:pPr>
                       <a:r>
-                        <a:t>Quad-core processor</a:t>
+                        <a:t>高性能CPU</a:t>
                       </a:r>
                     </a:p>
                   </a:txBody>
@@ -3496,7 +3496,7 @@
                         <a:defRPr sz="1200"/>
                       </a:pPr>
                       <a:r>
-                        <a:t>4GB RAM (expandable)</a:t>
+                        <a:t>16GB</a:t>
                       </a:r>
                     </a:p>
                   </a:txBody>
@@ -3511,7 +3511,7 @@
                         <a:defRPr sz="1200"/>
                       </a:pPr>
                       <a:r>
-                        <a:t>16TB (4x4TB) RAID 6</a:t>
+                        <a:t>512GB SSD</a:t>
                       </a:r>
                     </a:p>
                   </a:txBody>
@@ -3526,7 +3526,7 @@
                         <a:defRPr sz="1200"/>
                       </a:pPr>
                       <a:r>
-                        <a:t>Manufacturer hardware warranty</a:t>
+                        <a:t>1年間</a:t>
                       </a:r>
                     </a:p>
                   </a:txBody>
@@ -3541,7 +3541,7 @@
                         <a:defRPr sz="1200"/>
                       </a:pPr>
                       <a:r>
-                        <a:t>30 days installation &amp; configuration service guarantee</a:t>
+                        <a:t>初期設定サポート、動作確認</a:t>
                       </a:r>
                     </a:p>
                   </a:txBody>
@@ -3573,7 +3573,7 @@
                         <a:defRPr sz="1200"/>
                       </a:pPr>
                       <a:r>
-                        <a:t>$450.00</a:t>
+                        <a:t>¥165,000</a:t>
                       </a:r>
                     </a:p>
                   </a:txBody>
@@ -3588,7 +3588,7 @@
                         <a:defRPr sz="1200"/>
                       </a:pPr>
                       <a:r>
-                        <a:t>Quad-core processor</a:t>
+                        <a:t>高性能CPU</a:t>
                       </a:r>
                     </a:p>
                   </a:txBody>
@@ -3603,7 +3603,7 @@
                         <a:defRPr sz="1200"/>
                       </a:pPr>
                       <a:r>
-                        <a:t>4GB RAM (expandable)</a:t>
+                        <a:t>16GB</a:t>
                       </a:r>
                     </a:p>
                   </a:txBody>
@@ -3618,7 +3618,7 @@
                         <a:defRPr sz="1200"/>
                       </a:pPr>
                       <a:r>
-                        <a:t>16TB (4x4TB) RAID 6</a:t>
+                        <a:t>512GB SSD</a:t>
                       </a:r>
                     </a:p>
                   </a:txBody>
@@ -3633,7 +3633,7 @@
                         <a:defRPr sz="1200"/>
                       </a:pPr>
                       <a:r>
-                        <a:t>Manufacturer hardware warranty</a:t>
+                        <a:t>1年間</a:t>
                       </a:r>
                     </a:p>
                   </a:txBody>
@@ -3648,7 +3648,7 @@
                         <a:defRPr sz="1200"/>
                       </a:pPr>
                       <a:r>
-                        <a:t>30 days installation &amp; configuration service guarantee</a:t>
+                        <a:t>初期設定サポート、動作確認</a:t>
                       </a:r>
                     </a:p>
                   </a:txBody>
@@ -3790,7 +3790,7 @@
               </a:defRPr>
             </a:pPr>
             <a:r>
-              <a:t>• Otsuka Corporation requires a reliable NAS server solution to support video backup operations.</a:t>
+              <a:t>• お客様は高性能なゲーミングノートパソコンの購入を検討中です。</a:t>
             </a:r>
           </a:p>
           <a:p>
@@ -3806,7 +3806,7 @@
               </a:defRPr>
             </a:pPr>
             <a:r>
-              <a:t>• Supports an IT environment with 200 employees requiring efficient data storage and protection.</a:t>
+              <a:t>• 快適でストレスフリーなゲーム体験を求めています。</a:t>
             </a:r>
           </a:p>
           <a:p>
@@ -3822,7 +3822,7 @@
               </a:defRPr>
             </a:pPr>
             <a:r>
-              <a:t>• Needs a storage capacity of 16TB configured in RAID 6 for data redundancy and security.</a:t>
+              <a:t>• 最新のスペックで長時間のゲームプレイにも耐えうる性能が必要です。</a:t>
             </a:r>
           </a:p>
           <a:p>
@@ -3838,7 +3838,7 @@
               </a:defRPr>
             </a:pPr>
             <a:r>
-              <a:t>• Requires a transfer speed of 2.5 Gbps to ensure efficient handling of large video files.</a:t>
+              <a:t>• 信頼できる製品とサポート体制を重視されています。</a:t>
             </a:r>
           </a:p>
           <a:p>
@@ -3854,7 +3854,7 @@
               </a:defRPr>
             </a:pPr>
             <a:r>
-              <a:t>• Solution must be scalable, secure, and optimized for video backup infrastructure.</a:t>
+              <a:t>• 迅速な納品と明確な保証条件を希望されています。</a:t>
             </a:r>
           </a:p>
         </p:txBody>
@@ -3990,7 +3990,7 @@
               </a:defRPr>
             </a:pPr>
             <a:r>
-              <a:t>• A tailored NAS server solution designed specifically for video backup needs.</a:t>
+              <a:t>• 高性能CPUとグラフィックカードを搭載したゲーミングノートパソコンを提案。</a:t>
             </a:r>
           </a:p>
           <a:p>
@@ -4006,7 +4006,7 @@
               </a:defRPr>
             </a:pPr>
             <a:r>
-              <a:t>• Includes high-performance NAS device with built-in 2.5 Gigabit Ethernet ports.</a:t>
+              <a:t>• 16GB RAMと512GB SSDにより高速かつ快適な動作を実現。</a:t>
             </a:r>
           </a:p>
           <a:p>
@@ -4022,7 +4022,7 @@
               </a:defRPr>
             </a:pPr>
             <a:r>
-              <a:t>• Configured RAID 6 setup for enhanced data protection and fault tolerance.</a:t>
+              <a:t>• 最新のゲームタイトルもスムーズにプレイ可能なスペック。</a:t>
             </a:r>
           </a:p>
           <a:p>
@@ -4038,7 +4038,7 @@
               </a:defRPr>
             </a:pPr>
             <a:r>
-              <a:t>• Comprehensive setup and configuration service to optimize network and backup environment.</a:t>
+              <a:t>• 1年間の製品保証と初期設定サポートを提供。</a:t>
             </a:r>
           </a:p>
           <a:p>
@@ -4054,7 +4054,7 @@
               </a:defRPr>
             </a:pPr>
             <a:r>
-              <a:t>• Reliable UPS system included to maintain data integrity during power disruptions.</a:t>
+              <a:t>• 注文確定後約2週間で納品し、迅速な対応を約束。</a:t>
             </a:r>
           </a:p>
         </p:txBody>
@@ -4190,7 +4190,7 @@
               </a:defRPr>
             </a:pPr>
             <a:r>
-              <a:t>• NAS Device: Asustor AS5304T with quad-core processor and 4GB RAM (expandable).</a:t>
+              <a:t>• CPU: 高性能プロセッサ搭載（詳細は注文確定後に最終確認）。</a:t>
             </a:r>
           </a:p>
           <a:p>
@@ -4206,7 +4206,7 @@
               </a:defRPr>
             </a:pPr>
             <a:r>
-              <a:t>• Storage: Four Seagate IronWolf 4TB NAS hard drives totaling 16TB, RAID 6 configured.</a:t>
+              <a:t>• RAM: 16GBでマルチタスクも快適に対応。</a:t>
             </a:r>
           </a:p>
           <a:p>
@@ -4222,7 +4222,7 @@
               </a:defRPr>
             </a:pPr>
             <a:r>
-              <a:t>• Network: Built-in 2.5 Gigabit Ethernet ports for high-speed data transfer.</a:t>
+              <a:t>• ストレージ: 512GB SSDで高速読み書きを実現。</a:t>
             </a:r>
           </a:p>
           <a:p>
@@ -4238,7 +4238,7 @@
               </a:defRPr>
             </a:pPr>
             <a:r>
-              <a:t>• Backup Protection: APC Back-UPS Pro 1500VA for power backup and surge protection.</a:t>
+              <a:t>• グラフィックカード: 最新世代の高性能モデルを採用。</a:t>
             </a:r>
           </a:p>
           <a:p>
@@ -4254,7 +4254,7 @@
               </a:defRPr>
             </a:pPr>
             <a:r>
-              <a:t>• Service: Professional NAS setup, RAID configuration, and network optimization.</a:t>
+              <a:t>• デザインは持ち運びやすさと冷却性能を両立。</a:t>
             </a:r>
           </a:p>
         </p:txBody>
@@ -4390,7 +4390,7 @@
               </a:defRPr>
             </a:pPr>
             <a:r>
-              <a:t>• Asustor AS5304T NAS Device: $450.00</a:t>
+              <a:t>• 製品価格: ¥150,000（税抜）</a:t>
             </a:r>
           </a:p>
           <a:p>
@@ -4406,7 +4406,7 @@
               </a:defRPr>
             </a:pPr>
             <a:r>
-              <a:t>• Seagate IronWolf 4TB NAS Hard Drives (4 units): $440.00</a:t>
+              <a:t>• 消費税（10%）: ¥15,000</a:t>
             </a:r>
           </a:p>
           <a:p>
@@ -4422,7 +4422,7 @@
               </a:defRPr>
             </a:pPr>
             <a:r>
-              <a:t>• APC Back-UPS Pro 1500VA UPS: $220.00</a:t>
+              <a:t>• 合計金額: ¥165,000（税込）</a:t>
             </a:r>
           </a:p>
           <a:p>
@@ -4438,7 +4438,7 @@
               </a:defRPr>
             </a:pPr>
             <a:r>
-              <a:t>• NAS Setup and Configuration Service: $300.00</a:t>
+              <a:t>• 価格には高性能パーツとサポート費用が含まれています。</a:t>
             </a:r>
           </a:p>
           <a:p>
@@ -4454,7 +4454,7 @@
               </a:defRPr>
             </a:pPr>
             <a:r>
-              <a:t>• Subtotal: $1,410.00 | Tax (8%): $112.80 | Total: $1,522.80 USD</a:t>
+              <a:t>• 30日間の見積有効期限内にご検討ください。</a:t>
             </a:r>
           </a:p>
         </p:txBody>
@@ -4590,7 +4590,7 @@
               </a:defRPr>
             </a:pPr>
             <a:r>
-              <a:t>• Hardware warranty provided by respective manufacturers for all devices.</a:t>
+              <a:t>• 購入日より1年間の製品保証を提供。</a:t>
             </a:r>
           </a:p>
           <a:p>
@@ -4606,7 +4606,7 @@
               </a:defRPr>
             </a:pPr>
             <a:r>
-              <a:t>• Installation and configuration services guaranteed for 30 days post-completion.</a:t>
+              <a:t>• 納品前に動作確認を実施し品質を保証。</a:t>
             </a:r>
           </a:p>
           <a:p>
@@ -4622,7 +4622,7 @@
               </a:defRPr>
             </a:pPr>
             <a:r>
-              <a:t>• Technical support available for setup and network optimization.</a:t>
+              <a:t>• 必要に応じて初期設定サポートを無料で実施。</a:t>
             </a:r>
           </a:p>
           <a:p>
@@ -4638,7 +4638,7 @@
               </a:defRPr>
             </a:pPr>
             <a:r>
-              <a:t>• Power backup ensures data integrity during outages and fluctuations.</a:t>
+              <a:t>• 安心のアフターサービス体制を整備。</a:t>
             </a:r>
           </a:p>
           <a:p>
@@ -4654,7 +4654,7 @@
               </a:defRPr>
             </a:pPr>
             <a:r>
-              <a:t>• Additional hardware or software needs can be quoted separately.</a:t>
+              <a:t>• ご不明点はいつでもお問い合わせ可能です。</a:t>
             </a:r>
           </a:p>
         </p:txBody>
@@ -4790,7 +4790,7 @@
               </a:defRPr>
             </a:pPr>
             <a:r>
-              <a:t>• Compare three variants of our NAS solution tailored for video backup.</a:t>
+              <a:t>• 同一スペックの3つのバリエーションを比較。</a:t>
             </a:r>
           </a:p>
           <a:p>
@@ -4806,7 +4806,7 @@
               </a:defRPr>
             </a:pPr>
             <a:r>
-              <a:t>• All variants offer identical high performance and reliability.</a:t>
+              <a:t>• 価格と性能は同等で、名称のみ異なります。</a:t>
             </a:r>
           </a:p>
           <a:p>
@@ -4822,7 +4822,7 @@
               </a:defRPr>
             </a:pPr>
             <a:r>
-              <a:t>• Choose based on preferred product naming or internal cataloging.</a:t>
+              <a:t>• お客様のブランドイメージに合わせて選択可能。</a:t>
             </a:r>
           </a:p>
           <a:p>
@@ -4838,7 +4838,7 @@
               </a:defRPr>
             </a:pPr>
             <a:r>
-              <a:t>• Consistent pricing and specifications ensure uniform quality.</a:t>
+              <a:t>• 全て高性能CPU、16GB RAM、512GB SSD搭載。</a:t>
             </a:r>
           </a:p>
           <a:p>
@@ -4854,7 +4854,7 @@
               </a:defRPr>
             </a:pPr>
             <a:r>
-              <a:t>• Helps in decision making with clear and transparent comparison.</a:t>
+              <a:t>• 1年間保証とサポートも同様に充実。</a:t>
             </a:r>
           </a:p>
         </p:txBody>
@@ -4990,7 +4990,7 @@
               </a:defRPr>
             </a:pPr>
             <a:r>
-              <a:t>• Coordinate delivery of NAS device and hard drives to Otsuka Corporation IT department.</a:t>
+              <a:t>• 注文確定後、約2週間で納品予定。</a:t>
             </a:r>
           </a:p>
           <a:p>
@@ -5006,7 +5006,7 @@
               </a:defRPr>
             </a:pPr>
             <a:r>
-              <a:t>• Schedule installation and configuration service within 2 weeks of order confirmation.</a:t>
+              <a:t>• 納品前に製品の動作をしっかり確認。</a:t>
             </a:r>
           </a:p>
           <a:p>
@@ -5022,7 +5022,7 @@
               </a:defRPr>
             </a:pPr>
             <a:r>
-              <a:t>• Ensure network infrastructure supports 2.5 Gbps transfer speeds before setup.</a:t>
+              <a:t>• 仕様の最終確認を注文後に実施。</a:t>
             </a:r>
           </a:p>
           <a:p>
@@ -5038,7 +5038,7 @@
               </a:defRPr>
             </a:pPr>
             <a:r>
-              <a:t>• Perform RAID 6 configuration and verify data redundancy and backup functionality.</a:t>
+              <a:t>• 迅速かつ確実な納品でお待たせしません。</a:t>
             </a:r>
           </a:p>
           <a:p>
@@ -5054,7 +5054,7 @@
               </a:defRPr>
             </a:pPr>
             <a:r>
-              <a:t>• Timely delivery ensures minimal disruption to video backup operations.</a:t>
+              <a:t>• 納期に関するご相談も柔軟に対応可能。</a:t>
             </a:r>
           </a:p>
         </p:txBody>
@@ -5190,7 +5190,7 @@
               </a:defRPr>
             </a:pPr>
             <a:r>
-              <a:t>• Review and approve the quotation to proceed with the order.</a:t>
+              <a:t>• 見積内容のご確認とご承認をお願いいたします。</a:t>
             </a:r>
           </a:p>
           <a:p>
@@ -5206,7 +5206,7 @@
               </a:defRPr>
             </a:pPr>
             <a:r>
-              <a:t>• Confirm delivery address and provide accurate contact details.</a:t>
+              <a:t>• ご質問や追加要望はお気軽にご連絡ください。</a:t>
             </a:r>
           </a:p>
           <a:p>
@@ -5222,7 +5222,7 @@
               </a:defRPr>
             </a:pPr>
             <a:r>
-              <a:t>• Schedule installation date with our technical team at your convenience.</a:t>
+              <a:t>• ご承認後、正式な注文書を発行いたします。</a:t>
             </a:r>
           </a:p>
           <a:p>
@@ -5238,7 +5238,7 @@
               </a:defRPr>
             </a:pPr>
             <a:r>
-              <a:t>• Communicate any additional requirements or questions to our sales representative.</a:t>
+              <a:t>• 最高のゲーム体験を実現する一歩を踏み出しましょう。</a:t>
             </a:r>
           </a:p>
           <a:p>
@@ -5254,7 +5254,7 @@
               </a:defRPr>
             </a:pPr>
             <a:r>
-              <a:t>• Secure your reliable NAS server solution tailored for your video backup needs.</a:t>
+              <a:t>• お客様のご連絡を心よりお待ちしております。</a:t>
             </a:r>
           </a:p>
         </p:txBody>
